--- a/1.5 Time series.pptx
+++ b/1.5 Time series.pptx
@@ -383,7 +383,7 @@
           <a:p>
             <a:fld id="{0CBFB8CE-488C-4A7E-87F2-3AF6127C51C1}" type="datetimeFigureOut">
               <a:rPr lang="en-IE" smtClean="0"/>
-              <a:t>27/08/2026</a:t>
+              <a:t>25/09/2026</a:t>
             </a:fld>
             <a:endParaRPr lang="en-IE"/>
           </a:p>
@@ -9270,8 +9270,8 @@
           </a:p>
         </p:txBody>
       </p:sp>
-      <mc:AlternateContent xmlns:mc="http://schemas.openxmlformats.org/markup-compatibility/2006">
-        <mc:Choice xmlns:a14="http://schemas.microsoft.com/office/drawing/2010/main" Requires="a14">
+      <mc:AlternateContent xmlns:mc="http://schemas.openxmlformats.org/markup-compatibility/2006" xmlns:a14="http://schemas.microsoft.com/office/drawing/2010/main">
+        <mc:Choice Requires="a14">
           <p:sp>
             <p:nvSpPr>
               <p:cNvPr id="3" name="Content Placeholder 2">
@@ -9783,7 +9783,7 @@
                       <m:d>
                         <m:dPr>
                           <m:ctrlPr>
-                            <a:rPr lang="en-GB" sz="2400" i="1" smtClean="0">
+                            <a:rPr lang="en-GB" sz="2400" b="0" i="1" smtClean="0">
                               <a:latin typeface="Cambria Math" panose="02040503050406030204" pitchFamily="18" charset="0"/>
                               <a:ea typeface="Cambria Math" panose="02040503050406030204" pitchFamily="18" charset="0"/>
                             </a:rPr>
@@ -10108,6 +10108,7 @@
                           <m:ctrlPr>
                             <a:rPr lang="en-GB" sz="2400" i="1">
                               <a:latin typeface="Cambria Math" panose="02040503050406030204" pitchFamily="18" charset="0"/>
+                              <a:ea typeface="Cambria Math" panose="02040503050406030204" pitchFamily="18" charset="0"/>
                             </a:rPr>
                           </m:ctrlPr>
                         </m:fPr>
@@ -10403,7 +10404,7 @@
             </p:txBody>
           </p:sp>
         </mc:Choice>
-        <mc:Fallback>
+        <mc:Fallback xmlns="">
           <p:sp>
             <p:nvSpPr>
               <p:cNvPr id="3" name="Content Placeholder 2">
@@ -11037,7 +11038,7 @@
                       <m:d>
                         <m:dPr>
                           <m:ctrlPr>
-                            <a:rPr lang="en-GB" sz="2400" i="1" smtClean="0">
+                            <a:rPr lang="en-GB" sz="2400" b="0" i="1" smtClean="0">
                               <a:latin typeface="Cambria Math" panose="02040503050406030204" pitchFamily="18" charset="0"/>
                               <a:ea typeface="Cambria Math" panose="02040503050406030204" pitchFamily="18" charset="0"/>
                             </a:rPr>
@@ -11362,6 +11363,7 @@
                           <m:ctrlPr>
                             <a:rPr lang="en-GB" sz="2400" i="1">
                               <a:latin typeface="Cambria Math" panose="02040503050406030204" pitchFamily="18" charset="0"/>
+                              <a:ea typeface="Cambria Math" panose="02040503050406030204" pitchFamily="18" charset="0"/>
                             </a:rPr>
                           </m:ctrlPr>
                         </m:fPr>
@@ -12244,7 +12246,7 @@
         </p:blipFill>
         <p:spPr>
           <a:xfrm>
-            <a:off x="3265714" y="4137047"/>
+            <a:off x="3180653" y="4541084"/>
             <a:ext cx="5399778" cy="2039916"/>
           </a:xfrm>
           <a:prstGeom prst="rect">
@@ -13287,8 +13289,8 @@
           </a:p>
         </p:txBody>
       </p:sp>
-      <mc:AlternateContent xmlns:mc="http://schemas.openxmlformats.org/markup-compatibility/2006">
-        <mc:Choice xmlns:a14="http://schemas.microsoft.com/office/drawing/2010/main" Requires="a14">
+      <mc:AlternateContent xmlns:mc="http://schemas.openxmlformats.org/markup-compatibility/2006" xmlns:a14="http://schemas.microsoft.com/office/drawing/2010/main">
+        <mc:Choice Requires="a14">
           <p:sp>
             <p:nvSpPr>
               <p:cNvPr id="3" name="Content Placeholder 2">
@@ -13308,7 +13310,7 @@
             <p:spPr/>
             <p:txBody>
               <a:bodyPr>
-                <a:normAutofit fontScale="40000" lnSpcReduction="20000"/>
+                <a:normAutofit fontScale="47500" lnSpcReduction="20000"/>
               </a:bodyPr>
               <a:lstStyle/>
               <a:p>
@@ -13340,7 +13342,7 @@
                     <m:sSub>
                       <m:sSubPr>
                         <m:ctrlPr>
-                          <a:rPr lang="fr-BE" b="1" i="1">
+                          <a:rPr lang="fr-BE" b="0" i="1" smtClean="0">
                             <a:latin typeface="Cambria Math" panose="02040503050406030204" pitchFamily="18" charset="0"/>
                           </a:rPr>
                         </m:ctrlPr>
@@ -13351,7 +13353,7 @@
                             <m:begChr m:val="{"/>
                             <m:endChr m:val="}"/>
                             <m:ctrlPr>
-                              <a:rPr lang="en-GB" i="1">
+                              <a:rPr lang="fr-BE" b="0" i="1" smtClean="0">
                                 <a:latin typeface="Cambria Math" panose="02040503050406030204" pitchFamily="18" charset="0"/>
                               </a:rPr>
                             </m:ctrlPr>
@@ -13428,7 +13430,9 @@
                 <a:endParaRPr lang="en-GB" dirty="0"/>
               </a:p>
               <a:p>
-                <a:pPr lvl="2"/>
+                <a:pPr marL="1028700" lvl="2" indent="0">
+                  <a:buNone/>
+                </a:pPr>
                 <a:r>
                   <a:rPr lang="en-GB" dirty="0"/>
                   <a:t>Fourier frequencies: </a:t>
@@ -13543,7 +13547,9 @@
                 <a:endParaRPr lang="en-GB" dirty="0"/>
               </a:p>
               <a:p>
-                <a:pPr lvl="2"/>
+                <a:pPr marL="1028700" lvl="2" indent="0">
+                  <a:buNone/>
+                </a:pPr>
                 <a14:m>
                   <m:oMath xmlns:m="http://schemas.openxmlformats.org/officeDocument/2006/math">
                     <m:sSub>
@@ -13882,7 +13888,7 @@
                         <m:begChr m:val="{"/>
                         <m:endChr m:val="}"/>
                         <m:ctrlPr>
-                          <a:rPr lang="en-GB" b="1" i="1">
+                          <a:rPr lang="fr-BE" b="1" i="1">
                             <a:latin typeface="Cambria Math" panose="02040503050406030204" pitchFamily="18" charset="0"/>
                           </a:rPr>
                         </m:ctrlPr>
@@ -14048,7 +14054,9 @@
                 <a:endParaRPr lang="en-GB" dirty="0"/>
               </a:p>
               <a:p>
-                <a:pPr lvl="2"/>
+                <a:pPr marL="1028700" lvl="2" indent="0">
+                  <a:buNone/>
+                </a:pPr>
                 <a14:m>
                   <m:oMath xmlns:m="http://schemas.openxmlformats.org/officeDocument/2006/math">
                     <m:r>
@@ -14362,973 +14370,984 @@
                 <a:endParaRPr lang="en-GB" dirty="0"/>
               </a:p>
               <a:p>
-                <a:pPr lvl="2"/>
+                <a:pPr marL="1028700" lvl="2" indent="0">
+                  <a:buNone/>
+                </a:pPr>
                 <a14:m>
-                  <m:oMath xmlns:m="http://schemas.openxmlformats.org/officeDocument/2006/math">
-                    <m:sSub>
-                      <m:sSubPr>
-                        <m:ctrlPr>
-                          <a:rPr lang="fr-BE" b="0" i="1" smtClean="0">
-                            <a:latin typeface="Cambria Math" panose="02040503050406030204" pitchFamily="18" charset="0"/>
-                          </a:rPr>
-                        </m:ctrlPr>
-                      </m:sSubPr>
-                      <m:e>
-                        <m:r>
-                          <a:rPr lang="fr-BE" b="0" i="1" smtClean="0">
-                            <a:latin typeface="Cambria Math" panose="02040503050406030204" pitchFamily="18" charset="0"/>
-                          </a:rPr>
-                          <m:t>𝑎</m:t>
-                        </m:r>
-                      </m:e>
-                      <m:sub>
-                        <m:r>
-                          <a:rPr lang="fr-BE" b="0" i="1" smtClean="0">
-                            <a:latin typeface="Cambria Math" panose="02040503050406030204" pitchFamily="18" charset="0"/>
-                          </a:rPr>
-                          <m:t>𝑗</m:t>
-                        </m:r>
-                      </m:sub>
-                    </m:sSub>
-                    <m:r>
-                      <a:rPr lang="fr-BE" b="0" i="1" smtClean="0">
-                        <a:latin typeface="Cambria Math" panose="02040503050406030204" pitchFamily="18" charset="0"/>
-                      </a:rPr>
-                      <m:t>=</m:t>
-                    </m:r>
-                    <m:sSup>
-                      <m:sSupPr>
-                        <m:ctrlPr>
-                          <a:rPr lang="fr-BE" b="0" i="1" smtClean="0">
-                            <a:latin typeface="Cambria Math" panose="02040503050406030204" pitchFamily="18" charset="0"/>
-                          </a:rPr>
-                        </m:ctrlPr>
-                      </m:sSupPr>
-                      <m:e>
-                        <m:r>
-                          <a:rPr lang="fr-BE" b="0" i="1" smtClean="0">
-                            <a:latin typeface="Cambria Math" panose="02040503050406030204" pitchFamily="18" charset="0"/>
-                          </a:rPr>
-                          <m:t>𝑛</m:t>
-                        </m:r>
-                      </m:e>
-                      <m:sup>
-                        <m:r>
-                          <a:rPr lang="fr-BE" b="0" i="1" smtClean="0">
-                            <a:latin typeface="Cambria Math" panose="02040503050406030204" pitchFamily="18" charset="0"/>
-                          </a:rPr>
-                          <m:t>−</m:t>
-                        </m:r>
-                        <m:f>
-                          <m:fPr>
-                            <m:type m:val="skw"/>
-                            <m:ctrlPr>
-                              <a:rPr lang="fr-BE" b="0" i="1" smtClean="0">
-                                <a:latin typeface="Cambria Math" panose="02040503050406030204" pitchFamily="18" charset="0"/>
-                              </a:rPr>
-                            </m:ctrlPr>
-                          </m:fPr>
-                          <m:num>
-                            <m:r>
-                              <a:rPr lang="fr-BE" b="0" i="1" smtClean="0">
-                                <a:latin typeface="Cambria Math" panose="02040503050406030204" pitchFamily="18" charset="0"/>
-                              </a:rPr>
-                              <m:t>1</m:t>
-                            </m:r>
-                          </m:num>
-                          <m:den>
-                            <m:r>
-                              <a:rPr lang="fr-BE" b="0" i="1" smtClean="0">
-                                <a:latin typeface="Cambria Math" panose="02040503050406030204" pitchFamily="18" charset="0"/>
-                              </a:rPr>
-                              <m:t>2</m:t>
-                            </m:r>
-                          </m:den>
-                        </m:f>
-                      </m:sup>
-                    </m:sSup>
-                    <m:nary>
-                      <m:naryPr>
-                        <m:chr m:val="∑"/>
-                        <m:ctrlPr>
-                          <a:rPr lang="fr-BE" b="0" i="1" smtClean="0">
-                            <a:latin typeface="Cambria Math" panose="02040503050406030204" pitchFamily="18" charset="0"/>
-                          </a:rPr>
-                        </m:ctrlPr>
-                      </m:naryPr>
-                      <m:sub>
-                        <m:r>
-                          <a:rPr lang="fr-BE" b="0" i="1" smtClean="0">
-                            <a:latin typeface="Cambria Math" panose="02040503050406030204" pitchFamily="18" charset="0"/>
-                          </a:rPr>
-                          <m:t>𝑘</m:t>
-                        </m:r>
-                        <m:r>
-                          <a:rPr lang="fr-BE" b="0" i="1" smtClean="0">
-                            <a:latin typeface="Cambria Math" panose="02040503050406030204" pitchFamily="18" charset="0"/>
-                          </a:rPr>
-                          <m:t>=0</m:t>
-                        </m:r>
-                      </m:sub>
-                      <m:sup>
-                        <m:r>
-                          <a:rPr lang="fr-BE" b="0" i="1" smtClean="0">
-                            <a:latin typeface="Cambria Math" panose="02040503050406030204" pitchFamily="18" charset="0"/>
-                          </a:rPr>
-                          <m:t>𝑘</m:t>
-                        </m:r>
-                        <m:r>
-                          <a:rPr lang="fr-BE" b="0" i="1" smtClean="0">
-                            <a:latin typeface="Cambria Math" panose="02040503050406030204" pitchFamily="18" charset="0"/>
-                            <a:ea typeface="Cambria Math" panose="02040503050406030204" pitchFamily="18" charset="0"/>
-                          </a:rPr>
-                          <m:t>&lt;</m:t>
-                        </m:r>
-                        <m:r>
-                          <a:rPr lang="fr-BE" b="0" i="1" smtClean="0">
-                            <a:latin typeface="Cambria Math" panose="02040503050406030204" pitchFamily="18" charset="0"/>
-                            <a:ea typeface="Cambria Math" panose="02040503050406030204" pitchFamily="18" charset="0"/>
-                          </a:rPr>
-                          <m:t>𝑛</m:t>
-                        </m:r>
-                      </m:sup>
-                      <m:e>
-                        <m:sSub>
-                          <m:sSubPr>
-                            <m:ctrlPr>
-                              <a:rPr lang="fr-BE" b="0" i="1" smtClean="0">
-                                <a:latin typeface="Cambria Math" panose="02040503050406030204" pitchFamily="18" charset="0"/>
-                              </a:rPr>
-                            </m:ctrlPr>
-                          </m:sSubPr>
-                          <m:e>
-                            <m:r>
-                              <a:rPr lang="fr-BE" b="0" i="1" smtClean="0">
-                                <a:latin typeface="Cambria Math" panose="02040503050406030204" pitchFamily="18" charset="0"/>
-                              </a:rPr>
-                              <m:t>𝑥</m:t>
-                            </m:r>
-                          </m:e>
-                          <m:sub>
-                            <m:r>
-                              <a:rPr lang="fr-BE" b="0" i="1" smtClean="0">
-                                <a:latin typeface="Cambria Math" panose="02040503050406030204" pitchFamily="18" charset="0"/>
-                              </a:rPr>
-                              <m:t>𝑘</m:t>
-                            </m:r>
-                          </m:sub>
-                        </m:sSub>
-                        <m:sSup>
-                          <m:sSupPr>
-                            <m:ctrlPr>
-                              <a:rPr lang="fr-BE" b="0" i="1" smtClean="0">
-                                <a:latin typeface="Cambria Math" panose="02040503050406030204" pitchFamily="18" charset="0"/>
-                              </a:rPr>
-                            </m:ctrlPr>
-                          </m:sSupPr>
-                          <m:e>
-                            <m:r>
-                              <a:rPr lang="fr-BE" b="0" i="1" smtClean="0">
-                                <a:latin typeface="Cambria Math" panose="02040503050406030204" pitchFamily="18" charset="0"/>
-                              </a:rPr>
-                              <m:t>𝑒</m:t>
-                            </m:r>
-                          </m:e>
-                          <m:sup>
-                            <m:r>
-                              <a:rPr lang="fr-BE" b="0" i="1" smtClean="0">
-                                <a:latin typeface="Cambria Math" panose="02040503050406030204" pitchFamily="18" charset="0"/>
-                              </a:rPr>
-                              <m:t>−</m:t>
-                            </m:r>
-                            <m:r>
-                              <a:rPr lang="fr-BE" b="0" i="1" smtClean="0">
-                                <a:latin typeface="Cambria Math" panose="02040503050406030204" pitchFamily="18" charset="0"/>
-                              </a:rPr>
-                              <m:t>𝑖</m:t>
-                            </m:r>
-                            <m:sSub>
-                              <m:sSubPr>
-                                <m:ctrlPr>
-                                  <a:rPr lang="fr-BE" b="0" i="1" smtClean="0">
-                                    <a:latin typeface="Cambria Math" panose="02040503050406030204" pitchFamily="18" charset="0"/>
-                                  </a:rPr>
-                                </m:ctrlPr>
-                              </m:sSubPr>
-                              <m:e>
-                                <m:r>
-                                  <a:rPr lang="fr-BE" b="0" i="1" smtClean="0">
-                                    <a:latin typeface="Cambria Math" panose="02040503050406030204" pitchFamily="18" charset="0"/>
-                                  </a:rPr>
-                                  <m:t>𝑘</m:t>
-                                </m:r>
-                                <m:r>
-                                  <a:rPr lang="fr-BE" b="0" i="1" smtClean="0">
-                                    <a:latin typeface="Cambria Math" panose="02040503050406030204" pitchFamily="18" charset="0"/>
-                                    <a:ea typeface="Cambria Math" panose="02040503050406030204" pitchFamily="18" charset="0"/>
-                                  </a:rPr>
-                                  <m:t>𝜔</m:t>
-                                </m:r>
-                              </m:e>
-                              <m:sub>
-                                <m:r>
-                                  <a:rPr lang="fr-BE" b="0" i="1" smtClean="0">
-                                    <a:latin typeface="Cambria Math" panose="02040503050406030204" pitchFamily="18" charset="0"/>
-                                    <a:ea typeface="Cambria Math" panose="02040503050406030204" pitchFamily="18" charset="0"/>
-                                  </a:rPr>
-                                  <m:t>𝑗</m:t>
-                                </m:r>
-                              </m:sub>
-                            </m:sSub>
-                          </m:sup>
-                        </m:sSup>
-                      </m:e>
-                    </m:nary>
-                    <m:r>
-                      <a:rPr lang="fr-BE" b="0" i="1" smtClean="0">
-                        <a:latin typeface="Cambria Math" panose="02040503050406030204" pitchFamily="18" charset="0"/>
-                      </a:rPr>
-                      <m:t>     [</m:t>
-                    </m:r>
-                    <m:r>
-                      <a:rPr lang="fr-BE" b="0" i="1" smtClean="0">
-                        <a:latin typeface="Cambria Math" panose="02040503050406030204" pitchFamily="18" charset="0"/>
-                      </a:rPr>
-                      <m:t>𝑜𝑟</m:t>
-                    </m:r>
-                    <m:r>
-                      <a:rPr lang="fr-BE" b="0" i="1" smtClean="0">
-                        <a:latin typeface="Cambria Math" panose="02040503050406030204" pitchFamily="18" charset="0"/>
-                      </a:rPr>
-                      <m:t>      </m:t>
-                    </m:r>
-                    <m:sSub>
-                      <m:sSubPr>
-                        <m:ctrlPr>
-                          <a:rPr lang="fr-BE" i="1">
-                            <a:latin typeface="Cambria Math" panose="02040503050406030204" pitchFamily="18" charset="0"/>
-                          </a:rPr>
-                        </m:ctrlPr>
-                      </m:sSubPr>
-                      <m:e>
-                        <m:r>
-                          <a:rPr lang="fr-BE" i="1">
-                            <a:latin typeface="Cambria Math" panose="02040503050406030204" pitchFamily="18" charset="0"/>
-                          </a:rPr>
-                          <m:t>𝑎</m:t>
-                        </m:r>
-                      </m:e>
-                      <m:sub>
-                        <m:r>
-                          <a:rPr lang="fr-BE" i="1">
-                            <a:latin typeface="Cambria Math" panose="02040503050406030204" pitchFamily="18" charset="0"/>
-                          </a:rPr>
-                          <m:t>𝑗</m:t>
-                        </m:r>
-                      </m:sub>
-                    </m:sSub>
-                    <m:r>
-                      <a:rPr lang="fr-BE" i="1">
-                        <a:latin typeface="Cambria Math" panose="02040503050406030204" pitchFamily="18" charset="0"/>
-                      </a:rPr>
-                      <m:t>=</m:t>
-                    </m:r>
-                    <m:nary>
-                      <m:naryPr>
-                        <m:chr m:val="∑"/>
-                        <m:ctrlPr>
-                          <a:rPr lang="fr-BE" i="1">
-                            <a:latin typeface="Cambria Math" panose="02040503050406030204" pitchFamily="18" charset="0"/>
-                          </a:rPr>
-                        </m:ctrlPr>
-                      </m:naryPr>
-                      <m:sub>
-                        <m:r>
-                          <a:rPr lang="fr-BE" i="1">
-                            <a:latin typeface="Cambria Math" panose="02040503050406030204" pitchFamily="18" charset="0"/>
-                          </a:rPr>
-                          <m:t>𝑘</m:t>
-                        </m:r>
-                        <m:r>
-                          <a:rPr lang="fr-BE" i="1">
-                            <a:latin typeface="Cambria Math" panose="02040503050406030204" pitchFamily="18" charset="0"/>
-                          </a:rPr>
-                          <m:t>=0</m:t>
-                        </m:r>
-                      </m:sub>
-                      <m:sup>
-                        <m:r>
-                          <a:rPr lang="fr-BE" i="1">
-                            <a:latin typeface="Cambria Math" panose="02040503050406030204" pitchFamily="18" charset="0"/>
-                          </a:rPr>
-                          <m:t>𝑘</m:t>
-                        </m:r>
-                        <m:r>
-                          <a:rPr lang="fr-BE" i="1">
-                            <a:latin typeface="Cambria Math" panose="02040503050406030204" pitchFamily="18" charset="0"/>
-                            <a:ea typeface="Cambria Math" panose="02040503050406030204" pitchFamily="18" charset="0"/>
-                          </a:rPr>
-                          <m:t>&lt;</m:t>
-                        </m:r>
-                        <m:r>
-                          <a:rPr lang="fr-BE" i="1">
-                            <a:latin typeface="Cambria Math" panose="02040503050406030204" pitchFamily="18" charset="0"/>
-                            <a:ea typeface="Cambria Math" panose="02040503050406030204" pitchFamily="18" charset="0"/>
-                          </a:rPr>
-                          <m:t>𝑛</m:t>
-                        </m:r>
-                      </m:sup>
-                      <m:e>
-                        <m:sSub>
-                          <m:sSubPr>
-                            <m:ctrlPr>
-                              <a:rPr lang="fr-BE" i="1">
-                                <a:latin typeface="Cambria Math" panose="02040503050406030204" pitchFamily="18" charset="0"/>
-                              </a:rPr>
-                            </m:ctrlPr>
-                          </m:sSubPr>
-                          <m:e>
-                            <m:r>
-                              <a:rPr lang="fr-BE" i="1">
-                                <a:latin typeface="Cambria Math" panose="02040503050406030204" pitchFamily="18" charset="0"/>
-                              </a:rPr>
-                              <m:t>𝑥</m:t>
-                            </m:r>
-                          </m:e>
-                          <m:sub>
-                            <m:r>
-                              <a:rPr lang="fr-BE" i="1">
-                                <a:latin typeface="Cambria Math" panose="02040503050406030204" pitchFamily="18" charset="0"/>
-                              </a:rPr>
-                              <m:t>𝑘</m:t>
-                            </m:r>
-                          </m:sub>
-                        </m:sSub>
-                        <m:sSup>
-                          <m:sSupPr>
-                            <m:ctrlPr>
-                              <a:rPr lang="fr-BE" i="1">
-                                <a:latin typeface="Cambria Math" panose="02040503050406030204" pitchFamily="18" charset="0"/>
-                              </a:rPr>
-                            </m:ctrlPr>
-                          </m:sSupPr>
-                          <m:e>
-                            <m:r>
-                              <a:rPr lang="fr-BE" i="1">
-                                <a:latin typeface="Cambria Math" panose="02040503050406030204" pitchFamily="18" charset="0"/>
-                              </a:rPr>
-                              <m:t>𝑒</m:t>
-                            </m:r>
-                          </m:e>
-                          <m:sup>
-                            <m:r>
-                              <a:rPr lang="fr-BE" i="1">
-                                <a:latin typeface="Cambria Math" panose="02040503050406030204" pitchFamily="18" charset="0"/>
-                              </a:rPr>
-                              <m:t>−</m:t>
-                            </m:r>
-                            <m:r>
-                              <a:rPr lang="fr-BE" i="1">
-                                <a:latin typeface="Cambria Math" panose="02040503050406030204" pitchFamily="18" charset="0"/>
-                              </a:rPr>
-                              <m:t>𝑖</m:t>
-                            </m:r>
-                            <m:sSub>
-                              <m:sSubPr>
-                                <m:ctrlPr>
-                                  <a:rPr lang="fr-BE" i="1">
-                                    <a:latin typeface="Cambria Math" panose="02040503050406030204" pitchFamily="18" charset="0"/>
-                                  </a:rPr>
-                                </m:ctrlPr>
-                              </m:sSubPr>
-                              <m:e>
-                                <m:r>
-                                  <a:rPr lang="fr-BE" i="1">
-                                    <a:latin typeface="Cambria Math" panose="02040503050406030204" pitchFamily="18" charset="0"/>
-                                  </a:rPr>
-                                  <m:t>𝑘</m:t>
-                                </m:r>
-                                <m:r>
-                                  <a:rPr lang="fr-BE" i="1">
-                                    <a:latin typeface="Cambria Math" panose="02040503050406030204" pitchFamily="18" charset="0"/>
-                                    <a:ea typeface="Cambria Math" panose="02040503050406030204" pitchFamily="18" charset="0"/>
-                                  </a:rPr>
-                                  <m:t>𝜔</m:t>
-                                </m:r>
-                              </m:e>
-                              <m:sub>
-                                <m:r>
-                                  <a:rPr lang="fr-BE" i="1">
-                                    <a:latin typeface="Cambria Math" panose="02040503050406030204" pitchFamily="18" charset="0"/>
-                                    <a:ea typeface="Cambria Math" panose="02040503050406030204" pitchFamily="18" charset="0"/>
-                                  </a:rPr>
-                                  <m:t>𝑗</m:t>
-                                </m:r>
-                              </m:sub>
-                            </m:sSub>
-                          </m:sup>
-                        </m:sSup>
-                      </m:e>
-                    </m:nary>
-                    <m:r>
-                      <a:rPr lang="fr-BE" b="0" i="1" smtClean="0">
-                        <a:latin typeface="Cambria Math" panose="02040503050406030204" pitchFamily="18" charset="0"/>
-                        <a:ea typeface="Cambria Math" panose="02040503050406030204" pitchFamily="18" charset="0"/>
-                      </a:rPr>
-                      <m:t>]</m:t>
-                    </m:r>
-                  </m:oMath>
+                  <m:oMathPara xmlns:m="http://schemas.openxmlformats.org/officeDocument/2006/math">
+                    <m:oMath>
+                      <m:sSub>
+                        <m:sSubPr>
+                          <m:ctrlPr>
+                            <a:rPr lang="fr-BE" b="0" i="1" smtClean="0">
+                              <a:latin typeface="Cambria Math" panose="02040503050406030204" pitchFamily="18" charset="0"/>
+                            </a:rPr>
+                          </m:ctrlPr>
+                        </m:sSubPr>
+                        <m:e>
+                          <m:r>
+                            <a:rPr lang="fr-BE" b="0" i="1" smtClean="0">
+                              <a:latin typeface="Cambria Math" panose="02040503050406030204" pitchFamily="18" charset="0"/>
+                            </a:rPr>
+                            <m:t>𝑎</m:t>
+                          </m:r>
+                        </m:e>
+                        <m:sub>
+                          <m:r>
+                            <a:rPr lang="fr-BE" b="0" i="1" smtClean="0">
+                              <a:latin typeface="Cambria Math" panose="02040503050406030204" pitchFamily="18" charset="0"/>
+                            </a:rPr>
+                            <m:t>𝑗</m:t>
+                          </m:r>
+                        </m:sub>
+                      </m:sSub>
+                      <m:r>
+                        <a:rPr lang="fr-BE" b="0" i="1" smtClean="0">
+                          <a:latin typeface="Cambria Math" panose="02040503050406030204" pitchFamily="18" charset="0"/>
+                        </a:rPr>
+                        <m:t>=</m:t>
+                      </m:r>
+                      <m:sSup>
+                        <m:sSupPr>
+                          <m:ctrlPr>
+                            <a:rPr lang="fr-BE" b="0" i="1" smtClean="0">
+                              <a:latin typeface="Cambria Math" panose="02040503050406030204" pitchFamily="18" charset="0"/>
+                            </a:rPr>
+                          </m:ctrlPr>
+                        </m:sSupPr>
+                        <m:e>
+                          <m:r>
+                            <a:rPr lang="fr-BE" b="0" i="1" smtClean="0">
+                              <a:latin typeface="Cambria Math" panose="02040503050406030204" pitchFamily="18" charset="0"/>
+                            </a:rPr>
+                            <m:t>𝑛</m:t>
+                          </m:r>
+                        </m:e>
+                        <m:sup>
+                          <m:r>
+                            <a:rPr lang="fr-BE" b="0" i="1" smtClean="0">
+                              <a:latin typeface="Cambria Math" panose="02040503050406030204" pitchFamily="18" charset="0"/>
+                            </a:rPr>
+                            <m:t>−</m:t>
+                          </m:r>
+                          <m:f>
+                            <m:fPr>
+                              <m:type m:val="skw"/>
+                              <m:ctrlPr>
+                                <a:rPr lang="fr-BE" b="0" i="1" smtClean="0">
+                                  <a:latin typeface="Cambria Math" panose="02040503050406030204" pitchFamily="18" charset="0"/>
+                                </a:rPr>
+                              </m:ctrlPr>
+                            </m:fPr>
+                            <m:num>
+                              <m:r>
+                                <a:rPr lang="fr-BE" b="0" i="1" smtClean="0">
+                                  <a:latin typeface="Cambria Math" panose="02040503050406030204" pitchFamily="18" charset="0"/>
+                                </a:rPr>
+                                <m:t>1</m:t>
+                              </m:r>
+                            </m:num>
+                            <m:den>
+                              <m:r>
+                                <a:rPr lang="fr-BE" b="0" i="1" smtClean="0">
+                                  <a:latin typeface="Cambria Math" panose="02040503050406030204" pitchFamily="18" charset="0"/>
+                                </a:rPr>
+                                <m:t>2</m:t>
+                              </m:r>
+                            </m:den>
+                          </m:f>
+                        </m:sup>
+                      </m:sSup>
+                      <m:nary>
+                        <m:naryPr>
+                          <m:chr m:val="∑"/>
+                          <m:ctrlPr>
+                            <a:rPr lang="fr-BE" b="0" i="1" smtClean="0">
+                              <a:latin typeface="Cambria Math" panose="02040503050406030204" pitchFamily="18" charset="0"/>
+                            </a:rPr>
+                          </m:ctrlPr>
+                        </m:naryPr>
+                        <m:sub>
+                          <m:r>
+                            <a:rPr lang="fr-BE" b="0" i="1" smtClean="0">
+                              <a:latin typeface="Cambria Math" panose="02040503050406030204" pitchFamily="18" charset="0"/>
+                            </a:rPr>
+                            <m:t>𝑘</m:t>
+                          </m:r>
+                          <m:r>
+                            <a:rPr lang="fr-BE" b="0" i="1" smtClean="0">
+                              <a:latin typeface="Cambria Math" panose="02040503050406030204" pitchFamily="18" charset="0"/>
+                            </a:rPr>
+                            <m:t>=0</m:t>
+                          </m:r>
+                        </m:sub>
+                        <m:sup>
+                          <m:r>
+                            <a:rPr lang="fr-BE" b="0" i="1" smtClean="0">
+                              <a:latin typeface="Cambria Math" panose="02040503050406030204" pitchFamily="18" charset="0"/>
+                            </a:rPr>
+                            <m:t>𝑘</m:t>
+                          </m:r>
+                          <m:r>
+                            <a:rPr lang="fr-BE" b="0" i="1" smtClean="0">
+                              <a:latin typeface="Cambria Math" panose="02040503050406030204" pitchFamily="18" charset="0"/>
+                              <a:ea typeface="Cambria Math" panose="02040503050406030204" pitchFamily="18" charset="0"/>
+                            </a:rPr>
+                            <m:t>&lt;</m:t>
+                          </m:r>
+                          <m:r>
+                            <a:rPr lang="fr-BE" b="0" i="1" smtClean="0">
+                              <a:latin typeface="Cambria Math" panose="02040503050406030204" pitchFamily="18" charset="0"/>
+                              <a:ea typeface="Cambria Math" panose="02040503050406030204" pitchFamily="18" charset="0"/>
+                            </a:rPr>
+                            <m:t>𝑛</m:t>
+                          </m:r>
+                        </m:sup>
+                        <m:e>
+                          <m:sSub>
+                            <m:sSubPr>
+                              <m:ctrlPr>
+                                <a:rPr lang="fr-BE" b="0" i="1" smtClean="0">
+                                  <a:latin typeface="Cambria Math" panose="02040503050406030204" pitchFamily="18" charset="0"/>
+                                </a:rPr>
+                              </m:ctrlPr>
+                            </m:sSubPr>
+                            <m:e>
+                              <m:r>
+                                <a:rPr lang="fr-BE" b="0" i="1" smtClean="0">
+                                  <a:latin typeface="Cambria Math" panose="02040503050406030204" pitchFamily="18" charset="0"/>
+                                </a:rPr>
+                                <m:t>𝑥</m:t>
+                              </m:r>
+                            </m:e>
+                            <m:sub>
+                              <m:r>
+                                <a:rPr lang="fr-BE" b="0" i="1" smtClean="0">
+                                  <a:latin typeface="Cambria Math" panose="02040503050406030204" pitchFamily="18" charset="0"/>
+                                </a:rPr>
+                                <m:t>𝑘</m:t>
+                              </m:r>
+                            </m:sub>
+                          </m:sSub>
+                          <m:sSup>
+                            <m:sSupPr>
+                              <m:ctrlPr>
+                                <a:rPr lang="fr-BE" b="0" i="1" smtClean="0">
+                                  <a:latin typeface="Cambria Math" panose="02040503050406030204" pitchFamily="18" charset="0"/>
+                                </a:rPr>
+                              </m:ctrlPr>
+                            </m:sSupPr>
+                            <m:e>
+                              <m:r>
+                                <a:rPr lang="fr-BE" b="0" i="1" smtClean="0">
+                                  <a:latin typeface="Cambria Math" panose="02040503050406030204" pitchFamily="18" charset="0"/>
+                                </a:rPr>
+                                <m:t>𝑒</m:t>
+                              </m:r>
+                            </m:e>
+                            <m:sup>
+                              <m:r>
+                                <a:rPr lang="fr-BE" b="0" i="1" smtClean="0">
+                                  <a:latin typeface="Cambria Math" panose="02040503050406030204" pitchFamily="18" charset="0"/>
+                                </a:rPr>
+                                <m:t>−</m:t>
+                              </m:r>
+                              <m:r>
+                                <a:rPr lang="fr-BE" b="0" i="1" smtClean="0">
+                                  <a:latin typeface="Cambria Math" panose="02040503050406030204" pitchFamily="18" charset="0"/>
+                                </a:rPr>
+                                <m:t>𝑖</m:t>
+                              </m:r>
+                              <m:sSub>
+                                <m:sSubPr>
+                                  <m:ctrlPr>
+                                    <a:rPr lang="fr-BE" b="0" i="1" smtClean="0">
+                                      <a:latin typeface="Cambria Math" panose="02040503050406030204" pitchFamily="18" charset="0"/>
+                                    </a:rPr>
+                                  </m:ctrlPr>
+                                </m:sSubPr>
+                                <m:e>
+                                  <m:r>
+                                    <a:rPr lang="fr-BE" b="0" i="1" smtClean="0">
+                                      <a:latin typeface="Cambria Math" panose="02040503050406030204" pitchFamily="18" charset="0"/>
+                                    </a:rPr>
+                                    <m:t>𝑘</m:t>
+                                  </m:r>
+                                  <m:r>
+                                    <a:rPr lang="fr-BE" b="0" i="1" smtClean="0">
+                                      <a:latin typeface="Cambria Math" panose="02040503050406030204" pitchFamily="18" charset="0"/>
+                                      <a:ea typeface="Cambria Math" panose="02040503050406030204" pitchFamily="18" charset="0"/>
+                                    </a:rPr>
+                                    <m:t>𝜔</m:t>
+                                  </m:r>
+                                </m:e>
+                                <m:sub>
+                                  <m:r>
+                                    <a:rPr lang="fr-BE" b="0" i="1" smtClean="0">
+                                      <a:latin typeface="Cambria Math" panose="02040503050406030204" pitchFamily="18" charset="0"/>
+                                      <a:ea typeface="Cambria Math" panose="02040503050406030204" pitchFamily="18" charset="0"/>
+                                    </a:rPr>
+                                    <m:t>𝑗</m:t>
+                                  </m:r>
+                                </m:sub>
+                              </m:sSub>
+                            </m:sup>
+                          </m:sSup>
+                        </m:e>
+                      </m:nary>
+                      <m:r>
+                        <a:rPr lang="fr-BE" b="0" i="1" smtClean="0">
+                          <a:latin typeface="Cambria Math" panose="02040503050406030204" pitchFamily="18" charset="0"/>
+                        </a:rPr>
+                        <m:t>     [</m:t>
+                      </m:r>
+                      <m:r>
+                        <a:rPr lang="fr-BE" b="0" i="1" smtClean="0">
+                          <a:latin typeface="Cambria Math" panose="02040503050406030204" pitchFamily="18" charset="0"/>
+                        </a:rPr>
+                        <m:t>𝑜𝑟</m:t>
+                      </m:r>
+                      <m:r>
+                        <a:rPr lang="fr-BE" b="0" i="1" smtClean="0">
+                          <a:latin typeface="Cambria Math" panose="02040503050406030204" pitchFamily="18" charset="0"/>
+                        </a:rPr>
+                        <m:t>      </m:t>
+                      </m:r>
+                      <m:sSub>
+                        <m:sSubPr>
+                          <m:ctrlPr>
+                            <a:rPr lang="fr-BE" i="1">
+                              <a:latin typeface="Cambria Math" panose="02040503050406030204" pitchFamily="18" charset="0"/>
+                            </a:rPr>
+                          </m:ctrlPr>
+                        </m:sSubPr>
+                        <m:e>
+                          <m:r>
+                            <a:rPr lang="fr-BE" i="1">
+                              <a:latin typeface="Cambria Math" panose="02040503050406030204" pitchFamily="18" charset="0"/>
+                            </a:rPr>
+                            <m:t>𝑎</m:t>
+                          </m:r>
+                        </m:e>
+                        <m:sub>
+                          <m:r>
+                            <a:rPr lang="fr-BE" i="1">
+                              <a:latin typeface="Cambria Math" panose="02040503050406030204" pitchFamily="18" charset="0"/>
+                            </a:rPr>
+                            <m:t>𝑗</m:t>
+                          </m:r>
+                        </m:sub>
+                      </m:sSub>
+                      <m:r>
+                        <a:rPr lang="fr-BE" i="1">
+                          <a:latin typeface="Cambria Math" panose="02040503050406030204" pitchFamily="18" charset="0"/>
+                        </a:rPr>
+                        <m:t>=</m:t>
+                      </m:r>
+                      <m:nary>
+                        <m:naryPr>
+                          <m:chr m:val="∑"/>
+                          <m:ctrlPr>
+                            <a:rPr lang="fr-BE" i="1">
+                              <a:latin typeface="Cambria Math" panose="02040503050406030204" pitchFamily="18" charset="0"/>
+                            </a:rPr>
+                          </m:ctrlPr>
+                        </m:naryPr>
+                        <m:sub>
+                          <m:r>
+                            <a:rPr lang="fr-BE" i="1">
+                              <a:latin typeface="Cambria Math" panose="02040503050406030204" pitchFamily="18" charset="0"/>
+                            </a:rPr>
+                            <m:t>𝑘</m:t>
+                          </m:r>
+                          <m:r>
+                            <a:rPr lang="fr-BE" i="1">
+                              <a:latin typeface="Cambria Math" panose="02040503050406030204" pitchFamily="18" charset="0"/>
+                            </a:rPr>
+                            <m:t>=0</m:t>
+                          </m:r>
+                        </m:sub>
+                        <m:sup>
+                          <m:r>
+                            <a:rPr lang="fr-BE" i="1">
+                              <a:latin typeface="Cambria Math" panose="02040503050406030204" pitchFamily="18" charset="0"/>
+                            </a:rPr>
+                            <m:t>𝑘</m:t>
+                          </m:r>
+                          <m:r>
+                            <a:rPr lang="fr-BE" i="1">
+                              <a:latin typeface="Cambria Math" panose="02040503050406030204" pitchFamily="18" charset="0"/>
+                              <a:ea typeface="Cambria Math" panose="02040503050406030204" pitchFamily="18" charset="0"/>
+                            </a:rPr>
+                            <m:t>&lt;</m:t>
+                          </m:r>
+                          <m:r>
+                            <a:rPr lang="fr-BE" i="1">
+                              <a:latin typeface="Cambria Math" panose="02040503050406030204" pitchFamily="18" charset="0"/>
+                              <a:ea typeface="Cambria Math" panose="02040503050406030204" pitchFamily="18" charset="0"/>
+                            </a:rPr>
+                            <m:t>𝑛</m:t>
+                          </m:r>
+                        </m:sup>
+                        <m:e>
+                          <m:sSub>
+                            <m:sSubPr>
+                              <m:ctrlPr>
+                                <a:rPr lang="fr-BE" i="1">
+                                  <a:latin typeface="Cambria Math" panose="02040503050406030204" pitchFamily="18" charset="0"/>
+                                </a:rPr>
+                              </m:ctrlPr>
+                            </m:sSubPr>
+                            <m:e>
+                              <m:r>
+                                <a:rPr lang="fr-BE" i="1">
+                                  <a:latin typeface="Cambria Math" panose="02040503050406030204" pitchFamily="18" charset="0"/>
+                                </a:rPr>
+                                <m:t>𝑥</m:t>
+                              </m:r>
+                            </m:e>
+                            <m:sub>
+                              <m:r>
+                                <a:rPr lang="fr-BE" i="1">
+                                  <a:latin typeface="Cambria Math" panose="02040503050406030204" pitchFamily="18" charset="0"/>
+                                </a:rPr>
+                                <m:t>𝑘</m:t>
+                              </m:r>
+                            </m:sub>
+                          </m:sSub>
+                          <m:sSup>
+                            <m:sSupPr>
+                              <m:ctrlPr>
+                                <a:rPr lang="fr-BE" i="1">
+                                  <a:latin typeface="Cambria Math" panose="02040503050406030204" pitchFamily="18" charset="0"/>
+                                </a:rPr>
+                              </m:ctrlPr>
+                            </m:sSupPr>
+                            <m:e>
+                              <m:r>
+                                <a:rPr lang="fr-BE" i="1">
+                                  <a:latin typeface="Cambria Math" panose="02040503050406030204" pitchFamily="18" charset="0"/>
+                                </a:rPr>
+                                <m:t>𝑒</m:t>
+                              </m:r>
+                            </m:e>
+                            <m:sup>
+                              <m:r>
+                                <a:rPr lang="fr-BE" i="1">
+                                  <a:latin typeface="Cambria Math" panose="02040503050406030204" pitchFamily="18" charset="0"/>
+                                </a:rPr>
+                                <m:t>−</m:t>
+                              </m:r>
+                              <m:r>
+                                <a:rPr lang="fr-BE" i="1">
+                                  <a:latin typeface="Cambria Math" panose="02040503050406030204" pitchFamily="18" charset="0"/>
+                                </a:rPr>
+                                <m:t>𝑖</m:t>
+                              </m:r>
+                              <m:sSub>
+                                <m:sSubPr>
+                                  <m:ctrlPr>
+                                    <a:rPr lang="fr-BE" i="1">
+                                      <a:latin typeface="Cambria Math" panose="02040503050406030204" pitchFamily="18" charset="0"/>
+                                    </a:rPr>
+                                  </m:ctrlPr>
+                                </m:sSubPr>
+                                <m:e>
+                                  <m:r>
+                                    <a:rPr lang="fr-BE" i="1">
+                                      <a:latin typeface="Cambria Math" panose="02040503050406030204" pitchFamily="18" charset="0"/>
+                                    </a:rPr>
+                                    <m:t>𝑘</m:t>
+                                  </m:r>
+                                  <m:r>
+                                    <a:rPr lang="fr-BE" i="1">
+                                      <a:latin typeface="Cambria Math" panose="02040503050406030204" pitchFamily="18" charset="0"/>
+                                      <a:ea typeface="Cambria Math" panose="02040503050406030204" pitchFamily="18" charset="0"/>
+                                    </a:rPr>
+                                    <m:t>𝜔</m:t>
+                                  </m:r>
+                                </m:e>
+                                <m:sub>
+                                  <m:r>
+                                    <a:rPr lang="fr-BE" i="1">
+                                      <a:latin typeface="Cambria Math" panose="02040503050406030204" pitchFamily="18" charset="0"/>
+                                      <a:ea typeface="Cambria Math" panose="02040503050406030204" pitchFamily="18" charset="0"/>
+                                    </a:rPr>
+                                    <m:t>𝑗</m:t>
+                                  </m:r>
+                                </m:sub>
+                              </m:sSub>
+                            </m:sup>
+                          </m:sSup>
+                        </m:e>
+                      </m:nary>
+                      <m:r>
+                        <a:rPr lang="fr-BE" b="0" i="1" smtClean="0">
+                          <a:latin typeface="Cambria Math" panose="02040503050406030204" pitchFamily="18" charset="0"/>
+                          <a:ea typeface="Cambria Math" panose="02040503050406030204" pitchFamily="18" charset="0"/>
+                        </a:rPr>
+                        <m:t>]</m:t>
+                      </m:r>
+                    </m:oMath>
+                  </m:oMathPara>
                 </a14:m>
                 <a:endParaRPr lang="en-GB" dirty="0"/>
               </a:p>
               <a:p>
-                <a:pPr lvl="2"/>
+                <a:pPr marL="1028700" lvl="2" indent="0">
+                  <a:buNone/>
+                </a:pPr>
                 <a14:m>
-                  <m:oMath xmlns:m="http://schemas.openxmlformats.org/officeDocument/2006/math">
-                    <m:sSub>
-                      <m:sSubPr>
-                        <m:ctrlPr>
-                          <a:rPr lang="fr-BE" b="0" i="1" smtClean="0">
-                            <a:latin typeface="Cambria Math" panose="02040503050406030204" pitchFamily="18" charset="0"/>
-                          </a:rPr>
-                        </m:ctrlPr>
-                      </m:sSubPr>
-                      <m:e>
-                        <m:r>
-                          <a:rPr lang="fr-BE" b="0" i="1" smtClean="0">
-                            <a:latin typeface="Cambria Math" panose="02040503050406030204" pitchFamily="18" charset="0"/>
-                          </a:rPr>
-                          <m:t>𝑥</m:t>
-                        </m:r>
-                      </m:e>
-                      <m:sub>
-                        <m:r>
-                          <a:rPr lang="fr-BE" b="0" i="1" smtClean="0">
-                            <a:latin typeface="Cambria Math" panose="02040503050406030204" pitchFamily="18" charset="0"/>
-                          </a:rPr>
-                          <m:t>𝑘</m:t>
-                        </m:r>
-                      </m:sub>
-                    </m:sSub>
-                    <m:r>
-                      <a:rPr lang="fr-BE" b="0" i="1" smtClean="0">
-                        <a:latin typeface="Cambria Math" panose="02040503050406030204" pitchFamily="18" charset="0"/>
-                      </a:rPr>
-                      <m:t>=</m:t>
-                    </m:r>
-                    <m:sSup>
-                      <m:sSupPr>
-                        <m:ctrlPr>
-                          <a:rPr lang="fr-BE" b="0" i="1" smtClean="0">
-                            <a:latin typeface="Cambria Math" panose="02040503050406030204" pitchFamily="18" charset="0"/>
-                          </a:rPr>
-                        </m:ctrlPr>
-                      </m:sSupPr>
-                      <m:e>
-                        <m:r>
-                          <a:rPr lang="fr-BE" b="0" i="1" smtClean="0">
-                            <a:latin typeface="Cambria Math" panose="02040503050406030204" pitchFamily="18" charset="0"/>
-                          </a:rPr>
-                          <m:t>𝑛</m:t>
-                        </m:r>
-                      </m:e>
-                      <m:sup>
-                        <m:r>
-                          <a:rPr lang="fr-BE" b="0" i="1" smtClean="0">
-                            <a:latin typeface="Cambria Math" panose="02040503050406030204" pitchFamily="18" charset="0"/>
-                          </a:rPr>
-                          <m:t>−</m:t>
-                        </m:r>
-                        <m:f>
-                          <m:fPr>
-                            <m:type m:val="skw"/>
-                            <m:ctrlPr>
-                              <a:rPr lang="fr-BE" b="0" i="1" smtClean="0">
-                                <a:latin typeface="Cambria Math" panose="02040503050406030204" pitchFamily="18" charset="0"/>
-                              </a:rPr>
-                            </m:ctrlPr>
-                          </m:fPr>
-                          <m:num>
-                            <m:r>
-                              <a:rPr lang="fr-BE" b="0" i="1" smtClean="0">
-                                <a:latin typeface="Cambria Math" panose="02040503050406030204" pitchFamily="18" charset="0"/>
-                              </a:rPr>
-                              <m:t>1</m:t>
-                            </m:r>
-                          </m:num>
-                          <m:den>
-                            <m:r>
-                              <a:rPr lang="fr-BE" b="0" i="1" smtClean="0">
-                                <a:latin typeface="Cambria Math" panose="02040503050406030204" pitchFamily="18" charset="0"/>
-                              </a:rPr>
-                              <m:t>2</m:t>
-                            </m:r>
-                          </m:den>
-                        </m:f>
-                      </m:sup>
-                    </m:sSup>
-                    <m:nary>
-                      <m:naryPr>
-                        <m:chr m:val="∑"/>
-                        <m:ctrlPr>
-                          <a:rPr lang="fr-BE" b="0" i="1" smtClean="0">
-                            <a:latin typeface="Cambria Math" panose="02040503050406030204" pitchFamily="18" charset="0"/>
-                          </a:rPr>
-                        </m:ctrlPr>
-                      </m:naryPr>
-                      <m:sub>
-                        <m:r>
-                          <m:rPr>
-                            <m:brk m:alnAt="23"/>
-                          </m:rPr>
-                          <a:rPr lang="fr-BE" b="0" i="1" smtClean="0">
-                            <a:latin typeface="Cambria Math" panose="02040503050406030204" pitchFamily="18" charset="0"/>
-                          </a:rPr>
-                          <m:t>𝑗</m:t>
-                        </m:r>
-                        <m:r>
-                          <a:rPr lang="fr-BE" b="0" i="1" smtClean="0">
-                            <a:latin typeface="Cambria Math" panose="02040503050406030204" pitchFamily="18" charset="0"/>
-                          </a:rPr>
-                          <m:t>=0</m:t>
-                        </m:r>
-                      </m:sub>
-                      <m:sup>
-                        <m:r>
-                          <a:rPr lang="fr-BE" b="0" i="1" smtClean="0">
-                            <a:latin typeface="Cambria Math" panose="02040503050406030204" pitchFamily="18" charset="0"/>
-                          </a:rPr>
-                          <m:t>𝑗</m:t>
-                        </m:r>
-                        <m:r>
-                          <a:rPr lang="fr-BE" b="0" i="1" smtClean="0">
-                            <a:latin typeface="Cambria Math" panose="02040503050406030204" pitchFamily="18" charset="0"/>
-                            <a:ea typeface="Cambria Math" panose="02040503050406030204" pitchFamily="18" charset="0"/>
-                          </a:rPr>
-                          <m:t>&lt;</m:t>
-                        </m:r>
-                        <m:r>
-                          <a:rPr lang="fr-BE" b="0" i="1" smtClean="0">
-                            <a:latin typeface="Cambria Math" panose="02040503050406030204" pitchFamily="18" charset="0"/>
-                            <a:ea typeface="Cambria Math" panose="02040503050406030204" pitchFamily="18" charset="0"/>
-                          </a:rPr>
-                          <m:t>𝑛</m:t>
-                        </m:r>
-                      </m:sup>
-                      <m:e>
-                        <m:sSub>
-                          <m:sSubPr>
-                            <m:ctrlPr>
-                              <a:rPr lang="fr-BE" b="0" i="1" smtClean="0">
-                                <a:latin typeface="Cambria Math" panose="02040503050406030204" pitchFamily="18" charset="0"/>
-                              </a:rPr>
-                            </m:ctrlPr>
-                          </m:sSubPr>
-                          <m:e>
-                            <m:r>
-                              <a:rPr lang="fr-BE" b="0" i="1" smtClean="0">
-                                <a:latin typeface="Cambria Math" panose="02040503050406030204" pitchFamily="18" charset="0"/>
-                              </a:rPr>
-                              <m:t>𝑎</m:t>
-                            </m:r>
-                          </m:e>
-                          <m:sub>
-                            <m:r>
-                              <a:rPr lang="fr-BE" b="0" i="1" smtClean="0">
-                                <a:latin typeface="Cambria Math" panose="02040503050406030204" pitchFamily="18" charset="0"/>
-                              </a:rPr>
-                              <m:t>𝑗</m:t>
-                            </m:r>
-                          </m:sub>
-                        </m:sSub>
-                        <m:sSup>
-                          <m:sSupPr>
-                            <m:ctrlPr>
-                              <a:rPr lang="fr-BE" b="0" i="1" smtClean="0">
-                                <a:latin typeface="Cambria Math" panose="02040503050406030204" pitchFamily="18" charset="0"/>
-                              </a:rPr>
-                            </m:ctrlPr>
-                          </m:sSupPr>
-                          <m:e>
-                            <m:r>
-                              <a:rPr lang="fr-BE" b="0" i="1" smtClean="0">
-                                <a:latin typeface="Cambria Math" panose="02040503050406030204" pitchFamily="18" charset="0"/>
-                              </a:rPr>
-                              <m:t>𝑒</m:t>
-                            </m:r>
-                          </m:e>
-                          <m:sup>
-                            <m:r>
-                              <a:rPr lang="fr-BE" b="0" i="1" smtClean="0">
-                                <a:latin typeface="Cambria Math" panose="02040503050406030204" pitchFamily="18" charset="0"/>
-                              </a:rPr>
-                              <m:t>𝑖𝑗</m:t>
-                            </m:r>
-                            <m:sSub>
-                              <m:sSubPr>
-                                <m:ctrlPr>
-                                  <a:rPr lang="fr-BE" b="0" i="1" smtClean="0">
-                                    <a:latin typeface="Cambria Math" panose="02040503050406030204" pitchFamily="18" charset="0"/>
-                                    <a:ea typeface="Cambria Math" panose="02040503050406030204" pitchFamily="18" charset="0"/>
-                                  </a:rPr>
-                                </m:ctrlPr>
-                              </m:sSubPr>
-                              <m:e>
-                                <m:r>
-                                  <a:rPr lang="fr-BE" b="0" i="1" smtClean="0">
-                                    <a:latin typeface="Cambria Math" panose="02040503050406030204" pitchFamily="18" charset="0"/>
-                                    <a:ea typeface="Cambria Math" panose="02040503050406030204" pitchFamily="18" charset="0"/>
-                                  </a:rPr>
-                                  <m:t>𝜔</m:t>
-                                </m:r>
-                              </m:e>
-                              <m:sub>
-                                <m:r>
-                                  <a:rPr lang="fr-BE" b="0" i="1" smtClean="0">
-                                    <a:latin typeface="Cambria Math" panose="02040503050406030204" pitchFamily="18" charset="0"/>
-                                  </a:rPr>
-                                  <m:t>𝑘</m:t>
-                                </m:r>
-                              </m:sub>
-                            </m:sSub>
-                          </m:sup>
-                        </m:sSup>
-                      </m:e>
-                    </m:nary>
-                    <m:r>
-                      <a:rPr lang="fr-BE" b="0" i="1" smtClean="0">
-                        <a:latin typeface="Cambria Math" panose="02040503050406030204" pitchFamily="18" charset="0"/>
-                      </a:rPr>
-                      <m:t>        [</m:t>
-                    </m:r>
-                    <m:r>
-                      <a:rPr lang="fr-BE" i="1">
-                        <a:latin typeface="Cambria Math" panose="02040503050406030204" pitchFamily="18" charset="0"/>
-                      </a:rPr>
-                      <m:t>𝑜𝑟</m:t>
-                    </m:r>
-                    <m:r>
-                      <a:rPr lang="fr-BE" b="0" i="1" smtClean="0">
-                        <a:latin typeface="Cambria Math" panose="02040503050406030204" pitchFamily="18" charset="0"/>
-                      </a:rPr>
-                      <m:t>      </m:t>
-                    </m:r>
-                    <m:sSub>
-                      <m:sSubPr>
-                        <m:ctrlPr>
-                          <a:rPr lang="fr-BE" i="1">
-                            <a:latin typeface="Cambria Math" panose="02040503050406030204" pitchFamily="18" charset="0"/>
-                          </a:rPr>
-                        </m:ctrlPr>
-                      </m:sSubPr>
-                      <m:e>
-                        <m:r>
-                          <a:rPr lang="fr-BE" i="1">
-                            <a:latin typeface="Cambria Math" panose="02040503050406030204" pitchFamily="18" charset="0"/>
-                          </a:rPr>
-                          <m:t>𝑥</m:t>
-                        </m:r>
-                      </m:e>
-                      <m:sub>
-                        <m:r>
-                          <a:rPr lang="fr-BE" i="1">
-                            <a:latin typeface="Cambria Math" panose="02040503050406030204" pitchFamily="18" charset="0"/>
-                          </a:rPr>
-                          <m:t>𝑘</m:t>
-                        </m:r>
-                      </m:sub>
-                    </m:sSub>
-                    <m:r>
-                      <a:rPr lang="fr-BE" i="1">
-                        <a:latin typeface="Cambria Math" panose="02040503050406030204" pitchFamily="18" charset="0"/>
-                      </a:rPr>
-                      <m:t>=</m:t>
-                    </m:r>
-                    <m:sSup>
-                      <m:sSupPr>
-                        <m:ctrlPr>
-                          <a:rPr lang="fr-BE" i="1">
-                            <a:latin typeface="Cambria Math" panose="02040503050406030204" pitchFamily="18" charset="0"/>
-                          </a:rPr>
-                        </m:ctrlPr>
-                      </m:sSupPr>
-                      <m:e>
-                        <m:r>
-                          <a:rPr lang="fr-BE" i="1">
-                            <a:latin typeface="Cambria Math" panose="02040503050406030204" pitchFamily="18" charset="0"/>
-                          </a:rPr>
-                          <m:t>𝑛</m:t>
-                        </m:r>
-                      </m:e>
-                      <m:sup>
-                        <m:r>
-                          <a:rPr lang="fr-BE" i="1">
-                            <a:latin typeface="Cambria Math" panose="02040503050406030204" pitchFamily="18" charset="0"/>
-                          </a:rPr>
-                          <m:t>−</m:t>
-                        </m:r>
-                        <m:r>
-                          <a:rPr lang="fr-BE" b="0" i="1" smtClean="0">
-                            <a:latin typeface="Cambria Math" panose="02040503050406030204" pitchFamily="18" charset="0"/>
-                          </a:rPr>
-                          <m:t>1</m:t>
-                        </m:r>
-                      </m:sup>
-                    </m:sSup>
-                    <m:nary>
-                      <m:naryPr>
-                        <m:chr m:val="∑"/>
-                        <m:ctrlPr>
-                          <a:rPr lang="fr-BE" i="1">
-                            <a:latin typeface="Cambria Math" panose="02040503050406030204" pitchFamily="18" charset="0"/>
-                          </a:rPr>
-                        </m:ctrlPr>
-                      </m:naryPr>
-                      <m:sub>
-                        <m:r>
-                          <m:rPr>
-                            <m:brk m:alnAt="23"/>
-                          </m:rPr>
-                          <a:rPr lang="fr-BE" i="1">
-                            <a:latin typeface="Cambria Math" panose="02040503050406030204" pitchFamily="18" charset="0"/>
-                          </a:rPr>
-                          <m:t>𝑗</m:t>
-                        </m:r>
-                        <m:r>
-                          <a:rPr lang="fr-BE" i="1">
-                            <a:latin typeface="Cambria Math" panose="02040503050406030204" pitchFamily="18" charset="0"/>
-                          </a:rPr>
-                          <m:t>=0</m:t>
-                        </m:r>
-                      </m:sub>
-                      <m:sup>
-                        <m:r>
-                          <a:rPr lang="fr-BE" i="1">
-                            <a:latin typeface="Cambria Math" panose="02040503050406030204" pitchFamily="18" charset="0"/>
-                          </a:rPr>
-                          <m:t>𝑗</m:t>
-                        </m:r>
-                        <m:r>
-                          <a:rPr lang="fr-BE" i="1">
-                            <a:latin typeface="Cambria Math" panose="02040503050406030204" pitchFamily="18" charset="0"/>
-                            <a:ea typeface="Cambria Math" panose="02040503050406030204" pitchFamily="18" charset="0"/>
-                          </a:rPr>
-                          <m:t>&lt;</m:t>
-                        </m:r>
-                        <m:r>
-                          <a:rPr lang="fr-BE" i="1">
-                            <a:latin typeface="Cambria Math" panose="02040503050406030204" pitchFamily="18" charset="0"/>
-                            <a:ea typeface="Cambria Math" panose="02040503050406030204" pitchFamily="18" charset="0"/>
-                          </a:rPr>
-                          <m:t>𝑛</m:t>
-                        </m:r>
-                      </m:sup>
-                      <m:e>
-                        <m:sSub>
-                          <m:sSubPr>
-                            <m:ctrlPr>
-                              <a:rPr lang="fr-BE" i="1">
-                                <a:latin typeface="Cambria Math" panose="02040503050406030204" pitchFamily="18" charset="0"/>
-                              </a:rPr>
-                            </m:ctrlPr>
-                          </m:sSubPr>
-                          <m:e>
-                            <m:r>
-                              <a:rPr lang="fr-BE" i="1">
-                                <a:latin typeface="Cambria Math" panose="02040503050406030204" pitchFamily="18" charset="0"/>
-                              </a:rPr>
-                              <m:t>𝑎</m:t>
-                            </m:r>
-                          </m:e>
-                          <m:sub>
-                            <m:r>
-                              <a:rPr lang="fr-BE" i="1">
-                                <a:latin typeface="Cambria Math" panose="02040503050406030204" pitchFamily="18" charset="0"/>
-                              </a:rPr>
-                              <m:t>𝑗</m:t>
-                            </m:r>
-                          </m:sub>
-                        </m:sSub>
-                        <m:sSup>
-                          <m:sSupPr>
-                            <m:ctrlPr>
-                              <a:rPr lang="fr-BE" i="1">
-                                <a:latin typeface="Cambria Math" panose="02040503050406030204" pitchFamily="18" charset="0"/>
-                              </a:rPr>
-                            </m:ctrlPr>
-                          </m:sSupPr>
-                          <m:e>
-                            <m:r>
-                              <a:rPr lang="fr-BE" i="1">
-                                <a:latin typeface="Cambria Math" panose="02040503050406030204" pitchFamily="18" charset="0"/>
-                              </a:rPr>
-                              <m:t>𝑒</m:t>
-                            </m:r>
-                          </m:e>
-                          <m:sup>
-                            <m:r>
-                              <a:rPr lang="fr-BE" i="1">
-                                <a:latin typeface="Cambria Math" panose="02040503050406030204" pitchFamily="18" charset="0"/>
-                              </a:rPr>
-                              <m:t>𝑖𝑗</m:t>
-                            </m:r>
-                            <m:sSub>
-                              <m:sSubPr>
-                                <m:ctrlPr>
-                                  <a:rPr lang="fr-BE" i="1">
-                                    <a:latin typeface="Cambria Math" panose="02040503050406030204" pitchFamily="18" charset="0"/>
-                                    <a:ea typeface="Cambria Math" panose="02040503050406030204" pitchFamily="18" charset="0"/>
-                                  </a:rPr>
-                                </m:ctrlPr>
-                              </m:sSubPr>
-                              <m:e>
-                                <m:r>
-                                  <a:rPr lang="fr-BE" i="1">
-                                    <a:latin typeface="Cambria Math" panose="02040503050406030204" pitchFamily="18" charset="0"/>
-                                    <a:ea typeface="Cambria Math" panose="02040503050406030204" pitchFamily="18" charset="0"/>
-                                  </a:rPr>
-                                  <m:t>𝜔</m:t>
-                                </m:r>
-                              </m:e>
-                              <m:sub>
-                                <m:r>
-                                  <a:rPr lang="fr-BE" i="1">
-                                    <a:latin typeface="Cambria Math" panose="02040503050406030204" pitchFamily="18" charset="0"/>
-                                  </a:rPr>
-                                  <m:t>𝑘</m:t>
-                                </m:r>
-                              </m:sub>
-                            </m:sSub>
-                          </m:sup>
-                        </m:sSup>
-                      </m:e>
-                    </m:nary>
-                    <m:r>
-                      <a:rPr lang="fr-BE" b="0" i="1" smtClean="0">
-                        <a:latin typeface="Cambria Math" panose="02040503050406030204" pitchFamily="18" charset="0"/>
-                      </a:rPr>
-                      <m:t>]</m:t>
-                    </m:r>
-                  </m:oMath>
+                  <m:oMathPara xmlns:m="http://schemas.openxmlformats.org/officeDocument/2006/math">
+                    <m:oMath>
+                      <m:sSub>
+                        <m:sSubPr>
+                          <m:ctrlPr>
+                            <a:rPr lang="fr-BE" b="0" i="1" smtClean="0">
+                              <a:latin typeface="Cambria Math" panose="02040503050406030204" pitchFamily="18" charset="0"/>
+                            </a:rPr>
+                          </m:ctrlPr>
+                        </m:sSubPr>
+                        <m:e>
+                          <m:r>
+                            <a:rPr lang="fr-BE" b="0" i="1" smtClean="0">
+                              <a:latin typeface="Cambria Math" panose="02040503050406030204" pitchFamily="18" charset="0"/>
+                            </a:rPr>
+                            <m:t>𝑥</m:t>
+                          </m:r>
+                        </m:e>
+                        <m:sub>
+                          <m:r>
+                            <a:rPr lang="fr-BE" b="0" i="1" smtClean="0">
+                              <a:latin typeface="Cambria Math" panose="02040503050406030204" pitchFamily="18" charset="0"/>
+                            </a:rPr>
+                            <m:t>𝑘</m:t>
+                          </m:r>
+                        </m:sub>
+                      </m:sSub>
+                      <m:r>
+                        <a:rPr lang="fr-BE" b="0" i="1" smtClean="0">
+                          <a:latin typeface="Cambria Math" panose="02040503050406030204" pitchFamily="18" charset="0"/>
+                        </a:rPr>
+                        <m:t>=</m:t>
+                      </m:r>
+                      <m:sSup>
+                        <m:sSupPr>
+                          <m:ctrlPr>
+                            <a:rPr lang="fr-BE" b="0" i="1" smtClean="0">
+                              <a:latin typeface="Cambria Math" panose="02040503050406030204" pitchFamily="18" charset="0"/>
+                            </a:rPr>
+                          </m:ctrlPr>
+                        </m:sSupPr>
+                        <m:e>
+                          <m:r>
+                            <a:rPr lang="fr-BE" b="0" i="1" smtClean="0">
+                              <a:latin typeface="Cambria Math" panose="02040503050406030204" pitchFamily="18" charset="0"/>
+                            </a:rPr>
+                            <m:t>𝑛</m:t>
+                          </m:r>
+                        </m:e>
+                        <m:sup>
+                          <m:r>
+                            <a:rPr lang="fr-BE" b="0" i="1" smtClean="0">
+                              <a:latin typeface="Cambria Math" panose="02040503050406030204" pitchFamily="18" charset="0"/>
+                            </a:rPr>
+                            <m:t>−</m:t>
+                          </m:r>
+                          <m:f>
+                            <m:fPr>
+                              <m:type m:val="skw"/>
+                              <m:ctrlPr>
+                                <a:rPr lang="fr-BE" b="0" i="1" smtClean="0">
+                                  <a:latin typeface="Cambria Math" panose="02040503050406030204" pitchFamily="18" charset="0"/>
+                                </a:rPr>
+                              </m:ctrlPr>
+                            </m:fPr>
+                            <m:num>
+                              <m:r>
+                                <a:rPr lang="fr-BE" b="0" i="1" smtClean="0">
+                                  <a:latin typeface="Cambria Math" panose="02040503050406030204" pitchFamily="18" charset="0"/>
+                                </a:rPr>
+                                <m:t>1</m:t>
+                              </m:r>
+                            </m:num>
+                            <m:den>
+                              <m:r>
+                                <a:rPr lang="fr-BE" b="0" i="1" smtClean="0">
+                                  <a:latin typeface="Cambria Math" panose="02040503050406030204" pitchFamily="18" charset="0"/>
+                                </a:rPr>
+                                <m:t>2</m:t>
+                              </m:r>
+                            </m:den>
+                          </m:f>
+                        </m:sup>
+                      </m:sSup>
+                      <m:nary>
+                        <m:naryPr>
+                          <m:chr m:val="∑"/>
+                          <m:ctrlPr>
+                            <a:rPr lang="fr-BE" b="0" i="1" smtClean="0">
+                              <a:latin typeface="Cambria Math" panose="02040503050406030204" pitchFamily="18" charset="0"/>
+                            </a:rPr>
+                          </m:ctrlPr>
+                        </m:naryPr>
+                        <m:sub>
+                          <m:r>
+                            <m:rPr>
+                              <m:brk m:alnAt="23"/>
+                            </m:rPr>
+                            <a:rPr lang="fr-BE" b="0" i="1" smtClean="0">
+                              <a:latin typeface="Cambria Math" panose="02040503050406030204" pitchFamily="18" charset="0"/>
+                            </a:rPr>
+                            <m:t>𝑗</m:t>
+                          </m:r>
+                          <m:r>
+                            <a:rPr lang="fr-BE" b="0" i="1" smtClean="0">
+                              <a:latin typeface="Cambria Math" panose="02040503050406030204" pitchFamily="18" charset="0"/>
+                            </a:rPr>
+                            <m:t>=0</m:t>
+                          </m:r>
+                        </m:sub>
+                        <m:sup>
+                          <m:r>
+                            <a:rPr lang="fr-BE" b="0" i="1" smtClean="0">
+                              <a:latin typeface="Cambria Math" panose="02040503050406030204" pitchFamily="18" charset="0"/>
+                            </a:rPr>
+                            <m:t>𝑗</m:t>
+                          </m:r>
+                          <m:r>
+                            <a:rPr lang="fr-BE" b="0" i="1" smtClean="0">
+                              <a:latin typeface="Cambria Math" panose="02040503050406030204" pitchFamily="18" charset="0"/>
+                              <a:ea typeface="Cambria Math" panose="02040503050406030204" pitchFamily="18" charset="0"/>
+                            </a:rPr>
+                            <m:t>&lt;</m:t>
+                          </m:r>
+                          <m:r>
+                            <a:rPr lang="fr-BE" b="0" i="1" smtClean="0">
+                              <a:latin typeface="Cambria Math" panose="02040503050406030204" pitchFamily="18" charset="0"/>
+                              <a:ea typeface="Cambria Math" panose="02040503050406030204" pitchFamily="18" charset="0"/>
+                            </a:rPr>
+                            <m:t>𝑛</m:t>
+                          </m:r>
+                        </m:sup>
+                        <m:e>
+                          <m:sSub>
+                            <m:sSubPr>
+                              <m:ctrlPr>
+                                <a:rPr lang="fr-BE" b="0" i="1" smtClean="0">
+                                  <a:latin typeface="Cambria Math" panose="02040503050406030204" pitchFamily="18" charset="0"/>
+                                </a:rPr>
+                              </m:ctrlPr>
+                            </m:sSubPr>
+                            <m:e>
+                              <m:r>
+                                <a:rPr lang="fr-BE" b="0" i="1" smtClean="0">
+                                  <a:latin typeface="Cambria Math" panose="02040503050406030204" pitchFamily="18" charset="0"/>
+                                </a:rPr>
+                                <m:t>𝑎</m:t>
+                              </m:r>
+                            </m:e>
+                            <m:sub>
+                              <m:r>
+                                <a:rPr lang="fr-BE" b="0" i="1" smtClean="0">
+                                  <a:latin typeface="Cambria Math" panose="02040503050406030204" pitchFamily="18" charset="0"/>
+                                </a:rPr>
+                                <m:t>𝑗</m:t>
+                              </m:r>
+                            </m:sub>
+                          </m:sSub>
+                          <m:sSup>
+                            <m:sSupPr>
+                              <m:ctrlPr>
+                                <a:rPr lang="fr-BE" b="0" i="1" smtClean="0">
+                                  <a:latin typeface="Cambria Math" panose="02040503050406030204" pitchFamily="18" charset="0"/>
+                                </a:rPr>
+                              </m:ctrlPr>
+                            </m:sSupPr>
+                            <m:e>
+                              <m:r>
+                                <a:rPr lang="fr-BE" b="0" i="1" smtClean="0">
+                                  <a:latin typeface="Cambria Math" panose="02040503050406030204" pitchFamily="18" charset="0"/>
+                                </a:rPr>
+                                <m:t>𝑒</m:t>
+                              </m:r>
+                            </m:e>
+                            <m:sup>
+                              <m:r>
+                                <a:rPr lang="fr-BE" b="0" i="1" smtClean="0">
+                                  <a:latin typeface="Cambria Math" panose="02040503050406030204" pitchFamily="18" charset="0"/>
+                                </a:rPr>
+                                <m:t>𝑖𝑗</m:t>
+                              </m:r>
+                              <m:sSub>
+                                <m:sSubPr>
+                                  <m:ctrlPr>
+                                    <a:rPr lang="fr-BE" b="0" i="1" smtClean="0">
+                                      <a:latin typeface="Cambria Math" panose="02040503050406030204" pitchFamily="18" charset="0"/>
+                                      <a:ea typeface="Cambria Math" panose="02040503050406030204" pitchFamily="18" charset="0"/>
+                                    </a:rPr>
+                                  </m:ctrlPr>
+                                </m:sSubPr>
+                                <m:e>
+                                  <m:r>
+                                    <a:rPr lang="fr-BE" b="0" i="1" smtClean="0">
+                                      <a:latin typeface="Cambria Math" panose="02040503050406030204" pitchFamily="18" charset="0"/>
+                                      <a:ea typeface="Cambria Math" panose="02040503050406030204" pitchFamily="18" charset="0"/>
+                                    </a:rPr>
+                                    <m:t>𝜔</m:t>
+                                  </m:r>
+                                </m:e>
+                                <m:sub>
+                                  <m:r>
+                                    <a:rPr lang="fr-BE" b="0" i="1" smtClean="0">
+                                      <a:latin typeface="Cambria Math" panose="02040503050406030204" pitchFamily="18" charset="0"/>
+                                    </a:rPr>
+                                    <m:t>𝑘</m:t>
+                                  </m:r>
+                                </m:sub>
+                              </m:sSub>
+                            </m:sup>
+                          </m:sSup>
+                        </m:e>
+                      </m:nary>
+                      <m:r>
+                        <a:rPr lang="fr-BE" b="0" i="1" smtClean="0">
+                          <a:latin typeface="Cambria Math" panose="02040503050406030204" pitchFamily="18" charset="0"/>
+                        </a:rPr>
+                        <m:t>        [</m:t>
+                      </m:r>
+                      <m:r>
+                        <a:rPr lang="fr-BE" i="1">
+                          <a:latin typeface="Cambria Math" panose="02040503050406030204" pitchFamily="18" charset="0"/>
+                        </a:rPr>
+                        <m:t>𝑜𝑟</m:t>
+                      </m:r>
+                      <m:r>
+                        <a:rPr lang="fr-BE" b="0" i="1" smtClean="0">
+                          <a:latin typeface="Cambria Math" panose="02040503050406030204" pitchFamily="18" charset="0"/>
+                        </a:rPr>
+                        <m:t>      </m:t>
+                      </m:r>
+                      <m:sSub>
+                        <m:sSubPr>
+                          <m:ctrlPr>
+                            <a:rPr lang="fr-BE" i="1">
+                              <a:latin typeface="Cambria Math" panose="02040503050406030204" pitchFamily="18" charset="0"/>
+                            </a:rPr>
+                          </m:ctrlPr>
+                        </m:sSubPr>
+                        <m:e>
+                          <m:r>
+                            <a:rPr lang="fr-BE" i="1">
+                              <a:latin typeface="Cambria Math" panose="02040503050406030204" pitchFamily="18" charset="0"/>
+                            </a:rPr>
+                            <m:t>𝑥</m:t>
+                          </m:r>
+                        </m:e>
+                        <m:sub>
+                          <m:r>
+                            <a:rPr lang="fr-BE" i="1">
+                              <a:latin typeface="Cambria Math" panose="02040503050406030204" pitchFamily="18" charset="0"/>
+                            </a:rPr>
+                            <m:t>𝑘</m:t>
+                          </m:r>
+                        </m:sub>
+                      </m:sSub>
+                      <m:r>
+                        <a:rPr lang="fr-BE" i="1">
+                          <a:latin typeface="Cambria Math" panose="02040503050406030204" pitchFamily="18" charset="0"/>
+                        </a:rPr>
+                        <m:t>=</m:t>
+                      </m:r>
+                      <m:sSup>
+                        <m:sSupPr>
+                          <m:ctrlPr>
+                            <a:rPr lang="fr-BE" i="1">
+                              <a:latin typeface="Cambria Math" panose="02040503050406030204" pitchFamily="18" charset="0"/>
+                            </a:rPr>
+                          </m:ctrlPr>
+                        </m:sSupPr>
+                        <m:e>
+                          <m:r>
+                            <a:rPr lang="fr-BE" i="1">
+                              <a:latin typeface="Cambria Math" panose="02040503050406030204" pitchFamily="18" charset="0"/>
+                            </a:rPr>
+                            <m:t>𝑛</m:t>
+                          </m:r>
+                        </m:e>
+                        <m:sup>
+                          <m:r>
+                            <a:rPr lang="fr-BE" i="1">
+                              <a:latin typeface="Cambria Math" panose="02040503050406030204" pitchFamily="18" charset="0"/>
+                            </a:rPr>
+                            <m:t>−</m:t>
+                          </m:r>
+                          <m:r>
+                            <a:rPr lang="fr-BE" b="0" i="1" smtClean="0">
+                              <a:latin typeface="Cambria Math" panose="02040503050406030204" pitchFamily="18" charset="0"/>
+                            </a:rPr>
+                            <m:t>1</m:t>
+                          </m:r>
+                        </m:sup>
+                      </m:sSup>
+                      <m:nary>
+                        <m:naryPr>
+                          <m:chr m:val="∑"/>
+                          <m:ctrlPr>
+                            <a:rPr lang="fr-BE" i="1">
+                              <a:latin typeface="Cambria Math" panose="02040503050406030204" pitchFamily="18" charset="0"/>
+                            </a:rPr>
+                          </m:ctrlPr>
+                        </m:naryPr>
+                        <m:sub>
+                          <m:r>
+                            <m:rPr>
+                              <m:brk m:alnAt="23"/>
+                            </m:rPr>
+                            <a:rPr lang="fr-BE" i="1">
+                              <a:latin typeface="Cambria Math" panose="02040503050406030204" pitchFamily="18" charset="0"/>
+                            </a:rPr>
+                            <m:t>𝑗</m:t>
+                          </m:r>
+                          <m:r>
+                            <a:rPr lang="fr-BE" i="1">
+                              <a:latin typeface="Cambria Math" panose="02040503050406030204" pitchFamily="18" charset="0"/>
+                            </a:rPr>
+                            <m:t>=0</m:t>
+                          </m:r>
+                        </m:sub>
+                        <m:sup>
+                          <m:r>
+                            <a:rPr lang="fr-BE" i="1">
+                              <a:latin typeface="Cambria Math" panose="02040503050406030204" pitchFamily="18" charset="0"/>
+                            </a:rPr>
+                            <m:t>𝑗</m:t>
+                          </m:r>
+                          <m:r>
+                            <a:rPr lang="fr-BE" i="1">
+                              <a:latin typeface="Cambria Math" panose="02040503050406030204" pitchFamily="18" charset="0"/>
+                              <a:ea typeface="Cambria Math" panose="02040503050406030204" pitchFamily="18" charset="0"/>
+                            </a:rPr>
+                            <m:t>&lt;</m:t>
+                          </m:r>
+                          <m:r>
+                            <a:rPr lang="fr-BE" i="1">
+                              <a:latin typeface="Cambria Math" panose="02040503050406030204" pitchFamily="18" charset="0"/>
+                              <a:ea typeface="Cambria Math" panose="02040503050406030204" pitchFamily="18" charset="0"/>
+                            </a:rPr>
+                            <m:t>𝑛</m:t>
+                          </m:r>
+                        </m:sup>
+                        <m:e>
+                          <m:sSub>
+                            <m:sSubPr>
+                              <m:ctrlPr>
+                                <a:rPr lang="fr-BE" i="1">
+                                  <a:latin typeface="Cambria Math" panose="02040503050406030204" pitchFamily="18" charset="0"/>
+                                </a:rPr>
+                              </m:ctrlPr>
+                            </m:sSubPr>
+                            <m:e>
+                              <m:r>
+                                <a:rPr lang="fr-BE" i="1">
+                                  <a:latin typeface="Cambria Math" panose="02040503050406030204" pitchFamily="18" charset="0"/>
+                                </a:rPr>
+                                <m:t>𝑎</m:t>
+                              </m:r>
+                            </m:e>
+                            <m:sub>
+                              <m:r>
+                                <a:rPr lang="fr-BE" i="1">
+                                  <a:latin typeface="Cambria Math" panose="02040503050406030204" pitchFamily="18" charset="0"/>
+                                </a:rPr>
+                                <m:t>𝑗</m:t>
+                              </m:r>
+                            </m:sub>
+                          </m:sSub>
+                          <m:sSup>
+                            <m:sSupPr>
+                              <m:ctrlPr>
+                                <a:rPr lang="fr-BE" i="1">
+                                  <a:latin typeface="Cambria Math" panose="02040503050406030204" pitchFamily="18" charset="0"/>
+                                </a:rPr>
+                              </m:ctrlPr>
+                            </m:sSupPr>
+                            <m:e>
+                              <m:r>
+                                <a:rPr lang="fr-BE" i="1">
+                                  <a:latin typeface="Cambria Math" panose="02040503050406030204" pitchFamily="18" charset="0"/>
+                                </a:rPr>
+                                <m:t>𝑒</m:t>
+                              </m:r>
+                            </m:e>
+                            <m:sup>
+                              <m:r>
+                                <a:rPr lang="fr-BE" i="1">
+                                  <a:latin typeface="Cambria Math" panose="02040503050406030204" pitchFamily="18" charset="0"/>
+                                </a:rPr>
+                                <m:t>𝑖𝑗</m:t>
+                              </m:r>
+                              <m:sSub>
+                                <m:sSubPr>
+                                  <m:ctrlPr>
+                                    <a:rPr lang="fr-BE" i="1">
+                                      <a:latin typeface="Cambria Math" panose="02040503050406030204" pitchFamily="18" charset="0"/>
+                                      <a:ea typeface="Cambria Math" panose="02040503050406030204" pitchFamily="18" charset="0"/>
+                                    </a:rPr>
+                                  </m:ctrlPr>
+                                </m:sSubPr>
+                                <m:e>
+                                  <m:r>
+                                    <a:rPr lang="fr-BE" i="1">
+                                      <a:latin typeface="Cambria Math" panose="02040503050406030204" pitchFamily="18" charset="0"/>
+                                      <a:ea typeface="Cambria Math" panose="02040503050406030204" pitchFamily="18" charset="0"/>
+                                    </a:rPr>
+                                    <m:t>𝜔</m:t>
+                                  </m:r>
+                                </m:e>
+                                <m:sub>
+                                  <m:r>
+                                    <a:rPr lang="fr-BE" i="1">
+                                      <a:latin typeface="Cambria Math" panose="02040503050406030204" pitchFamily="18" charset="0"/>
+                                    </a:rPr>
+                                    <m:t>𝑘</m:t>
+                                  </m:r>
+                                </m:sub>
+                              </m:sSub>
+                            </m:sup>
+                          </m:sSup>
+                        </m:e>
+                      </m:nary>
+                      <m:r>
+                        <a:rPr lang="fr-BE" b="0" i="1" smtClean="0">
+                          <a:latin typeface="Cambria Math" panose="02040503050406030204" pitchFamily="18" charset="0"/>
+                        </a:rPr>
+                        <m:t>]</m:t>
+                      </m:r>
+                    </m:oMath>
+                  </m:oMathPara>
                 </a14:m>
                 <a:endParaRPr lang="en-GB" dirty="0"/>
               </a:p>
               <a:p>
-                <a:pPr lvl="2"/>
+                <a:pPr marL="1028700" lvl="2" indent="0">
+                  <a:buNone/>
+                </a:pPr>
                 <a14:m>
-                  <m:oMath xmlns:m="http://schemas.openxmlformats.org/officeDocument/2006/math">
-                    <m:sSub>
-                      <m:sSubPr>
-                        <m:ctrlPr>
-                          <a:rPr lang="fr-BE" b="0" i="1" smtClean="0">
-                            <a:latin typeface="Cambria Math" panose="02040503050406030204" pitchFamily="18" charset="0"/>
-                          </a:rPr>
-                        </m:ctrlPr>
-                      </m:sSubPr>
-                      <m:e>
-                        <m:r>
-                          <a:rPr lang="fr-BE" b="0" i="1" smtClean="0">
-                            <a:latin typeface="Cambria Math" panose="02040503050406030204" pitchFamily="18" charset="0"/>
-                          </a:rPr>
-                          <m:t>𝑝</m:t>
-                        </m:r>
-                      </m:e>
-                      <m:sub>
-                        <m:sSub>
-                          <m:sSubPr>
-                            <m:ctrlPr>
-                              <a:rPr lang="fr-BE" b="0" i="1" smtClean="0">
-                                <a:latin typeface="Cambria Math" panose="02040503050406030204" pitchFamily="18" charset="0"/>
-                                <a:ea typeface="Cambria Math" panose="02040503050406030204" pitchFamily="18" charset="0"/>
-                              </a:rPr>
-                            </m:ctrlPr>
-                          </m:sSubPr>
-                          <m:e>
-                            <m:r>
-                              <a:rPr lang="fr-BE" b="0" i="1" smtClean="0">
-                                <a:latin typeface="Cambria Math" panose="02040503050406030204" pitchFamily="18" charset="0"/>
-                                <a:ea typeface="Cambria Math" panose="02040503050406030204" pitchFamily="18" charset="0"/>
-                              </a:rPr>
-                              <m:t>𝜔</m:t>
-                            </m:r>
-                          </m:e>
-                          <m:sub>
-                            <m:r>
-                              <a:rPr lang="fr-BE" b="0" i="1" smtClean="0">
-                                <a:latin typeface="Cambria Math" panose="02040503050406030204" pitchFamily="18" charset="0"/>
-                              </a:rPr>
-                              <m:t>𝑘</m:t>
-                            </m:r>
-                          </m:sub>
-                        </m:sSub>
-                      </m:sub>
-                    </m:sSub>
-                    <m:r>
-                      <a:rPr lang="fr-BE" b="0" i="1" smtClean="0">
-                        <a:latin typeface="Cambria Math" panose="02040503050406030204" pitchFamily="18" charset="0"/>
-                      </a:rPr>
-                      <m:t>=</m:t>
-                    </m:r>
-                    <m:sSup>
-                      <m:sSupPr>
-                        <m:ctrlPr>
-                          <a:rPr lang="fr-BE" b="0" i="1" smtClean="0">
-                            <a:latin typeface="Cambria Math" panose="02040503050406030204" pitchFamily="18" charset="0"/>
-                            <a:ea typeface="Cambria Math" panose="02040503050406030204" pitchFamily="18" charset="0"/>
-                          </a:rPr>
-                        </m:ctrlPr>
-                      </m:sSupPr>
-                      <m:e>
-                        <m:d>
-                          <m:dPr>
-                            <m:begChr m:val="|"/>
-                            <m:endChr m:val="|"/>
-                            <m:ctrlPr>
-                              <a:rPr lang="en-GB" i="1" smtClean="0">
-                                <a:latin typeface="Cambria Math" panose="02040503050406030204" pitchFamily="18" charset="0"/>
-                              </a:rPr>
-                            </m:ctrlPr>
-                          </m:dPr>
-                          <m:e>
-                            <m:sSub>
-                              <m:sSubPr>
-                                <m:ctrlPr>
-                                  <a:rPr lang="fr-BE" b="0" i="1" smtClean="0">
-                                    <a:latin typeface="Cambria Math" panose="02040503050406030204" pitchFamily="18" charset="0"/>
-                                  </a:rPr>
-                                </m:ctrlPr>
-                              </m:sSubPr>
-                              <m:e>
-                                <m:r>
-                                  <a:rPr lang="fr-BE" b="0" i="1" smtClean="0">
-                                    <a:latin typeface="Cambria Math" panose="02040503050406030204" pitchFamily="18" charset="0"/>
-                                  </a:rPr>
-                                  <m:t>𝑎</m:t>
-                                </m:r>
-                              </m:e>
-                              <m:sub>
-                                <m:r>
-                                  <a:rPr lang="fr-BE" b="0" i="1" smtClean="0">
-                                    <a:latin typeface="Cambria Math" panose="02040503050406030204" pitchFamily="18" charset="0"/>
-                                  </a:rPr>
-                                  <m:t>𝑘</m:t>
-                                </m:r>
-                              </m:sub>
-                            </m:sSub>
-                          </m:e>
-                        </m:d>
-                      </m:e>
-                      <m:sup>
-                        <m:r>
-                          <a:rPr lang="fr-BE" b="0" i="1" smtClean="0">
-                            <a:latin typeface="Cambria Math" panose="02040503050406030204" pitchFamily="18" charset="0"/>
-                            <a:ea typeface="Cambria Math" panose="02040503050406030204" pitchFamily="18" charset="0"/>
-                          </a:rPr>
-                          <m:t>2</m:t>
-                        </m:r>
-                      </m:sup>
-                    </m:sSup>
-                  </m:oMath>
+                  <m:oMathPara xmlns:m="http://schemas.openxmlformats.org/officeDocument/2006/math">
+                    <m:oMath>
+                      <m:sSub>
+                        <m:sSubPr>
+                          <m:ctrlPr>
+                            <a:rPr lang="fr-BE" b="0" i="1" smtClean="0">
+                              <a:latin typeface="Cambria Math" panose="02040503050406030204" pitchFamily="18" charset="0"/>
+                            </a:rPr>
+                          </m:ctrlPr>
+                        </m:sSubPr>
+                        <m:e>
+                          <m:r>
+                            <a:rPr lang="fr-BE" b="0" i="1" smtClean="0">
+                              <a:latin typeface="Cambria Math" panose="02040503050406030204" pitchFamily="18" charset="0"/>
+                            </a:rPr>
+                            <m:t>𝑝</m:t>
+                          </m:r>
+                        </m:e>
+                        <m:sub>
+                          <m:sSub>
+                            <m:sSubPr>
+                              <m:ctrlPr>
+                                <a:rPr lang="fr-BE" b="0" i="1" smtClean="0">
+                                  <a:latin typeface="Cambria Math" panose="02040503050406030204" pitchFamily="18" charset="0"/>
+                                  <a:ea typeface="Cambria Math" panose="02040503050406030204" pitchFamily="18" charset="0"/>
+                                </a:rPr>
+                              </m:ctrlPr>
+                            </m:sSubPr>
+                            <m:e>
+                              <m:r>
+                                <a:rPr lang="fr-BE" b="0" i="1" smtClean="0">
+                                  <a:latin typeface="Cambria Math" panose="02040503050406030204" pitchFamily="18" charset="0"/>
+                                  <a:ea typeface="Cambria Math" panose="02040503050406030204" pitchFamily="18" charset="0"/>
+                                </a:rPr>
+                                <m:t>𝜔</m:t>
+                              </m:r>
+                            </m:e>
+                            <m:sub>
+                              <m:r>
+                                <a:rPr lang="fr-BE" b="0" i="1" smtClean="0">
+                                  <a:latin typeface="Cambria Math" panose="02040503050406030204" pitchFamily="18" charset="0"/>
+                                </a:rPr>
+                                <m:t>𝑘</m:t>
+                              </m:r>
+                            </m:sub>
+                          </m:sSub>
+                        </m:sub>
+                      </m:sSub>
+                      <m:r>
+                        <a:rPr lang="fr-BE" b="0" i="1" smtClean="0">
+                          <a:latin typeface="Cambria Math" panose="02040503050406030204" pitchFamily="18" charset="0"/>
+                        </a:rPr>
+                        <m:t>=</m:t>
+                      </m:r>
+                      <m:sSup>
+                        <m:sSupPr>
+                          <m:ctrlPr>
+                            <a:rPr lang="fr-BE" b="0" i="1" smtClean="0">
+                              <a:latin typeface="Cambria Math" panose="02040503050406030204" pitchFamily="18" charset="0"/>
+                            </a:rPr>
+                          </m:ctrlPr>
+                        </m:sSupPr>
+                        <m:e>
+                          <m:d>
+                            <m:dPr>
+                              <m:begChr m:val="|"/>
+                              <m:endChr m:val="|"/>
+                              <m:ctrlPr>
+                                <a:rPr lang="fr-BE" b="0" i="1" smtClean="0">
+                                  <a:latin typeface="Cambria Math" panose="02040503050406030204" pitchFamily="18" charset="0"/>
+                                </a:rPr>
+                              </m:ctrlPr>
+                            </m:dPr>
+                            <m:e>
+                              <m:sSub>
+                                <m:sSubPr>
+                                  <m:ctrlPr>
+                                    <a:rPr lang="fr-BE" b="0" i="1" smtClean="0">
+                                      <a:latin typeface="Cambria Math" panose="02040503050406030204" pitchFamily="18" charset="0"/>
+                                    </a:rPr>
+                                  </m:ctrlPr>
+                                </m:sSubPr>
+                                <m:e>
+                                  <m:r>
+                                    <a:rPr lang="fr-BE" b="0" i="1" smtClean="0">
+                                      <a:latin typeface="Cambria Math" panose="02040503050406030204" pitchFamily="18" charset="0"/>
+                                    </a:rPr>
+                                    <m:t>𝑎</m:t>
+                                  </m:r>
+                                </m:e>
+                                <m:sub>
+                                  <m:r>
+                                    <a:rPr lang="fr-BE" b="0" i="1" smtClean="0">
+                                      <a:latin typeface="Cambria Math" panose="02040503050406030204" pitchFamily="18" charset="0"/>
+                                    </a:rPr>
+                                    <m:t>𝑘</m:t>
+                                  </m:r>
+                                </m:sub>
+                              </m:sSub>
+                            </m:e>
+                          </m:d>
+                        </m:e>
+                        <m:sup>
+                          <m:r>
+                            <a:rPr lang="fr-BE" b="0" i="1" smtClean="0">
+                              <a:latin typeface="Cambria Math" panose="02040503050406030204" pitchFamily="18" charset="0"/>
+                              <a:ea typeface="Cambria Math" panose="02040503050406030204" pitchFamily="18" charset="0"/>
+                            </a:rPr>
+                            <m:t>2</m:t>
+                          </m:r>
+                        </m:sup>
+                      </m:sSup>
+                    </m:oMath>
+                  </m:oMathPara>
                 </a14:m>
                 <a:endParaRPr lang="en-GB" sz="1800" dirty="0"/>
               </a:p>
@@ -15374,7 +15393,7 @@
             </p:txBody>
           </p:sp>
         </mc:Choice>
-        <mc:Fallback>
+        <mc:Fallback xmlns="">
           <p:sp>
             <p:nvSpPr>
               <p:cNvPr id="3" name="Content Placeholder 2">
@@ -15395,7 +15414,7 @@
               <a:blipFill>
                 <a:blip r:embed="rId2"/>
                 <a:stretch>
-                  <a:fillRect l="-58" t="-5808"/>
+                  <a:fillRect l="-58" t="-5495"/>
                 </a:stretch>
               </a:blipFill>
             </p:spPr>
@@ -15690,8 +15709,9 @@
                         <m:begChr m:val="{"/>
                         <m:endChr m:val="}"/>
                         <m:ctrlPr>
-                          <a:rPr lang="en-GB" i="1">
-                            <a:latin typeface="Cambria Math" panose="02040503050406030204" pitchFamily="18" charset="0"/>
+                          <a:rPr lang="fr-BE" i="1" smtClean="0">
+                            <a:latin typeface="Cambria Math" panose="02040503050406030204" pitchFamily="18" charset="0"/>
+                            <a:ea typeface="Cambria Math" panose="02040503050406030204" pitchFamily="18" charset="0"/>
                           </a:rPr>
                         </m:ctrlPr>
                       </m:dPr>
@@ -18277,8 +18297,8 @@
           </a:p>
         </p:txBody>
       </p:sp>
-      <mc:AlternateContent xmlns:mc="http://schemas.openxmlformats.org/markup-compatibility/2006">
-        <mc:Choice xmlns:a14="http://schemas.microsoft.com/office/drawing/2010/main" Requires="a14">
+      <mc:AlternateContent xmlns:mc="http://schemas.openxmlformats.org/markup-compatibility/2006" xmlns:a14="http://schemas.microsoft.com/office/drawing/2010/main">
+        <mc:Choice Requires="a14">
           <p:sp>
             <p:nvSpPr>
               <p:cNvPr id="3" name="Content Placeholder 2">
@@ -18563,7 +18583,7 @@
             </p:txBody>
           </p:sp>
         </mc:Choice>
-        <mc:Fallback>
+        <mc:Fallback xmlns="">
           <p:sp>
             <p:nvSpPr>
               <p:cNvPr id="3" name="Content Placeholder 2">
@@ -19516,6 +19536,26 @@
 </file>
 
 <file path=customXml/item1.xml><?xml version="1.0" encoding="utf-8"?>
+<?mso-contentType ?>
+<FormTemplates xmlns="http://schemas.microsoft.com/sharepoint/v3/contenttype/forms">
+  <Display>DocumentLibraryForm</Display>
+  <Edit>DocumentLibraryForm</Edit>
+  <New>DocumentLibraryForm</New>
+</FormTemplates>
+</file>
+
+<file path=customXml/item2.xml><?xml version="1.0" encoding="utf-8"?>
+<p:properties xmlns:p="http://schemas.microsoft.com/office/2006/metadata/properties" xmlns:xsi="http://www.w3.org/2001/XMLSchema-instance" xmlns:pc="http://schemas.microsoft.com/office/infopath/2007/PartnerControls">
+  <documentManagement>
+    <lcf76f155ced4ddcb4097134ff3c332f xmlns="0e422b70-e85d-4377-8ee0-b6227433d381">
+      <Terms xmlns="http://schemas.microsoft.com/office/infopath/2007/PartnerControls"/>
+    </lcf76f155ced4ddcb4097134ff3c332f>
+    <TaxCatchAll xmlns="199f642e-5af9-486c-ac06-f366742ef41a"/>
+  </documentManagement>
+</p:properties>
+</file>
+
+<file path=customXml/item3.xml><?xml version="1.0" encoding="utf-8"?>
 <ct:contentTypeSchema xmlns:ct="http://schemas.microsoft.com/office/2006/metadata/contentType" xmlns:ma="http://schemas.microsoft.com/office/2006/metadata/properties/metaAttributes" ct:_="" ma:_="" ma:contentTypeName="Document" ma:contentTypeID="0x010100E6AA5C57F8EADE4E9CD6BB064C0C3195" ma:contentTypeVersion="16" ma:contentTypeDescription="Create a new document." ma:contentTypeScope="" ma:versionID="bb51c19a58f458ddcddd050a07659236">
   <xsd:schema xmlns:xsd="http://www.w3.org/2001/XMLSchema" xmlns:xs="http://www.w3.org/2001/XMLSchema" xmlns:p="http://schemas.microsoft.com/office/2006/metadata/properties" xmlns:ns2="0e422b70-e85d-4377-8ee0-b6227433d381" xmlns:ns3="199f642e-5af9-486c-ac06-f366742ef41a" targetNamespace="http://schemas.microsoft.com/office/2006/metadata/properties" ma:root="true" ma:fieldsID="0ee7a3bac0352a48a43420936abd968a" ns2:_="" ns3:_="">
     <xsd:import namespace="0e422b70-e85d-4377-8ee0-b6227433d381"/>
@@ -19756,27 +19796,32 @@
 </ct:contentTypeSchema>
 </file>
 
-<file path=customXml/item2.xml><?xml version="1.0" encoding="utf-8"?>
-<?mso-contentType ?>
-<FormTemplates xmlns="http://schemas.microsoft.com/sharepoint/v3/contenttype/forms">
-  <Display>DocumentLibraryForm</Display>
-  <Edit>DocumentLibraryForm</Edit>
-  <New>DocumentLibraryForm</New>
-</FormTemplates>
+<file path=customXml/itemProps1.xml><?xml version="1.0" encoding="utf-8"?>
+<ds:datastoreItem xmlns:ds="http://schemas.openxmlformats.org/officeDocument/2006/customXml" ds:itemID="{67DD9E9F-9EEB-4105-B29B-819486C2855A}">
+  <ds:schemaRefs>
+    <ds:schemaRef ds:uri="http://schemas.microsoft.com/sharepoint/v3/contenttype/forms"/>
+  </ds:schemaRefs>
+</ds:datastoreItem>
 </file>
 
-<file path=customXml/item3.xml><?xml version="1.0" encoding="utf-8"?>
-<p:properties xmlns:p="http://schemas.microsoft.com/office/2006/metadata/properties" xmlns:xsi="http://www.w3.org/2001/XMLSchema-instance" xmlns:pc="http://schemas.microsoft.com/office/infopath/2007/PartnerControls">
-  <documentManagement>
-    <lcf76f155ced4ddcb4097134ff3c332f xmlns="0e422b70-e85d-4377-8ee0-b6227433d381">
-      <Terms xmlns="http://schemas.microsoft.com/office/infopath/2007/PartnerControls"/>
-    </lcf76f155ced4ddcb4097134ff3c332f>
-    <TaxCatchAll xmlns="199f642e-5af9-486c-ac06-f366742ef41a"/>
-  </documentManagement>
-</p:properties>
+<file path=customXml/itemProps2.xml><?xml version="1.0" encoding="utf-8"?>
+<ds:datastoreItem xmlns:ds="http://schemas.openxmlformats.org/officeDocument/2006/customXml" ds:itemID="{2D6C293B-B8B4-4284-A17E-9F9E4C32B25A}">
+  <ds:schemaRefs>
+    <ds:schemaRef ds:uri="http://schemas.microsoft.com/office/2006/documentManagement/types"/>
+    <ds:schemaRef ds:uri="http://purl.org/dc/elements/1.1/"/>
+    <ds:schemaRef ds:uri="http://purl.org/dc/terms/"/>
+    <ds:schemaRef ds:uri="http://purl.org/dc/dcmitype/"/>
+    <ds:schemaRef ds:uri="0e422b70-e85d-4377-8ee0-b6227433d381"/>
+    <ds:schemaRef ds:uri="http://schemas.microsoft.com/office/infopath/2007/PartnerControls"/>
+    <ds:schemaRef ds:uri="199f642e-5af9-486c-ac06-f366742ef41a"/>
+    <ds:schemaRef ds:uri="http://schemas.openxmlformats.org/package/2006/metadata/core-properties"/>
+    <ds:schemaRef ds:uri="http://schemas.microsoft.com/office/2006/metadata/properties"/>
+    <ds:schemaRef ds:uri="http://www.w3.org/XML/1998/namespace"/>
+  </ds:schemaRefs>
+</ds:datastoreItem>
 </file>
 
-<file path=customXml/itemProps1.xml><?xml version="1.0" encoding="utf-8"?>
+<file path=customXml/itemProps3.xml><?xml version="1.0" encoding="utf-8"?>
 <ds:datastoreItem xmlns:ds="http://schemas.openxmlformats.org/officeDocument/2006/customXml" ds:itemID="{04B464EA-1576-49DD-9675-1E3399D4D196}">
   <ds:schemaRefs>
     <ds:schemaRef ds:uri="http://schemas.microsoft.com/office/2006/metadata/contentType"/>
@@ -19793,29 +19838,4 @@
     <ds:schemaRef ds:uri="http://schemas.microsoft.com/internal/obd"/>
   </ds:schemaRefs>
 </ds:datastoreItem>
-</file>
-
-<file path=customXml/itemProps2.xml><?xml version="1.0" encoding="utf-8"?>
-<ds:datastoreItem xmlns:ds="http://schemas.openxmlformats.org/officeDocument/2006/customXml" ds:itemID="{67DD9E9F-9EEB-4105-B29B-819486C2855A}">
-  <ds:schemaRefs>
-    <ds:schemaRef ds:uri="http://schemas.microsoft.com/sharepoint/v3/contenttype/forms"/>
-  </ds:schemaRefs>
-</ds:datastoreItem>
-</file>
-
-<file path=customXml/itemProps3.xml><?xml version="1.0" encoding="utf-8"?>
-<ds:datastoreItem xmlns:ds="http://schemas.openxmlformats.org/officeDocument/2006/customXml" ds:itemID="{2D6C293B-B8B4-4284-A17E-9F9E4C32B25A}">
-  <ds:schemaRefs>
-    <ds:schemaRef ds:uri="http://schemas.microsoft.com/office/2006/documentManagement/types"/>
-    <ds:schemaRef ds:uri="http://purl.org/dc/elements/1.1/"/>
-    <ds:schemaRef ds:uri="http://purl.org/dc/terms/"/>
-    <ds:schemaRef ds:uri="http://purl.org/dc/dcmitype/"/>
-    <ds:schemaRef ds:uri="0e422b70-e85d-4377-8ee0-b6227433d381"/>
-    <ds:schemaRef ds:uri="http://schemas.microsoft.com/office/infopath/2007/PartnerControls"/>
-    <ds:schemaRef ds:uri="199f642e-5af9-486c-ac06-f366742ef41a"/>
-    <ds:schemaRef ds:uri="http://schemas.openxmlformats.org/package/2006/metadata/core-properties"/>
-    <ds:schemaRef ds:uri="http://schemas.microsoft.com/office/2006/metadata/properties"/>
-    <ds:schemaRef ds:uri="http://www.w3.org/XML/1998/namespace"/>
-  </ds:schemaRefs>
-</ds:datastoreItem>
 </file>
--- a/1.5 Time series.pptx
+++ b/1.5 Time series.pptx
@@ -15,8 +15,8 @@
     <p:sldId id="262" r:id="rId6"/>
     <p:sldId id="263" r:id="rId7"/>
     <p:sldId id="264" r:id="rId8"/>
-    <p:sldId id="259" r:id="rId9"/>
-    <p:sldId id="271" r:id="rId10"/>
+    <p:sldId id="280" r:id="rId9"/>
+    <p:sldId id="279" r:id="rId10"/>
     <p:sldId id="272" r:id="rId11"/>
     <p:sldId id="273" r:id="rId12"/>
     <p:sldId id="260" r:id="rId13"/>
@@ -283,7 +283,7 @@
       <p15:notesGuideLst xmlns:p15="http://schemas.microsoft.com/office/powerpoint/2012/main"/>
     </p:ext>
     <p:ext uri="http://customooxmlschemas.google.com/">
-      <go:slidesCustomData xmlns:mc="http://schemas.openxmlformats.org/markup-compatibility/2006" xmlns:mv="urn:schemas-microsoft-com:mac:vml" xmlns:c="http://schemas.openxmlformats.org/drawingml/2006/chart" xmlns:dgm="http://schemas.openxmlformats.org/drawingml/2006/diagram" xmlns:o="urn:schemas-microsoft-com:office:office" xmlns:v="urn:schemas-microsoft-com:vml" xmlns:pvml="urn:schemas-microsoft-com:office:powerpoint" xmlns:com="http://schemas.openxmlformats.org/drawingml/2006/compatibility" xmlns:p14="http://schemas.microsoft.com/office/powerpoint/2010/main" xmlns:p15="http://schemas.microsoft.com/office/powerpoint/2012/main" xmlns:ahyp="http://schemas.microsoft.com/office/drawing/2018/hyperlinkcolor" xmlns:go="http://customooxmlschemas.google.com/" xmlns="" r:id="rId59" roundtripDataSignature="AMtx7mh3YP3xexYcFoahXa2ehi0H5V4Zaw=="/>
+      <go:slidesCustomData xmlns="" xmlns:go="http://customooxmlschemas.google.com/" xmlns:ahyp="http://schemas.microsoft.com/office/drawing/2018/hyperlinkcolor" xmlns:p15="http://schemas.microsoft.com/office/powerpoint/2012/main" xmlns:p14="http://schemas.microsoft.com/office/powerpoint/2010/main" xmlns:com="http://schemas.openxmlformats.org/drawingml/2006/compatibility" xmlns:pvml="urn:schemas-microsoft-com:office:powerpoint" xmlns:v="urn:schemas-microsoft-com:vml" xmlns:o="urn:schemas-microsoft-com:office:office" xmlns:dgm="http://schemas.openxmlformats.org/drawingml/2006/diagram" xmlns:c="http://schemas.openxmlformats.org/drawingml/2006/chart" xmlns:mv="urn:schemas-microsoft-com:mac:vml" xmlns:mc="http://schemas.openxmlformats.org/markup-compatibility/2006" r:id="rId59" roundtripDataSignature="AMtx7mh3YP3xexYcFoahXa2ehi0H5V4Zaw=="/>
     </p:ext>
   </p:extLst>
 </p:presentation>
@@ -383,7 +383,7 @@
           <a:p>
             <a:fld id="{0CBFB8CE-488C-4A7E-87F2-3AF6127C51C1}" type="datetimeFigureOut">
               <a:rPr lang="en-IE" smtClean="0"/>
-              <a:t>25/09/2026</a:t>
+              <a:t>27/09/2026</a:t>
             </a:fld>
             <a:endParaRPr lang="en-IE"/>
           </a:p>
@@ -2069,7 +2069,7 @@
         </p:nvSpPr>
         <p:spPr>
           <a:xfrm>
-            <a:off x="970722" y="413590"/>
+            <a:off x="970722" y="65387"/>
             <a:ext cx="10515600" cy="782357"/>
           </a:xfrm>
           <a:prstGeom prst="rect">
@@ -2488,8 +2488,8 @@
         </p:nvSpPr>
         <p:spPr>
           <a:xfrm>
-            <a:off x="970722" y="1901951"/>
-            <a:ext cx="10515597" cy="4194176"/>
+            <a:off x="970722" y="1024934"/>
+            <a:ext cx="10515597" cy="5245233"/>
           </a:xfrm>
         </p:spPr>
         <p:txBody>
@@ -4946,10 +4946,6 @@
           <a:bodyPr/>
           <a:lstStyle/>
           <a:p>
-            <a:r>
-              <a:rPr lang="en-US"/>
-              <a:t>15-17/10/2024</a:t>
-            </a:r>
             <a:endParaRPr lang="en-GB"/>
           </a:p>
         </p:txBody>
@@ -5476,7 +5472,7 @@
     <p:sldLayoutId id="2147483723" r:id="rId5"/>
     <p:sldLayoutId id="2147483728" r:id="rId6"/>
   </p:sldLayoutIdLst>
-  <p:hf sldNum="0" hdr="0" dt="0"/>
+  <p:hf hdr="0" dt="0"/>
   <p:txStyles>
     <p:titleStyle>
       <a:defPPr marR="0" lvl="0" algn="l" rtl="0">
@@ -6355,8 +6351,8 @@
         </p:blipFill>
         <p:spPr>
           <a:xfrm>
-            <a:off x="1421125" y="1825625"/>
-            <a:ext cx="9349749" cy="4351338"/>
+            <a:off x="1925964" y="1825625"/>
+            <a:ext cx="8340071" cy="3881438"/>
           </a:xfrm>
         </p:spPr>
       </p:pic>
@@ -6385,6 +6381,35 @@
               <a:rPr lang="en-GB"/>
               <a:t>Time Series</a:t>
             </a:r>
+          </a:p>
+        </p:txBody>
+      </p:sp>
+      <p:sp>
+        <p:nvSpPr>
+          <p:cNvPr id="3" name="Espace réservé du numéro de diapositive 2">
+            <a:extLst>
+              <a:ext uri="{FF2B5EF4-FFF2-40B4-BE49-F238E27FC236}">
+                <a16:creationId xmlns:a16="http://schemas.microsoft.com/office/drawing/2014/main" id="{E85E42A2-CFF8-9648-52A7-28EAE25A4AA3}"/>
+              </a:ext>
+            </a:extLst>
+          </p:cNvPr>
+          <p:cNvSpPr>
+            <a:spLocks noGrp="1"/>
+          </p:cNvSpPr>
+          <p:nvPr>
+            <p:ph type="sldNum" sz="quarter" idx="12"/>
+          </p:nvPr>
+        </p:nvSpPr>
+        <p:spPr/>
+        <p:txBody>
+          <a:bodyPr/>
+          <a:lstStyle/>
+          <a:p>
+            <a:fld id="{71CC62B1-FA1F-4849-B719-012F8D8A46B3}" type="slidenum">
+              <a:rPr lang="en-GB" smtClean="0"/>
+              <a:t>10</a:t>
+            </a:fld>
+            <a:endParaRPr lang="en-GB"/>
           </a:p>
         </p:txBody>
       </p:sp>
@@ -6446,34 +6471,6 @@
           </a:p>
         </p:txBody>
       </p:sp>
-      <p:sp>
-        <p:nvSpPr>
-          <p:cNvPr id="5" name="Footer Placeholder 4">
-            <a:extLst>
-              <a:ext uri="{FF2B5EF4-FFF2-40B4-BE49-F238E27FC236}">
-                <a16:creationId xmlns:a16="http://schemas.microsoft.com/office/drawing/2014/main" id="{4F114F3D-D210-4AF1-8DB5-62B99927784C}"/>
-              </a:ext>
-            </a:extLst>
-          </p:cNvPr>
-          <p:cNvSpPr>
-            <a:spLocks noGrp="1"/>
-          </p:cNvSpPr>
-          <p:nvPr>
-            <p:ph type="ftr" sz="quarter" idx="11"/>
-          </p:nvPr>
-        </p:nvSpPr>
-        <p:spPr/>
-        <p:txBody>
-          <a:bodyPr/>
-          <a:lstStyle/>
-          <a:p>
-            <a:r>
-              <a:rPr lang="en-GB"/>
-              <a:t>Time Series</a:t>
-            </a:r>
-          </a:p>
-        </p:txBody>
-      </p:sp>
       <p:pic>
         <p:nvPicPr>
           <p:cNvPr id="11" name="Content Placeholder 10">
@@ -6508,6 +6505,34 @@
           </a:ln>
         </p:spPr>
       </p:pic>
+      <p:sp>
+        <p:nvSpPr>
+          <p:cNvPr id="5" name="Footer Placeholder 4">
+            <a:extLst>
+              <a:ext uri="{FF2B5EF4-FFF2-40B4-BE49-F238E27FC236}">
+                <a16:creationId xmlns:a16="http://schemas.microsoft.com/office/drawing/2014/main" id="{4F114F3D-D210-4AF1-8DB5-62B99927784C}"/>
+              </a:ext>
+            </a:extLst>
+          </p:cNvPr>
+          <p:cNvSpPr>
+            <a:spLocks noGrp="1"/>
+          </p:cNvSpPr>
+          <p:nvPr>
+            <p:ph type="ftr" sz="quarter" idx="11"/>
+          </p:nvPr>
+        </p:nvSpPr>
+        <p:spPr/>
+        <p:txBody>
+          <a:bodyPr/>
+          <a:lstStyle/>
+          <a:p>
+            <a:r>
+              <a:rPr lang="en-GB"/>
+              <a:t>Time Series</a:t>
+            </a:r>
+          </a:p>
+        </p:txBody>
+      </p:sp>
       <p:pic>
         <p:nvPicPr>
           <p:cNvPr id="13" name="Picture 12">
@@ -6598,6 +6623,35 @@
           </a:prstGeom>
         </p:spPr>
       </p:pic>
+      <p:sp>
+        <p:nvSpPr>
+          <p:cNvPr id="3" name="Espace réservé du numéro de diapositive 2">
+            <a:extLst>
+              <a:ext uri="{FF2B5EF4-FFF2-40B4-BE49-F238E27FC236}">
+                <a16:creationId xmlns:a16="http://schemas.microsoft.com/office/drawing/2014/main" id="{FFF63AB1-C27D-EAD9-0808-5D190CB592DB}"/>
+              </a:ext>
+            </a:extLst>
+          </p:cNvPr>
+          <p:cNvSpPr>
+            <a:spLocks noGrp="1"/>
+          </p:cNvSpPr>
+          <p:nvPr>
+            <p:ph type="sldNum" sz="quarter" idx="12"/>
+          </p:nvPr>
+        </p:nvSpPr>
+        <p:spPr/>
+        <p:txBody>
+          <a:bodyPr/>
+          <a:lstStyle/>
+          <a:p>
+            <a:fld id="{71CC62B1-FA1F-4849-B719-012F8D8A46B3}" type="slidenum">
+              <a:rPr lang="en-GB" smtClean="0"/>
+              <a:t>11</a:t>
+            </a:fld>
+            <a:endParaRPr lang="en-GB"/>
+          </a:p>
+        </p:txBody>
+      </p:sp>
     </p:spTree>
     <p:extLst>
       <p:ext uri="{BB962C8B-B14F-4D97-AF65-F5344CB8AC3E}">
@@ -6944,6 +6998,35 @@
           </a:p>
         </p:txBody>
       </p:sp>
+      <p:sp>
+        <p:nvSpPr>
+          <p:cNvPr id="4" name="Espace réservé du numéro de diapositive 3">
+            <a:extLst>
+              <a:ext uri="{FF2B5EF4-FFF2-40B4-BE49-F238E27FC236}">
+                <a16:creationId xmlns:a16="http://schemas.microsoft.com/office/drawing/2014/main" id="{0CC0D185-D7F0-B137-7D45-9B731C0BA051}"/>
+              </a:ext>
+            </a:extLst>
+          </p:cNvPr>
+          <p:cNvSpPr>
+            <a:spLocks noGrp="1"/>
+          </p:cNvSpPr>
+          <p:nvPr>
+            <p:ph type="sldNum" sz="quarter" idx="12"/>
+          </p:nvPr>
+        </p:nvSpPr>
+        <p:spPr/>
+        <p:txBody>
+          <a:bodyPr/>
+          <a:lstStyle/>
+          <a:p>
+            <a:fld id="{71CC62B1-FA1F-4849-B719-012F8D8A46B3}" type="slidenum">
+              <a:rPr lang="en-GB" smtClean="0"/>
+              <a:t>12</a:t>
+            </a:fld>
+            <a:endParaRPr lang="en-GB"/>
+          </a:p>
+        </p:txBody>
+      </p:sp>
     </p:spTree>
     <p:extLst>
       <p:ext uri="{BB962C8B-B14F-4D97-AF65-F5344CB8AC3E}">
@@ -7993,6 +8076,35 @@
               <a:rPr lang="en-GB"/>
               <a:t>Time Series</a:t>
             </a:r>
+          </a:p>
+        </p:txBody>
+      </p:sp>
+      <p:sp>
+        <p:nvSpPr>
+          <p:cNvPr id="4" name="Espace réservé du numéro de diapositive 3">
+            <a:extLst>
+              <a:ext uri="{FF2B5EF4-FFF2-40B4-BE49-F238E27FC236}">
+                <a16:creationId xmlns:a16="http://schemas.microsoft.com/office/drawing/2014/main" id="{F698B9C4-D421-3CB5-9B87-B2EE50C86EAB}"/>
+              </a:ext>
+            </a:extLst>
+          </p:cNvPr>
+          <p:cNvSpPr>
+            <a:spLocks noGrp="1"/>
+          </p:cNvSpPr>
+          <p:nvPr>
+            <p:ph type="sldNum" sz="quarter" idx="12"/>
+          </p:nvPr>
+        </p:nvSpPr>
+        <p:spPr/>
+        <p:txBody>
+          <a:bodyPr/>
+          <a:lstStyle/>
+          <a:p>
+            <a:fld id="{71CC62B1-FA1F-4849-B719-012F8D8A46B3}" type="slidenum">
+              <a:rPr lang="en-GB" smtClean="0"/>
+              <a:t>13</a:t>
+            </a:fld>
+            <a:endParaRPr lang="en-GB"/>
           </a:p>
         </p:txBody>
       </p:sp>
@@ -9209,6 +9321,35 @@
               <a:rPr lang="en-GB"/>
               <a:t>Time Series</a:t>
             </a:r>
+          </a:p>
+        </p:txBody>
+      </p:sp>
+      <p:sp>
+        <p:nvSpPr>
+          <p:cNvPr id="4" name="Espace réservé du numéro de diapositive 3">
+            <a:extLst>
+              <a:ext uri="{FF2B5EF4-FFF2-40B4-BE49-F238E27FC236}">
+                <a16:creationId xmlns:a16="http://schemas.microsoft.com/office/drawing/2014/main" id="{BADFD712-9779-1A00-8354-49373E4E2A95}"/>
+              </a:ext>
+            </a:extLst>
+          </p:cNvPr>
+          <p:cNvSpPr>
+            <a:spLocks noGrp="1"/>
+          </p:cNvSpPr>
+          <p:nvPr>
+            <p:ph type="sldNum" sz="quarter" idx="12"/>
+          </p:nvPr>
+        </p:nvSpPr>
+        <p:spPr/>
+        <p:txBody>
+          <a:bodyPr/>
+          <a:lstStyle/>
+          <a:p>
+            <a:fld id="{71CC62B1-FA1F-4849-B719-012F8D8A46B3}" type="slidenum">
+              <a:rPr lang="en-GB" smtClean="0"/>
+              <a:t>14</a:t>
+            </a:fld>
+            <a:endParaRPr lang="en-GB"/>
           </a:p>
         </p:txBody>
       </p:sp>
@@ -10472,6 +10613,35 @@
           </a:p>
         </p:txBody>
       </p:sp>
+      <p:sp>
+        <p:nvSpPr>
+          <p:cNvPr id="4" name="Espace réservé du numéro de diapositive 3">
+            <a:extLst>
+              <a:ext uri="{FF2B5EF4-FFF2-40B4-BE49-F238E27FC236}">
+                <a16:creationId xmlns:a16="http://schemas.microsoft.com/office/drawing/2014/main" id="{51987D7A-EEE8-4602-2E49-EF97D6AEE52B}"/>
+              </a:ext>
+            </a:extLst>
+          </p:cNvPr>
+          <p:cNvSpPr>
+            <a:spLocks noGrp="1"/>
+          </p:cNvSpPr>
+          <p:nvPr>
+            <p:ph type="sldNum" sz="quarter" idx="12"/>
+          </p:nvPr>
+        </p:nvSpPr>
+        <p:spPr/>
+        <p:txBody>
+          <a:bodyPr/>
+          <a:lstStyle/>
+          <a:p>
+            <a:fld id="{71CC62B1-FA1F-4849-B719-012F8D8A46B3}" type="slidenum">
+              <a:rPr lang="en-GB" smtClean="0"/>
+              <a:t>15</a:t>
+            </a:fld>
+            <a:endParaRPr lang="en-GB"/>
+          </a:p>
+        </p:txBody>
+      </p:sp>
     </p:spTree>
     <p:extLst>
       <p:ext uri="{BB962C8B-B14F-4D97-AF65-F5344CB8AC3E}">
@@ -11704,6 +11874,35 @@
           </a:p>
         </p:txBody>
       </p:sp>
+      <p:sp>
+        <p:nvSpPr>
+          <p:cNvPr id="4" name="Espace réservé du numéro de diapositive 3">
+            <a:extLst>
+              <a:ext uri="{FF2B5EF4-FFF2-40B4-BE49-F238E27FC236}">
+                <a16:creationId xmlns:a16="http://schemas.microsoft.com/office/drawing/2014/main" id="{8F7B091E-430F-8C59-94B1-A2EFB2B55329}"/>
+              </a:ext>
+            </a:extLst>
+          </p:cNvPr>
+          <p:cNvSpPr>
+            <a:spLocks noGrp="1"/>
+          </p:cNvSpPr>
+          <p:nvPr>
+            <p:ph type="sldNum" sz="quarter" idx="12"/>
+          </p:nvPr>
+        </p:nvSpPr>
+        <p:spPr/>
+        <p:txBody>
+          <a:bodyPr/>
+          <a:lstStyle/>
+          <a:p>
+            <a:fld id="{71CC62B1-FA1F-4849-B719-012F8D8A46B3}" type="slidenum">
+              <a:rPr lang="en-GB" smtClean="0"/>
+              <a:t>16</a:t>
+            </a:fld>
+            <a:endParaRPr lang="en-GB"/>
+          </a:p>
+        </p:txBody>
+      </p:sp>
     </p:spTree>
     <p:extLst>
       <p:ext uri="{BB962C8B-B14F-4D97-AF65-F5344CB8AC3E}">
@@ -11850,6 +12049,35 @@
           </a:p>
         </p:txBody>
       </p:sp>
+      <p:sp>
+        <p:nvSpPr>
+          <p:cNvPr id="4" name="Espace réservé du numéro de diapositive 3">
+            <a:extLst>
+              <a:ext uri="{FF2B5EF4-FFF2-40B4-BE49-F238E27FC236}">
+                <a16:creationId xmlns:a16="http://schemas.microsoft.com/office/drawing/2014/main" id="{F746840B-23EB-74E9-F545-AC1E0DB273D4}"/>
+              </a:ext>
+            </a:extLst>
+          </p:cNvPr>
+          <p:cNvSpPr>
+            <a:spLocks noGrp="1"/>
+          </p:cNvSpPr>
+          <p:nvPr>
+            <p:ph type="sldNum" sz="quarter" idx="12"/>
+          </p:nvPr>
+        </p:nvSpPr>
+        <p:spPr/>
+        <p:txBody>
+          <a:bodyPr/>
+          <a:lstStyle/>
+          <a:p>
+            <a:fld id="{71CC62B1-FA1F-4849-B719-012F8D8A46B3}" type="slidenum">
+              <a:rPr lang="en-GB" smtClean="0"/>
+              <a:t>17</a:t>
+            </a:fld>
+            <a:endParaRPr lang="en-GB"/>
+          </a:p>
+        </p:txBody>
+      </p:sp>
     </p:spTree>
     <p:extLst>
       <p:ext uri="{BB962C8B-B14F-4D97-AF65-F5344CB8AC3E}">
@@ -11930,6 +12158,36 @@
           </a:p>
         </p:txBody>
       </p:sp>
+      <p:sp>
+        <p:nvSpPr>
+          <p:cNvPr id="4" name="Espace réservé du numéro de diapositive 3">
+            <a:extLst>
+              <a:ext uri="{FF2B5EF4-FFF2-40B4-BE49-F238E27FC236}">
+                <a16:creationId xmlns:a16="http://schemas.microsoft.com/office/drawing/2014/main" id="{59262D70-62B9-D263-8A19-424C6F78C6B0}"/>
+              </a:ext>
+            </a:extLst>
+          </p:cNvPr>
+          <p:cNvSpPr>
+            <a:spLocks noGrp="1"/>
+          </p:cNvSpPr>
+          <p:nvPr>
+            <p:ph type="sldNum" idx="12"/>
+          </p:nvPr>
+        </p:nvSpPr>
+        <p:spPr/>
+        <p:txBody>
+          <a:bodyPr/>
+          <a:lstStyle/>
+          <a:p>
+            <a:fld id="{00000000-1234-1234-1234-123412341234}" type="slidenum">
+              <a:rPr lang="en-GB" smtClean="0"/>
+              <a:pPr/>
+              <a:t>18</a:t>
+            </a:fld>
+            <a:endParaRPr lang="en-GB"/>
+          </a:p>
+        </p:txBody>
+      </p:sp>
     </p:spTree>
     <p:extLst>
       <p:ext uri="{BB962C8B-B14F-4D97-AF65-F5344CB8AC3E}">
@@ -12001,7 +12259,7 @@
             <a:spLocks noGrp="1"/>
           </p:cNvSpPr>
           <p:nvPr>
-            <p:ph idx="1"/>
+            <p:ph sz="half" idx="2"/>
           </p:nvPr>
         </p:nvSpPr>
         <p:spPr/>
@@ -12010,46 +12268,46 @@
           <a:lstStyle/>
           <a:p>
             <a:r>
-              <a:rPr lang="en-GB" dirty="0"/>
+              <a:rPr lang="en-GB" sz="2800" dirty="0"/>
               <a:t>“Regular” time series</a:t>
             </a:r>
           </a:p>
           <a:p>
             <a:r>
-              <a:rPr lang="en-GB" dirty="0"/>
+              <a:rPr lang="en-GB" sz="2800" dirty="0"/>
               <a:t>Basic tools</a:t>
             </a:r>
           </a:p>
           <a:p>
             <a:pPr lvl="1"/>
             <a:r>
-              <a:rPr lang="en-GB" dirty="0"/>
+              <a:rPr lang="en-GB" sz="2400" dirty="0"/>
               <a:t>Auto-correlation function</a:t>
             </a:r>
           </a:p>
           <a:p>
             <a:pPr lvl="1"/>
             <a:r>
-              <a:rPr lang="en-GB" dirty="0"/>
+              <a:rPr lang="en-GB" sz="2400" dirty="0"/>
               <a:t>Periodogram</a:t>
             </a:r>
           </a:p>
           <a:p>
             <a:pPr lvl="1"/>
             <a:r>
-              <a:rPr lang="en-GB" dirty="0"/>
+              <a:rPr lang="en-GB" sz="2400" dirty="0"/>
               <a:t>Linear filter</a:t>
             </a:r>
           </a:p>
           <a:p>
             <a:r>
-              <a:rPr lang="en-GB" dirty="0"/>
+              <a:rPr lang="en-GB" sz="2800" dirty="0"/>
               <a:t>Stationarity</a:t>
             </a:r>
           </a:p>
           <a:p>
             <a:r>
-              <a:rPr lang="en-GB" dirty="0"/>
+              <a:rPr lang="en-GB" sz="2800" dirty="0"/>
               <a:t>Arima model</a:t>
             </a:r>
           </a:p>
@@ -12071,10 +12329,15 @@
             <a:spLocks noGrp="1"/>
           </p:cNvSpPr>
           <p:nvPr>
-            <p:ph type="ftr" sz="quarter" idx="11"/>
+            <p:ph type="ftr" sz="quarter" idx="4294967295"/>
           </p:nvPr>
         </p:nvSpPr>
-        <p:spPr/>
+        <p:spPr>
+          <a:xfrm>
+            <a:off x="0" y="0"/>
+            <a:ext cx="0" cy="0"/>
+          </a:xfrm>
+        </p:spPr>
         <p:txBody>
           <a:bodyPr/>
           <a:lstStyle/>
@@ -12083,6 +12346,36 @@
               <a:rPr lang="en-GB"/>
               <a:t>Time Series</a:t>
             </a:r>
+          </a:p>
+        </p:txBody>
+      </p:sp>
+      <p:sp>
+        <p:nvSpPr>
+          <p:cNvPr id="8" name="Espace réservé du numéro de diapositive 7">
+            <a:extLst>
+              <a:ext uri="{FF2B5EF4-FFF2-40B4-BE49-F238E27FC236}">
+                <a16:creationId xmlns:a16="http://schemas.microsoft.com/office/drawing/2014/main" id="{33861ED7-66D6-B6D1-0F00-D987567622B5}"/>
+              </a:ext>
+            </a:extLst>
+          </p:cNvPr>
+          <p:cNvSpPr>
+            <a:spLocks noGrp="1"/>
+          </p:cNvSpPr>
+          <p:nvPr>
+            <p:ph type="sldNum" idx="12"/>
+          </p:nvPr>
+        </p:nvSpPr>
+        <p:spPr/>
+        <p:txBody>
+          <a:bodyPr/>
+          <a:lstStyle/>
+          <a:p>
+            <a:fld id="{00000000-1234-1234-1234-123412341234}" type="slidenum">
+              <a:rPr lang="en-GB" smtClean="0"/>
+              <a:pPr/>
+              <a:t>2</a:t>
+            </a:fld>
+            <a:endParaRPr lang="en-GB"/>
           </a:p>
         </p:txBody>
       </p:sp>
@@ -12157,7 +12450,7 @@
             <a:spLocks noGrp="1"/>
           </p:cNvSpPr>
           <p:nvPr>
-            <p:ph idx="1"/>
+            <p:ph sz="half" idx="2"/>
           </p:nvPr>
         </p:nvSpPr>
         <p:spPr/>
@@ -12209,10 +12502,15 @@
             <a:spLocks noGrp="1"/>
           </p:cNvSpPr>
           <p:nvPr>
-            <p:ph type="ftr" sz="quarter" idx="11"/>
+            <p:ph type="ftr" sz="quarter" idx="4294967295"/>
           </p:nvPr>
         </p:nvSpPr>
-        <p:spPr/>
+        <p:spPr>
+          <a:xfrm>
+            <a:off x="0" y="0"/>
+            <a:ext cx="0" cy="0"/>
+          </a:xfrm>
+        </p:spPr>
         <p:txBody>
           <a:bodyPr/>
           <a:lstStyle/>
@@ -12246,7 +12544,7 @@
         </p:blipFill>
         <p:spPr>
           <a:xfrm>
-            <a:off x="3180653" y="4541084"/>
+            <a:off x="2868926" y="3575070"/>
             <a:ext cx="5399778" cy="2039916"/>
           </a:xfrm>
           <a:prstGeom prst="rect">
@@ -12284,6 +12582,36 @@
           </a:sp3d>
         </p:spPr>
       </p:pic>
+      <p:sp>
+        <p:nvSpPr>
+          <p:cNvPr id="9" name="Espace réservé du numéro de diapositive 8">
+            <a:extLst>
+              <a:ext uri="{FF2B5EF4-FFF2-40B4-BE49-F238E27FC236}">
+                <a16:creationId xmlns:a16="http://schemas.microsoft.com/office/drawing/2014/main" id="{B2722F15-0917-B441-78B6-E8AA2EE1E9A5}"/>
+              </a:ext>
+            </a:extLst>
+          </p:cNvPr>
+          <p:cNvSpPr>
+            <a:spLocks noGrp="1"/>
+          </p:cNvSpPr>
+          <p:nvPr>
+            <p:ph type="sldNum" idx="12"/>
+          </p:nvPr>
+        </p:nvSpPr>
+        <p:spPr/>
+        <p:txBody>
+          <a:bodyPr/>
+          <a:lstStyle/>
+          <a:p>
+            <a:fld id="{00000000-1234-1234-1234-123412341234}" type="slidenum">
+              <a:rPr lang="en-GB" smtClean="0"/>
+              <a:pPr/>
+              <a:t>3</a:t>
+            </a:fld>
+            <a:endParaRPr lang="en-GB"/>
+          </a:p>
+        </p:txBody>
+      </p:sp>
     </p:spTree>
     <p:extLst>
       <p:ext uri="{BB962C8B-B14F-4D97-AF65-F5344CB8AC3E}">
@@ -12342,8 +12670,37 @@
           </a:p>
         </p:txBody>
       </p:sp>
-      <mc:AlternateContent xmlns:mc="http://schemas.openxmlformats.org/markup-compatibility/2006" xmlns:a14="http://schemas.microsoft.com/office/drawing/2010/main">
-        <mc:Choice Requires="a14">
+      <p:sp>
+        <p:nvSpPr>
+          <p:cNvPr id="4" name="Espace réservé du numéro de diapositive 3">
+            <a:extLst>
+              <a:ext uri="{FF2B5EF4-FFF2-40B4-BE49-F238E27FC236}">
+                <a16:creationId xmlns:a16="http://schemas.microsoft.com/office/drawing/2014/main" id="{1518B0C6-EC6E-6099-8916-E4D3E9172346}"/>
+              </a:ext>
+            </a:extLst>
+          </p:cNvPr>
+          <p:cNvSpPr>
+            <a:spLocks noGrp="1"/>
+          </p:cNvSpPr>
+          <p:nvPr>
+            <p:ph type="sldNum" idx="12"/>
+          </p:nvPr>
+        </p:nvSpPr>
+        <p:spPr/>
+        <p:txBody>
+          <a:bodyPr/>
+          <a:lstStyle/>
+          <a:p>
+            <a:fld id="{71CC62B1-FA1F-4849-B719-012F8D8A46B3}" type="slidenum">
+              <a:rPr lang="en-GB" smtClean="0"/>
+              <a:t>4</a:t>
+            </a:fld>
+            <a:endParaRPr lang="en-GB"/>
+          </a:p>
+        </p:txBody>
+      </p:sp>
+      <mc:AlternateContent xmlns:mc="http://schemas.openxmlformats.org/markup-compatibility/2006">
+        <mc:Choice xmlns:a14="http://schemas.microsoft.com/office/drawing/2010/main" Requires="a14">
           <p:sp>
             <p:nvSpPr>
               <p:cNvPr id="3" name="Content Placeholder 2">
@@ -12357,7 +12714,7 @@
                 <a:spLocks noGrp="1"/>
               </p:cNvSpPr>
               <p:nvPr>
-                <p:ph idx="1"/>
+                <p:ph sz="half" idx="2"/>
               </p:nvPr>
             </p:nvSpPr>
             <p:spPr/>
@@ -12366,17 +12723,14 @@
               <a:lstStyle/>
               <a:p>
                 <a:r>
-                  <a:rPr lang="en-GB" dirty="0"/>
+                  <a:rPr lang="en-GB" sz="3200" dirty="0"/>
                   <a:t>Auto-correlation function and auto-covariance function (ACF)</a:t>
                 </a:r>
               </a:p>
               <a:p>
-                <a:endParaRPr lang="en-GB" dirty="0"/>
-              </a:p>
-              <a:p>
                 <a:pPr lvl="1"/>
                 <a:r>
-                  <a:rPr lang="en-GB" dirty="0"/>
+                  <a:rPr lang="en-GB" sz="2800" dirty="0"/>
                   <a:t>Measurement of “patterns” in time series (</a:t>
                 </a:r>
                 <a14:m>
@@ -12384,14 +12738,14 @@
                     <m:sSub>
                       <m:sSubPr>
                         <m:ctrlPr>
-                          <a:rPr lang="fr-BE" i="1">
+                          <a:rPr lang="fr-BE" sz="2800" i="1">
                             <a:latin typeface="Cambria Math" panose="02040503050406030204" pitchFamily="18" charset="0"/>
                           </a:rPr>
                         </m:ctrlPr>
                       </m:sSubPr>
                       <m:e>
                         <m:r>
-                          <a:rPr lang="fr-BE" i="1">
+                          <a:rPr lang="fr-BE" sz="2800" i="1">
                             <a:latin typeface="Cambria Math" panose="02040503050406030204" pitchFamily="18" charset="0"/>
                           </a:rPr>
                           <m:t>𝑥</m:t>
@@ -12399,7 +12753,7 @@
                       </m:e>
                       <m:sub>
                         <m:r>
-                          <a:rPr lang="fr-BE" i="1">
+                          <a:rPr lang="fr-BE" sz="2800" i="1">
                             <a:latin typeface="Cambria Math" panose="02040503050406030204" pitchFamily="18" charset="0"/>
                           </a:rPr>
                           <m:t>𝑡</m:t>
@@ -12409,40 +12763,40 @@
                   </m:oMath>
                 </a14:m>
                 <a:r>
-                  <a:rPr lang="en-GB" dirty="0"/>
+                  <a:rPr lang="en-GB" sz="2800" dirty="0"/>
                   <a:t>, </a:t>
                 </a:r>
                 <a14:m>
                   <m:oMath xmlns:m="http://schemas.openxmlformats.org/officeDocument/2006/math">
                     <m:r>
-                      <a:rPr lang="fr-BE" sz="1200" i="1">
+                      <a:rPr lang="fr-BE" i="1">
                         <a:latin typeface="Cambria Math" panose="02040503050406030204" pitchFamily="18" charset="0"/>
                       </a:rPr>
                       <m:t>0</m:t>
                     </m:r>
                     <m:r>
-                      <a:rPr lang="fr-BE" sz="1200" i="1">
+                      <a:rPr lang="fr-BE" i="1">
                         <a:latin typeface="Cambria Math" panose="02040503050406030204" pitchFamily="18" charset="0"/>
                         <a:ea typeface="Cambria Math" panose="02040503050406030204" pitchFamily="18" charset="0"/>
                       </a:rPr>
                       <m:t>≤</m:t>
                     </m:r>
                     <m:r>
-                      <a:rPr lang="fr-BE" sz="1200" i="1">
+                      <a:rPr lang="fr-BE" i="1">
                         <a:latin typeface="Cambria Math" panose="02040503050406030204" pitchFamily="18" charset="0"/>
                         <a:ea typeface="Cambria Math" panose="02040503050406030204" pitchFamily="18" charset="0"/>
                       </a:rPr>
                       <m:t>𝑡</m:t>
                     </m:r>
                     <m:r>
-                      <a:rPr lang="fr-BE" sz="1200" i="1">
+                      <a:rPr lang="fr-BE" i="1">
                         <a:latin typeface="Cambria Math" panose="02040503050406030204" pitchFamily="18" charset="0"/>
                         <a:ea typeface="Cambria Math" panose="02040503050406030204" pitchFamily="18" charset="0"/>
                       </a:rPr>
                       <m:t>&lt;</m:t>
                     </m:r>
                     <m:r>
-                      <a:rPr lang="fr-BE" sz="1200" i="1">
+                      <a:rPr lang="fr-BE" i="1">
                         <a:latin typeface="Cambria Math" panose="02040503050406030204" pitchFamily="18" charset="0"/>
                         <a:ea typeface="Cambria Math" panose="02040503050406030204" pitchFamily="18" charset="0"/>
                       </a:rPr>
@@ -12451,20 +12805,16 @@
                   </m:oMath>
                 </a14:m>
                 <a:r>
-                  <a:rPr lang="en-GB" dirty="0"/>
+                  <a:rPr lang="en-GB" sz="2800" dirty="0"/>
                   <a:t>)</a:t>
                 </a:r>
-                <a:endParaRPr lang="en-GB" sz="1200" dirty="0"/>
-              </a:p>
-              <a:p>
-                <a:endParaRPr lang="en-GB" dirty="0"/>
               </a:p>
               <a:p>
                 <a:pPr lvl="1"/>
                 <a14:m>
                   <m:oMath xmlns:m="http://schemas.openxmlformats.org/officeDocument/2006/math">
                     <m:r>
-                      <a:rPr lang="fr-BE" b="0" i="1" smtClean="0">
+                      <a:rPr lang="fr-BE" sz="2800" b="0" i="1" smtClean="0">
                         <a:latin typeface="Cambria Math" panose="02040503050406030204" pitchFamily="18" charset="0"/>
                       </a:rPr>
                       <m:t>𝑎𝑐𝑓</m:t>
@@ -12472,14 +12822,14 @@
                     <m:d>
                       <m:dPr>
                         <m:ctrlPr>
-                          <a:rPr lang="fr-BE" b="0" i="1" smtClean="0">
+                          <a:rPr lang="fr-BE" sz="2800" b="0" i="1" smtClean="0">
                             <a:latin typeface="Cambria Math" panose="02040503050406030204" pitchFamily="18" charset="0"/>
                           </a:rPr>
                         </m:ctrlPr>
                       </m:dPr>
                       <m:e>
                         <m:r>
-                          <a:rPr lang="fr-BE" b="0" i="1" smtClean="0">
+                          <a:rPr lang="fr-BE" sz="2800" b="0" i="1" smtClean="0">
                             <a:latin typeface="Cambria Math" panose="02040503050406030204" pitchFamily="18" charset="0"/>
                           </a:rPr>
                           <m:t>𝑘</m:t>
@@ -12487,7 +12837,7 @@
                       </m:e>
                     </m:d>
                     <m:r>
-                      <a:rPr lang="fr-BE" b="0" i="1" smtClean="0">
+                      <a:rPr lang="fr-BE" sz="2800" b="0" i="1" smtClean="0">
                         <a:latin typeface="Cambria Math" panose="02040503050406030204" pitchFamily="18" charset="0"/>
                       </a:rPr>
                       <m:t>= </m:t>
@@ -12495,7 +12845,7 @@
                     <m:sSub>
                       <m:sSubPr>
                         <m:ctrlPr>
-                          <a:rPr lang="fr-BE" b="0" i="1" smtClean="0">
+                          <a:rPr lang="fr-BE" sz="2800" b="0" i="1" smtClean="0">
                             <a:latin typeface="Cambria Math" panose="02040503050406030204" pitchFamily="18" charset="0"/>
                             <a:ea typeface="Cambria Math" panose="02040503050406030204" pitchFamily="18" charset="0"/>
                           </a:rPr>
@@ -12503,7 +12853,7 @@
                       </m:sSubPr>
                       <m:e>
                         <m:r>
-                          <a:rPr lang="fr-BE" b="0" i="1" smtClean="0">
+                          <a:rPr lang="fr-BE" sz="2800" b="0" i="1" smtClean="0">
                             <a:latin typeface="Cambria Math" panose="02040503050406030204" pitchFamily="18" charset="0"/>
                             <a:ea typeface="Cambria Math" panose="02040503050406030204" pitchFamily="18" charset="0"/>
                           </a:rPr>
@@ -12512,7 +12862,7 @@
                       </m:e>
                       <m:sub>
                         <m:r>
-                          <a:rPr lang="fr-BE" b="0" i="1" smtClean="0">
+                          <a:rPr lang="fr-BE" sz="2800" b="0" i="1" smtClean="0">
                             <a:latin typeface="Cambria Math" panose="02040503050406030204" pitchFamily="18" charset="0"/>
                           </a:rPr>
                           <m:t>𝑘</m:t>
@@ -12520,7 +12870,7 @@
                       </m:sub>
                     </m:sSub>
                     <m:r>
-                      <a:rPr lang="fr-BE" b="0" i="1" smtClean="0">
+                      <a:rPr lang="fr-BE" sz="2800" b="0" i="1" smtClean="0">
                         <a:latin typeface="Cambria Math" panose="02040503050406030204" pitchFamily="18" charset="0"/>
                       </a:rPr>
                       <m:t>=</m:t>
@@ -12528,7 +12878,7 @@
                     <m:f>
                       <m:fPr>
                         <m:ctrlPr>
-                          <a:rPr lang="fr-BE" b="0" i="1" smtClean="0">
+                          <a:rPr lang="fr-BE" sz="2800" b="0" i="1" smtClean="0">
                             <a:latin typeface="Cambria Math" panose="02040503050406030204" pitchFamily="18" charset="0"/>
                           </a:rPr>
                         </m:ctrlPr>
@@ -12538,7 +12888,7 @@
                           <m:naryPr>
                             <m:chr m:val="∑"/>
                             <m:ctrlPr>
-                              <a:rPr lang="fr-BE" b="0" i="1" smtClean="0">
+                              <a:rPr lang="fr-BE" sz="2800" b="0" i="1" smtClean="0">
                                 <a:latin typeface="Cambria Math" panose="02040503050406030204" pitchFamily="18" charset="0"/>
                               </a:rPr>
                             </m:ctrlPr>
@@ -12548,19 +12898,19 @@
                               <m:rPr>
                                 <m:brk m:alnAt="23"/>
                               </m:rPr>
-                              <a:rPr lang="fr-BE" b="0" i="1" smtClean="0">
+                              <a:rPr lang="fr-BE" sz="2800" b="0" i="1" smtClean="0">
                                 <a:latin typeface="Cambria Math" panose="02040503050406030204" pitchFamily="18" charset="0"/>
                               </a:rPr>
                               <m:t>𝑡</m:t>
                             </m:r>
                             <m:r>
-                              <a:rPr lang="fr-BE" b="0" i="1" smtClean="0">
+                              <a:rPr lang="fr-BE" sz="2800" b="0" i="1" smtClean="0">
                                 <a:latin typeface="Cambria Math" panose="02040503050406030204" pitchFamily="18" charset="0"/>
                               </a:rPr>
                               <m:t>=</m:t>
                             </m:r>
                             <m:r>
-                              <a:rPr lang="fr-BE" b="0" i="1" smtClean="0">
+                              <a:rPr lang="fr-BE" sz="2800" b="0" i="1" smtClean="0">
                                 <a:latin typeface="Cambria Math" panose="02040503050406030204" pitchFamily="18" charset="0"/>
                               </a:rPr>
                               <m:t>𝑘</m:t>
@@ -12568,13 +12918,13 @@
                           </m:sub>
                           <m:sup>
                             <m:r>
-                              <a:rPr lang="fr-BE" b="0" i="1" smtClean="0">
+                              <a:rPr lang="fr-BE" sz="2800" b="0" i="1" smtClean="0">
                                 <a:latin typeface="Cambria Math" panose="02040503050406030204" pitchFamily="18" charset="0"/>
                               </a:rPr>
                               <m:t>𝑛</m:t>
                             </m:r>
                             <m:r>
-                              <a:rPr lang="fr-BE" b="0" i="1" smtClean="0">
+                              <a:rPr lang="fr-BE" sz="2800" b="0" i="1" smtClean="0">
                                 <a:latin typeface="Cambria Math" panose="02040503050406030204" pitchFamily="18" charset="0"/>
                               </a:rPr>
                               <m:t>−1</m:t>
@@ -12582,7 +12932,7 @@
                           </m:sup>
                           <m:e>
                             <m:r>
-                              <a:rPr lang="fr-BE" b="0" i="1" smtClean="0">
+                              <a:rPr lang="fr-BE" sz="2800" b="0" i="1" smtClean="0">
                                 <a:latin typeface="Cambria Math" panose="02040503050406030204" pitchFamily="18" charset="0"/>
                               </a:rPr>
                               <m:t>(</m:t>
@@ -12590,14 +12940,14 @@
                             <m:sSub>
                               <m:sSubPr>
                                 <m:ctrlPr>
-                                  <a:rPr lang="fr-BE" b="0" i="1" smtClean="0">
+                                  <a:rPr lang="fr-BE" sz="2800" b="0" i="1" smtClean="0">
                                     <a:latin typeface="Cambria Math" panose="02040503050406030204" pitchFamily="18" charset="0"/>
                                   </a:rPr>
                                 </m:ctrlPr>
                               </m:sSubPr>
                               <m:e>
                                 <m:r>
-                                  <a:rPr lang="fr-BE" b="0" i="1" smtClean="0">
+                                  <a:rPr lang="fr-BE" sz="2800" b="0" i="1" smtClean="0">
                                     <a:latin typeface="Cambria Math" panose="02040503050406030204" pitchFamily="18" charset="0"/>
                                   </a:rPr>
                                   <m:t>𝑥</m:t>
@@ -12605,7 +12955,7 @@
                               </m:e>
                               <m:sub>
                                 <m:r>
-                                  <a:rPr lang="fr-BE" b="0" i="1" smtClean="0">
+                                  <a:rPr lang="fr-BE" sz="2800" b="0" i="1" smtClean="0">
                                     <a:latin typeface="Cambria Math" panose="02040503050406030204" pitchFamily="18" charset="0"/>
                                   </a:rPr>
                                   <m:t>𝑡</m:t>
@@ -12613,7 +12963,7 @@
                               </m:sub>
                             </m:sSub>
                             <m:r>
-                              <a:rPr lang="fr-BE" b="0" i="1" smtClean="0">
+                              <a:rPr lang="fr-BE" sz="2800" b="0" i="1" smtClean="0">
                                 <a:latin typeface="Cambria Math" panose="02040503050406030204" pitchFamily="18" charset="0"/>
                               </a:rPr>
                               <m:t>−</m:t>
@@ -12622,14 +12972,14 @@
                               <m:accPr>
                                 <m:chr m:val="̅"/>
                                 <m:ctrlPr>
-                                  <a:rPr lang="fr-BE" b="0" i="1" smtClean="0">
+                                  <a:rPr lang="fr-BE" sz="2800" b="0" i="1" smtClean="0">
                                     <a:latin typeface="Cambria Math" panose="02040503050406030204" pitchFamily="18" charset="0"/>
                                   </a:rPr>
                                 </m:ctrlPr>
                               </m:accPr>
                               <m:e>
                                 <m:r>
-                                  <a:rPr lang="fr-BE" b="0" i="1" smtClean="0">
+                                  <a:rPr lang="fr-BE" sz="2800" b="0" i="1" smtClean="0">
                                     <a:latin typeface="Cambria Math" panose="02040503050406030204" pitchFamily="18" charset="0"/>
                                   </a:rPr>
                                   <m:t>𝑥</m:t>
@@ -12637,7 +12987,7 @@
                               </m:e>
                             </m:acc>
                             <m:r>
-                              <a:rPr lang="fr-BE" b="0" i="1" smtClean="0">
+                              <a:rPr lang="fr-BE" sz="2800" b="0" i="1" smtClean="0">
                                 <a:latin typeface="Cambria Math" panose="02040503050406030204" pitchFamily="18" charset="0"/>
                               </a:rPr>
                               <m:t>)(</m:t>
@@ -12645,14 +12995,14 @@
                             <m:sSub>
                               <m:sSubPr>
                                 <m:ctrlPr>
-                                  <a:rPr lang="fr-BE" b="0" i="1" smtClean="0">
+                                  <a:rPr lang="fr-BE" sz="2800" b="0" i="1" smtClean="0">
                                     <a:latin typeface="Cambria Math" panose="02040503050406030204" pitchFamily="18" charset="0"/>
                                   </a:rPr>
                                 </m:ctrlPr>
                               </m:sSubPr>
                               <m:e>
                                 <m:r>
-                                  <a:rPr lang="fr-BE" b="0" i="1" smtClean="0">
+                                  <a:rPr lang="fr-BE" sz="2800" b="0" i="1" smtClean="0">
                                     <a:latin typeface="Cambria Math" panose="02040503050406030204" pitchFamily="18" charset="0"/>
                                   </a:rPr>
                                   <m:t>𝑥</m:t>
@@ -12660,19 +13010,19 @@
                               </m:e>
                               <m:sub>
                                 <m:r>
-                                  <a:rPr lang="fr-BE" b="0" i="1" smtClean="0">
+                                  <a:rPr lang="fr-BE" sz="2800" b="0" i="1" smtClean="0">
                                     <a:latin typeface="Cambria Math" panose="02040503050406030204" pitchFamily="18" charset="0"/>
                                   </a:rPr>
                                   <m:t>𝑡</m:t>
                                 </m:r>
                                 <m:r>
-                                  <a:rPr lang="fr-BE" b="0" i="1" smtClean="0">
+                                  <a:rPr lang="fr-BE" sz="2800" b="0" i="1" smtClean="0">
                                     <a:latin typeface="Cambria Math" panose="02040503050406030204" pitchFamily="18" charset="0"/>
                                   </a:rPr>
                                   <m:t>−</m:t>
                                 </m:r>
                                 <m:r>
-                                  <a:rPr lang="fr-BE" b="0" i="1" smtClean="0">
+                                  <a:rPr lang="fr-BE" sz="2800" b="0" i="1" smtClean="0">
                                     <a:latin typeface="Cambria Math" panose="02040503050406030204" pitchFamily="18" charset="0"/>
                                   </a:rPr>
                                   <m:t>𝑘</m:t>
@@ -12680,7 +13030,7 @@
                               </m:sub>
                             </m:sSub>
                             <m:r>
-                              <a:rPr lang="fr-BE" b="0" i="1" smtClean="0">
+                              <a:rPr lang="fr-BE" sz="2800" b="0" i="1" smtClean="0">
                                 <a:latin typeface="Cambria Math" panose="02040503050406030204" pitchFamily="18" charset="0"/>
                               </a:rPr>
                               <m:t>−</m:t>
@@ -12689,14 +13039,14 @@
                               <m:accPr>
                                 <m:chr m:val="̅"/>
                                 <m:ctrlPr>
-                                  <a:rPr lang="fr-BE" b="0" i="1" smtClean="0">
+                                  <a:rPr lang="fr-BE" sz="2800" b="0" i="1" smtClean="0">
                                     <a:latin typeface="Cambria Math" panose="02040503050406030204" pitchFamily="18" charset="0"/>
                                   </a:rPr>
                                 </m:ctrlPr>
                               </m:accPr>
                               <m:e>
                                 <m:r>
-                                  <a:rPr lang="fr-BE" b="0" i="1" smtClean="0">
+                                  <a:rPr lang="fr-BE" sz="2800" b="0" i="1" smtClean="0">
                                     <a:latin typeface="Cambria Math" panose="02040503050406030204" pitchFamily="18" charset="0"/>
                                   </a:rPr>
                                   <m:t>𝑥</m:t>
@@ -12704,7 +13054,7 @@
                               </m:e>
                             </m:acc>
                             <m:r>
-                              <a:rPr lang="fr-BE" b="0" i="1" smtClean="0">
+                              <a:rPr lang="fr-BE" sz="2800" b="0" i="1" smtClean="0">
                                 <a:latin typeface="Cambria Math" panose="02040503050406030204" pitchFamily="18" charset="0"/>
                               </a:rPr>
                               <m:t>)</m:t>
@@ -12714,7 +13064,7 @@
                       </m:num>
                       <m:den>
                         <m:r>
-                          <a:rPr lang="fr-BE" b="0" i="1" smtClean="0">
+                          <a:rPr lang="fr-BE" sz="2800" b="0" i="1" smtClean="0">
                             <a:latin typeface="Cambria Math" panose="02040503050406030204" pitchFamily="18" charset="0"/>
                           </a:rPr>
                           <m:t>[</m:t>
@@ -12723,7 +13073,7 @@
                           <m:naryPr>
                             <m:chr m:val="∑"/>
                             <m:ctrlPr>
-                              <a:rPr lang="fr-BE" b="0" i="1" smtClean="0">
+                              <a:rPr lang="fr-BE" sz="2800" b="0" i="1" smtClean="0">
                                 <a:latin typeface="Cambria Math" panose="02040503050406030204" pitchFamily="18" charset="0"/>
                               </a:rPr>
                             </m:ctrlPr>
@@ -12733,13 +13083,13 @@
                               <m:rPr>
                                 <m:brk m:alnAt="23"/>
                               </m:rPr>
-                              <a:rPr lang="fr-BE" b="0" i="1" smtClean="0">
+                              <a:rPr lang="fr-BE" sz="2800" b="0" i="1" smtClean="0">
                                 <a:latin typeface="Cambria Math" panose="02040503050406030204" pitchFamily="18" charset="0"/>
                               </a:rPr>
                               <m:t>𝑡</m:t>
                             </m:r>
                             <m:r>
-                              <a:rPr lang="fr-BE" b="0" i="1" smtClean="0">
+                              <a:rPr lang="fr-BE" sz="2800" b="0" i="1" smtClean="0">
                                 <a:latin typeface="Cambria Math" panose="02040503050406030204" pitchFamily="18" charset="0"/>
                               </a:rPr>
                               <m:t>=0</m:t>
@@ -12747,13 +13097,13 @@
                           </m:sub>
                           <m:sup>
                             <m:r>
-                              <a:rPr lang="fr-BE" b="0" i="1" smtClean="0">
+                              <a:rPr lang="fr-BE" sz="2800" b="0" i="1" smtClean="0">
                                 <a:latin typeface="Cambria Math" panose="02040503050406030204" pitchFamily="18" charset="0"/>
                               </a:rPr>
                               <m:t>𝑛</m:t>
                             </m:r>
                             <m:r>
-                              <a:rPr lang="fr-BE" b="0" i="1" smtClean="0">
+                              <a:rPr lang="fr-BE" sz="2800" b="0" i="1" smtClean="0">
                                 <a:latin typeface="Cambria Math" panose="02040503050406030204" pitchFamily="18" charset="0"/>
                               </a:rPr>
                               <m:t>−1</m:t>
@@ -12763,7 +13113,7 @@
                             <m:sSup>
                               <m:sSupPr>
                                 <m:ctrlPr>
-                                  <a:rPr lang="fr-BE" b="0" i="1" smtClean="0">
+                                  <a:rPr lang="fr-BE" sz="2800" b="0" i="1" smtClean="0">
                                     <a:latin typeface="Cambria Math" panose="02040503050406030204" pitchFamily="18" charset="0"/>
                                   </a:rPr>
                                 </m:ctrlPr>
@@ -12772,7 +13122,7 @@
                                 <m:d>
                                   <m:dPr>
                                     <m:ctrlPr>
-                                      <a:rPr lang="fr-BE" b="0" i="1" smtClean="0">
+                                      <a:rPr lang="fr-BE" sz="2800" b="0" i="1" smtClean="0">
                                         <a:latin typeface="Cambria Math" panose="02040503050406030204" pitchFamily="18" charset="0"/>
                                       </a:rPr>
                                     </m:ctrlPr>
@@ -12781,14 +13131,14 @@
                                     <m:sSub>
                                       <m:sSubPr>
                                         <m:ctrlPr>
-                                          <a:rPr lang="fr-BE" b="0" i="1" smtClean="0">
+                                          <a:rPr lang="fr-BE" sz="2800" b="0" i="1" smtClean="0">
                                             <a:latin typeface="Cambria Math" panose="02040503050406030204" pitchFamily="18" charset="0"/>
                                           </a:rPr>
                                         </m:ctrlPr>
                                       </m:sSubPr>
                                       <m:e>
                                         <m:r>
-                                          <a:rPr lang="fr-BE" b="0" i="1" smtClean="0">
+                                          <a:rPr lang="fr-BE" sz="2800" b="0" i="1" smtClean="0">
                                             <a:latin typeface="Cambria Math" panose="02040503050406030204" pitchFamily="18" charset="0"/>
                                           </a:rPr>
                                           <m:t>𝑥</m:t>
@@ -12796,7 +13146,7 @@
                                       </m:e>
                                       <m:sub>
                                         <m:r>
-                                          <a:rPr lang="fr-BE" b="0" i="1" smtClean="0">
+                                          <a:rPr lang="fr-BE" sz="2800" b="0" i="1" smtClean="0">
                                             <a:latin typeface="Cambria Math" panose="02040503050406030204" pitchFamily="18" charset="0"/>
                                           </a:rPr>
                                           <m:t>𝑡</m:t>
@@ -12804,7 +13154,7 @@
                                       </m:sub>
                                     </m:sSub>
                                     <m:r>
-                                      <a:rPr lang="fr-BE" b="0" i="1" smtClean="0">
+                                      <a:rPr lang="fr-BE" sz="2800" b="0" i="1" smtClean="0">
                                         <a:latin typeface="Cambria Math" panose="02040503050406030204" pitchFamily="18" charset="0"/>
                                       </a:rPr>
                                       <m:t>−</m:t>
@@ -12813,14 +13163,14 @@
                                       <m:accPr>
                                         <m:chr m:val="̅"/>
                                         <m:ctrlPr>
-                                          <a:rPr lang="fr-BE" b="0" i="1" smtClean="0">
+                                          <a:rPr lang="fr-BE" sz="2800" b="0" i="1" smtClean="0">
                                             <a:latin typeface="Cambria Math" panose="02040503050406030204" pitchFamily="18" charset="0"/>
                                           </a:rPr>
                                         </m:ctrlPr>
                                       </m:accPr>
                                       <m:e>
                                         <m:r>
-                                          <a:rPr lang="fr-BE" b="0" i="1" smtClean="0">
+                                          <a:rPr lang="fr-BE" sz="2800" b="0" i="1" smtClean="0">
                                             <a:latin typeface="Cambria Math" panose="02040503050406030204" pitchFamily="18" charset="0"/>
                                           </a:rPr>
                                           <m:t>𝑥</m:t>
@@ -12832,7 +13182,7 @@
                               </m:e>
                               <m:sup>
                                 <m:r>
-                                  <a:rPr lang="fr-BE" b="0" i="1" smtClean="0">
+                                  <a:rPr lang="fr-BE" sz="2800" b="0" i="1" smtClean="0">
                                     <a:latin typeface="Cambria Math" panose="02040503050406030204" pitchFamily="18" charset="0"/>
                                   </a:rPr>
                                   <m:t>2</m:t>
@@ -12842,7 +13192,7 @@
                           </m:e>
                         </m:nary>
                         <m:r>
-                          <a:rPr lang="fr-BE" b="0" i="1" smtClean="0">
+                          <a:rPr lang="fr-BE" sz="2800" b="0" i="1" smtClean="0">
                             <a:latin typeface="Cambria Math" panose="02040503050406030204" pitchFamily="18" charset="0"/>
                           </a:rPr>
                           <m:t>]</m:t>
@@ -12852,18 +13202,14 @@
                   </m:oMath>
                 </a14:m>
                 <a:r>
-                  <a:rPr lang="en-GB" dirty="0"/>
+                  <a:rPr lang="en-GB" sz="2800" dirty="0"/>
                   <a:t> </a:t>
                 </a:r>
               </a:p>
               <a:p>
                 <a:pPr lvl="1"/>
-                <a:endParaRPr lang="en-GB" dirty="0"/>
-              </a:p>
-              <a:p>
-                <a:pPr lvl="1"/>
                 <a:r>
-                  <a:rPr lang="en-GB" dirty="0"/>
+                  <a:rPr lang="en-GB" sz="2800" dirty="0"/>
                   <a:t>If we assume that </a:t>
                 </a:r>
                 <a14:m>
@@ -12872,14 +13218,14 @@
                       <m:accPr>
                         <m:chr m:val="̅"/>
                         <m:ctrlPr>
-                          <a:rPr lang="fr-BE" b="0" i="1" smtClean="0">
+                          <a:rPr lang="fr-BE" sz="2800" b="0" i="1" smtClean="0">
                             <a:latin typeface="Cambria Math" panose="02040503050406030204" pitchFamily="18" charset="0"/>
                           </a:rPr>
                         </m:ctrlPr>
                       </m:accPr>
                       <m:e>
                         <m:r>
-                          <a:rPr lang="fr-BE" b="0" i="1" smtClean="0">
+                          <a:rPr lang="fr-BE" sz="2800" b="0" i="1" smtClean="0">
                             <a:latin typeface="Cambria Math" panose="02040503050406030204" pitchFamily="18" charset="0"/>
                           </a:rPr>
                           <m:t>𝑥</m:t>
@@ -12887,7 +13233,7 @@
                       </m:e>
                     </m:acc>
                     <m:r>
-                      <a:rPr lang="fr-BE" b="0" i="1" smtClean="0">
+                      <a:rPr lang="fr-BE" sz="2800" b="0" i="1" smtClean="0">
                         <a:latin typeface="Cambria Math" panose="02040503050406030204" pitchFamily="18" charset="0"/>
                       </a:rPr>
                       <m:t>=0</m:t>
@@ -12895,7 +13241,7 @@
                   </m:oMath>
                 </a14:m>
                 <a:r>
-                  <a:rPr lang="en-GB" dirty="0"/>
+                  <a:rPr lang="en-GB" sz="2800" dirty="0"/>
                   <a:t>, </a:t>
                 </a:r>
                 <a14:m>
@@ -12903,7 +13249,7 @@
                     <m:sSub>
                       <m:sSubPr>
                         <m:ctrlPr>
-                          <a:rPr lang="fr-BE" b="0" i="1" smtClean="0">
+                          <a:rPr lang="fr-BE" sz="2800" b="0" i="1" smtClean="0">
                             <a:latin typeface="Cambria Math" panose="02040503050406030204" pitchFamily="18" charset="0"/>
                             <a:ea typeface="Cambria Math" panose="02040503050406030204" pitchFamily="18" charset="0"/>
                           </a:rPr>
@@ -12911,7 +13257,7 @@
                       </m:sSubPr>
                       <m:e>
                         <m:r>
-                          <a:rPr lang="fr-BE" b="0" i="1" smtClean="0">
+                          <a:rPr lang="fr-BE" sz="2800" b="0" i="1" smtClean="0">
                             <a:latin typeface="Cambria Math" panose="02040503050406030204" pitchFamily="18" charset="0"/>
                             <a:ea typeface="Cambria Math" panose="02040503050406030204" pitchFamily="18" charset="0"/>
                           </a:rPr>
@@ -12920,7 +13266,7 @@
                       </m:e>
                       <m:sub>
                         <m:r>
-                          <a:rPr lang="fr-BE" b="0" i="1" smtClean="0">
+                          <a:rPr lang="fr-BE" sz="2800" b="0" i="1" smtClean="0">
                             <a:latin typeface="Cambria Math" panose="02040503050406030204" pitchFamily="18" charset="0"/>
                           </a:rPr>
                           <m:t>𝑘</m:t>
@@ -12928,7 +13274,7 @@
                       </m:sub>
                     </m:sSub>
                     <m:r>
-                      <a:rPr lang="fr-BE" b="0" i="1" smtClean="0">
+                      <a:rPr lang="fr-BE" sz="2800" b="0" i="1" smtClean="0">
                         <a:latin typeface="Cambria Math" panose="02040503050406030204" pitchFamily="18" charset="0"/>
                       </a:rPr>
                       <m:t>=</m:t>
@@ -12936,7 +13282,7 @@
                     <m:f>
                       <m:fPr>
                         <m:ctrlPr>
-                          <a:rPr lang="fr-BE" b="0" i="1" smtClean="0">
+                          <a:rPr lang="fr-BE" sz="2800" b="0" i="1" smtClean="0">
                             <a:latin typeface="Cambria Math" panose="02040503050406030204" pitchFamily="18" charset="0"/>
                           </a:rPr>
                         </m:ctrlPr>
@@ -12946,7 +13292,7 @@
                           <m:naryPr>
                             <m:chr m:val="∑"/>
                             <m:ctrlPr>
-                              <a:rPr lang="fr-BE" b="0" i="1" smtClean="0">
+                              <a:rPr lang="fr-BE" sz="2800" b="0" i="1" smtClean="0">
                                 <a:latin typeface="Cambria Math" panose="02040503050406030204" pitchFamily="18" charset="0"/>
                               </a:rPr>
                             </m:ctrlPr>
@@ -12956,19 +13302,19 @@
                               <m:rPr>
                                 <m:brk m:alnAt="23"/>
                               </m:rPr>
-                              <a:rPr lang="fr-BE" b="0" i="1" smtClean="0">
+                              <a:rPr lang="fr-BE" sz="2800" b="0" i="1" smtClean="0">
                                 <a:latin typeface="Cambria Math" panose="02040503050406030204" pitchFamily="18" charset="0"/>
                               </a:rPr>
                               <m:t>𝑡</m:t>
                             </m:r>
                             <m:r>
-                              <a:rPr lang="fr-BE" b="0" i="1" smtClean="0">
+                              <a:rPr lang="fr-BE" sz="2800" b="0" i="1" smtClean="0">
                                 <a:latin typeface="Cambria Math" panose="02040503050406030204" pitchFamily="18" charset="0"/>
                               </a:rPr>
                               <m:t>=</m:t>
                             </m:r>
                             <m:r>
-                              <a:rPr lang="fr-BE" b="0" i="1" smtClean="0">
+                              <a:rPr lang="fr-BE" sz="2800" b="0" i="1" smtClean="0">
                                 <a:latin typeface="Cambria Math" panose="02040503050406030204" pitchFamily="18" charset="0"/>
                               </a:rPr>
                               <m:t>𝑘</m:t>
@@ -12976,13 +13322,13 @@
                           </m:sub>
                           <m:sup>
                             <m:r>
-                              <a:rPr lang="fr-BE" b="0" i="1" smtClean="0">
+                              <a:rPr lang="fr-BE" sz="2800" b="0" i="1" smtClean="0">
                                 <a:latin typeface="Cambria Math" panose="02040503050406030204" pitchFamily="18" charset="0"/>
                               </a:rPr>
                               <m:t>𝑛</m:t>
                             </m:r>
                             <m:r>
-                              <a:rPr lang="fr-BE" b="0" i="1" smtClean="0">
+                              <a:rPr lang="fr-BE" sz="2800" b="0" i="1" smtClean="0">
                                 <a:latin typeface="Cambria Math" panose="02040503050406030204" pitchFamily="18" charset="0"/>
                               </a:rPr>
                               <m:t>−1</m:t>
@@ -12992,14 +13338,14 @@
                             <m:sSub>
                               <m:sSubPr>
                                 <m:ctrlPr>
-                                  <a:rPr lang="fr-BE" b="0" i="1" smtClean="0">
+                                  <a:rPr lang="fr-BE" sz="2800" b="0" i="1" smtClean="0">
                                     <a:latin typeface="Cambria Math" panose="02040503050406030204" pitchFamily="18" charset="0"/>
                                   </a:rPr>
                                 </m:ctrlPr>
                               </m:sSubPr>
                               <m:e>
                                 <m:r>
-                                  <a:rPr lang="fr-BE" b="0" i="1" smtClean="0">
+                                  <a:rPr lang="fr-BE" sz="2800" b="0" i="1" smtClean="0">
                                     <a:latin typeface="Cambria Math" panose="02040503050406030204" pitchFamily="18" charset="0"/>
                                   </a:rPr>
                                   <m:t>𝑥</m:t>
@@ -13007,7 +13353,7 @@
                               </m:e>
                               <m:sub>
                                 <m:r>
-                                  <a:rPr lang="fr-BE" b="0" i="1" smtClean="0">
+                                  <a:rPr lang="fr-BE" sz="2800" b="0" i="1" smtClean="0">
                                     <a:latin typeface="Cambria Math" panose="02040503050406030204" pitchFamily="18" charset="0"/>
                                   </a:rPr>
                                   <m:t>𝑡</m:t>
@@ -13017,14 +13363,14 @@
                             <m:sSub>
                               <m:sSubPr>
                                 <m:ctrlPr>
-                                  <a:rPr lang="fr-BE" b="0" i="1" smtClean="0">
+                                  <a:rPr lang="fr-BE" sz="2800" b="0" i="1" smtClean="0">
                                     <a:latin typeface="Cambria Math" panose="02040503050406030204" pitchFamily="18" charset="0"/>
                                   </a:rPr>
                                 </m:ctrlPr>
                               </m:sSubPr>
                               <m:e>
                                 <m:r>
-                                  <a:rPr lang="fr-BE" b="0" i="1" smtClean="0">
+                                  <a:rPr lang="fr-BE" sz="2800" b="0" i="1" smtClean="0">
                                     <a:latin typeface="Cambria Math" panose="02040503050406030204" pitchFamily="18" charset="0"/>
                                   </a:rPr>
                                   <m:t>𝑥</m:t>
@@ -13032,19 +13378,19 @@
                               </m:e>
                               <m:sub>
                                 <m:r>
-                                  <a:rPr lang="fr-BE" b="0" i="1" smtClean="0">
+                                  <a:rPr lang="fr-BE" sz="2800" b="0" i="1" smtClean="0">
                                     <a:latin typeface="Cambria Math" panose="02040503050406030204" pitchFamily="18" charset="0"/>
                                   </a:rPr>
                                   <m:t>𝑡</m:t>
                                 </m:r>
                                 <m:r>
-                                  <a:rPr lang="fr-BE" b="0" i="1" smtClean="0">
+                                  <a:rPr lang="fr-BE" sz="2800" b="0" i="1" smtClean="0">
                                     <a:latin typeface="Cambria Math" panose="02040503050406030204" pitchFamily="18" charset="0"/>
                                   </a:rPr>
                                   <m:t>−</m:t>
                                 </m:r>
                                 <m:r>
-                                  <a:rPr lang="fr-BE" b="0" i="1" smtClean="0">
+                                  <a:rPr lang="fr-BE" sz="2800" b="0" i="1" smtClean="0">
                                     <a:latin typeface="Cambria Math" panose="02040503050406030204" pitchFamily="18" charset="0"/>
                                   </a:rPr>
                                   <m:t>𝑘</m:t>
@@ -13056,7 +13402,7 @@
                       </m:num>
                       <m:den>
                         <m:r>
-                          <a:rPr lang="fr-BE" b="0" i="1" smtClean="0">
+                          <a:rPr lang="fr-BE" sz="2800" b="0" i="1" smtClean="0">
                             <a:latin typeface="Cambria Math" panose="02040503050406030204" pitchFamily="18" charset="0"/>
                           </a:rPr>
                           <m:t>[</m:t>
@@ -13065,7 +13411,7 @@
                           <m:naryPr>
                             <m:chr m:val="∑"/>
                             <m:ctrlPr>
-                              <a:rPr lang="fr-BE" b="0" i="1" smtClean="0">
+                              <a:rPr lang="fr-BE" sz="2800" b="0" i="1" smtClean="0">
                                 <a:latin typeface="Cambria Math" panose="02040503050406030204" pitchFamily="18" charset="0"/>
                               </a:rPr>
                             </m:ctrlPr>
@@ -13075,13 +13421,13 @@
                               <m:rPr>
                                 <m:brk m:alnAt="23"/>
                               </m:rPr>
-                              <a:rPr lang="fr-BE" b="0" i="1" smtClean="0">
+                              <a:rPr lang="fr-BE" sz="2800" b="0" i="1" smtClean="0">
                                 <a:latin typeface="Cambria Math" panose="02040503050406030204" pitchFamily="18" charset="0"/>
                               </a:rPr>
                               <m:t>𝑡</m:t>
                             </m:r>
                             <m:r>
-                              <a:rPr lang="fr-BE" b="0" i="1" smtClean="0">
+                              <a:rPr lang="fr-BE" sz="2800" b="0" i="1" smtClean="0">
                                 <a:latin typeface="Cambria Math" panose="02040503050406030204" pitchFamily="18" charset="0"/>
                               </a:rPr>
                               <m:t>=0</m:t>
@@ -13089,13 +13435,13 @@
                           </m:sub>
                           <m:sup>
                             <m:r>
-                              <a:rPr lang="fr-BE" b="0" i="1" smtClean="0">
+                              <a:rPr lang="fr-BE" sz="2800" b="0" i="1" smtClean="0">
                                 <a:latin typeface="Cambria Math" panose="02040503050406030204" pitchFamily="18" charset="0"/>
                               </a:rPr>
                               <m:t>𝑛</m:t>
                             </m:r>
                             <m:r>
-                              <a:rPr lang="fr-BE" b="0" i="1" smtClean="0">
+                              <a:rPr lang="fr-BE" sz="2800" b="0" i="1" smtClean="0">
                                 <a:latin typeface="Cambria Math" panose="02040503050406030204" pitchFamily="18" charset="0"/>
                               </a:rPr>
                               <m:t>−1</m:t>
@@ -13105,7 +13451,7 @@
                             <m:sSup>
                               <m:sSupPr>
                                 <m:ctrlPr>
-                                  <a:rPr lang="fr-BE" b="0" i="1" smtClean="0">
+                                  <a:rPr lang="fr-BE" sz="2800" b="0" i="1" smtClean="0">
                                     <a:latin typeface="Cambria Math" panose="02040503050406030204" pitchFamily="18" charset="0"/>
                                   </a:rPr>
                                 </m:ctrlPr>
@@ -13114,14 +13460,14 @@
                                 <m:sSub>
                                   <m:sSubPr>
                                     <m:ctrlPr>
-                                      <a:rPr lang="fr-BE" b="0" i="1" smtClean="0">
+                                      <a:rPr lang="fr-BE" sz="2800" b="0" i="1" smtClean="0">
                                         <a:latin typeface="Cambria Math" panose="02040503050406030204" pitchFamily="18" charset="0"/>
                                       </a:rPr>
                                     </m:ctrlPr>
                                   </m:sSubPr>
                                   <m:e>
                                     <m:r>
-                                      <a:rPr lang="fr-BE" b="0" i="1" smtClean="0">
+                                      <a:rPr lang="fr-BE" sz="2800" b="0" i="1" smtClean="0">
                                         <a:latin typeface="Cambria Math" panose="02040503050406030204" pitchFamily="18" charset="0"/>
                                       </a:rPr>
                                       <m:t>𝑥</m:t>
@@ -13129,7 +13475,7 @@
                                   </m:e>
                                   <m:sub>
                                     <m:r>
-                                      <a:rPr lang="fr-BE" b="0" i="1" smtClean="0">
+                                      <a:rPr lang="fr-BE" sz="2800" b="0" i="1" smtClean="0">
                                         <a:latin typeface="Cambria Math" panose="02040503050406030204" pitchFamily="18" charset="0"/>
                                       </a:rPr>
                                       <m:t>𝑡</m:t>
@@ -13139,7 +13485,7 @@
                               </m:e>
                               <m:sup>
                                 <m:r>
-                                  <a:rPr lang="fr-BE" b="0" i="1" smtClean="0">
+                                  <a:rPr lang="fr-BE" sz="2800" b="0" i="1" smtClean="0">
                                     <a:latin typeface="Cambria Math" panose="02040503050406030204" pitchFamily="18" charset="0"/>
                                   </a:rPr>
                                   <m:t>2</m:t>
@@ -13149,7 +13495,7 @@
                           </m:e>
                         </m:nary>
                         <m:r>
-                          <a:rPr lang="fr-BE" b="0" i="1" smtClean="0">
+                          <a:rPr lang="fr-BE" sz="2800" b="0" i="1" smtClean="0">
                             <a:latin typeface="Cambria Math" panose="02040503050406030204" pitchFamily="18" charset="0"/>
                           </a:rPr>
                           <m:t>]</m:t>
@@ -13163,7 +13509,7 @@
             </p:txBody>
           </p:sp>
         </mc:Choice>
-        <mc:Fallback xmlns="">
+        <mc:Fallback>
           <p:sp>
             <p:nvSpPr>
               <p:cNvPr id="3" name="Content Placeholder 2">
@@ -13177,14 +13523,14 @@
                 <a:spLocks noGrp="1" noRot="1" noChangeAspect="1" noMove="1" noResize="1" noEditPoints="1" noAdjustHandles="1" noChangeArrowheads="1" noChangeShapeType="1" noTextEdit="1"/>
               </p:cNvSpPr>
               <p:nvPr>
-                <p:ph idx="1"/>
+                <p:ph sz="half" idx="2"/>
               </p:nvPr>
             </p:nvSpPr>
             <p:spPr>
               <a:blipFill>
                 <a:blip r:embed="rId2"/>
                 <a:stretch>
-                  <a:fillRect l="-1043" t="-2241"/>
+                  <a:fillRect l="-754" t="-2439"/>
                 </a:stretch>
               </a:blipFill>
             </p:spPr>
@@ -13216,10 +13562,15 @@
             <a:spLocks noGrp="1"/>
           </p:cNvSpPr>
           <p:nvPr>
-            <p:ph type="ftr" sz="quarter" idx="11"/>
+            <p:ph type="ftr" sz="quarter" idx="4294967295"/>
           </p:nvPr>
         </p:nvSpPr>
-        <p:spPr/>
+        <p:spPr>
+          <a:xfrm>
+            <a:off x="0" y="0"/>
+            <a:ext cx="0" cy="0"/>
+          </a:xfrm>
+        </p:spPr>
         <p:txBody>
           <a:bodyPr/>
           <a:lstStyle/>
@@ -13249,7 +13600,13 @@
   <p:cSld>
     <p:spTree>
       <p:nvGrpSpPr>
-        <p:cNvPr id="1" name=""/>
+        <p:cNvPr id="1" name="">
+          <a:extLst>
+            <a:ext uri="{FF2B5EF4-FFF2-40B4-BE49-F238E27FC236}">
+              <a16:creationId xmlns:a16="http://schemas.microsoft.com/office/drawing/2014/main" id="{B7AB1216-2EA9-7A0A-3C41-BB713377459E}"/>
+            </a:ext>
+          </a:extLst>
+        </p:cNvPr>
         <p:cNvGrpSpPr/>
         <p:nvPr/>
       </p:nvGrpSpPr>
@@ -13266,7 +13623,7 @@
           <p:cNvPr id="2" name="Title 1">
             <a:extLst>
               <a:ext uri="{FF2B5EF4-FFF2-40B4-BE49-F238E27FC236}">
-                <a16:creationId xmlns:a16="http://schemas.microsoft.com/office/drawing/2014/main" id="{569180A3-8F25-444E-96A2-248683A857A2}"/>
+                <a16:creationId xmlns:a16="http://schemas.microsoft.com/office/drawing/2014/main" id="{3C4CCCD4-9DC8-CF79-F09C-D99F8C248F5F}"/>
               </a:ext>
             </a:extLst>
           </p:cNvPr>
@@ -13289,14 +13646,14 @@
           </a:p>
         </p:txBody>
       </p:sp>
-      <mc:AlternateContent xmlns:mc="http://schemas.openxmlformats.org/markup-compatibility/2006" xmlns:a14="http://schemas.microsoft.com/office/drawing/2010/main">
-        <mc:Choice Requires="a14">
+      <mc:AlternateContent xmlns:mc="http://schemas.openxmlformats.org/markup-compatibility/2006">
+        <mc:Choice xmlns:a14="http://schemas.microsoft.com/office/drawing/2010/main" Requires="a14">
           <p:sp>
             <p:nvSpPr>
               <p:cNvPr id="3" name="Content Placeholder 2">
                 <a:extLst>
                   <a:ext uri="{FF2B5EF4-FFF2-40B4-BE49-F238E27FC236}">
-                    <a16:creationId xmlns:a16="http://schemas.microsoft.com/office/drawing/2014/main" id="{0D5DEFE7-7E41-4E13-88FE-5BC2E427D451}"/>
+                    <a16:creationId xmlns:a16="http://schemas.microsoft.com/office/drawing/2014/main" id="{E508C413-EA68-1DAB-E5A5-BF537176310E}"/>
                   </a:ext>
                 </a:extLst>
               </p:cNvPr>
@@ -13304,13 +13661,18 @@
                 <a:spLocks noGrp="1"/>
               </p:cNvSpPr>
               <p:nvPr>
-                <p:ph idx="1"/>
+                <p:ph sz="half" idx="2"/>
               </p:nvPr>
             </p:nvSpPr>
-            <p:spPr/>
+            <p:spPr>
+              <a:xfrm>
+                <a:off x="970722" y="1280160"/>
+                <a:ext cx="10515597" cy="4815967"/>
+              </a:xfrm>
+            </p:spPr>
             <p:txBody>
               <a:bodyPr>
-                <a:normAutofit fontScale="47500" lnSpcReduction="20000"/>
+                <a:normAutofit fontScale="92500" lnSpcReduction="10000"/>
               </a:bodyPr>
               <a:lstStyle/>
               <a:p>
@@ -15393,13 +15755,13 @@
             </p:txBody>
           </p:sp>
         </mc:Choice>
-        <mc:Fallback xmlns="">
+        <mc:Fallback>
           <p:sp>
             <p:nvSpPr>
               <p:cNvPr id="3" name="Content Placeholder 2">
                 <a:extLst>
                   <a:ext uri="{FF2B5EF4-FFF2-40B4-BE49-F238E27FC236}">
-                    <a16:creationId xmlns:a16="http://schemas.microsoft.com/office/drawing/2014/main" id="{0D5DEFE7-7E41-4E13-88FE-5BC2E427D451}"/>
+                    <a16:creationId xmlns:a16="http://schemas.microsoft.com/office/drawing/2014/main" id="{E508C413-EA68-1DAB-E5A5-BF537176310E}"/>
                   </a:ext>
                 </a:extLst>
               </p:cNvPr>
@@ -15407,14 +15769,18 @@
                 <a:spLocks noGrp="1" noRot="1" noChangeAspect="1" noMove="1" noResize="1" noEditPoints="1" noAdjustHandles="1" noChangeArrowheads="1" noChangeShapeType="1" noTextEdit="1"/>
               </p:cNvSpPr>
               <p:nvPr>
-                <p:ph idx="1"/>
+                <p:ph sz="half" idx="2"/>
               </p:nvPr>
             </p:nvSpPr>
             <p:spPr>
+              <a:xfrm>
+                <a:off x="970722" y="1280160"/>
+                <a:ext cx="10515597" cy="4815967"/>
+              </a:xfrm>
               <a:blipFill>
                 <a:blip r:embed="rId2"/>
                 <a:stretch>
-                  <a:fillRect l="-58" t="-5495"/>
+                  <a:fillRect l="-754" t="-2911"/>
                 </a:stretch>
               </a:blipFill>
             </p:spPr>
@@ -15438,7 +15804,7 @@
           <p:cNvPr id="5" name="Footer Placeholder 4">
             <a:extLst>
               <a:ext uri="{FF2B5EF4-FFF2-40B4-BE49-F238E27FC236}">
-                <a16:creationId xmlns:a16="http://schemas.microsoft.com/office/drawing/2014/main" id="{998987FF-C064-426B-A5C1-86A84C84F71E}"/>
+                <a16:creationId xmlns:a16="http://schemas.microsoft.com/office/drawing/2014/main" id="{2FD60575-C516-A176-F03E-1167B879334D}"/>
               </a:ext>
             </a:extLst>
           </p:cNvPr>
@@ -15446,10 +15812,15 @@
             <a:spLocks noGrp="1"/>
           </p:cNvSpPr>
           <p:nvPr>
-            <p:ph type="ftr" sz="quarter" idx="11"/>
+            <p:ph type="ftr" sz="quarter" idx="4294967295"/>
           </p:nvPr>
         </p:nvSpPr>
-        <p:spPr/>
+        <p:spPr>
+          <a:xfrm>
+            <a:off x="0" y="0"/>
+            <a:ext cx="0" cy="0"/>
+          </a:xfrm>
+        </p:spPr>
         <p:txBody>
           <a:bodyPr/>
           <a:lstStyle/>
@@ -15461,10 +15832,40 @@
           </a:p>
         </p:txBody>
       </p:sp>
+      <p:sp>
+        <p:nvSpPr>
+          <p:cNvPr id="4" name="Espace réservé du numéro de diapositive 3">
+            <a:extLst>
+              <a:ext uri="{FF2B5EF4-FFF2-40B4-BE49-F238E27FC236}">
+                <a16:creationId xmlns:a16="http://schemas.microsoft.com/office/drawing/2014/main" id="{6F9F7DBD-159A-D5E6-E685-F5242AFF1209}"/>
+              </a:ext>
+            </a:extLst>
+          </p:cNvPr>
+          <p:cNvSpPr>
+            <a:spLocks noGrp="1"/>
+          </p:cNvSpPr>
+          <p:nvPr>
+            <p:ph type="sldNum" idx="12"/>
+          </p:nvPr>
+        </p:nvSpPr>
+        <p:spPr/>
+        <p:txBody>
+          <a:bodyPr/>
+          <a:lstStyle/>
+          <a:p>
+            <a:fld id="{00000000-1234-1234-1234-123412341234}" type="slidenum">
+              <a:rPr lang="en-GB" smtClean="0"/>
+              <a:pPr/>
+              <a:t>5</a:t>
+            </a:fld>
+            <a:endParaRPr lang="en-GB"/>
+          </a:p>
+        </p:txBody>
+      </p:sp>
     </p:spTree>
     <p:extLst>
       <p:ext uri="{BB962C8B-B14F-4D97-AF65-F5344CB8AC3E}">
-        <p14:creationId xmlns:p14="http://schemas.microsoft.com/office/powerpoint/2010/main" val="3395920579"/>
+        <p14:creationId xmlns:p14="http://schemas.microsoft.com/office/powerpoint/2010/main" val="1625154390"/>
       </p:ext>
     </p:extLst>
   </p:cSld>
@@ -15479,7 +15880,13 @@
   <p:cSld>
     <p:spTree>
       <p:nvGrpSpPr>
-        <p:cNvPr id="1" name=""/>
+        <p:cNvPr id="1" name="">
+          <a:extLst>
+            <a:ext uri="{FF2B5EF4-FFF2-40B4-BE49-F238E27FC236}">
+              <a16:creationId xmlns:a16="http://schemas.microsoft.com/office/drawing/2014/main" id="{4B3E6AFB-F04B-0D05-2C03-C985A239914A}"/>
+            </a:ext>
+          </a:extLst>
+        </p:cNvPr>
         <p:cNvGrpSpPr/>
         <p:nvPr/>
       </p:nvGrpSpPr>
@@ -15496,7 +15903,7 @@
           <p:cNvPr id="2" name="Titre 1">
             <a:extLst>
               <a:ext uri="{FF2B5EF4-FFF2-40B4-BE49-F238E27FC236}">
-                <a16:creationId xmlns:a16="http://schemas.microsoft.com/office/drawing/2014/main" id="{4D667EEF-9B78-4236-CBAA-311B2EFEC40A}"/>
+                <a16:creationId xmlns:a16="http://schemas.microsoft.com/office/drawing/2014/main" id="{F3F4E915-11AA-D340-62CD-3DDFFA4C5025}"/>
               </a:ext>
             </a:extLst>
           </p:cNvPr>
@@ -15507,7 +15914,12 @@
             <p:ph type="title"/>
           </p:nvPr>
         </p:nvSpPr>
-        <p:spPr/>
+        <p:spPr>
+          <a:xfrm>
+            <a:off x="970722" y="98630"/>
+            <a:ext cx="10515600" cy="782357"/>
+          </a:xfrm>
+        </p:spPr>
         <p:txBody>
           <a:bodyPr/>
           <a:lstStyle/>
@@ -15532,14 +15944,14 @@
           </a:p>
         </p:txBody>
       </p:sp>
-      <mc:AlternateContent xmlns:mc="http://schemas.openxmlformats.org/markup-compatibility/2006" xmlns:a14="http://schemas.microsoft.com/office/drawing/2010/main">
-        <mc:Choice Requires="a14">
+      <mc:AlternateContent xmlns:mc="http://schemas.openxmlformats.org/markup-compatibility/2006">
+        <mc:Choice xmlns:a14="http://schemas.microsoft.com/office/drawing/2010/main" Requires="a14">
           <p:sp>
             <p:nvSpPr>
               <p:cNvPr id="3" name="Espace réservé du contenu 2">
                 <a:extLst>
                   <a:ext uri="{FF2B5EF4-FFF2-40B4-BE49-F238E27FC236}">
-                    <a16:creationId xmlns:a16="http://schemas.microsoft.com/office/drawing/2014/main" id="{FA2D216B-525D-E32A-3860-2CFBF8223E67}"/>
+                    <a16:creationId xmlns:a16="http://schemas.microsoft.com/office/drawing/2014/main" id="{3C94E51F-5AFA-32B4-9645-9C665D68DC1D}"/>
                   </a:ext>
                 </a:extLst>
               </p:cNvPr>
@@ -15547,10 +15959,15 @@
                 <a:spLocks noGrp="1"/>
               </p:cNvSpPr>
               <p:nvPr>
-                <p:ph idx="1"/>
+                <p:ph sz="half" idx="2"/>
               </p:nvPr>
             </p:nvSpPr>
-            <p:spPr/>
+            <p:spPr>
+              <a:xfrm>
+                <a:off x="970722" y="1320799"/>
+                <a:ext cx="10515597" cy="4775327"/>
+              </a:xfrm>
+            </p:spPr>
             <p:txBody>
               <a:bodyPr/>
               <a:lstStyle/>
@@ -15560,14 +15977,14 @@
                     <m:sSub>
                       <m:sSubPr>
                         <m:ctrlPr>
-                          <a:rPr lang="fr-BE" b="0" i="1" smtClean="0">
+                          <a:rPr lang="fr-BE" sz="2800" b="0" i="1" smtClean="0">
                             <a:latin typeface="Cambria Math" panose="02040503050406030204" pitchFamily="18" charset="0"/>
                           </a:rPr>
                         </m:ctrlPr>
                       </m:sSubPr>
                       <m:e>
                         <m:r>
-                          <a:rPr lang="fr-BE" b="0" i="1" smtClean="0">
+                          <a:rPr lang="fr-BE" sz="2800" b="0" i="1" smtClean="0">
                             <a:latin typeface="Cambria Math" panose="02040503050406030204" pitchFamily="18" charset="0"/>
                           </a:rPr>
                           <m:t>𝑦</m:t>
@@ -15575,7 +15992,7 @@
                       </m:e>
                       <m:sub>
                         <m:r>
-                          <a:rPr lang="fr-BE" b="0" i="1" smtClean="0">
+                          <a:rPr lang="fr-BE" sz="2800" b="0" i="1" smtClean="0">
                             <a:latin typeface="Cambria Math" panose="02040503050406030204" pitchFamily="18" charset="0"/>
                           </a:rPr>
                           <m:t>𝑡</m:t>
@@ -15583,7 +16000,7 @@
                       </m:sub>
                     </m:sSub>
                     <m:r>
-                      <a:rPr lang="fr-BE" b="0" i="1" smtClean="0">
+                      <a:rPr lang="fr-BE" sz="2800" b="0" i="1" smtClean="0">
                         <a:latin typeface="Cambria Math" panose="02040503050406030204" pitchFamily="18" charset="0"/>
                       </a:rPr>
                       <m:t>=</m:t>
@@ -15592,7 +16009,7 @@
                       <m:naryPr>
                         <m:chr m:val="∑"/>
                         <m:ctrlPr>
-                          <a:rPr lang="fr-BE" b="0" i="1" smtClean="0">
+                          <a:rPr lang="fr-BE" sz="2800" b="0" i="1" smtClean="0">
                             <a:latin typeface="Cambria Math" panose="02040503050406030204" pitchFamily="18" charset="0"/>
                           </a:rPr>
                         </m:ctrlPr>
@@ -15602,13 +16019,13 @@
                           <m:rPr>
                             <m:brk m:alnAt="23"/>
                           </m:rPr>
-                          <a:rPr lang="fr-BE" b="0" i="1" smtClean="0">
+                          <a:rPr lang="fr-BE" sz="2800" b="0" i="1" smtClean="0">
                             <a:latin typeface="Cambria Math" panose="02040503050406030204" pitchFamily="18" charset="0"/>
                           </a:rPr>
                           <m:t>𝑖</m:t>
                         </m:r>
                         <m:r>
-                          <a:rPr lang="fr-BE" b="0" i="1" smtClean="0">
+                          <a:rPr lang="fr-BE" sz="2800" b="0" i="1" smtClean="0">
                             <a:latin typeface="Cambria Math" panose="02040503050406030204" pitchFamily="18" charset="0"/>
                           </a:rPr>
                           <m:t>=−∞</m:t>
@@ -15616,13 +16033,13 @@
                       </m:sub>
                       <m:sup>
                         <m:r>
-                          <a:rPr lang="fr-BE" b="0" i="1" smtClean="0">
+                          <a:rPr lang="fr-BE" sz="2800" b="0" i="1" smtClean="0">
                             <a:latin typeface="Cambria Math" panose="02040503050406030204" pitchFamily="18" charset="0"/>
                           </a:rPr>
                           <m:t>+</m:t>
                         </m:r>
                         <m:r>
-                          <a:rPr lang="fr-BE" b="0" i="1" smtClean="0">
+                          <a:rPr lang="fr-BE" sz="2800" b="0" i="1" smtClean="0">
                             <a:latin typeface="Cambria Math" panose="02040503050406030204" pitchFamily="18" charset="0"/>
                             <a:ea typeface="Cambria Math" panose="02040503050406030204" pitchFamily="18" charset="0"/>
                           </a:rPr>
@@ -15633,7 +16050,7 @@
                         <m:sSub>
                           <m:sSubPr>
                             <m:ctrlPr>
-                              <a:rPr lang="fr-BE" b="0" i="1" smtClean="0">
+                              <a:rPr lang="fr-BE" sz="2800" b="0" i="1" smtClean="0">
                                 <a:latin typeface="Cambria Math" panose="02040503050406030204" pitchFamily="18" charset="0"/>
                                 <a:ea typeface="Cambria Math" panose="02040503050406030204" pitchFamily="18" charset="0"/>
                               </a:rPr>
@@ -15641,7 +16058,7 @@
                           </m:sSubPr>
                           <m:e>
                             <m:r>
-                              <a:rPr lang="fr-BE" b="0" i="1" smtClean="0">
+                              <a:rPr lang="fr-BE" sz="2800" b="0" i="1" smtClean="0">
                                 <a:latin typeface="Cambria Math" panose="02040503050406030204" pitchFamily="18" charset="0"/>
                                 <a:ea typeface="Cambria Math" panose="02040503050406030204" pitchFamily="18" charset="0"/>
                               </a:rPr>
@@ -15650,7 +16067,7 @@
                           </m:e>
                           <m:sub>
                             <m:r>
-                              <a:rPr lang="fr-BE" b="0" i="1" smtClean="0">
+                              <a:rPr lang="fr-BE" sz="2800" b="0" i="1" smtClean="0">
                                 <a:latin typeface="Cambria Math" panose="02040503050406030204" pitchFamily="18" charset="0"/>
                               </a:rPr>
                               <m:t>𝑖</m:t>
@@ -15660,14 +16077,14 @@
                         <m:sSub>
                           <m:sSubPr>
                             <m:ctrlPr>
-                              <a:rPr lang="fr-BE" b="0" i="1" smtClean="0">
+                              <a:rPr lang="fr-BE" sz="2800" b="0" i="1" smtClean="0">
                                 <a:latin typeface="Cambria Math" panose="02040503050406030204" pitchFamily="18" charset="0"/>
                               </a:rPr>
                             </m:ctrlPr>
                           </m:sSubPr>
                           <m:e>
                             <m:r>
-                              <a:rPr lang="fr-BE" b="0" i="1" smtClean="0">
+                              <a:rPr lang="fr-BE" sz="2800" b="0" i="1" smtClean="0">
                                 <a:latin typeface="Cambria Math" panose="02040503050406030204" pitchFamily="18" charset="0"/>
                               </a:rPr>
                               <m:t>𝑥</m:t>
@@ -15675,19 +16092,19 @@
                           </m:e>
                           <m:sub>
                             <m:r>
-                              <a:rPr lang="fr-BE" b="0" i="1" smtClean="0">
+                              <a:rPr lang="fr-BE" sz="2800" b="0" i="1" smtClean="0">
                                 <a:latin typeface="Cambria Math" panose="02040503050406030204" pitchFamily="18" charset="0"/>
                               </a:rPr>
                               <m:t>𝑡</m:t>
                             </m:r>
                             <m:r>
-                              <a:rPr lang="fr-BE" b="0" i="1" smtClean="0">
+                              <a:rPr lang="fr-BE" sz="2800" b="0" i="1" smtClean="0">
                                 <a:latin typeface="Cambria Math" panose="02040503050406030204" pitchFamily="18" charset="0"/>
                               </a:rPr>
                               <m:t>−</m:t>
                             </m:r>
                             <m:r>
-                              <a:rPr lang="fr-BE" b="0" i="1" smtClean="0">
+                              <a:rPr lang="fr-BE" sz="2800" b="0" i="1" smtClean="0">
                                 <a:latin typeface="Cambria Math" panose="02040503050406030204" pitchFamily="18" charset="0"/>
                               </a:rPr>
                               <m:t>𝑖</m:t>
@@ -15699,7 +16116,7 @@
                   </m:oMath>
                 </a14:m>
                 <a:r>
-                  <a:rPr lang="en-GB" dirty="0"/>
+                  <a:rPr lang="en-GB" sz="2800" dirty="0"/>
                   <a:t>, </a:t>
                 </a:r>
                 <a14:m>
@@ -15709,7 +16126,7 @@
                         <m:begChr m:val="{"/>
                         <m:endChr m:val="}"/>
                         <m:ctrlPr>
-                          <a:rPr lang="fr-BE" i="1" smtClean="0">
+                          <a:rPr lang="fr-BE" sz="2800" i="1" smtClean="0">
                             <a:latin typeface="Cambria Math" panose="02040503050406030204" pitchFamily="18" charset="0"/>
                             <a:ea typeface="Cambria Math" panose="02040503050406030204" pitchFamily="18" charset="0"/>
                           </a:rPr>
@@ -15719,7 +16136,7 @@
                         <m:sSub>
                           <m:sSubPr>
                             <m:ctrlPr>
-                              <a:rPr lang="fr-BE" i="1" smtClean="0">
+                              <a:rPr lang="fr-BE" sz="2800" i="1" smtClean="0">
                                 <a:latin typeface="Cambria Math" panose="02040503050406030204" pitchFamily="18" charset="0"/>
                                 <a:ea typeface="Cambria Math" panose="02040503050406030204" pitchFamily="18" charset="0"/>
                               </a:rPr>
@@ -15727,7 +16144,7 @@
                           </m:sSubPr>
                           <m:e>
                             <m:r>
-                              <a:rPr lang="fr-BE" i="1" smtClean="0">
+                              <a:rPr lang="fr-BE" sz="2800" i="1" smtClean="0">
                                 <a:latin typeface="Cambria Math" panose="02040503050406030204" pitchFamily="18" charset="0"/>
                                 <a:ea typeface="Cambria Math" panose="02040503050406030204" pitchFamily="18" charset="0"/>
                               </a:rPr>
@@ -15736,7 +16153,7 @@
                           </m:e>
                           <m:sub>
                             <m:r>
-                              <a:rPr lang="fr-BE" b="0" i="1" smtClean="0">
+                              <a:rPr lang="fr-BE" sz="2800" b="0" i="1" smtClean="0">
                                 <a:latin typeface="Cambria Math" panose="02040503050406030204" pitchFamily="18" charset="0"/>
                               </a:rPr>
                               <m:t>𝑖</m:t>
@@ -15746,28 +16163,28 @@
                       </m:e>
                     </m:d>
                     <m:r>
-                      <a:rPr lang="fr-BE" b="1" i="1" smtClean="0">
+                      <a:rPr lang="fr-BE" sz="2800" b="1" i="1" smtClean="0">
                         <a:latin typeface="Cambria Math" panose="02040503050406030204" pitchFamily="18" charset="0"/>
                         <a:ea typeface="Cambria Math" panose="02040503050406030204" pitchFamily="18" charset="0"/>
                       </a:rPr>
                       <m:t>≡</m:t>
                     </m:r>
                     <m:r>
-                      <a:rPr lang="fr-BE" b="0" i="1" smtClean="0">
+                      <a:rPr lang="fr-BE" sz="2800" b="0" i="1" smtClean="0">
                         <a:latin typeface="Cambria Math" panose="02040503050406030204" pitchFamily="18" charset="0"/>
                         <a:ea typeface="Cambria Math" panose="02040503050406030204" pitchFamily="18" charset="0"/>
                       </a:rPr>
                       <m:t>𝑙𝑖𝑛𝑒𝑎𝑟</m:t>
                     </m:r>
                     <m:r>
-                      <a:rPr lang="fr-BE" b="0" i="1" smtClean="0">
+                      <a:rPr lang="fr-BE" sz="2800" b="0" i="1" smtClean="0">
                         <a:latin typeface="Cambria Math" panose="02040503050406030204" pitchFamily="18" charset="0"/>
                         <a:ea typeface="Cambria Math" panose="02040503050406030204" pitchFamily="18" charset="0"/>
                       </a:rPr>
                       <m:t> </m:t>
                     </m:r>
                     <m:r>
-                      <a:rPr lang="fr-BE" b="0" i="1" smtClean="0">
+                      <a:rPr lang="fr-BE" sz="2800" b="0" i="1" smtClean="0">
                         <a:latin typeface="Cambria Math" panose="02040503050406030204" pitchFamily="18" charset="0"/>
                         <a:ea typeface="Cambria Math" panose="02040503050406030204" pitchFamily="18" charset="0"/>
                       </a:rPr>
@@ -15775,14 +16192,14 @@
                     </m:r>
                   </m:oMath>
                 </a14:m>
-                <a:endParaRPr lang="en-GB" dirty="0"/>
+                <a:endParaRPr lang="en-GB" sz="2800" dirty="0"/>
               </a:p>
               <a:p>
-                <a:endParaRPr lang="en-GB" dirty="0"/>
+                <a:endParaRPr lang="en-GB" sz="2800" dirty="0"/>
               </a:p>
               <a:p>
                 <a:r>
-                  <a:rPr lang="en-GB" dirty="0"/>
+                  <a:rPr lang="en-GB" sz="2800" dirty="0"/>
                   <a:t>Backward, forward operators: </a:t>
                 </a:r>
                 <a14:m>
@@ -15790,14 +16207,14 @@
                     <m:sSup>
                       <m:sSupPr>
                         <m:ctrlPr>
-                          <a:rPr lang="fr-BE" b="0" i="1" smtClean="0">
+                          <a:rPr lang="fr-BE" sz="2800" b="0" i="1" smtClean="0">
                             <a:latin typeface="Cambria Math" panose="02040503050406030204" pitchFamily="18" charset="0"/>
                           </a:rPr>
                         </m:ctrlPr>
                       </m:sSupPr>
                       <m:e>
                         <m:r>
-                          <a:rPr lang="fr-BE" b="0" i="1" smtClean="0">
+                          <a:rPr lang="fr-BE" sz="2800" b="0" i="1" smtClean="0">
                             <a:latin typeface="Cambria Math" panose="02040503050406030204" pitchFamily="18" charset="0"/>
                           </a:rPr>
                           <m:t>𝐵</m:t>
@@ -15805,7 +16222,7 @@
                       </m:e>
                       <m:sup>
                         <m:r>
-                          <a:rPr lang="fr-BE" b="0" i="1" smtClean="0">
+                          <a:rPr lang="fr-BE" sz="2800" b="0" i="1" smtClean="0">
                             <a:latin typeface="Cambria Math" panose="02040503050406030204" pitchFamily="18" charset="0"/>
                           </a:rPr>
                           <m:t>𝑘</m:t>
@@ -15815,14 +16232,14 @@
                     <m:sSub>
                       <m:sSubPr>
                         <m:ctrlPr>
-                          <a:rPr lang="fr-BE" b="0" i="1" smtClean="0">
+                          <a:rPr lang="fr-BE" sz="2800" b="0" i="1" smtClean="0">
                             <a:latin typeface="Cambria Math" panose="02040503050406030204" pitchFamily="18" charset="0"/>
                           </a:rPr>
                         </m:ctrlPr>
                       </m:sSubPr>
                       <m:e>
                         <m:r>
-                          <a:rPr lang="fr-BE" b="0" i="1" smtClean="0">
+                          <a:rPr lang="fr-BE" sz="2800" b="0" i="1" smtClean="0">
                             <a:latin typeface="Cambria Math" panose="02040503050406030204" pitchFamily="18" charset="0"/>
                           </a:rPr>
                           <m:t>𝑥</m:t>
@@ -15830,7 +16247,7 @@
                       </m:e>
                       <m:sub>
                         <m:r>
-                          <a:rPr lang="fr-BE" b="0" i="1" smtClean="0">
+                          <a:rPr lang="fr-BE" sz="2800" b="0" i="1" smtClean="0">
                             <a:latin typeface="Cambria Math" panose="02040503050406030204" pitchFamily="18" charset="0"/>
                           </a:rPr>
                           <m:t>𝑡</m:t>
@@ -15838,7 +16255,7 @@
                       </m:sub>
                     </m:sSub>
                     <m:r>
-                      <a:rPr lang="fr-BE" b="0" i="1" smtClean="0">
+                      <a:rPr lang="fr-BE" sz="2800" b="0" i="1" smtClean="0">
                         <a:latin typeface="Cambria Math" panose="02040503050406030204" pitchFamily="18" charset="0"/>
                       </a:rPr>
                       <m:t>=</m:t>
@@ -15846,14 +16263,14 @@
                     <m:sSub>
                       <m:sSubPr>
                         <m:ctrlPr>
-                          <a:rPr lang="fr-BE" b="0" i="1" smtClean="0">
+                          <a:rPr lang="fr-BE" sz="2800" b="0" i="1" smtClean="0">
                             <a:latin typeface="Cambria Math" panose="02040503050406030204" pitchFamily="18" charset="0"/>
                           </a:rPr>
                         </m:ctrlPr>
                       </m:sSubPr>
                       <m:e>
                         <m:r>
-                          <a:rPr lang="fr-BE" b="0" i="1" smtClean="0">
+                          <a:rPr lang="fr-BE" sz="2800" b="0" i="1" smtClean="0">
                             <a:latin typeface="Cambria Math" panose="02040503050406030204" pitchFamily="18" charset="0"/>
                           </a:rPr>
                           <m:t>𝑥</m:t>
@@ -15861,19 +16278,19 @@
                       </m:e>
                       <m:sub>
                         <m:r>
-                          <a:rPr lang="fr-BE" b="0" i="1" smtClean="0">
+                          <a:rPr lang="fr-BE" sz="2800" b="0" i="1" smtClean="0">
                             <a:latin typeface="Cambria Math" panose="02040503050406030204" pitchFamily="18" charset="0"/>
                           </a:rPr>
                           <m:t>𝑡</m:t>
                         </m:r>
                         <m:r>
-                          <a:rPr lang="fr-BE" b="0" i="1" smtClean="0">
+                          <a:rPr lang="fr-BE" sz="2800" b="0" i="1" smtClean="0">
                             <a:latin typeface="Cambria Math" panose="02040503050406030204" pitchFamily="18" charset="0"/>
                           </a:rPr>
                           <m:t>−</m:t>
                         </m:r>
                         <m:r>
-                          <a:rPr lang="fr-BE" b="0" i="1" smtClean="0">
+                          <a:rPr lang="fr-BE" sz="2800" b="0" i="1" smtClean="0">
                             <a:latin typeface="Cambria Math" panose="02040503050406030204" pitchFamily="18" charset="0"/>
                           </a:rPr>
                           <m:t>𝑘</m:t>
@@ -15881,7 +16298,7 @@
                       </m:sub>
                     </m:sSub>
                     <m:r>
-                      <a:rPr lang="fr-BE" b="0" i="1" smtClean="0">
+                      <a:rPr lang="fr-BE" sz="2800" b="0" i="1" smtClean="0">
                         <a:latin typeface="Cambria Math" panose="02040503050406030204" pitchFamily="18" charset="0"/>
                       </a:rPr>
                       <m:t>,</m:t>
@@ -15889,14 +16306,14 @@
                     <m:sSup>
                       <m:sSupPr>
                         <m:ctrlPr>
-                          <a:rPr lang="fr-BE" b="0" i="1" smtClean="0">
+                          <a:rPr lang="fr-BE" sz="2800" b="0" i="1" smtClean="0">
                             <a:latin typeface="Cambria Math" panose="02040503050406030204" pitchFamily="18" charset="0"/>
                           </a:rPr>
                         </m:ctrlPr>
                       </m:sSupPr>
                       <m:e>
                         <m:r>
-                          <a:rPr lang="fr-BE" b="0" i="1" smtClean="0">
+                          <a:rPr lang="fr-BE" sz="2800" b="0" i="1" smtClean="0">
                             <a:latin typeface="Cambria Math" panose="02040503050406030204" pitchFamily="18" charset="0"/>
                           </a:rPr>
                           <m:t>𝐹</m:t>
@@ -15904,7 +16321,7 @@
                       </m:e>
                       <m:sup>
                         <m:r>
-                          <a:rPr lang="fr-BE" i="1">
+                          <a:rPr lang="fr-BE" sz="2800" i="1">
                             <a:latin typeface="Cambria Math" panose="02040503050406030204" pitchFamily="18" charset="0"/>
                           </a:rPr>
                           <m:t>𝑘</m:t>
@@ -15914,14 +16331,14 @@
                     <m:sSub>
                       <m:sSubPr>
                         <m:ctrlPr>
-                          <a:rPr lang="fr-BE" i="1">
+                          <a:rPr lang="fr-BE" sz="2800" i="1">
                             <a:latin typeface="Cambria Math" panose="02040503050406030204" pitchFamily="18" charset="0"/>
                           </a:rPr>
                         </m:ctrlPr>
                       </m:sSubPr>
                       <m:e>
                         <m:r>
-                          <a:rPr lang="fr-BE" i="1">
+                          <a:rPr lang="fr-BE" sz="2800" i="1">
                             <a:latin typeface="Cambria Math" panose="02040503050406030204" pitchFamily="18" charset="0"/>
                           </a:rPr>
                           <m:t>𝑥</m:t>
@@ -15929,7 +16346,7 @@
                       </m:e>
                       <m:sub>
                         <m:r>
-                          <a:rPr lang="fr-BE" i="1">
+                          <a:rPr lang="fr-BE" sz="2800" i="1">
                             <a:latin typeface="Cambria Math" panose="02040503050406030204" pitchFamily="18" charset="0"/>
                           </a:rPr>
                           <m:t>𝑡</m:t>
@@ -15937,7 +16354,7 @@
                       </m:sub>
                     </m:sSub>
                     <m:r>
-                      <a:rPr lang="fr-BE" i="1">
+                      <a:rPr lang="fr-BE" sz="2800" i="1">
                         <a:latin typeface="Cambria Math" panose="02040503050406030204" pitchFamily="18" charset="0"/>
                       </a:rPr>
                       <m:t>=</m:t>
@@ -15945,14 +16362,14 @@
                     <m:sSub>
                       <m:sSubPr>
                         <m:ctrlPr>
-                          <a:rPr lang="fr-BE" i="1">
+                          <a:rPr lang="fr-BE" sz="2800" i="1">
                             <a:latin typeface="Cambria Math" panose="02040503050406030204" pitchFamily="18" charset="0"/>
                           </a:rPr>
                         </m:ctrlPr>
                       </m:sSubPr>
                       <m:e>
                         <m:r>
-                          <a:rPr lang="fr-BE" i="1">
+                          <a:rPr lang="fr-BE" sz="2800" i="1">
                             <a:latin typeface="Cambria Math" panose="02040503050406030204" pitchFamily="18" charset="0"/>
                           </a:rPr>
                           <m:t>𝑥</m:t>
@@ -15960,19 +16377,19 @@
                       </m:e>
                       <m:sub>
                         <m:r>
-                          <a:rPr lang="fr-BE" i="1">
+                          <a:rPr lang="fr-BE" sz="2800" i="1">
                             <a:latin typeface="Cambria Math" panose="02040503050406030204" pitchFamily="18" charset="0"/>
                           </a:rPr>
                           <m:t>𝑡</m:t>
                         </m:r>
                         <m:r>
-                          <a:rPr lang="fr-BE" b="0" i="1" smtClean="0">
+                          <a:rPr lang="fr-BE" sz="2800" b="0" i="1" smtClean="0">
                             <a:latin typeface="Cambria Math" panose="02040503050406030204" pitchFamily="18" charset="0"/>
                           </a:rPr>
                           <m:t>+</m:t>
                         </m:r>
                         <m:r>
-                          <a:rPr lang="fr-BE" i="1">
+                          <a:rPr lang="fr-BE" sz="2800" i="1">
                             <a:latin typeface="Cambria Math" panose="02040503050406030204" pitchFamily="18" charset="0"/>
                           </a:rPr>
                           <m:t>𝑘</m:t>
@@ -15981,10 +16398,10 @@
                     </m:sSub>
                   </m:oMath>
                 </a14:m>
-                <a:endParaRPr lang="en-GB" dirty="0"/>
+                <a:endParaRPr lang="en-GB" sz="2800" dirty="0"/>
               </a:p>
               <a:p>
-                <a:endParaRPr lang="en-GB" i="1" dirty="0">
+                <a:endParaRPr lang="en-GB" sz="2800" i="1" dirty="0">
                   <a:latin typeface="Cambria Math" panose="02040503050406030204" pitchFamily="18" charset="0"/>
                 </a:endParaRPr>
               </a:p>
@@ -15994,14 +16411,14 @@
                     <m:sSub>
                       <m:sSubPr>
                         <m:ctrlPr>
-                          <a:rPr lang="fr-BE" b="0" i="1" smtClean="0">
+                          <a:rPr lang="fr-BE" sz="2800" b="0" i="1" smtClean="0">
                             <a:latin typeface="Cambria Math" panose="02040503050406030204" pitchFamily="18" charset="0"/>
                           </a:rPr>
                         </m:ctrlPr>
                       </m:sSubPr>
                       <m:e>
                         <m:r>
-                          <a:rPr lang="fr-BE" b="0" i="1" smtClean="0">
+                          <a:rPr lang="fr-BE" sz="2800" b="0" i="1" smtClean="0">
                             <a:latin typeface="Cambria Math" panose="02040503050406030204" pitchFamily="18" charset="0"/>
                           </a:rPr>
                           <m:t>𝑦</m:t>
@@ -16009,7 +16426,7 @@
                       </m:e>
                       <m:sub>
                         <m:r>
-                          <a:rPr lang="fr-BE" b="0" i="1" smtClean="0">
+                          <a:rPr lang="fr-BE" sz="2800" b="0" i="1" smtClean="0">
                             <a:latin typeface="Cambria Math" panose="02040503050406030204" pitchFamily="18" charset="0"/>
                           </a:rPr>
                           <m:t>𝑡</m:t>
@@ -16017,13 +16434,13 @@
                       </m:sub>
                     </m:sSub>
                     <m:r>
-                      <a:rPr lang="fr-BE" b="0" i="1" smtClean="0">
+                      <a:rPr lang="fr-BE" sz="2800" b="0" i="1" smtClean="0">
                         <a:latin typeface="Cambria Math" panose="02040503050406030204" pitchFamily="18" charset="0"/>
                       </a:rPr>
                       <m:t>=</m:t>
                     </m:r>
                     <m:r>
-                      <a:rPr lang="fr-BE" b="0" i="1" smtClean="0">
+                      <a:rPr lang="fr-BE" sz="2800" b="0" i="1" smtClean="0">
                         <a:latin typeface="Cambria Math" panose="02040503050406030204" pitchFamily="18" charset="0"/>
                       </a:rPr>
                       <m:t>𝑃</m:t>
@@ -16031,14 +16448,14 @@
                     <m:d>
                       <m:dPr>
                         <m:ctrlPr>
-                          <a:rPr lang="fr-BE" b="0" i="1" smtClean="0">
+                          <a:rPr lang="fr-BE" sz="2800" b="0" i="1" smtClean="0">
                             <a:latin typeface="Cambria Math" panose="02040503050406030204" pitchFamily="18" charset="0"/>
                           </a:rPr>
                         </m:ctrlPr>
                       </m:dPr>
                       <m:e>
                         <m:r>
-                          <a:rPr lang="fr-BE" b="0" i="1" smtClean="0">
+                          <a:rPr lang="fr-BE" sz="2800" b="0" i="1" smtClean="0">
                             <a:latin typeface="Cambria Math" panose="02040503050406030204" pitchFamily="18" charset="0"/>
                           </a:rPr>
                           <m:t>𝐵</m:t>
@@ -16048,14 +16465,14 @@
                     <m:sSub>
                       <m:sSubPr>
                         <m:ctrlPr>
-                          <a:rPr lang="fr-BE" b="0" i="1" smtClean="0">
+                          <a:rPr lang="fr-BE" sz="2800" b="0" i="1" smtClean="0">
                             <a:latin typeface="Cambria Math" panose="02040503050406030204" pitchFamily="18" charset="0"/>
                           </a:rPr>
                         </m:ctrlPr>
                       </m:sSubPr>
                       <m:e>
                         <m:r>
-                          <a:rPr lang="fr-BE" b="0" i="1" smtClean="0">
+                          <a:rPr lang="fr-BE" sz="2800" b="0" i="1" smtClean="0">
                             <a:latin typeface="Cambria Math" panose="02040503050406030204" pitchFamily="18" charset="0"/>
                           </a:rPr>
                           <m:t>𝑥</m:t>
@@ -16063,7 +16480,7 @@
                       </m:e>
                       <m:sub>
                         <m:r>
-                          <a:rPr lang="fr-BE" b="0" i="1" smtClean="0">
+                          <a:rPr lang="fr-BE" sz="2800" b="0" i="1" smtClean="0">
                             <a:latin typeface="Cambria Math" panose="02040503050406030204" pitchFamily="18" charset="0"/>
                           </a:rPr>
                           <m:t>𝑡</m:t>
@@ -16073,13 +16490,13 @@
                   </m:oMath>
                 </a14:m>
                 <a:r>
-                  <a:rPr lang="en-GB" dirty="0"/>
+                  <a:rPr lang="en-GB" sz="2800" dirty="0"/>
                   <a:t>, </a:t>
                 </a:r>
                 <a14:m>
                   <m:oMath xmlns:m="http://schemas.openxmlformats.org/officeDocument/2006/math">
                     <m:r>
-                      <a:rPr lang="fr-BE" i="1">
+                      <a:rPr lang="fr-BE" sz="2800" i="1">
                         <a:latin typeface="Cambria Math" panose="02040503050406030204" pitchFamily="18" charset="0"/>
                       </a:rPr>
                       <m:t>𝑃</m:t>
@@ -16087,14 +16504,14 @@
                     <m:d>
                       <m:dPr>
                         <m:ctrlPr>
-                          <a:rPr lang="fr-BE" i="1">
+                          <a:rPr lang="fr-BE" sz="2800" i="1">
                             <a:latin typeface="Cambria Math" panose="02040503050406030204" pitchFamily="18" charset="0"/>
                           </a:rPr>
                         </m:ctrlPr>
                       </m:dPr>
                       <m:e>
                         <m:r>
-                          <a:rPr lang="fr-BE" i="1">
+                          <a:rPr lang="fr-BE" sz="2800" i="1">
                             <a:latin typeface="Cambria Math" panose="02040503050406030204" pitchFamily="18" charset="0"/>
                           </a:rPr>
                           <m:t>𝐵</m:t>
@@ -16104,14 +16521,14 @@
                     <m:sSub>
                       <m:sSubPr>
                         <m:ctrlPr>
-                          <a:rPr lang="fr-BE" i="1">
+                          <a:rPr lang="fr-BE" sz="2800" i="1">
                             <a:latin typeface="Cambria Math" panose="02040503050406030204" pitchFamily="18" charset="0"/>
                           </a:rPr>
                         </m:ctrlPr>
                       </m:sSubPr>
                       <m:e>
                         <m:r>
-                          <a:rPr lang="fr-BE" i="1">
+                          <a:rPr lang="fr-BE" sz="2800" i="1">
                             <a:latin typeface="Cambria Math" panose="02040503050406030204" pitchFamily="18" charset="0"/>
                           </a:rPr>
                           <m:t>𝑦</m:t>
@@ -16119,7 +16536,7 @@
                       </m:e>
                       <m:sub>
                         <m:r>
-                          <a:rPr lang="fr-BE" i="1">
+                          <a:rPr lang="fr-BE" sz="2800" i="1">
                             <a:latin typeface="Cambria Math" panose="02040503050406030204" pitchFamily="18" charset="0"/>
                           </a:rPr>
                           <m:t>𝑡</m:t>
@@ -16127,7 +16544,7 @@
                       </m:sub>
                     </m:sSub>
                     <m:r>
-                      <a:rPr lang="fr-BE" i="1">
+                      <a:rPr lang="fr-BE" sz="2800" i="1">
                         <a:latin typeface="Cambria Math" panose="02040503050406030204" pitchFamily="18" charset="0"/>
                       </a:rPr>
                       <m:t>=</m:t>
@@ -16135,14 +16552,14 @@
                     <m:sSub>
                       <m:sSubPr>
                         <m:ctrlPr>
-                          <a:rPr lang="fr-BE" i="1">
+                          <a:rPr lang="fr-BE" sz="2800" i="1">
                             <a:latin typeface="Cambria Math" panose="02040503050406030204" pitchFamily="18" charset="0"/>
                           </a:rPr>
                         </m:ctrlPr>
                       </m:sSubPr>
                       <m:e>
                         <m:r>
-                          <a:rPr lang="fr-BE" i="1">
+                          <a:rPr lang="fr-BE" sz="2800" i="1">
                             <a:latin typeface="Cambria Math" panose="02040503050406030204" pitchFamily="18" charset="0"/>
                           </a:rPr>
                           <m:t>𝑥</m:t>
@@ -16150,7 +16567,7 @@
                       </m:e>
                       <m:sub>
                         <m:r>
-                          <a:rPr lang="fr-BE" i="1">
+                          <a:rPr lang="fr-BE" sz="2800" i="1">
                             <a:latin typeface="Cambria Math" panose="02040503050406030204" pitchFamily="18" charset="0"/>
                           </a:rPr>
                           <m:t>𝑡</m:t>
@@ -16160,13 +16577,13 @@
                   </m:oMath>
                 </a14:m>
                 <a:r>
-                  <a:rPr lang="en-GB" dirty="0"/>
+                  <a:rPr lang="en-GB" sz="2800" dirty="0"/>
                   <a:t>, </a:t>
                 </a:r>
                 <a14:m>
                   <m:oMath xmlns:m="http://schemas.openxmlformats.org/officeDocument/2006/math">
                     <m:r>
-                      <a:rPr lang="fr-BE" i="1">
+                      <a:rPr lang="fr-BE" sz="2800" i="1">
                         <a:latin typeface="Cambria Math" panose="02040503050406030204" pitchFamily="18" charset="0"/>
                       </a:rPr>
                       <m:t>𝑃</m:t>
@@ -16174,14 +16591,14 @@
                     <m:d>
                       <m:dPr>
                         <m:ctrlPr>
-                          <a:rPr lang="fr-BE" i="1">
+                          <a:rPr lang="fr-BE" sz="2800" i="1">
                             <a:latin typeface="Cambria Math" panose="02040503050406030204" pitchFamily="18" charset="0"/>
                           </a:rPr>
                         </m:ctrlPr>
                       </m:dPr>
                       <m:e>
                         <m:r>
-                          <a:rPr lang="fr-BE" i="1">
+                          <a:rPr lang="fr-BE" sz="2800" i="1">
                             <a:latin typeface="Cambria Math" panose="02040503050406030204" pitchFamily="18" charset="0"/>
                           </a:rPr>
                           <m:t>𝐵</m:t>
@@ -16191,14 +16608,14 @@
                     <m:sSub>
                       <m:sSubPr>
                         <m:ctrlPr>
-                          <a:rPr lang="fr-BE" i="1">
+                          <a:rPr lang="fr-BE" sz="2800" i="1">
                             <a:latin typeface="Cambria Math" panose="02040503050406030204" pitchFamily="18" charset="0"/>
                           </a:rPr>
                         </m:ctrlPr>
                       </m:sSubPr>
                       <m:e>
                         <m:r>
-                          <a:rPr lang="fr-BE" i="1">
+                          <a:rPr lang="fr-BE" sz="2800" i="1">
                             <a:latin typeface="Cambria Math" panose="02040503050406030204" pitchFamily="18" charset="0"/>
                           </a:rPr>
                           <m:t>𝑦</m:t>
@@ -16206,7 +16623,7 @@
                       </m:e>
                       <m:sub>
                         <m:r>
-                          <a:rPr lang="fr-BE" i="1">
+                          <a:rPr lang="fr-BE" sz="2800" i="1">
                             <a:latin typeface="Cambria Math" panose="02040503050406030204" pitchFamily="18" charset="0"/>
                           </a:rPr>
                           <m:t>𝑡</m:t>
@@ -16214,7 +16631,7 @@
                       </m:sub>
                     </m:sSub>
                     <m:r>
-                      <a:rPr lang="fr-BE" i="1">
+                      <a:rPr lang="fr-BE" sz="2800" i="1">
                         <a:latin typeface="Cambria Math" panose="02040503050406030204" pitchFamily="18" charset="0"/>
                       </a:rPr>
                       <m:t>=</m:t>
@@ -16222,38 +16639,38 @@
                     <m:sSub>
                       <m:sSubPr>
                         <m:ctrlPr>
-                          <a:rPr lang="fr-BE" b="0" i="1" smtClean="0">
+                          <a:rPr lang="fr-BE" sz="2800" b="0" i="1" smtClean="0">
                             <a:latin typeface="Cambria Math" panose="02040503050406030204" pitchFamily="18" charset="0"/>
                           </a:rPr>
                         </m:ctrlPr>
                       </m:sSubPr>
                       <m:e>
                         <m:r>
-                          <a:rPr lang="fr-BE" b="0" i="1" smtClean="0">
+                          <a:rPr lang="fr-BE" sz="2800" b="0" i="1" smtClean="0">
                             <a:latin typeface="Cambria Math" panose="02040503050406030204" pitchFamily="18" charset="0"/>
                           </a:rPr>
                           <m:t>𝑄</m:t>
                         </m:r>
                         <m:r>
-                          <a:rPr lang="fr-BE" b="0" i="1" smtClean="0">
+                          <a:rPr lang="fr-BE" sz="2800" b="0" i="1" smtClean="0">
                             <a:latin typeface="Cambria Math" panose="02040503050406030204" pitchFamily="18" charset="0"/>
                           </a:rPr>
                           <m:t>(</m:t>
                         </m:r>
                         <m:r>
-                          <a:rPr lang="fr-BE" b="0" i="1" smtClean="0">
+                          <a:rPr lang="fr-BE" sz="2800" b="0" i="1" smtClean="0">
                             <a:latin typeface="Cambria Math" panose="02040503050406030204" pitchFamily="18" charset="0"/>
                           </a:rPr>
                           <m:t>𝐵</m:t>
                         </m:r>
                         <m:r>
-                          <a:rPr lang="fr-BE" b="0" i="1" smtClean="0">
+                          <a:rPr lang="fr-BE" sz="2800" b="0" i="1" smtClean="0">
                             <a:latin typeface="Cambria Math" panose="02040503050406030204" pitchFamily="18" charset="0"/>
                           </a:rPr>
                           <m:t>)</m:t>
                         </m:r>
                         <m:r>
-                          <a:rPr lang="fr-BE" i="1">
+                          <a:rPr lang="fr-BE" sz="2800" i="1">
                             <a:latin typeface="Cambria Math" panose="02040503050406030204" pitchFamily="18" charset="0"/>
                           </a:rPr>
                           <m:t>𝑥</m:t>
@@ -16261,7 +16678,7 @@
                       </m:e>
                       <m:sub>
                         <m:r>
-                          <a:rPr lang="fr-BE" i="1">
+                          <a:rPr lang="fr-BE" sz="2800" i="1">
                             <a:latin typeface="Cambria Math" panose="02040503050406030204" pitchFamily="18" charset="0"/>
                           </a:rPr>
                           <m:t>𝑡</m:t>
@@ -16270,7 +16687,7 @@
                     </m:sSub>
                   </m:oMath>
                 </a14:m>
-                <a:endParaRPr lang="en-GB" dirty="0"/>
+                <a:endParaRPr lang="en-GB" sz="2800" dirty="0"/>
               </a:p>
               <a:p>
                 <a:pPr lvl="1"/>
@@ -16279,14 +16696,14 @@
                     <m:sSub>
                       <m:sSubPr>
                         <m:ctrlPr>
-                          <a:rPr lang="fr-BE" b="0" i="1" smtClean="0">
+                          <a:rPr lang="fr-BE" sz="2400" b="0" i="1" smtClean="0">
                             <a:latin typeface="Cambria Math" panose="02040503050406030204" pitchFamily="18" charset="0"/>
                           </a:rPr>
                         </m:ctrlPr>
                       </m:sSubPr>
                       <m:e>
                         <m:r>
-                          <a:rPr lang="fr-BE" b="0" i="1" smtClean="0">
+                          <a:rPr lang="fr-BE" sz="2400" b="0" i="1" smtClean="0">
                             <a:latin typeface="Cambria Math" panose="02040503050406030204" pitchFamily="18" charset="0"/>
                           </a:rPr>
                           <m:t>𝑦</m:t>
@@ -16294,7 +16711,7 @@
                       </m:e>
                       <m:sub>
                         <m:r>
-                          <a:rPr lang="fr-BE" b="0" i="1" smtClean="0">
+                          <a:rPr lang="fr-BE" sz="2400" b="0" i="1" smtClean="0">
                             <a:latin typeface="Cambria Math" panose="02040503050406030204" pitchFamily="18" charset="0"/>
                           </a:rPr>
                           <m:t>𝑡</m:t>
@@ -16302,7 +16719,7 @@
                       </m:sub>
                     </m:sSub>
                     <m:r>
-                      <a:rPr lang="fr-BE" b="0" i="1" smtClean="0">
+                      <a:rPr lang="fr-BE" sz="2400" b="0" i="1" smtClean="0">
                         <a:latin typeface="Cambria Math" panose="02040503050406030204" pitchFamily="18" charset="0"/>
                       </a:rPr>
                       <m:t>=</m:t>
@@ -16310,14 +16727,14 @@
                     <m:sSub>
                       <m:sSubPr>
                         <m:ctrlPr>
-                          <a:rPr lang="fr-BE" b="0" i="1" smtClean="0">
+                          <a:rPr lang="fr-BE" sz="2400" b="0" i="1" smtClean="0">
                             <a:latin typeface="Cambria Math" panose="02040503050406030204" pitchFamily="18" charset="0"/>
                           </a:rPr>
                         </m:ctrlPr>
                       </m:sSubPr>
                       <m:e>
                         <m:r>
-                          <a:rPr lang="fr-BE" b="0" i="1" smtClean="0">
+                          <a:rPr lang="fr-BE" sz="2400" b="0" i="1" smtClean="0">
                             <a:latin typeface="Cambria Math" panose="02040503050406030204" pitchFamily="18" charset="0"/>
                           </a:rPr>
                           <m:t>𝑥</m:t>
@@ -16325,7 +16742,7 @@
                       </m:e>
                       <m:sub>
                         <m:r>
-                          <a:rPr lang="fr-BE" i="1">
+                          <a:rPr lang="fr-BE" sz="2400" i="1">
                             <a:latin typeface="Cambria Math" panose="02040503050406030204" pitchFamily="18" charset="0"/>
                           </a:rPr>
                           <m:t>𝑡</m:t>
@@ -16333,7 +16750,7 @@
                       </m:sub>
                     </m:sSub>
                     <m:r>
-                      <a:rPr lang="fr-BE" b="0" i="1" smtClean="0">
+                      <a:rPr lang="fr-BE" sz="2400" b="0" i="1" smtClean="0">
                         <a:latin typeface="Cambria Math" panose="02040503050406030204" pitchFamily="18" charset="0"/>
                       </a:rPr>
                       <m:t>−</m:t>
@@ -16341,14 +16758,14 @@
                     <m:sSub>
                       <m:sSubPr>
                         <m:ctrlPr>
-                          <a:rPr lang="fr-BE" b="0" i="1" smtClean="0">
+                          <a:rPr lang="fr-BE" sz="2400" b="0" i="1" smtClean="0">
                             <a:latin typeface="Cambria Math" panose="02040503050406030204" pitchFamily="18" charset="0"/>
                           </a:rPr>
                         </m:ctrlPr>
                       </m:sSubPr>
                       <m:e>
                         <m:r>
-                          <a:rPr lang="fr-BE" b="0" i="1" smtClean="0">
+                          <a:rPr lang="fr-BE" sz="2400" b="0" i="1" smtClean="0">
                             <a:latin typeface="Cambria Math" panose="02040503050406030204" pitchFamily="18" charset="0"/>
                           </a:rPr>
                           <m:t>𝑥</m:t>
@@ -16356,13 +16773,13 @@
                       </m:e>
                       <m:sub>
                         <m:r>
-                          <a:rPr lang="fr-BE" i="1">
+                          <a:rPr lang="fr-BE" sz="2400" i="1">
                             <a:latin typeface="Cambria Math" panose="02040503050406030204" pitchFamily="18" charset="0"/>
                           </a:rPr>
                           <m:t>𝑡</m:t>
                         </m:r>
                         <m:r>
-                          <a:rPr lang="fr-BE" b="0" i="1" smtClean="0">
+                          <a:rPr lang="fr-BE" sz="2400" b="0" i="1" smtClean="0">
                             <a:latin typeface="Cambria Math" panose="02040503050406030204" pitchFamily="18" charset="0"/>
                           </a:rPr>
                           <m:t>−1</m:t>
@@ -16371,7 +16788,7 @@
                     </m:sSub>
                   </m:oMath>
                 </a14:m>
-                <a:endParaRPr lang="en-GB" dirty="0"/>
+                <a:endParaRPr lang="en-GB" sz="2400" dirty="0"/>
               </a:p>
               <a:p>
                 <a:pPr lvl="1"/>
@@ -16380,14 +16797,14 @@
                     <m:sSub>
                       <m:sSubPr>
                         <m:ctrlPr>
-                          <a:rPr lang="fr-BE" i="1">
+                          <a:rPr lang="fr-BE" sz="2400" i="1">
                             <a:latin typeface="Cambria Math" panose="02040503050406030204" pitchFamily="18" charset="0"/>
                           </a:rPr>
                         </m:ctrlPr>
                       </m:sSubPr>
                       <m:e>
                         <m:r>
-                          <a:rPr lang="fr-BE" i="1">
+                          <a:rPr lang="fr-BE" sz="2400" i="1">
                             <a:latin typeface="Cambria Math" panose="02040503050406030204" pitchFamily="18" charset="0"/>
                           </a:rPr>
                           <m:t>𝑦</m:t>
@@ -16395,7 +16812,7 @@
                       </m:e>
                       <m:sub>
                         <m:r>
-                          <a:rPr lang="fr-BE" i="1">
+                          <a:rPr lang="fr-BE" sz="2400" i="1">
                             <a:latin typeface="Cambria Math" panose="02040503050406030204" pitchFamily="18" charset="0"/>
                           </a:rPr>
                           <m:t>𝑡</m:t>
@@ -16403,7 +16820,7 @@
                       </m:sub>
                     </m:sSub>
                     <m:r>
-                      <a:rPr lang="fr-BE" b="0" i="1" smtClean="0">
+                      <a:rPr lang="fr-BE" sz="2400" b="0" i="1" smtClean="0">
                         <a:latin typeface="Cambria Math" panose="02040503050406030204" pitchFamily="18" charset="0"/>
                       </a:rPr>
                       <m:t>−0.9</m:t>
@@ -16411,14 +16828,14 @@
                     <m:sSub>
                       <m:sSubPr>
                         <m:ctrlPr>
-                          <a:rPr lang="fr-BE" i="1">
+                          <a:rPr lang="fr-BE" sz="2400" i="1">
                             <a:latin typeface="Cambria Math" panose="02040503050406030204" pitchFamily="18" charset="0"/>
                           </a:rPr>
                         </m:ctrlPr>
                       </m:sSubPr>
                       <m:e>
                         <m:r>
-                          <a:rPr lang="fr-BE" i="1">
+                          <a:rPr lang="fr-BE" sz="2400" i="1">
                             <a:latin typeface="Cambria Math" panose="02040503050406030204" pitchFamily="18" charset="0"/>
                           </a:rPr>
                           <m:t>𝑦</m:t>
@@ -16426,13 +16843,13 @@
                       </m:e>
                       <m:sub>
                         <m:r>
-                          <a:rPr lang="fr-BE" i="1">
+                          <a:rPr lang="fr-BE" sz="2400" i="1">
                             <a:latin typeface="Cambria Math" panose="02040503050406030204" pitchFamily="18" charset="0"/>
                           </a:rPr>
                           <m:t>𝑡</m:t>
                         </m:r>
                         <m:r>
-                          <a:rPr lang="fr-BE" b="0" i="1" smtClean="0">
+                          <a:rPr lang="fr-BE" sz="2400" b="0" i="1" smtClean="0">
                             <a:latin typeface="Cambria Math" panose="02040503050406030204" pitchFamily="18" charset="0"/>
                           </a:rPr>
                           <m:t>−1</m:t>
@@ -16440,7 +16857,7 @@
                       </m:sub>
                     </m:sSub>
                     <m:r>
-                      <a:rPr lang="fr-BE" i="1">
+                      <a:rPr lang="fr-BE" sz="2400" i="1">
                         <a:latin typeface="Cambria Math" panose="02040503050406030204" pitchFamily="18" charset="0"/>
                       </a:rPr>
                       <m:t>=</m:t>
@@ -16448,14 +16865,14 @@
                     <m:sSub>
                       <m:sSubPr>
                         <m:ctrlPr>
-                          <a:rPr lang="fr-BE" i="1">
+                          <a:rPr lang="fr-BE" sz="2400" i="1">
                             <a:latin typeface="Cambria Math" panose="02040503050406030204" pitchFamily="18" charset="0"/>
                           </a:rPr>
                         </m:ctrlPr>
                       </m:sSubPr>
                       <m:e>
                         <m:r>
-                          <a:rPr lang="fr-BE" i="1">
+                          <a:rPr lang="fr-BE" sz="2400" i="1">
                             <a:latin typeface="Cambria Math" panose="02040503050406030204" pitchFamily="18" charset="0"/>
                           </a:rPr>
                           <m:t>𝑥</m:t>
@@ -16463,7 +16880,7 @@
                       </m:e>
                       <m:sub>
                         <m:r>
-                          <a:rPr lang="fr-BE" i="1">
+                          <a:rPr lang="fr-BE" sz="2400" i="1">
                             <a:latin typeface="Cambria Math" panose="02040503050406030204" pitchFamily="18" charset="0"/>
                           </a:rPr>
                           <m:t>𝑡</m:t>
@@ -16473,7 +16890,7 @@
                   </m:oMath>
                 </a14:m>
                 <a:r>
-                  <a:rPr lang="en-GB" dirty="0"/>
+                  <a:rPr lang="en-GB" sz="2400" dirty="0"/>
                   <a:t> or </a:t>
                 </a:r>
                 <a14:m>
@@ -16481,14 +16898,14 @@
                     <m:sSub>
                       <m:sSubPr>
                         <m:ctrlPr>
-                          <a:rPr lang="fr-BE" i="1">
+                          <a:rPr lang="fr-BE" sz="2400" i="1">
                             <a:latin typeface="Cambria Math" panose="02040503050406030204" pitchFamily="18" charset="0"/>
                           </a:rPr>
                         </m:ctrlPr>
                       </m:sSubPr>
                       <m:e>
                         <m:r>
-                          <a:rPr lang="fr-BE" i="1">
+                          <a:rPr lang="fr-BE" sz="2400" i="1">
                             <a:latin typeface="Cambria Math" panose="02040503050406030204" pitchFamily="18" charset="0"/>
                           </a:rPr>
                           <m:t>𝑦</m:t>
@@ -16496,7 +16913,7 @@
                       </m:e>
                       <m:sub>
                         <m:r>
-                          <a:rPr lang="fr-BE" i="1">
+                          <a:rPr lang="fr-BE" sz="2400" i="1">
                             <a:latin typeface="Cambria Math" panose="02040503050406030204" pitchFamily="18" charset="0"/>
                           </a:rPr>
                           <m:t>𝑡</m:t>
@@ -16504,7 +16921,7 @@
                       </m:sub>
                     </m:sSub>
                     <m:r>
-                      <a:rPr lang="fr-BE" b="0" i="1" smtClean="0">
+                      <a:rPr lang="fr-BE" sz="2400" b="0" i="1" smtClean="0">
                         <a:latin typeface="Cambria Math" panose="02040503050406030204" pitchFamily="18" charset="0"/>
                       </a:rPr>
                       <m:t>=</m:t>
@@ -16512,14 +16929,14 @@
                     <m:sSub>
                       <m:sSubPr>
                         <m:ctrlPr>
-                          <a:rPr lang="fr-BE" i="1">
+                          <a:rPr lang="fr-BE" sz="2400" i="1">
                             <a:latin typeface="Cambria Math" panose="02040503050406030204" pitchFamily="18" charset="0"/>
                           </a:rPr>
                         </m:ctrlPr>
                       </m:sSubPr>
                       <m:e>
                         <m:r>
-                          <a:rPr lang="fr-BE" i="1">
+                          <a:rPr lang="fr-BE" sz="2400" i="1">
                             <a:latin typeface="Cambria Math" panose="02040503050406030204" pitchFamily="18" charset="0"/>
                           </a:rPr>
                           <m:t>𝑥</m:t>
@@ -16527,7 +16944,7 @@
                       </m:e>
                       <m:sub>
                         <m:r>
-                          <a:rPr lang="fr-BE" i="1">
+                          <a:rPr lang="fr-BE" sz="2400" i="1">
                             <a:latin typeface="Cambria Math" panose="02040503050406030204" pitchFamily="18" charset="0"/>
                           </a:rPr>
                           <m:t>𝑡</m:t>
@@ -16535,13 +16952,13 @@
                       </m:sub>
                     </m:sSub>
                     <m:r>
-                      <a:rPr lang="fr-BE" b="0" i="1" smtClean="0">
+                      <a:rPr lang="fr-BE" sz="2400" b="0" i="1" smtClean="0">
                         <a:latin typeface="Cambria Math" panose="02040503050406030204" pitchFamily="18" charset="0"/>
                       </a:rPr>
                       <m:t>+</m:t>
                     </m:r>
                     <m:r>
-                      <a:rPr lang="fr-BE" i="1">
+                      <a:rPr lang="fr-BE" sz="2400" i="1">
                         <a:latin typeface="Cambria Math" panose="02040503050406030204" pitchFamily="18" charset="0"/>
                       </a:rPr>
                       <m:t>0.9</m:t>
@@ -16549,14 +16966,14 @@
                     <m:sSub>
                       <m:sSubPr>
                         <m:ctrlPr>
-                          <a:rPr lang="fr-BE" b="0" i="1" smtClean="0">
+                          <a:rPr lang="fr-BE" sz="2400" b="0" i="1" smtClean="0">
                             <a:latin typeface="Cambria Math" panose="02040503050406030204" pitchFamily="18" charset="0"/>
                           </a:rPr>
                         </m:ctrlPr>
                       </m:sSubPr>
                       <m:e>
                         <m:r>
-                          <a:rPr lang="fr-BE" b="0" i="1" smtClean="0">
+                          <a:rPr lang="fr-BE" sz="2400" b="0" i="1" smtClean="0">
                             <a:latin typeface="Cambria Math" panose="02040503050406030204" pitchFamily="18" charset="0"/>
                           </a:rPr>
                           <m:t>𝑥</m:t>
@@ -16564,13 +16981,13 @@
                       </m:e>
                       <m:sub>
                         <m:r>
-                          <a:rPr lang="fr-BE" i="1">
+                          <a:rPr lang="fr-BE" sz="2400" i="1">
                             <a:latin typeface="Cambria Math" panose="02040503050406030204" pitchFamily="18" charset="0"/>
                           </a:rPr>
                           <m:t>𝑡</m:t>
                         </m:r>
                         <m:r>
-                          <a:rPr lang="fr-BE" i="1">
+                          <a:rPr lang="fr-BE" sz="2400" i="1">
                             <a:latin typeface="Cambria Math" panose="02040503050406030204" pitchFamily="18" charset="0"/>
                           </a:rPr>
                           <m:t>−1</m:t>
@@ -16578,19 +16995,19 @@
                       </m:sub>
                     </m:sSub>
                     <m:r>
-                      <a:rPr lang="fr-BE" b="0" i="1" smtClean="0">
+                      <a:rPr lang="fr-BE" sz="2400" b="0" i="1" smtClean="0">
                         <a:latin typeface="Cambria Math" panose="02040503050406030204" pitchFamily="18" charset="0"/>
                       </a:rPr>
                       <m:t>+</m:t>
                     </m:r>
                     <m:r>
-                      <a:rPr lang="fr-BE" i="1">
+                      <a:rPr lang="fr-BE" sz="2400" i="1">
                         <a:latin typeface="Cambria Math" panose="02040503050406030204" pitchFamily="18" charset="0"/>
                       </a:rPr>
                       <m:t>0.</m:t>
                     </m:r>
                     <m:r>
-                      <a:rPr lang="fr-BE" b="0" i="1" smtClean="0">
+                      <a:rPr lang="fr-BE" sz="2400" b="0" i="1" smtClean="0">
                         <a:latin typeface="Cambria Math" panose="02040503050406030204" pitchFamily="18" charset="0"/>
                       </a:rPr>
                       <m:t>81</m:t>
@@ -16598,14 +17015,14 @@
                     <m:sSub>
                       <m:sSubPr>
                         <m:ctrlPr>
-                          <a:rPr lang="fr-BE" i="1">
+                          <a:rPr lang="fr-BE" sz="2400" i="1">
                             <a:latin typeface="Cambria Math" panose="02040503050406030204" pitchFamily="18" charset="0"/>
                           </a:rPr>
                         </m:ctrlPr>
                       </m:sSubPr>
                       <m:e>
                         <m:r>
-                          <a:rPr lang="fr-BE" i="1">
+                          <a:rPr lang="fr-BE" sz="2400" i="1">
                             <a:latin typeface="Cambria Math" panose="02040503050406030204" pitchFamily="18" charset="0"/>
                           </a:rPr>
                           <m:t>𝑥</m:t>
@@ -16613,13 +17030,13 @@
                       </m:e>
                       <m:sub>
                         <m:r>
-                          <a:rPr lang="fr-BE" i="1">
+                          <a:rPr lang="fr-BE" sz="2400" i="1">
                             <a:latin typeface="Cambria Math" panose="02040503050406030204" pitchFamily="18" charset="0"/>
                           </a:rPr>
                           <m:t>𝑡</m:t>
                         </m:r>
                         <m:r>
-                          <a:rPr lang="fr-BE" i="1">
+                          <a:rPr lang="fr-BE" sz="2400" i="1">
                             <a:latin typeface="Cambria Math" panose="02040503050406030204" pitchFamily="18" charset="0"/>
                           </a:rPr>
                           <m:t>−2</m:t>
@@ -16627,7 +17044,7 @@
                       </m:sub>
                     </m:sSub>
                     <m:r>
-                      <a:rPr lang="fr-BE" i="1">
+                      <a:rPr lang="fr-BE" sz="2400" i="1">
                         <a:latin typeface="Cambria Math" panose="02040503050406030204" pitchFamily="18" charset="0"/>
                       </a:rPr>
                       <m:t>+</m:t>
@@ -16635,7 +17052,7 @@
                   </m:oMath>
                 </a14:m>
                 <a:r>
-                  <a:rPr lang="en-GB" dirty="0"/>
+                  <a:rPr lang="en-GB" sz="2400" dirty="0"/>
                   <a:t>…</a:t>
                 </a:r>
               </a:p>
@@ -16645,14 +17062,14 @@
                     <m:sSub>
                       <m:sSubPr>
                         <m:ctrlPr>
-                          <a:rPr lang="fr-BE" b="0" i="1" smtClean="0">
+                          <a:rPr lang="fr-BE" sz="2800" b="0" i="1" smtClean="0">
                             <a:latin typeface="Cambria Math" panose="02040503050406030204" pitchFamily="18" charset="0"/>
                           </a:rPr>
                         </m:ctrlPr>
                       </m:sSubPr>
                       <m:e>
                         <m:r>
-                          <a:rPr lang="fr-BE" b="0" i="1" smtClean="0">
+                          <a:rPr lang="fr-BE" sz="2800" b="0" i="1" smtClean="0">
                             <a:latin typeface="Cambria Math" panose="02040503050406030204" pitchFamily="18" charset="0"/>
                           </a:rPr>
                           <m:t>𝑦</m:t>
@@ -16660,7 +17077,7 @@
                       </m:e>
                       <m:sub>
                         <m:r>
-                          <a:rPr lang="fr-BE" b="0" i="1" smtClean="0">
+                          <a:rPr lang="fr-BE" sz="2800" b="0" i="1" smtClean="0">
                             <a:latin typeface="Cambria Math" panose="02040503050406030204" pitchFamily="18" charset="0"/>
                           </a:rPr>
                           <m:t>𝑡</m:t>
@@ -16668,13 +17085,13 @@
                       </m:sub>
                     </m:sSub>
                     <m:r>
-                      <a:rPr lang="fr-BE" b="0" i="1" smtClean="0">
+                      <a:rPr lang="fr-BE" sz="2800" b="0" i="1" smtClean="0">
                         <a:latin typeface="Cambria Math" panose="02040503050406030204" pitchFamily="18" charset="0"/>
                       </a:rPr>
                       <m:t>=</m:t>
                     </m:r>
                     <m:r>
-                      <a:rPr lang="fr-BE" b="0" i="1" smtClean="0">
+                      <a:rPr lang="fr-BE" sz="2800" b="0" i="1" smtClean="0">
                         <a:latin typeface="Cambria Math" panose="02040503050406030204" pitchFamily="18" charset="0"/>
                       </a:rPr>
                       <m:t>𝑃</m:t>
@@ -16682,26 +17099,26 @@
                     <m:d>
                       <m:dPr>
                         <m:ctrlPr>
-                          <a:rPr lang="fr-BE" b="0" i="1" smtClean="0">
+                          <a:rPr lang="fr-BE" sz="2800" b="0" i="1" smtClean="0">
                             <a:latin typeface="Cambria Math" panose="02040503050406030204" pitchFamily="18" charset="0"/>
                           </a:rPr>
                         </m:ctrlPr>
                       </m:dPr>
                       <m:e>
                         <m:r>
-                          <a:rPr lang="fr-BE" b="0" i="1" smtClean="0">
+                          <a:rPr lang="fr-BE" sz="2800" b="0" i="1" smtClean="0">
                             <a:latin typeface="Cambria Math" panose="02040503050406030204" pitchFamily="18" charset="0"/>
                           </a:rPr>
                           <m:t>𝐵</m:t>
                         </m:r>
                         <m:r>
-                          <a:rPr lang="fr-BE" b="0" i="1" smtClean="0">
+                          <a:rPr lang="fr-BE" sz="2800" b="0" i="1" smtClean="0">
                             <a:latin typeface="Cambria Math" panose="02040503050406030204" pitchFamily="18" charset="0"/>
                           </a:rPr>
                           <m:t>, </m:t>
                         </m:r>
                         <m:r>
-                          <a:rPr lang="fr-BE" b="0" i="1" smtClean="0">
+                          <a:rPr lang="fr-BE" sz="2800" b="0" i="1" smtClean="0">
                             <a:latin typeface="Cambria Math" panose="02040503050406030204" pitchFamily="18" charset="0"/>
                           </a:rPr>
                           <m:t>𝐹</m:t>
@@ -16711,14 +17128,14 @@
                     <m:sSub>
                       <m:sSubPr>
                         <m:ctrlPr>
-                          <a:rPr lang="fr-BE" b="0" i="1" smtClean="0">
+                          <a:rPr lang="fr-BE" sz="2800" b="0" i="1" smtClean="0">
                             <a:latin typeface="Cambria Math" panose="02040503050406030204" pitchFamily="18" charset="0"/>
                           </a:rPr>
                         </m:ctrlPr>
                       </m:sSubPr>
                       <m:e>
                         <m:r>
-                          <a:rPr lang="fr-BE" b="0" i="1" smtClean="0">
+                          <a:rPr lang="fr-BE" sz="2800" b="0" i="1" smtClean="0">
                             <a:latin typeface="Cambria Math" panose="02040503050406030204" pitchFamily="18" charset="0"/>
                           </a:rPr>
                           <m:t>𝑥</m:t>
@@ -16726,7 +17143,7 @@
                       </m:e>
                       <m:sub>
                         <m:r>
-                          <a:rPr lang="fr-BE" b="0" i="1" smtClean="0">
+                          <a:rPr lang="fr-BE" sz="2800" b="0" i="1" smtClean="0">
                             <a:latin typeface="Cambria Math" panose="02040503050406030204" pitchFamily="18" charset="0"/>
                           </a:rPr>
                           <m:t>𝑡</m:t>
@@ -16736,13 +17153,13 @@
                   </m:oMath>
                 </a14:m>
                 <a:r>
-                  <a:rPr lang="en-GB" dirty="0"/>
+                  <a:rPr lang="en-GB" sz="2800" dirty="0"/>
                   <a:t>, </a:t>
                 </a:r>
                 <a14:m>
                   <m:oMath xmlns:m="http://schemas.openxmlformats.org/officeDocument/2006/math">
                     <m:r>
-                      <a:rPr lang="fr-BE" i="1">
+                      <a:rPr lang="fr-BE" sz="2800" i="1">
                         <a:latin typeface="Cambria Math" panose="02040503050406030204" pitchFamily="18" charset="0"/>
                       </a:rPr>
                       <m:t>𝑃</m:t>
@@ -16750,26 +17167,26 @@
                     <m:d>
                       <m:dPr>
                         <m:ctrlPr>
-                          <a:rPr lang="fr-BE" i="1">
+                          <a:rPr lang="fr-BE" sz="2800" i="1">
                             <a:latin typeface="Cambria Math" panose="02040503050406030204" pitchFamily="18" charset="0"/>
                           </a:rPr>
                         </m:ctrlPr>
                       </m:dPr>
                       <m:e>
                         <m:r>
-                          <a:rPr lang="fr-BE" i="1">
+                          <a:rPr lang="fr-BE" sz="2800" i="1">
                             <a:latin typeface="Cambria Math" panose="02040503050406030204" pitchFamily="18" charset="0"/>
                           </a:rPr>
                           <m:t>𝐵</m:t>
                         </m:r>
                         <m:r>
-                          <a:rPr lang="fr-BE" b="0" i="1" smtClean="0">
+                          <a:rPr lang="fr-BE" sz="2800" b="0" i="1" smtClean="0">
                             <a:latin typeface="Cambria Math" panose="02040503050406030204" pitchFamily="18" charset="0"/>
                           </a:rPr>
                           <m:t>, </m:t>
                         </m:r>
                         <m:r>
-                          <a:rPr lang="fr-BE" b="0" i="1" smtClean="0">
+                          <a:rPr lang="fr-BE" sz="2800" b="0" i="1" smtClean="0">
                             <a:latin typeface="Cambria Math" panose="02040503050406030204" pitchFamily="18" charset="0"/>
                           </a:rPr>
                           <m:t>𝐹</m:t>
@@ -16779,14 +17196,14 @@
                     <m:sSub>
                       <m:sSubPr>
                         <m:ctrlPr>
-                          <a:rPr lang="fr-BE" i="1">
+                          <a:rPr lang="fr-BE" sz="2800" i="1">
                             <a:latin typeface="Cambria Math" panose="02040503050406030204" pitchFamily="18" charset="0"/>
                           </a:rPr>
                         </m:ctrlPr>
                       </m:sSubPr>
                       <m:e>
                         <m:r>
-                          <a:rPr lang="fr-BE" i="1">
+                          <a:rPr lang="fr-BE" sz="2800" i="1">
                             <a:latin typeface="Cambria Math" panose="02040503050406030204" pitchFamily="18" charset="0"/>
                           </a:rPr>
                           <m:t>𝑦</m:t>
@@ -16794,7 +17211,7 @@
                       </m:e>
                       <m:sub>
                         <m:r>
-                          <a:rPr lang="fr-BE" i="1">
+                          <a:rPr lang="fr-BE" sz="2800" i="1">
                             <a:latin typeface="Cambria Math" panose="02040503050406030204" pitchFamily="18" charset="0"/>
                           </a:rPr>
                           <m:t>𝑡</m:t>
@@ -16802,7 +17219,7 @@
                       </m:sub>
                     </m:sSub>
                     <m:r>
-                      <a:rPr lang="fr-BE" i="1">
+                      <a:rPr lang="fr-BE" sz="2800" i="1">
                         <a:latin typeface="Cambria Math" panose="02040503050406030204" pitchFamily="18" charset="0"/>
                       </a:rPr>
                       <m:t>=</m:t>
@@ -16810,14 +17227,14 @@
                     <m:sSub>
                       <m:sSubPr>
                         <m:ctrlPr>
-                          <a:rPr lang="fr-BE" i="1">
+                          <a:rPr lang="fr-BE" sz="2800" i="1">
                             <a:latin typeface="Cambria Math" panose="02040503050406030204" pitchFamily="18" charset="0"/>
                           </a:rPr>
                         </m:ctrlPr>
                       </m:sSubPr>
                       <m:e>
                         <m:r>
-                          <a:rPr lang="fr-BE" i="1">
+                          <a:rPr lang="fr-BE" sz="2800" i="1">
                             <a:latin typeface="Cambria Math" panose="02040503050406030204" pitchFamily="18" charset="0"/>
                           </a:rPr>
                           <m:t>𝑥</m:t>
@@ -16825,7 +17242,7 @@
                       </m:e>
                       <m:sub>
                         <m:r>
-                          <a:rPr lang="fr-BE" i="1">
+                          <a:rPr lang="fr-BE" sz="2800" i="1">
                             <a:latin typeface="Cambria Math" panose="02040503050406030204" pitchFamily="18" charset="0"/>
                           </a:rPr>
                           <m:t>𝑡</m:t>
@@ -16835,13 +17252,13 @@
                   </m:oMath>
                 </a14:m>
                 <a:r>
-                  <a:rPr lang="en-GB" dirty="0"/>
+                  <a:rPr lang="en-GB" sz="2800" dirty="0"/>
                   <a:t>, </a:t>
                 </a:r>
                 <a14:m>
                   <m:oMath xmlns:m="http://schemas.openxmlformats.org/officeDocument/2006/math">
                     <m:r>
-                      <a:rPr lang="fr-BE" i="1">
+                      <a:rPr lang="fr-BE" sz="2800" i="1">
                         <a:latin typeface="Cambria Math" panose="02040503050406030204" pitchFamily="18" charset="0"/>
                       </a:rPr>
                       <m:t>𝑃</m:t>
@@ -16849,26 +17266,26 @@
                     <m:d>
                       <m:dPr>
                         <m:ctrlPr>
-                          <a:rPr lang="fr-BE" i="1">
+                          <a:rPr lang="fr-BE" sz="2800" i="1">
                             <a:latin typeface="Cambria Math" panose="02040503050406030204" pitchFamily="18" charset="0"/>
                           </a:rPr>
                         </m:ctrlPr>
                       </m:dPr>
                       <m:e>
                         <m:r>
-                          <a:rPr lang="fr-BE" i="1">
+                          <a:rPr lang="fr-BE" sz="2800" i="1">
                             <a:latin typeface="Cambria Math" panose="02040503050406030204" pitchFamily="18" charset="0"/>
                           </a:rPr>
                           <m:t>𝐵</m:t>
                         </m:r>
                         <m:r>
-                          <a:rPr lang="fr-BE" b="0" i="1" smtClean="0">
+                          <a:rPr lang="fr-BE" sz="2800" b="0" i="1" smtClean="0">
                             <a:latin typeface="Cambria Math" panose="02040503050406030204" pitchFamily="18" charset="0"/>
                           </a:rPr>
                           <m:t>, </m:t>
                         </m:r>
                         <m:r>
-                          <a:rPr lang="fr-BE" b="0" i="1" smtClean="0">
+                          <a:rPr lang="fr-BE" sz="2800" b="0" i="1" smtClean="0">
                             <a:latin typeface="Cambria Math" panose="02040503050406030204" pitchFamily="18" charset="0"/>
                           </a:rPr>
                           <m:t>𝐹</m:t>
@@ -16878,14 +17295,14 @@
                     <m:sSub>
                       <m:sSubPr>
                         <m:ctrlPr>
-                          <a:rPr lang="fr-BE" i="1">
+                          <a:rPr lang="fr-BE" sz="2800" i="1">
                             <a:latin typeface="Cambria Math" panose="02040503050406030204" pitchFamily="18" charset="0"/>
                           </a:rPr>
                         </m:ctrlPr>
                       </m:sSubPr>
                       <m:e>
                         <m:r>
-                          <a:rPr lang="fr-BE" i="1">
+                          <a:rPr lang="fr-BE" sz="2800" i="1">
                             <a:latin typeface="Cambria Math" panose="02040503050406030204" pitchFamily="18" charset="0"/>
                           </a:rPr>
                           <m:t>𝑦</m:t>
@@ -16893,7 +17310,7 @@
                       </m:e>
                       <m:sub>
                         <m:r>
-                          <a:rPr lang="fr-BE" i="1">
+                          <a:rPr lang="fr-BE" sz="2800" i="1">
                             <a:latin typeface="Cambria Math" panose="02040503050406030204" pitchFamily="18" charset="0"/>
                           </a:rPr>
                           <m:t>𝑡</m:t>
@@ -16901,7 +17318,7 @@
                       </m:sub>
                     </m:sSub>
                     <m:r>
-                      <a:rPr lang="fr-BE" i="1">
+                      <a:rPr lang="fr-BE" sz="2800" i="1">
                         <a:latin typeface="Cambria Math" panose="02040503050406030204" pitchFamily="18" charset="0"/>
                       </a:rPr>
                       <m:t>=</m:t>
@@ -16909,50 +17326,50 @@
                     <m:sSub>
                       <m:sSubPr>
                         <m:ctrlPr>
-                          <a:rPr lang="fr-BE" b="0" i="1" smtClean="0">
+                          <a:rPr lang="fr-BE" sz="2800" b="0" i="1" smtClean="0">
                             <a:latin typeface="Cambria Math" panose="02040503050406030204" pitchFamily="18" charset="0"/>
                           </a:rPr>
                         </m:ctrlPr>
                       </m:sSubPr>
                       <m:e>
                         <m:r>
-                          <a:rPr lang="fr-BE" b="0" i="1" smtClean="0">
+                          <a:rPr lang="fr-BE" sz="2800" b="0" i="1" smtClean="0">
                             <a:latin typeface="Cambria Math" panose="02040503050406030204" pitchFamily="18" charset="0"/>
                           </a:rPr>
                           <m:t>𝑄</m:t>
                         </m:r>
                         <m:r>
-                          <a:rPr lang="fr-BE" b="0" i="1" smtClean="0">
+                          <a:rPr lang="fr-BE" sz="2800" b="0" i="1" smtClean="0">
                             <a:latin typeface="Cambria Math" panose="02040503050406030204" pitchFamily="18" charset="0"/>
                           </a:rPr>
                           <m:t>(</m:t>
                         </m:r>
                         <m:r>
-                          <a:rPr lang="fr-BE" b="0" i="1" smtClean="0">
+                          <a:rPr lang="fr-BE" sz="2800" b="0" i="1" smtClean="0">
                             <a:latin typeface="Cambria Math" panose="02040503050406030204" pitchFamily="18" charset="0"/>
                           </a:rPr>
                           <m:t>𝐵</m:t>
                         </m:r>
                         <m:r>
-                          <a:rPr lang="fr-BE" b="0" i="1" smtClean="0">
+                          <a:rPr lang="fr-BE" sz="2800" b="0" i="1" smtClean="0">
                             <a:latin typeface="Cambria Math" panose="02040503050406030204" pitchFamily="18" charset="0"/>
                           </a:rPr>
                           <m:t>, </m:t>
                         </m:r>
                         <m:r>
-                          <a:rPr lang="fr-BE" b="0" i="1" smtClean="0">
+                          <a:rPr lang="fr-BE" sz="2800" b="0" i="1" smtClean="0">
                             <a:latin typeface="Cambria Math" panose="02040503050406030204" pitchFamily="18" charset="0"/>
                           </a:rPr>
                           <m:t>𝐹</m:t>
                         </m:r>
                         <m:r>
-                          <a:rPr lang="fr-BE" b="0" i="1" smtClean="0">
+                          <a:rPr lang="fr-BE" sz="2800" b="0" i="1" smtClean="0">
                             <a:latin typeface="Cambria Math" panose="02040503050406030204" pitchFamily="18" charset="0"/>
                           </a:rPr>
                           <m:t>)</m:t>
                         </m:r>
                         <m:r>
-                          <a:rPr lang="fr-BE" i="1">
+                          <a:rPr lang="fr-BE" sz="2800" i="1">
                             <a:latin typeface="Cambria Math" panose="02040503050406030204" pitchFamily="18" charset="0"/>
                           </a:rPr>
                           <m:t>𝑥</m:t>
@@ -16960,7 +17377,7 @@
                       </m:e>
                       <m:sub>
                         <m:r>
-                          <a:rPr lang="fr-BE" i="1">
+                          <a:rPr lang="fr-BE" sz="2800" i="1">
                             <a:latin typeface="Cambria Math" panose="02040503050406030204" pitchFamily="18" charset="0"/>
                           </a:rPr>
                           <m:t>𝑡</m:t>
@@ -16969,7 +17386,7 @@
                     </m:sSub>
                   </m:oMath>
                 </a14:m>
-                <a:endParaRPr lang="en-GB" dirty="0"/>
+                <a:endParaRPr lang="en-GB" sz="2800" dirty="0"/>
               </a:p>
               <a:p>
                 <a:pPr lvl="1"/>
@@ -16978,14 +17395,14 @@
                     <m:sSub>
                       <m:sSubPr>
                         <m:ctrlPr>
-                          <a:rPr lang="fr-BE" b="0" i="1" smtClean="0">
+                          <a:rPr lang="fr-BE" sz="2400" b="0" i="1" smtClean="0">
                             <a:latin typeface="Cambria Math" panose="02040503050406030204" pitchFamily="18" charset="0"/>
                           </a:rPr>
                         </m:ctrlPr>
                       </m:sSubPr>
                       <m:e>
                         <m:r>
-                          <a:rPr lang="fr-BE" b="0" i="1" smtClean="0">
+                          <a:rPr lang="fr-BE" sz="2400" b="0" i="1" smtClean="0">
                             <a:latin typeface="Cambria Math" panose="02040503050406030204" pitchFamily="18" charset="0"/>
                           </a:rPr>
                           <m:t>𝑦</m:t>
@@ -16993,7 +17410,7 @@
                       </m:e>
                       <m:sub>
                         <m:r>
-                          <a:rPr lang="fr-BE" b="0" i="1" smtClean="0">
+                          <a:rPr lang="fr-BE" sz="2400" b="0" i="1" smtClean="0">
                             <a:latin typeface="Cambria Math" panose="02040503050406030204" pitchFamily="18" charset="0"/>
                           </a:rPr>
                           <m:t>𝑡</m:t>
@@ -17001,7 +17418,7 @@
                       </m:sub>
                     </m:sSub>
                     <m:r>
-                      <a:rPr lang="fr-BE" b="0" i="1" smtClean="0">
+                      <a:rPr lang="fr-BE" sz="2400" b="0" i="1" smtClean="0">
                         <a:latin typeface="Cambria Math" panose="02040503050406030204" pitchFamily="18" charset="0"/>
                       </a:rPr>
                       <m:t>=</m:t>
@@ -17009,7 +17426,7 @@
                     <m:sSub>
                       <m:sSubPr>
                         <m:ctrlPr>
-                          <a:rPr lang="fr-BE" i="1">
+                          <a:rPr lang="fr-BE" sz="2400" i="1">
                             <a:latin typeface="Cambria Math" panose="02040503050406030204" pitchFamily="18" charset="0"/>
                           </a:rPr>
                         </m:ctrlPr>
@@ -17019,14 +17436,14 @@
                           <m:fPr>
                             <m:type m:val="skw"/>
                             <m:ctrlPr>
-                              <a:rPr lang="fr-BE" i="1">
+                              <a:rPr lang="fr-BE" sz="2400" i="1">
                                 <a:latin typeface="Cambria Math" panose="02040503050406030204" pitchFamily="18" charset="0"/>
                               </a:rPr>
                             </m:ctrlPr>
                           </m:fPr>
                           <m:num>
                             <m:r>
-                              <a:rPr lang="fr-BE" i="1">
+                              <a:rPr lang="fr-BE" sz="2400" i="1">
                                 <a:latin typeface="Cambria Math" panose="02040503050406030204" pitchFamily="18" charset="0"/>
                               </a:rPr>
                               <m:t>1</m:t>
@@ -17034,7 +17451,7 @@
                           </m:num>
                           <m:den>
                             <m:r>
-                              <a:rPr lang="fr-BE" i="1">
+                              <a:rPr lang="fr-BE" sz="2400" i="1">
                                 <a:latin typeface="Cambria Math" panose="02040503050406030204" pitchFamily="18" charset="0"/>
                               </a:rPr>
                               <m:t>3</m:t>
@@ -17042,7 +17459,7 @@
                           </m:den>
                         </m:f>
                         <m:r>
-                          <a:rPr lang="fr-BE" b="0" i="1" smtClean="0">
+                          <a:rPr lang="fr-BE" sz="2400" b="0" i="1" smtClean="0">
                             <a:latin typeface="Cambria Math" panose="02040503050406030204" pitchFamily="18" charset="0"/>
                           </a:rPr>
                           <m:t>𝑥</m:t>
@@ -17050,13 +17467,13 @@
                       </m:e>
                       <m:sub>
                         <m:r>
-                          <a:rPr lang="fr-BE" b="0" i="1" smtClean="0">
+                          <a:rPr lang="fr-BE" sz="2400" b="0" i="1" smtClean="0">
                             <a:latin typeface="Cambria Math" panose="02040503050406030204" pitchFamily="18" charset="0"/>
                           </a:rPr>
                           <m:t>𝑡</m:t>
                         </m:r>
                         <m:r>
-                          <a:rPr lang="fr-BE" b="0" i="1" smtClean="0">
+                          <a:rPr lang="fr-BE" sz="2400" b="0" i="1" smtClean="0">
                             <a:latin typeface="Cambria Math" panose="02040503050406030204" pitchFamily="18" charset="0"/>
                           </a:rPr>
                           <m:t>+1</m:t>
@@ -17064,7 +17481,7 @@
                       </m:sub>
                     </m:sSub>
                     <m:r>
-                      <a:rPr lang="fr-BE" b="0" i="1" smtClean="0">
+                      <a:rPr lang="fr-BE" sz="2400" b="0" i="1" smtClean="0">
                         <a:latin typeface="Cambria Math" panose="02040503050406030204" pitchFamily="18" charset="0"/>
                       </a:rPr>
                       <m:t>+</m:t>
@@ -17073,14 +17490,14 @@
                       <m:fPr>
                         <m:type m:val="skw"/>
                         <m:ctrlPr>
-                          <a:rPr lang="fr-BE" i="1">
+                          <a:rPr lang="fr-BE" sz="2400" i="1">
                             <a:latin typeface="Cambria Math" panose="02040503050406030204" pitchFamily="18" charset="0"/>
                           </a:rPr>
                         </m:ctrlPr>
                       </m:fPr>
                       <m:num>
                         <m:r>
-                          <a:rPr lang="fr-BE" i="1">
+                          <a:rPr lang="fr-BE" sz="2400" i="1">
                             <a:latin typeface="Cambria Math" panose="02040503050406030204" pitchFamily="18" charset="0"/>
                           </a:rPr>
                           <m:t>1</m:t>
@@ -17088,7 +17505,7 @@
                       </m:num>
                       <m:den>
                         <m:r>
-                          <a:rPr lang="fr-BE" i="1">
+                          <a:rPr lang="fr-BE" sz="2400" i="1">
                             <a:latin typeface="Cambria Math" panose="02040503050406030204" pitchFamily="18" charset="0"/>
                           </a:rPr>
                           <m:t>3</m:t>
@@ -17098,14 +17515,14 @@
                     <m:sSub>
                       <m:sSubPr>
                         <m:ctrlPr>
-                          <a:rPr lang="fr-BE" b="0" i="1" smtClean="0">
+                          <a:rPr lang="fr-BE" sz="2400" b="0" i="1" smtClean="0">
                             <a:latin typeface="Cambria Math" panose="02040503050406030204" pitchFamily="18" charset="0"/>
                           </a:rPr>
                         </m:ctrlPr>
                       </m:sSubPr>
                       <m:e>
                         <m:r>
-                          <a:rPr lang="fr-BE" b="0" i="1" smtClean="0">
+                          <a:rPr lang="fr-BE" sz="2400" b="0" i="1" smtClean="0">
                             <a:latin typeface="Cambria Math" panose="02040503050406030204" pitchFamily="18" charset="0"/>
                           </a:rPr>
                           <m:t>𝑥</m:t>
@@ -17113,7 +17530,7 @@
                       </m:e>
                       <m:sub>
                         <m:r>
-                          <a:rPr lang="fr-BE" i="1">
+                          <a:rPr lang="fr-BE" sz="2400" i="1">
                             <a:latin typeface="Cambria Math" panose="02040503050406030204" pitchFamily="18" charset="0"/>
                           </a:rPr>
                           <m:t>𝑡</m:t>
@@ -17121,7 +17538,7 @@
                       </m:sub>
                     </m:sSub>
                     <m:r>
-                      <a:rPr lang="fr-BE" b="0" i="1" smtClean="0">
+                      <a:rPr lang="fr-BE" sz="2400" b="0" i="1" smtClean="0">
                         <a:latin typeface="Cambria Math" panose="02040503050406030204" pitchFamily="18" charset="0"/>
                       </a:rPr>
                       <m:t>+</m:t>
@@ -17130,14 +17547,14 @@
                       <m:fPr>
                         <m:type m:val="skw"/>
                         <m:ctrlPr>
-                          <a:rPr lang="fr-BE" b="0" i="1" smtClean="0">
+                          <a:rPr lang="fr-BE" sz="2400" b="0" i="1" smtClean="0">
                             <a:latin typeface="Cambria Math" panose="02040503050406030204" pitchFamily="18" charset="0"/>
                           </a:rPr>
                         </m:ctrlPr>
                       </m:fPr>
                       <m:num>
                         <m:r>
-                          <a:rPr lang="fr-BE" b="0" i="1" smtClean="0">
+                          <a:rPr lang="fr-BE" sz="2400" b="0" i="1" smtClean="0">
                             <a:latin typeface="Cambria Math" panose="02040503050406030204" pitchFamily="18" charset="0"/>
                           </a:rPr>
                           <m:t>1</m:t>
@@ -17145,7 +17562,7 @@
                       </m:num>
                       <m:den>
                         <m:r>
-                          <a:rPr lang="fr-BE" b="0" i="1" smtClean="0">
+                          <a:rPr lang="fr-BE" sz="2400" b="0" i="1" smtClean="0">
                             <a:latin typeface="Cambria Math" panose="02040503050406030204" pitchFamily="18" charset="0"/>
                           </a:rPr>
                           <m:t>3</m:t>
@@ -17155,14 +17572,14 @@
                     <m:sSub>
                       <m:sSubPr>
                         <m:ctrlPr>
-                          <a:rPr lang="fr-BE" b="0" i="1" smtClean="0">
+                          <a:rPr lang="fr-BE" sz="2400" b="0" i="1" smtClean="0">
                             <a:latin typeface="Cambria Math" panose="02040503050406030204" pitchFamily="18" charset="0"/>
                           </a:rPr>
                         </m:ctrlPr>
                       </m:sSubPr>
                       <m:e>
                         <m:r>
-                          <a:rPr lang="fr-BE" b="0" i="1" smtClean="0">
+                          <a:rPr lang="fr-BE" sz="2400" b="0" i="1" smtClean="0">
                             <a:latin typeface="Cambria Math" panose="02040503050406030204" pitchFamily="18" charset="0"/>
                           </a:rPr>
                           <m:t>𝑥</m:t>
@@ -17170,13 +17587,13 @@
                       </m:e>
                       <m:sub>
                         <m:r>
-                          <a:rPr lang="fr-BE" i="1">
+                          <a:rPr lang="fr-BE" sz="2400" i="1">
                             <a:latin typeface="Cambria Math" panose="02040503050406030204" pitchFamily="18" charset="0"/>
                           </a:rPr>
                           <m:t>𝑡</m:t>
                         </m:r>
                         <m:r>
-                          <a:rPr lang="fr-BE" b="0" i="1" smtClean="0">
+                          <a:rPr lang="fr-BE" sz="2400" b="0" i="1" smtClean="0">
                             <a:latin typeface="Cambria Math" panose="02040503050406030204" pitchFamily="18" charset="0"/>
                           </a:rPr>
                           <m:t>−1</m:t>
@@ -17185,18 +17602,18 @@
                     </m:sSub>
                   </m:oMath>
                 </a14:m>
-                <a:endParaRPr lang="en-GB" dirty="0"/>
+                <a:endParaRPr lang="en-GB" sz="2400" dirty="0"/>
               </a:p>
             </p:txBody>
           </p:sp>
         </mc:Choice>
-        <mc:Fallback xmlns="">
+        <mc:Fallback>
           <p:sp>
             <p:nvSpPr>
               <p:cNvPr id="3" name="Espace réservé du contenu 2">
                 <a:extLst>
                   <a:ext uri="{FF2B5EF4-FFF2-40B4-BE49-F238E27FC236}">
-                    <a16:creationId xmlns:a16="http://schemas.microsoft.com/office/drawing/2014/main" id="{FA2D216B-525D-E32A-3860-2CFBF8223E67}"/>
+                    <a16:creationId xmlns:a16="http://schemas.microsoft.com/office/drawing/2014/main" id="{3C94E51F-5AFA-32B4-9645-9C665D68DC1D}"/>
                   </a:ext>
                 </a:extLst>
               </p:cNvPr>
@@ -17204,14 +17621,18 @@
                 <a:spLocks noGrp="1" noRot="1" noChangeAspect="1" noMove="1" noResize="1" noEditPoints="1" noAdjustHandles="1" noChangeArrowheads="1" noChangeShapeType="1" noTextEdit="1"/>
               </p:cNvSpPr>
               <p:nvPr>
-                <p:ph idx="1"/>
+                <p:ph sz="half" idx="2"/>
               </p:nvPr>
             </p:nvSpPr>
             <p:spPr>
+              <a:xfrm>
+                <a:off x="970722" y="1320799"/>
+                <a:ext cx="10515597" cy="4775327"/>
+              </a:xfrm>
               <a:blipFill>
                 <a:blip r:embed="rId2"/>
                 <a:stretch>
-                  <a:fillRect l="-1043" t="-2101" b="-17507"/>
+                  <a:fillRect l="-754" t="-2299" b="-12644"/>
                 </a:stretch>
               </a:blipFill>
             </p:spPr>
@@ -17235,7 +17656,7 @@
           <p:cNvPr id="5" name="Espace réservé du pied de page 4">
             <a:extLst>
               <a:ext uri="{FF2B5EF4-FFF2-40B4-BE49-F238E27FC236}">
-                <a16:creationId xmlns:a16="http://schemas.microsoft.com/office/drawing/2014/main" id="{39AB89E1-294E-F751-DE65-117B9FF28C78}"/>
+                <a16:creationId xmlns:a16="http://schemas.microsoft.com/office/drawing/2014/main" id="{4D8CD032-FE30-AB77-0471-0EA23EB36C34}"/>
               </a:ext>
             </a:extLst>
           </p:cNvPr>
@@ -17243,10 +17664,15 @@
             <a:spLocks noGrp="1"/>
           </p:cNvSpPr>
           <p:nvPr>
-            <p:ph type="ftr" sz="quarter" idx="11"/>
+            <p:ph type="ftr" sz="quarter" idx="4294967295"/>
           </p:nvPr>
         </p:nvSpPr>
-        <p:spPr/>
+        <p:spPr>
+          <a:xfrm>
+            <a:off x="0" y="0"/>
+            <a:ext cx="0" cy="0"/>
+          </a:xfrm>
+        </p:spPr>
         <p:txBody>
           <a:bodyPr/>
           <a:lstStyle/>
@@ -17258,10 +17684,40 @@
           </a:p>
         </p:txBody>
       </p:sp>
+      <p:sp>
+        <p:nvSpPr>
+          <p:cNvPr id="4" name="Espace réservé du numéro de diapositive 3">
+            <a:extLst>
+              <a:ext uri="{FF2B5EF4-FFF2-40B4-BE49-F238E27FC236}">
+                <a16:creationId xmlns:a16="http://schemas.microsoft.com/office/drawing/2014/main" id="{FD5DB650-6774-4CEE-8A91-1A43DBF93440}"/>
+              </a:ext>
+            </a:extLst>
+          </p:cNvPr>
+          <p:cNvSpPr>
+            <a:spLocks noGrp="1"/>
+          </p:cNvSpPr>
+          <p:nvPr>
+            <p:ph type="sldNum" idx="12"/>
+          </p:nvPr>
+        </p:nvSpPr>
+        <p:spPr/>
+        <p:txBody>
+          <a:bodyPr/>
+          <a:lstStyle/>
+          <a:p>
+            <a:fld id="{00000000-1234-1234-1234-123412341234}" type="slidenum">
+              <a:rPr lang="en-GB" smtClean="0"/>
+              <a:pPr/>
+              <a:t>6</a:t>
+            </a:fld>
+            <a:endParaRPr lang="en-GB"/>
+          </a:p>
+        </p:txBody>
+      </p:sp>
     </p:spTree>
     <p:extLst>
       <p:ext uri="{BB962C8B-B14F-4D97-AF65-F5344CB8AC3E}">
-        <p14:creationId xmlns:p14="http://schemas.microsoft.com/office/powerpoint/2010/main" val="2410907403"/>
+        <p14:creationId xmlns:p14="http://schemas.microsoft.com/office/powerpoint/2010/main" val="4064315755"/>
       </p:ext>
     </p:extLst>
   </p:cSld>
@@ -17337,8 +17793,8 @@
           </a:p>
         </p:txBody>
       </p:sp>
-      <mc:AlternateContent xmlns:mc="http://schemas.openxmlformats.org/markup-compatibility/2006" xmlns:a14="http://schemas.microsoft.com/office/drawing/2010/main">
-        <mc:Choice Requires="a14">
+      <mc:AlternateContent xmlns:mc="http://schemas.openxmlformats.org/markup-compatibility/2006">
+        <mc:Choice xmlns:a14="http://schemas.microsoft.com/office/drawing/2010/main" Requires="a14">
           <p:sp>
             <p:nvSpPr>
               <p:cNvPr id="3" name="Espace réservé du contenu 2">
@@ -17352,7 +17808,7 @@
                 <a:spLocks noGrp="1"/>
               </p:cNvSpPr>
               <p:nvPr>
-                <p:ph idx="1"/>
+                <p:ph sz="half" idx="2"/>
               </p:nvPr>
             </p:nvSpPr>
             <p:spPr/>
@@ -17361,10 +17817,10 @@
               <a:lstStyle/>
               <a:p>
                 <a:r>
-                  <a:rPr lang="en-GB" dirty="0"/>
+                  <a:rPr lang="en-GB" sz="2800" dirty="0"/>
                   <a:t>Filter: </a:t>
                 </a:r>
-                <a:endParaRPr lang="fr-BE" i="1" dirty="0">
+                <a:endParaRPr lang="fr-BE" sz="2800" i="1" dirty="0">
                   <a:latin typeface="Cambria Math" panose="02040503050406030204" pitchFamily="18" charset="0"/>
                 </a:endParaRPr>
               </a:p>
@@ -17378,14 +17834,14 @@
                       <m:sSub>
                         <m:sSubPr>
                           <m:ctrlPr>
-                            <a:rPr lang="fr-BE" b="0" i="1" smtClean="0">
+                            <a:rPr lang="fr-BE" sz="2800" b="0" i="1" smtClean="0">
                               <a:latin typeface="Cambria Math" panose="02040503050406030204" pitchFamily="18" charset="0"/>
                             </a:rPr>
                           </m:ctrlPr>
                         </m:sSubPr>
                         <m:e>
                           <m:r>
-                            <a:rPr lang="fr-BE" b="0" i="1" smtClean="0">
+                            <a:rPr lang="fr-BE" sz="2800" b="0" i="1" smtClean="0">
                               <a:latin typeface="Cambria Math" panose="02040503050406030204" pitchFamily="18" charset="0"/>
                             </a:rPr>
                             <m:t>𝑦</m:t>
@@ -17393,7 +17849,7 @@
                         </m:e>
                         <m:sub>
                           <m:r>
-                            <a:rPr lang="fr-BE" b="0" i="1" smtClean="0">
+                            <a:rPr lang="fr-BE" sz="2800" b="0" i="1" smtClean="0">
                               <a:latin typeface="Cambria Math" panose="02040503050406030204" pitchFamily="18" charset="0"/>
                             </a:rPr>
                             <m:t>𝑡</m:t>
@@ -17401,7 +17857,7 @@
                         </m:sub>
                       </m:sSub>
                       <m:r>
-                        <a:rPr lang="fr-BE" b="0" i="1" smtClean="0">
+                        <a:rPr lang="fr-BE" sz="2800" b="0" i="1" smtClean="0">
                           <a:latin typeface="Cambria Math" panose="02040503050406030204" pitchFamily="18" charset="0"/>
                         </a:rPr>
                         <m:t>=</m:t>
@@ -17410,20 +17866,20 @@
                         <m:naryPr>
                           <m:chr m:val="∑"/>
                           <m:ctrlPr>
-                            <a:rPr lang="fr-BE" b="0" i="1" smtClean="0">
+                            <a:rPr lang="fr-BE" sz="2800" b="0" i="1" smtClean="0">
                               <a:latin typeface="Cambria Math" panose="02040503050406030204" pitchFamily="18" charset="0"/>
                             </a:rPr>
                           </m:ctrlPr>
                         </m:naryPr>
                         <m:sub>
                           <m:r>
-                            <a:rPr lang="fr-BE" b="0" i="1" smtClean="0">
+                            <a:rPr lang="fr-BE" sz="2800" b="0" i="1" smtClean="0">
                               <a:latin typeface="Cambria Math" panose="02040503050406030204" pitchFamily="18" charset="0"/>
                             </a:rPr>
                             <m:t>𝑗</m:t>
                           </m:r>
                           <m:r>
-                            <a:rPr lang="fr-BE" b="0" i="1" smtClean="0">
+                            <a:rPr lang="fr-BE" sz="2800" b="0" i="1" smtClean="0">
                               <a:latin typeface="Cambria Math" panose="02040503050406030204" pitchFamily="18" charset="0"/>
                             </a:rPr>
                             <m:t>=−∞</m:t>
@@ -17431,13 +17887,13 @@
                         </m:sub>
                         <m:sup>
                           <m:r>
-                            <a:rPr lang="fr-BE" b="0" i="1" smtClean="0">
+                            <a:rPr lang="fr-BE" sz="2800" b="0" i="1" smtClean="0">
                               <a:latin typeface="Cambria Math" panose="02040503050406030204" pitchFamily="18" charset="0"/>
                             </a:rPr>
                             <m:t>+</m:t>
                           </m:r>
                           <m:r>
-                            <a:rPr lang="fr-BE" b="0" i="1" smtClean="0">
+                            <a:rPr lang="fr-BE" sz="2800" b="0" i="1" smtClean="0">
                               <a:latin typeface="Cambria Math" panose="02040503050406030204" pitchFamily="18" charset="0"/>
                               <a:ea typeface="Cambria Math" panose="02040503050406030204" pitchFamily="18" charset="0"/>
                             </a:rPr>
@@ -17448,7 +17904,7 @@
                           <m:sSub>
                             <m:sSubPr>
                               <m:ctrlPr>
-                                <a:rPr lang="fr-BE" b="0" i="1" smtClean="0">
+                                <a:rPr lang="fr-BE" sz="2800" b="0" i="1" smtClean="0">
                                   <a:latin typeface="Cambria Math" panose="02040503050406030204" pitchFamily="18" charset="0"/>
                                   <a:ea typeface="Cambria Math" panose="02040503050406030204" pitchFamily="18" charset="0"/>
                                 </a:rPr>
@@ -17456,7 +17912,7 @@
                             </m:sSubPr>
                             <m:e>
                               <m:r>
-                                <a:rPr lang="fr-BE" b="0" i="1" smtClean="0">
+                                <a:rPr lang="fr-BE" sz="2800" b="0" i="1" smtClean="0">
                                   <a:latin typeface="Cambria Math" panose="02040503050406030204" pitchFamily="18" charset="0"/>
                                   <a:ea typeface="Cambria Math" panose="02040503050406030204" pitchFamily="18" charset="0"/>
                                 </a:rPr>
@@ -17465,7 +17921,7 @@
                             </m:e>
                             <m:sub>
                               <m:r>
-                                <a:rPr lang="fr-BE" b="0" i="1" smtClean="0">
+                                <a:rPr lang="fr-BE" sz="2800" b="0" i="1" smtClean="0">
                                   <a:latin typeface="Cambria Math" panose="02040503050406030204" pitchFamily="18" charset="0"/>
                                   <a:ea typeface="Cambria Math" panose="02040503050406030204" pitchFamily="18" charset="0"/>
                                 </a:rPr>
@@ -17476,14 +17932,14 @@
                           <m:sSub>
                             <m:sSubPr>
                               <m:ctrlPr>
-                                <a:rPr lang="fr-BE" b="0" i="1" smtClean="0">
+                                <a:rPr lang="fr-BE" sz="2800" b="0" i="1" smtClean="0">
                                   <a:latin typeface="Cambria Math" panose="02040503050406030204" pitchFamily="18" charset="0"/>
                                 </a:rPr>
                               </m:ctrlPr>
                             </m:sSubPr>
                             <m:e>
                               <m:r>
-                                <a:rPr lang="fr-BE" b="0" i="1" smtClean="0">
+                                <a:rPr lang="fr-BE" sz="2800" b="0" i="1" smtClean="0">
                                   <a:latin typeface="Cambria Math" panose="02040503050406030204" pitchFamily="18" charset="0"/>
                                 </a:rPr>
                                 <m:t>𝑥</m:t>
@@ -17491,19 +17947,19 @@
                             </m:e>
                             <m:sub>
                               <m:r>
-                                <a:rPr lang="fr-BE" b="0" i="1" smtClean="0">
+                                <a:rPr lang="fr-BE" sz="2800" b="0" i="1" smtClean="0">
                                   <a:latin typeface="Cambria Math" panose="02040503050406030204" pitchFamily="18" charset="0"/>
                                 </a:rPr>
                                 <m:t>𝑡</m:t>
                               </m:r>
                               <m:r>
-                                <a:rPr lang="fr-BE" b="0" i="1" smtClean="0">
+                                <a:rPr lang="fr-BE" sz="2800" b="0" i="1" smtClean="0">
                                   <a:latin typeface="Cambria Math" panose="02040503050406030204" pitchFamily="18" charset="0"/>
                                 </a:rPr>
                                 <m:t>−</m:t>
                               </m:r>
                               <m:r>
-                                <a:rPr lang="fr-BE" b="0" i="1" smtClean="0">
+                                <a:rPr lang="fr-BE" sz="2800" b="0" i="1" smtClean="0">
                                   <a:latin typeface="Cambria Math" panose="02040503050406030204" pitchFamily="18" charset="0"/>
                                 </a:rPr>
                                 <m:t>𝑗</m:t>
@@ -17515,19 +17971,19 @@
                     </m:oMath>
                   </m:oMathPara>
                 </a14:m>
-                <a:endParaRPr lang="fr-BE" dirty="0"/>
+                <a:endParaRPr lang="fr-BE" sz="2800" dirty="0"/>
               </a:p>
               <a:p>
                 <a:r>
-                  <a:rPr lang="fr-BE" dirty="0"/>
+                  <a:rPr lang="fr-BE" sz="2800" dirty="0"/>
                   <a:t>Frequency </a:t>
                 </a:r>
                 <a:r>
-                  <a:rPr lang="fr-BE" dirty="0" err="1"/>
+                  <a:rPr lang="fr-BE" sz="2800" dirty="0" err="1"/>
                   <a:t>response</a:t>
                 </a:r>
                 <a:r>
-                  <a:rPr lang="fr-BE" dirty="0"/>
+                  <a:rPr lang="fr-BE" sz="2800" dirty="0"/>
                   <a:t>:</a:t>
                 </a:r>
               </a:p>
@@ -17539,26 +17995,26 @@
                   <m:oMathPara xmlns:m="http://schemas.openxmlformats.org/officeDocument/2006/math">
                     <m:oMath>
                       <m:r>
-                        <a:rPr lang="fr-BE" i="1" smtClean="0">
+                        <a:rPr lang="fr-BE" sz="2800" i="1" smtClean="0">
                           <a:latin typeface="Cambria Math" panose="02040503050406030204" pitchFamily="18" charset="0"/>
                         </a:rPr>
                         <m:t>𝐹</m:t>
                       </m:r>
                       <m:r>
-                        <a:rPr lang="fr-BE" b="0" i="1" smtClean="0">
+                        <a:rPr lang="fr-BE" sz="2800" b="0" i="1" smtClean="0">
                           <a:latin typeface="Cambria Math" panose="02040503050406030204" pitchFamily="18" charset="0"/>
                         </a:rPr>
                         <m:t>(</m:t>
                       </m:r>
                       <m:r>
-                        <a:rPr lang="fr-BE" b="0" i="1" smtClean="0">
+                        <a:rPr lang="fr-BE" sz="2800" b="0" i="1" smtClean="0">
                           <a:latin typeface="Cambria Math" panose="02040503050406030204" pitchFamily="18" charset="0"/>
                           <a:ea typeface="Cambria Math" panose="02040503050406030204" pitchFamily="18" charset="0"/>
                         </a:rPr>
                         <m:t>𝜔</m:t>
                       </m:r>
                       <m:r>
-                        <a:rPr lang="fr-BE" b="0" i="1" smtClean="0">
+                        <a:rPr lang="fr-BE" sz="2800" b="0" i="1" smtClean="0">
                           <a:latin typeface="Cambria Math" panose="02040503050406030204" pitchFamily="18" charset="0"/>
                           <a:ea typeface="Cambria Math" panose="02040503050406030204" pitchFamily="18" charset="0"/>
                         </a:rPr>
@@ -17568,20 +18024,20 @@
                         <m:naryPr>
                           <m:chr m:val="∑"/>
                           <m:ctrlPr>
-                            <a:rPr lang="fr-BE" b="0" i="1" smtClean="0">
+                            <a:rPr lang="fr-BE" sz="2800" b="0" i="1" smtClean="0">
                               <a:latin typeface="Cambria Math" panose="02040503050406030204" pitchFamily="18" charset="0"/>
                             </a:rPr>
                           </m:ctrlPr>
                         </m:naryPr>
                         <m:sub>
                           <m:r>
-                            <a:rPr lang="fr-BE" b="0" i="1" smtClean="0">
+                            <a:rPr lang="fr-BE" sz="2800" b="0" i="1" smtClean="0">
                               <a:latin typeface="Cambria Math" panose="02040503050406030204" pitchFamily="18" charset="0"/>
                             </a:rPr>
                             <m:t>𝑗</m:t>
                           </m:r>
                           <m:r>
-                            <a:rPr lang="fr-BE" b="0" i="1" smtClean="0">
+                            <a:rPr lang="fr-BE" sz="2800" b="0" i="1" smtClean="0">
                               <a:latin typeface="Cambria Math" panose="02040503050406030204" pitchFamily="18" charset="0"/>
                             </a:rPr>
                             <m:t>=−∞</m:t>
@@ -17589,13 +18045,13 @@
                         </m:sub>
                         <m:sup>
                           <m:r>
-                            <a:rPr lang="fr-BE" b="0" i="1" smtClean="0">
+                            <a:rPr lang="fr-BE" sz="2800" b="0" i="1" smtClean="0">
                               <a:latin typeface="Cambria Math" panose="02040503050406030204" pitchFamily="18" charset="0"/>
                             </a:rPr>
                             <m:t>+</m:t>
                           </m:r>
                           <m:r>
-                            <a:rPr lang="fr-BE" b="0" i="1" smtClean="0">
+                            <a:rPr lang="fr-BE" sz="2800" b="0" i="1" smtClean="0">
                               <a:latin typeface="Cambria Math" panose="02040503050406030204" pitchFamily="18" charset="0"/>
                               <a:ea typeface="Cambria Math" panose="02040503050406030204" pitchFamily="18" charset="0"/>
                             </a:rPr>
@@ -17606,7 +18062,7 @@
                           <m:sSub>
                             <m:sSubPr>
                               <m:ctrlPr>
-                                <a:rPr lang="fr-BE" b="0" i="1" smtClean="0">
+                                <a:rPr lang="fr-BE" sz="2800" b="0" i="1" smtClean="0">
                                   <a:latin typeface="Cambria Math" panose="02040503050406030204" pitchFamily="18" charset="0"/>
                                   <a:ea typeface="Cambria Math" panose="02040503050406030204" pitchFamily="18" charset="0"/>
                                 </a:rPr>
@@ -17614,7 +18070,7 @@
                             </m:sSubPr>
                             <m:e>
                               <m:r>
-                                <a:rPr lang="fr-BE" b="0" i="1" smtClean="0">
+                                <a:rPr lang="fr-BE" sz="2800" b="0" i="1" smtClean="0">
                                   <a:latin typeface="Cambria Math" panose="02040503050406030204" pitchFamily="18" charset="0"/>
                                   <a:ea typeface="Cambria Math" panose="02040503050406030204" pitchFamily="18" charset="0"/>
                                 </a:rPr>
@@ -17623,7 +18079,7 @@
                             </m:e>
                             <m:sub>
                               <m:r>
-                                <a:rPr lang="fr-BE" b="0" i="1" smtClean="0">
+                                <a:rPr lang="fr-BE" sz="2800" b="0" i="1" smtClean="0">
                                   <a:latin typeface="Cambria Math" panose="02040503050406030204" pitchFamily="18" charset="0"/>
                                   <a:ea typeface="Cambria Math" panose="02040503050406030204" pitchFamily="18" charset="0"/>
                                 </a:rPr>
@@ -17634,14 +18090,14 @@
                           <m:sSup>
                             <m:sSupPr>
                               <m:ctrlPr>
-                                <a:rPr lang="fr-BE" i="1">
+                                <a:rPr lang="fr-BE" sz="2800" i="1">
                                   <a:latin typeface="Cambria Math" panose="02040503050406030204" pitchFamily="18" charset="0"/>
                                 </a:rPr>
                               </m:ctrlPr>
                             </m:sSupPr>
                             <m:e>
                               <m:r>
-                                <a:rPr lang="fr-BE" i="1">
+                                <a:rPr lang="fr-BE" sz="2800" i="1">
                                   <a:latin typeface="Cambria Math" panose="02040503050406030204" pitchFamily="18" charset="0"/>
                                 </a:rPr>
                                 <m:t>𝑒</m:t>
@@ -17649,26 +18105,26 @@
                             </m:e>
                             <m:sup>
                               <m:r>
-                                <a:rPr lang="fr-BE" b="0" i="1" smtClean="0">
+                                <a:rPr lang="fr-BE" sz="2800" b="0" i="1" smtClean="0">
                                   <a:latin typeface="Cambria Math" panose="02040503050406030204" pitchFamily="18" charset="0"/>
                                 </a:rPr>
                                 <m:t>−</m:t>
                               </m:r>
                               <m:r>
-                                <a:rPr lang="fr-BE" b="0" i="1" smtClean="0">
+                                <a:rPr lang="fr-BE" sz="2800" b="0" i="1" smtClean="0">
                                   <a:latin typeface="Cambria Math" panose="02040503050406030204" pitchFamily="18" charset="0"/>
                                 </a:rPr>
                                 <m:t>𝑖</m:t>
                               </m:r>
                               <m:r>
-                                <a:rPr lang="fr-BE" i="1">
+                                <a:rPr lang="fr-BE" sz="2800" i="1">
                                   <a:latin typeface="Cambria Math" panose="02040503050406030204" pitchFamily="18" charset="0"/>
                                   <a:ea typeface="Cambria Math" panose="02040503050406030204" pitchFamily="18" charset="0"/>
                                 </a:rPr>
                                 <m:t>𝜔</m:t>
                               </m:r>
                               <m:r>
-                                <a:rPr lang="fr-BE" b="0" i="1" smtClean="0">
+                                <a:rPr lang="fr-BE" sz="2800" b="0" i="1" smtClean="0">
                                   <a:latin typeface="Cambria Math" panose="02040503050406030204" pitchFamily="18" charset="0"/>
                                   <a:ea typeface="Cambria Math" panose="02040503050406030204" pitchFamily="18" charset="0"/>
                                 </a:rPr>
@@ -17681,11 +18137,11 @@
                     </m:oMath>
                   </m:oMathPara>
                 </a14:m>
-                <a:endParaRPr lang="fr-BE" dirty="0"/>
+                <a:endParaRPr lang="fr-BE" sz="2800" dirty="0"/>
               </a:p>
               <a:p>
                 <a:r>
-                  <a:rPr lang="fr-BE" dirty="0"/>
+                  <a:rPr lang="fr-BE" sz="2800" dirty="0"/>
                   <a:t>Gain, phase</a:t>
                 </a:r>
               </a:p>
@@ -17694,7 +18150,7 @@
                   <a:buNone/>
                 </a:pPr>
                 <a:r>
-                  <a:rPr lang="en-GB" dirty="0"/>
+                  <a:rPr lang="en-GB" sz="2400" dirty="0"/>
                   <a:t>|</a:t>
                 </a:r>
                 <a14:m>
@@ -17702,14 +18158,14 @@
                     <m:sSub>
                       <m:sSubPr>
                         <m:ctrlPr>
-                          <a:rPr lang="fr-BE" b="0" i="1" smtClean="0">
+                          <a:rPr lang="fr-BE" sz="2400" b="0" i="1" smtClean="0">
                             <a:latin typeface="Cambria Math" panose="02040503050406030204" pitchFamily="18" charset="0"/>
                           </a:rPr>
                         </m:ctrlPr>
                       </m:sSubPr>
                       <m:e>
                         <m:r>
-                          <a:rPr lang="fr-BE" b="0" i="1" smtClean="0">
+                          <a:rPr lang="fr-BE" sz="2400" b="0" i="1" smtClean="0">
                             <a:latin typeface="Cambria Math" panose="02040503050406030204" pitchFamily="18" charset="0"/>
                           </a:rPr>
                           <m:t>𝐹</m:t>
@@ -17717,7 +18173,7 @@
                       </m:e>
                       <m:sub>
                         <m:r>
-                          <a:rPr lang="fr-BE" b="0" i="1" smtClean="0">
+                          <a:rPr lang="fr-BE" sz="2400" b="0" i="1" smtClean="0">
                             <a:latin typeface="Cambria Math" panose="02040503050406030204" pitchFamily="18" charset="0"/>
                           </a:rPr>
                           <m:t>𝑡</m:t>
@@ -17727,7 +18183,7 @@
                     <m:d>
                       <m:dPr>
                         <m:ctrlPr>
-                          <a:rPr lang="fr-BE" b="0" i="1" smtClean="0">
+                          <a:rPr lang="fr-BE" sz="2400" b="0" i="1" smtClean="0">
                             <a:latin typeface="Cambria Math" panose="02040503050406030204" pitchFamily="18" charset="0"/>
                             <a:ea typeface="Cambria Math" panose="02040503050406030204" pitchFamily="18" charset="0"/>
                           </a:rPr>
@@ -17735,7 +18191,7 @@
                       </m:dPr>
                       <m:e>
                         <m:r>
-                          <a:rPr lang="fr-BE" b="0" i="1" smtClean="0">
+                          <a:rPr lang="fr-BE" sz="2400" b="0" i="1" smtClean="0">
                             <a:latin typeface="Cambria Math" panose="02040503050406030204" pitchFamily="18" charset="0"/>
                             <a:ea typeface="Cambria Math" panose="02040503050406030204" pitchFamily="18" charset="0"/>
                           </a:rPr>
@@ -17744,7 +18200,7 @@
                       </m:e>
                     </m:d>
                     <m:r>
-                      <a:rPr lang="fr-BE" b="0" i="1" smtClean="0">
+                      <a:rPr lang="fr-BE" sz="2400" b="0" i="1" smtClean="0">
                         <a:latin typeface="Cambria Math" panose="02040503050406030204" pitchFamily="18" charset="0"/>
                         <a:ea typeface="Cambria Math" panose="02040503050406030204" pitchFamily="18" charset="0"/>
                       </a:rPr>
@@ -17754,14 +18210,14 @@
                       <m:rPr>
                         <m:sty m:val="p"/>
                       </m:rPr>
-                      <a:rPr lang="fr-BE" b="0" i="0" smtClean="0">
+                      <a:rPr lang="fr-BE" sz="2400" b="0" i="0" smtClean="0">
                         <a:latin typeface="Cambria Math" panose="02040503050406030204" pitchFamily="18" charset="0"/>
                         <a:ea typeface="Cambria Math" panose="02040503050406030204" pitchFamily="18" charset="0"/>
                       </a:rPr>
                       <m:t>arg</m:t>
                     </m:r>
                     <m:r>
-                      <a:rPr lang="fr-BE" b="0" i="1" smtClean="0">
+                      <a:rPr lang="fr-BE" sz="2400" b="0" i="1" smtClean="0">
                         <a:latin typeface="Cambria Math" panose="02040503050406030204" pitchFamily="18" charset="0"/>
                         <a:ea typeface="Cambria Math" panose="02040503050406030204" pitchFamily="18" charset="0"/>
                       </a:rPr>
@@ -17770,14 +18226,14 @@
                     <m:sSub>
                       <m:sSubPr>
                         <m:ctrlPr>
-                          <a:rPr lang="fr-BE" i="1">
+                          <a:rPr lang="fr-BE" sz="2400" i="1">
                             <a:latin typeface="Cambria Math" panose="02040503050406030204" pitchFamily="18" charset="0"/>
                           </a:rPr>
                         </m:ctrlPr>
                       </m:sSubPr>
                       <m:e>
                         <m:r>
-                          <a:rPr lang="fr-BE" i="1">
+                          <a:rPr lang="fr-BE" sz="2400" i="1">
                             <a:latin typeface="Cambria Math" panose="02040503050406030204" pitchFamily="18" charset="0"/>
                           </a:rPr>
                           <m:t>𝐹</m:t>
@@ -17785,7 +18241,7 @@
                       </m:e>
                       <m:sub>
                         <m:r>
-                          <a:rPr lang="fr-BE" i="1">
+                          <a:rPr lang="fr-BE" sz="2400" i="1">
                             <a:latin typeface="Cambria Math" panose="02040503050406030204" pitchFamily="18" charset="0"/>
                           </a:rPr>
                           <m:t>𝑡</m:t>
@@ -17795,7 +18251,7 @@
                     <m:d>
                       <m:dPr>
                         <m:ctrlPr>
-                          <a:rPr lang="fr-BE" i="1">
+                          <a:rPr lang="fr-BE" sz="2400" i="1">
                             <a:latin typeface="Cambria Math" panose="02040503050406030204" pitchFamily="18" charset="0"/>
                             <a:ea typeface="Cambria Math" panose="02040503050406030204" pitchFamily="18" charset="0"/>
                           </a:rPr>
@@ -17803,7 +18259,7 @@
                       </m:dPr>
                       <m:e>
                         <m:r>
-                          <a:rPr lang="fr-BE" i="1">
+                          <a:rPr lang="fr-BE" sz="2400" i="1">
                             <a:latin typeface="Cambria Math" panose="02040503050406030204" pitchFamily="18" charset="0"/>
                             <a:ea typeface="Cambria Math" panose="02040503050406030204" pitchFamily="18" charset="0"/>
                           </a:rPr>
@@ -17813,10 +18269,10 @@
                     </m:d>
                   </m:oMath>
                 </a14:m>
-                <a:endParaRPr lang="fr-BE" dirty="0"/>
+                <a:endParaRPr lang="fr-BE" sz="2400" dirty="0"/>
               </a:p>
               <a:p>
-                <a:endParaRPr lang="fr-BE" dirty="0"/>
+                <a:endParaRPr lang="fr-BE" sz="2800" dirty="0"/>
               </a:p>
               <a:p>
                 <a:endParaRPr lang="fr-BE" dirty="0"/>
@@ -17827,7 +18283,7 @@
             </p:txBody>
           </p:sp>
         </mc:Choice>
-        <mc:Fallback xmlns="">
+        <mc:Fallback>
           <p:sp>
             <p:nvSpPr>
               <p:cNvPr id="3" name="Espace réservé du contenu 2">
@@ -17841,14 +18297,14 @@
                 <a:spLocks noGrp="1" noRot="1" noChangeAspect="1" noMove="1" noResize="1" noEditPoints="1" noAdjustHandles="1" noChangeArrowheads="1" noChangeShapeType="1" noTextEdit="1"/>
               </p:cNvSpPr>
               <p:nvPr>
-                <p:ph idx="1"/>
+                <p:ph sz="half" idx="2"/>
               </p:nvPr>
             </p:nvSpPr>
             <p:spPr>
               <a:blipFill>
                 <a:blip r:embed="rId2"/>
                 <a:stretch>
-                  <a:fillRect l="-1043" t="-2241"/>
+                  <a:fillRect l="-754" t="-1974"/>
                 </a:stretch>
               </a:blipFill>
             </p:spPr>
@@ -17880,10 +18336,15 @@
             <a:spLocks noGrp="1"/>
           </p:cNvSpPr>
           <p:nvPr>
-            <p:ph type="ftr" sz="quarter" idx="11"/>
+            <p:ph type="ftr" sz="quarter" idx="4294967295"/>
           </p:nvPr>
         </p:nvSpPr>
-        <p:spPr/>
+        <p:spPr>
+          <a:xfrm>
+            <a:off x="0" y="0"/>
+            <a:ext cx="0" cy="0"/>
+          </a:xfrm>
+        </p:spPr>
         <p:txBody>
           <a:bodyPr/>
           <a:lstStyle/>
@@ -17892,6 +18353,36 @@
               <a:rPr lang="en-GB"/>
               <a:t>Time Series</a:t>
             </a:r>
+          </a:p>
+        </p:txBody>
+      </p:sp>
+      <p:sp>
+        <p:nvSpPr>
+          <p:cNvPr id="4" name="Espace réservé du numéro de diapositive 3">
+            <a:extLst>
+              <a:ext uri="{FF2B5EF4-FFF2-40B4-BE49-F238E27FC236}">
+                <a16:creationId xmlns:a16="http://schemas.microsoft.com/office/drawing/2014/main" id="{5E7C3401-7E2A-BED3-7424-3505A758F1FC}"/>
+              </a:ext>
+            </a:extLst>
+          </p:cNvPr>
+          <p:cNvSpPr>
+            <a:spLocks noGrp="1"/>
+          </p:cNvSpPr>
+          <p:nvPr>
+            <p:ph type="sldNum" idx="12"/>
+          </p:nvPr>
+        </p:nvSpPr>
+        <p:spPr/>
+        <p:txBody>
+          <a:bodyPr/>
+          <a:lstStyle/>
+          <a:p>
+            <a:fld id="{00000000-1234-1234-1234-123412341234}" type="slidenum">
+              <a:rPr lang="en-GB" smtClean="0"/>
+              <a:pPr/>
+              <a:t>7</a:t>
+            </a:fld>
+            <a:endParaRPr lang="en-GB"/>
           </a:p>
         </p:txBody>
       </p:sp>
@@ -18239,6 +18730,35 @@
           </a:prstGeom>
         </p:spPr>
       </p:pic>
+      <p:sp>
+        <p:nvSpPr>
+          <p:cNvPr id="4" name="Espace réservé du numéro de diapositive 3">
+            <a:extLst>
+              <a:ext uri="{FF2B5EF4-FFF2-40B4-BE49-F238E27FC236}">
+                <a16:creationId xmlns:a16="http://schemas.microsoft.com/office/drawing/2014/main" id="{CFC8EC61-861F-7E48-9740-55292BB50B76}"/>
+              </a:ext>
+            </a:extLst>
+          </p:cNvPr>
+          <p:cNvSpPr>
+            <a:spLocks noGrp="1"/>
+          </p:cNvSpPr>
+          <p:nvPr>
+            <p:ph type="sldNum" sz="quarter" idx="12"/>
+          </p:nvPr>
+        </p:nvSpPr>
+        <p:spPr/>
+        <p:txBody>
+          <a:bodyPr/>
+          <a:lstStyle/>
+          <a:p>
+            <a:fld id="{71CC62B1-FA1F-4849-B719-012F8D8A46B3}" type="slidenum">
+              <a:rPr lang="en-GB" smtClean="0"/>
+              <a:t>8</a:t>
+            </a:fld>
+            <a:endParaRPr lang="en-GB"/>
+          </a:p>
+        </p:txBody>
+      </p:sp>
     </p:spTree>
     <p:extLst>
       <p:ext uri="{BB962C8B-B14F-4D97-AF65-F5344CB8AC3E}">
@@ -18297,8 +18817,8 @@
           </a:p>
         </p:txBody>
       </p:sp>
-      <mc:AlternateContent xmlns:mc="http://schemas.openxmlformats.org/markup-compatibility/2006" xmlns:a14="http://schemas.microsoft.com/office/drawing/2010/main">
-        <mc:Choice Requires="a14">
+      <mc:AlternateContent xmlns:mc="http://schemas.openxmlformats.org/markup-compatibility/2006">
+        <mc:Choice xmlns:a14="http://schemas.microsoft.com/office/drawing/2010/main" Requires="a14">
           <p:sp>
             <p:nvSpPr>
               <p:cNvPr id="3" name="Content Placeholder 2">
@@ -18583,7 +19103,7 @@
             </p:txBody>
           </p:sp>
         </mc:Choice>
-        <mc:Fallback xmlns="">
+        <mc:Fallback>
           <p:sp>
             <p:nvSpPr>
               <p:cNvPr id="3" name="Content Placeholder 2">
@@ -18651,6 +19171,35 @@
           </a:p>
         </p:txBody>
       </p:sp>
+      <p:sp>
+        <p:nvSpPr>
+          <p:cNvPr id="4" name="Espace réservé du numéro de diapositive 3">
+            <a:extLst>
+              <a:ext uri="{FF2B5EF4-FFF2-40B4-BE49-F238E27FC236}">
+                <a16:creationId xmlns:a16="http://schemas.microsoft.com/office/drawing/2014/main" id="{97D4F089-3EFB-24DC-24F0-6DCC0815AD66}"/>
+              </a:ext>
+            </a:extLst>
+          </p:cNvPr>
+          <p:cNvSpPr>
+            <a:spLocks noGrp="1"/>
+          </p:cNvSpPr>
+          <p:nvPr>
+            <p:ph type="sldNum" sz="quarter" idx="12"/>
+          </p:nvPr>
+        </p:nvSpPr>
+        <p:spPr/>
+        <p:txBody>
+          <a:bodyPr/>
+          <a:lstStyle/>
+          <a:p>
+            <a:fld id="{71CC62B1-FA1F-4849-B719-012F8D8A46B3}" type="slidenum">
+              <a:rPr lang="en-GB" smtClean="0"/>
+              <a:t>9</a:t>
+            </a:fld>
+            <a:endParaRPr lang="en-GB"/>
+          </a:p>
+        </p:txBody>
+      </p:sp>
     </p:spTree>
     <p:extLst>
       <p:ext uri="{BB962C8B-B14F-4D97-AF65-F5344CB8AC3E}">
@@ -18714,22 +19263,22 @@
         <a:srgbClr val="24337E"/>
       </a:folHlink>
     </a:clrScheme>
-    <a:fontScheme name="Office">
+    <a:fontScheme name="Arial">
       <a:majorFont>
-        <a:latin typeface="Arial"/>
+        <a:latin typeface="Arial" panose="020B0604020202020204"/>
         <a:ea typeface=""/>
         <a:cs typeface=""/>
         <a:font script="Jpan" typeface="ＭＳ Ｐゴシック"/>
-        <a:font script="Hang" typeface="맑은 고딕"/>
-        <a:font script="Hans" typeface="宋体"/>
-        <a:font script="Hant" typeface="新細明體"/>
-        <a:font script="Arab" typeface="Times New Roman"/>
-        <a:font script="Hebr" typeface="Times New Roman"/>
-        <a:font script="Thai" typeface="Angsana New"/>
+        <a:font script="Hang" typeface="굴림"/>
+        <a:font script="Hans" typeface="黑体"/>
+        <a:font script="Hant" typeface="微軟正黑體"/>
+        <a:font script="Arab" typeface="Arial"/>
+        <a:font script="Hebr" typeface="Arial"/>
+        <a:font script="Thai" typeface="Cordia New"/>
         <a:font script="Ethi" typeface="Nyala"/>
         <a:font script="Beng" typeface="Vrinda"/>
         <a:font script="Gujr" typeface="Shruti"/>
-        <a:font script="Khmr" typeface="MoolBoran"/>
+        <a:font script="Khmr" typeface="DaunPenh"/>
         <a:font script="Knda" typeface="Tunga"/>
         <a:font script="Guru" typeface="Raavi"/>
         <a:font script="Cans" typeface="Euphemia"/>
@@ -18746,18 +19295,18 @@
         <a:font script="Laoo" typeface="DokChampa"/>
         <a:font script="Sinh" typeface="Iskoola Pota"/>
         <a:font script="Mong" typeface="Mongolian Baiti"/>
-        <a:font script="Viet" typeface="Times New Roman"/>
+        <a:font script="Viet" typeface="Arial"/>
         <a:font script="Uigh" typeface="Microsoft Uighur"/>
         <a:font script="Geor" typeface="Sylfaen"/>
       </a:majorFont>
       <a:minorFont>
-        <a:latin typeface="Arial"/>
+        <a:latin typeface="Arial" panose="020B0604020202020204"/>
         <a:ea typeface=""/>
         <a:cs typeface=""/>
         <a:font script="Jpan" typeface="ＭＳ Ｐゴシック"/>
-        <a:font script="Hang" typeface="맑은 고딕"/>
-        <a:font script="Hans" typeface="宋体"/>
-        <a:font script="Hant" typeface="新細明體"/>
+        <a:font script="Hang" typeface="굴림"/>
+        <a:font script="Hans" typeface="黑体"/>
+        <a:font script="Hant" typeface="微軟正黑體"/>
         <a:font script="Arab" typeface="Arial"/>
         <a:font script="Hebr" typeface="Arial"/>
         <a:font script="Thai" typeface="Cordia New"/>
@@ -19536,15 +20085,6 @@
 </file>
 
 <file path=customXml/item1.xml><?xml version="1.0" encoding="utf-8"?>
-<?mso-contentType ?>
-<FormTemplates xmlns="http://schemas.microsoft.com/sharepoint/v3/contenttype/forms">
-  <Display>DocumentLibraryForm</Display>
-  <Edit>DocumentLibraryForm</Edit>
-  <New>DocumentLibraryForm</New>
-</FormTemplates>
-</file>
-
-<file path=customXml/item2.xml><?xml version="1.0" encoding="utf-8"?>
 <p:properties xmlns:p="http://schemas.microsoft.com/office/2006/metadata/properties" xmlns:xsi="http://www.w3.org/2001/XMLSchema-instance" xmlns:pc="http://schemas.microsoft.com/office/infopath/2007/PartnerControls">
   <documentManagement>
     <lcf76f155ced4ddcb4097134ff3c332f xmlns="0e422b70-e85d-4377-8ee0-b6227433d381">
@@ -19553,6 +20093,15 @@
     <TaxCatchAll xmlns="199f642e-5af9-486c-ac06-f366742ef41a"/>
   </documentManagement>
 </p:properties>
+</file>
+
+<file path=customXml/item2.xml><?xml version="1.0" encoding="utf-8"?>
+<?mso-contentType ?>
+<FormTemplates xmlns="http://schemas.microsoft.com/sharepoint/v3/contenttype/forms">
+  <Display>DocumentLibraryForm</Display>
+  <Edit>DocumentLibraryForm</Edit>
+  <New>DocumentLibraryForm</New>
+</FormTemplates>
 </file>
 
 <file path=customXml/item3.xml><?xml version="1.0" encoding="utf-8"?>
@@ -19797,14 +20346,6 @@
 </file>
 
 <file path=customXml/itemProps1.xml><?xml version="1.0" encoding="utf-8"?>
-<ds:datastoreItem xmlns:ds="http://schemas.openxmlformats.org/officeDocument/2006/customXml" ds:itemID="{67DD9E9F-9EEB-4105-B29B-819486C2855A}">
-  <ds:schemaRefs>
-    <ds:schemaRef ds:uri="http://schemas.microsoft.com/sharepoint/v3/contenttype/forms"/>
-  </ds:schemaRefs>
-</ds:datastoreItem>
-</file>
-
-<file path=customXml/itemProps2.xml><?xml version="1.0" encoding="utf-8"?>
 <ds:datastoreItem xmlns:ds="http://schemas.openxmlformats.org/officeDocument/2006/customXml" ds:itemID="{2D6C293B-B8B4-4284-A17E-9F9E4C32B25A}">
   <ds:schemaRefs>
     <ds:schemaRef ds:uri="http://schemas.microsoft.com/office/2006/documentManagement/types"/>
@@ -19817,6 +20358,14 @@
     <ds:schemaRef ds:uri="http://schemas.openxmlformats.org/package/2006/metadata/core-properties"/>
     <ds:schemaRef ds:uri="http://schemas.microsoft.com/office/2006/metadata/properties"/>
     <ds:schemaRef ds:uri="http://www.w3.org/XML/1998/namespace"/>
+  </ds:schemaRefs>
+</ds:datastoreItem>
+</file>
+
+<file path=customXml/itemProps2.xml><?xml version="1.0" encoding="utf-8"?>
+<ds:datastoreItem xmlns:ds="http://schemas.openxmlformats.org/officeDocument/2006/customXml" ds:itemID="{67DD9E9F-9EEB-4105-B29B-819486C2855A}">
+  <ds:schemaRefs>
+    <ds:schemaRef ds:uri="http://schemas.microsoft.com/sharepoint/v3/contenttype/forms"/>
   </ds:schemaRefs>
 </ds:datastoreItem>
 </file>

--- a/1.5 Time series.pptx
+++ b/1.5 Time series.pptx
@@ -283,7 +283,7 @@
       <p15:notesGuideLst xmlns:p15="http://schemas.microsoft.com/office/powerpoint/2012/main"/>
     </p:ext>
     <p:ext uri="http://customooxmlschemas.google.com/">
-      <go:slidesCustomData xmlns="" xmlns:go="http://customooxmlschemas.google.com/" xmlns:ahyp="http://schemas.microsoft.com/office/drawing/2018/hyperlinkcolor" xmlns:p15="http://schemas.microsoft.com/office/powerpoint/2012/main" xmlns:p14="http://schemas.microsoft.com/office/powerpoint/2010/main" xmlns:com="http://schemas.openxmlformats.org/drawingml/2006/compatibility" xmlns:pvml="urn:schemas-microsoft-com:office:powerpoint" xmlns:v="urn:schemas-microsoft-com:vml" xmlns:o="urn:schemas-microsoft-com:office:office" xmlns:dgm="http://schemas.openxmlformats.org/drawingml/2006/diagram" xmlns:c="http://schemas.openxmlformats.org/drawingml/2006/chart" xmlns:mv="urn:schemas-microsoft-com:mac:vml" xmlns:mc="http://schemas.openxmlformats.org/markup-compatibility/2006" r:id="rId59" roundtripDataSignature="AMtx7mh3YP3xexYcFoahXa2ehi0H5V4Zaw=="/>
+      <go:slidesCustomData xmlns:mc="http://schemas.openxmlformats.org/markup-compatibility/2006" xmlns:mv="urn:schemas-microsoft-com:mac:vml" xmlns:c="http://schemas.openxmlformats.org/drawingml/2006/chart" xmlns:dgm="http://schemas.openxmlformats.org/drawingml/2006/diagram" xmlns:o="urn:schemas-microsoft-com:office:office" xmlns:v="urn:schemas-microsoft-com:vml" xmlns:pvml="urn:schemas-microsoft-com:office:powerpoint" xmlns:com="http://schemas.openxmlformats.org/drawingml/2006/compatibility" xmlns:p14="http://schemas.microsoft.com/office/powerpoint/2010/main" xmlns:p15="http://schemas.microsoft.com/office/powerpoint/2012/main" xmlns:ahyp="http://schemas.microsoft.com/office/drawing/2018/hyperlinkcolor" xmlns:go="http://customooxmlschemas.google.com/" xmlns="" r:id="rId59" roundtripDataSignature="AMtx7mh3YP3xexYcFoahXa2ehi0H5V4Zaw=="/>
     </p:ext>
   </p:extLst>
 </p:presentation>
@@ -383,7 +383,7 @@
           <a:p>
             <a:fld id="{0CBFB8CE-488C-4A7E-87F2-3AF6127C51C1}" type="datetimeFigureOut">
               <a:rPr lang="en-IE" smtClean="0"/>
-              <a:t>27/09/2026</a:t>
+              <a:t>29/09/2026</a:t>
             </a:fld>
             <a:endParaRPr lang="en-IE"/>
           </a:p>
@@ -13208,8 +13208,16 @@
               </a:p>
               <a:p>
                 <a:pPr lvl="1"/>
+                <a:endParaRPr lang="en-GB" sz="2400" i="1" dirty="0"/>
+              </a:p>
+              <a:p>
+                <a:pPr lvl="1"/>
+                <a:endParaRPr lang="en-GB" sz="2400" i="1" dirty="0"/>
+              </a:p>
+              <a:p>
+                <a:pPr lvl="1"/>
                 <a:r>
-                  <a:rPr lang="en-GB" sz="2800" dirty="0"/>
+                  <a:rPr lang="en-GB" sz="2400" i="1" dirty="0"/>
                   <a:t>If we assume that </a:t>
                 </a:r>
                 <a14:m>
@@ -13218,14 +13226,14 @@
                       <m:accPr>
                         <m:chr m:val="̅"/>
                         <m:ctrlPr>
-                          <a:rPr lang="fr-BE" sz="2800" b="0" i="1" smtClean="0">
+                          <a:rPr lang="fr-BE" sz="2400" b="0" i="1" smtClean="0">
                             <a:latin typeface="Cambria Math" panose="02040503050406030204" pitchFamily="18" charset="0"/>
                           </a:rPr>
                         </m:ctrlPr>
                       </m:accPr>
                       <m:e>
                         <m:r>
-                          <a:rPr lang="fr-BE" sz="2800" b="0" i="1" smtClean="0">
+                          <a:rPr lang="fr-BE" sz="2400" b="0" i="1" smtClean="0">
                             <a:latin typeface="Cambria Math" panose="02040503050406030204" pitchFamily="18" charset="0"/>
                           </a:rPr>
                           <m:t>𝑥</m:t>
@@ -13233,7 +13241,7 @@
                       </m:e>
                     </m:acc>
                     <m:r>
-                      <a:rPr lang="fr-BE" sz="2800" b="0" i="1" smtClean="0">
+                      <a:rPr lang="fr-BE" sz="2400" b="0" i="1" smtClean="0">
                         <a:latin typeface="Cambria Math" panose="02040503050406030204" pitchFamily="18" charset="0"/>
                       </a:rPr>
                       <m:t>=0</m:t>
@@ -13241,7 +13249,7 @@
                   </m:oMath>
                 </a14:m>
                 <a:r>
-                  <a:rPr lang="en-GB" sz="2800" dirty="0"/>
+                  <a:rPr lang="en-GB" sz="2400" i="1" dirty="0"/>
                   <a:t>, </a:t>
                 </a:r>
                 <a14:m>
@@ -13249,7 +13257,7 @@
                     <m:sSub>
                       <m:sSubPr>
                         <m:ctrlPr>
-                          <a:rPr lang="fr-BE" sz="2800" b="0" i="1" smtClean="0">
+                          <a:rPr lang="fr-BE" sz="2400" b="0" i="1" smtClean="0">
                             <a:latin typeface="Cambria Math" panose="02040503050406030204" pitchFamily="18" charset="0"/>
                             <a:ea typeface="Cambria Math" panose="02040503050406030204" pitchFamily="18" charset="0"/>
                           </a:rPr>
@@ -13257,7 +13265,7 @@
                       </m:sSubPr>
                       <m:e>
                         <m:r>
-                          <a:rPr lang="fr-BE" sz="2800" b="0" i="1" smtClean="0">
+                          <a:rPr lang="fr-BE" sz="2400" b="0" i="1" smtClean="0">
                             <a:latin typeface="Cambria Math" panose="02040503050406030204" pitchFamily="18" charset="0"/>
                             <a:ea typeface="Cambria Math" panose="02040503050406030204" pitchFamily="18" charset="0"/>
                           </a:rPr>
@@ -13266,7 +13274,7 @@
                       </m:e>
                       <m:sub>
                         <m:r>
-                          <a:rPr lang="fr-BE" sz="2800" b="0" i="1" smtClean="0">
+                          <a:rPr lang="fr-BE" sz="2400" b="0" i="1" smtClean="0">
                             <a:latin typeface="Cambria Math" panose="02040503050406030204" pitchFamily="18" charset="0"/>
                           </a:rPr>
                           <m:t>𝑘</m:t>
@@ -13274,7 +13282,7 @@
                       </m:sub>
                     </m:sSub>
                     <m:r>
-                      <a:rPr lang="fr-BE" sz="2800" b="0" i="1" smtClean="0">
+                      <a:rPr lang="fr-BE" sz="2400" b="0" i="1" smtClean="0">
                         <a:latin typeface="Cambria Math" panose="02040503050406030204" pitchFamily="18" charset="0"/>
                       </a:rPr>
                       <m:t>=</m:t>
@@ -13282,7 +13290,7 @@
                     <m:f>
                       <m:fPr>
                         <m:ctrlPr>
-                          <a:rPr lang="fr-BE" sz="2800" b="0" i="1" smtClean="0">
+                          <a:rPr lang="fr-BE" sz="2400" b="0" i="1" smtClean="0">
                             <a:latin typeface="Cambria Math" panose="02040503050406030204" pitchFamily="18" charset="0"/>
                           </a:rPr>
                         </m:ctrlPr>
@@ -13292,7 +13300,7 @@
                           <m:naryPr>
                             <m:chr m:val="∑"/>
                             <m:ctrlPr>
-                              <a:rPr lang="fr-BE" sz="2800" b="0" i="1" smtClean="0">
+                              <a:rPr lang="fr-BE" sz="2400" b="0" i="1" smtClean="0">
                                 <a:latin typeface="Cambria Math" panose="02040503050406030204" pitchFamily="18" charset="0"/>
                               </a:rPr>
                             </m:ctrlPr>
@@ -13302,19 +13310,19 @@
                               <m:rPr>
                                 <m:brk m:alnAt="23"/>
                               </m:rPr>
-                              <a:rPr lang="fr-BE" sz="2800" b="0" i="1" smtClean="0">
+                              <a:rPr lang="fr-BE" sz="2400" b="0" i="1" smtClean="0">
                                 <a:latin typeface="Cambria Math" panose="02040503050406030204" pitchFamily="18" charset="0"/>
                               </a:rPr>
                               <m:t>𝑡</m:t>
                             </m:r>
                             <m:r>
-                              <a:rPr lang="fr-BE" sz="2800" b="0" i="1" smtClean="0">
+                              <a:rPr lang="fr-BE" sz="2400" b="0" i="1" smtClean="0">
                                 <a:latin typeface="Cambria Math" panose="02040503050406030204" pitchFamily="18" charset="0"/>
                               </a:rPr>
                               <m:t>=</m:t>
                             </m:r>
                             <m:r>
-                              <a:rPr lang="fr-BE" sz="2800" b="0" i="1" smtClean="0">
+                              <a:rPr lang="fr-BE" sz="2400" b="0" i="1" smtClean="0">
                                 <a:latin typeface="Cambria Math" panose="02040503050406030204" pitchFamily="18" charset="0"/>
                               </a:rPr>
                               <m:t>𝑘</m:t>
@@ -13322,13 +13330,13 @@
                           </m:sub>
                           <m:sup>
                             <m:r>
-                              <a:rPr lang="fr-BE" sz="2800" b="0" i="1" smtClean="0">
+                              <a:rPr lang="fr-BE" sz="2400" b="0" i="1" smtClean="0">
                                 <a:latin typeface="Cambria Math" panose="02040503050406030204" pitchFamily="18" charset="0"/>
                               </a:rPr>
                               <m:t>𝑛</m:t>
                             </m:r>
                             <m:r>
-                              <a:rPr lang="fr-BE" sz="2800" b="0" i="1" smtClean="0">
+                              <a:rPr lang="fr-BE" sz="2400" b="0" i="1" smtClean="0">
                                 <a:latin typeface="Cambria Math" panose="02040503050406030204" pitchFamily="18" charset="0"/>
                               </a:rPr>
                               <m:t>−1</m:t>
@@ -13338,14 +13346,14 @@
                             <m:sSub>
                               <m:sSubPr>
                                 <m:ctrlPr>
-                                  <a:rPr lang="fr-BE" sz="2800" b="0" i="1" smtClean="0">
+                                  <a:rPr lang="fr-BE" sz="2400" b="0" i="1" smtClean="0">
                                     <a:latin typeface="Cambria Math" panose="02040503050406030204" pitchFamily="18" charset="0"/>
                                   </a:rPr>
                                 </m:ctrlPr>
                               </m:sSubPr>
                               <m:e>
                                 <m:r>
-                                  <a:rPr lang="fr-BE" sz="2800" b="0" i="1" smtClean="0">
+                                  <a:rPr lang="fr-BE" sz="2400" b="0" i="1" smtClean="0">
                                     <a:latin typeface="Cambria Math" panose="02040503050406030204" pitchFamily="18" charset="0"/>
                                   </a:rPr>
                                   <m:t>𝑥</m:t>
@@ -13353,7 +13361,7 @@
                               </m:e>
                               <m:sub>
                                 <m:r>
-                                  <a:rPr lang="fr-BE" sz="2800" b="0" i="1" smtClean="0">
+                                  <a:rPr lang="fr-BE" sz="2400" b="0" i="1" smtClean="0">
                                     <a:latin typeface="Cambria Math" panose="02040503050406030204" pitchFamily="18" charset="0"/>
                                   </a:rPr>
                                   <m:t>𝑡</m:t>
@@ -13363,14 +13371,14 @@
                             <m:sSub>
                               <m:sSubPr>
                                 <m:ctrlPr>
-                                  <a:rPr lang="fr-BE" sz="2800" b="0" i="1" smtClean="0">
+                                  <a:rPr lang="fr-BE" sz="2400" b="0" i="1" smtClean="0">
                                     <a:latin typeface="Cambria Math" panose="02040503050406030204" pitchFamily="18" charset="0"/>
                                   </a:rPr>
                                 </m:ctrlPr>
                               </m:sSubPr>
                               <m:e>
                                 <m:r>
-                                  <a:rPr lang="fr-BE" sz="2800" b="0" i="1" smtClean="0">
+                                  <a:rPr lang="fr-BE" sz="2400" b="0" i="1" smtClean="0">
                                     <a:latin typeface="Cambria Math" panose="02040503050406030204" pitchFamily="18" charset="0"/>
                                   </a:rPr>
                                   <m:t>𝑥</m:t>
@@ -13378,19 +13386,19 @@
                               </m:e>
                               <m:sub>
                                 <m:r>
-                                  <a:rPr lang="fr-BE" sz="2800" b="0" i="1" smtClean="0">
+                                  <a:rPr lang="fr-BE" sz="2400" b="0" i="1" smtClean="0">
                                     <a:latin typeface="Cambria Math" panose="02040503050406030204" pitchFamily="18" charset="0"/>
                                   </a:rPr>
                                   <m:t>𝑡</m:t>
                                 </m:r>
                                 <m:r>
-                                  <a:rPr lang="fr-BE" sz="2800" b="0" i="1" smtClean="0">
+                                  <a:rPr lang="fr-BE" sz="2400" b="0" i="1" smtClean="0">
                                     <a:latin typeface="Cambria Math" panose="02040503050406030204" pitchFamily="18" charset="0"/>
                                   </a:rPr>
                                   <m:t>−</m:t>
                                 </m:r>
                                 <m:r>
-                                  <a:rPr lang="fr-BE" sz="2800" b="0" i="1" smtClean="0">
+                                  <a:rPr lang="fr-BE" sz="2400" b="0" i="1" smtClean="0">
                                     <a:latin typeface="Cambria Math" panose="02040503050406030204" pitchFamily="18" charset="0"/>
                                   </a:rPr>
                                   <m:t>𝑘</m:t>
@@ -13402,7 +13410,7 @@
                       </m:num>
                       <m:den>
                         <m:r>
-                          <a:rPr lang="fr-BE" sz="2800" b="0" i="1" smtClean="0">
+                          <a:rPr lang="fr-BE" sz="2400" b="0" i="1" smtClean="0">
                             <a:latin typeface="Cambria Math" panose="02040503050406030204" pitchFamily="18" charset="0"/>
                           </a:rPr>
                           <m:t>[</m:t>
@@ -13411,7 +13419,7 @@
                           <m:naryPr>
                             <m:chr m:val="∑"/>
                             <m:ctrlPr>
-                              <a:rPr lang="fr-BE" sz="2800" b="0" i="1" smtClean="0">
+                              <a:rPr lang="fr-BE" sz="2400" b="0" i="1" smtClean="0">
                                 <a:latin typeface="Cambria Math" panose="02040503050406030204" pitchFamily="18" charset="0"/>
                               </a:rPr>
                             </m:ctrlPr>
@@ -13421,13 +13429,13 @@
                               <m:rPr>
                                 <m:brk m:alnAt="23"/>
                               </m:rPr>
-                              <a:rPr lang="fr-BE" sz="2800" b="0" i="1" smtClean="0">
+                              <a:rPr lang="fr-BE" sz="2400" b="0" i="1" smtClean="0">
                                 <a:latin typeface="Cambria Math" panose="02040503050406030204" pitchFamily="18" charset="0"/>
                               </a:rPr>
                               <m:t>𝑡</m:t>
                             </m:r>
                             <m:r>
-                              <a:rPr lang="fr-BE" sz="2800" b="0" i="1" smtClean="0">
+                              <a:rPr lang="fr-BE" sz="2400" b="0" i="1" smtClean="0">
                                 <a:latin typeface="Cambria Math" panose="02040503050406030204" pitchFamily="18" charset="0"/>
                               </a:rPr>
                               <m:t>=0</m:t>
@@ -13435,13 +13443,13 @@
                           </m:sub>
                           <m:sup>
                             <m:r>
-                              <a:rPr lang="fr-BE" sz="2800" b="0" i="1" smtClean="0">
+                              <a:rPr lang="fr-BE" sz="2400" b="0" i="1" smtClean="0">
                                 <a:latin typeface="Cambria Math" panose="02040503050406030204" pitchFamily="18" charset="0"/>
                               </a:rPr>
                               <m:t>𝑛</m:t>
                             </m:r>
                             <m:r>
-                              <a:rPr lang="fr-BE" sz="2800" b="0" i="1" smtClean="0">
+                              <a:rPr lang="fr-BE" sz="2400" b="0" i="1" smtClean="0">
                                 <a:latin typeface="Cambria Math" panose="02040503050406030204" pitchFamily="18" charset="0"/>
                               </a:rPr>
                               <m:t>−1</m:t>
@@ -13451,7 +13459,7 @@
                             <m:sSup>
                               <m:sSupPr>
                                 <m:ctrlPr>
-                                  <a:rPr lang="fr-BE" sz="2800" b="0" i="1" smtClean="0">
+                                  <a:rPr lang="fr-BE" sz="2400" b="0" i="1" smtClean="0">
                                     <a:latin typeface="Cambria Math" panose="02040503050406030204" pitchFamily="18" charset="0"/>
                                   </a:rPr>
                                 </m:ctrlPr>
@@ -13460,14 +13468,14 @@
                                 <m:sSub>
                                   <m:sSubPr>
                                     <m:ctrlPr>
-                                      <a:rPr lang="fr-BE" sz="2800" b="0" i="1" smtClean="0">
+                                      <a:rPr lang="fr-BE" sz="2400" b="0" i="1" smtClean="0">
                                         <a:latin typeface="Cambria Math" panose="02040503050406030204" pitchFamily="18" charset="0"/>
                                       </a:rPr>
                                     </m:ctrlPr>
                                   </m:sSubPr>
                                   <m:e>
                                     <m:r>
-                                      <a:rPr lang="fr-BE" sz="2800" b="0" i="1" smtClean="0">
+                                      <a:rPr lang="fr-BE" sz="2400" b="0" i="1" smtClean="0">
                                         <a:latin typeface="Cambria Math" panose="02040503050406030204" pitchFamily="18" charset="0"/>
                                       </a:rPr>
                                       <m:t>𝑥</m:t>
@@ -13475,7 +13483,7 @@
                                   </m:e>
                                   <m:sub>
                                     <m:r>
-                                      <a:rPr lang="fr-BE" sz="2800" b="0" i="1" smtClean="0">
+                                      <a:rPr lang="fr-BE" sz="2400" b="0" i="1" smtClean="0">
                                         <a:latin typeface="Cambria Math" panose="02040503050406030204" pitchFamily="18" charset="0"/>
                                       </a:rPr>
                                       <m:t>𝑡</m:t>
@@ -13485,7 +13493,7 @@
                               </m:e>
                               <m:sup>
                                 <m:r>
-                                  <a:rPr lang="fr-BE" sz="2800" b="0" i="1" smtClean="0">
+                                  <a:rPr lang="fr-BE" sz="2400" b="0" i="1" smtClean="0">
                                     <a:latin typeface="Cambria Math" panose="02040503050406030204" pitchFamily="18" charset="0"/>
                                   </a:rPr>
                                   <m:t>2</m:t>
@@ -13495,7 +13503,7 @@
                           </m:e>
                         </m:nary>
                         <m:r>
-                          <a:rPr lang="fr-BE" sz="2800" b="0" i="1" smtClean="0">
+                          <a:rPr lang="fr-BE" sz="2400" b="0" i="1" smtClean="0">
                             <a:latin typeface="Cambria Math" panose="02040503050406030204" pitchFamily="18" charset="0"/>
                           </a:rPr>
                           <m:t>]</m:t>
@@ -13504,7 +13512,10 @@
                     </m:f>
                   </m:oMath>
                 </a14:m>
-                <a:endParaRPr lang="en-GB" dirty="0"/>
+                <a:r>
+                  <a:rPr lang="en-GB" i="1" dirty="0"/>
+                  <a:t>  (residuals…)</a:t>
+                </a:r>
               </a:p>
             </p:txBody>
           </p:sp>
@@ -13646,8 +13657,8 @@
           </a:p>
         </p:txBody>
       </p:sp>
-      <mc:AlternateContent xmlns:mc="http://schemas.openxmlformats.org/markup-compatibility/2006">
-        <mc:Choice xmlns:a14="http://schemas.microsoft.com/office/drawing/2010/main" Requires="a14">
+      <mc:AlternateContent xmlns:mc="http://schemas.openxmlformats.org/markup-compatibility/2006" xmlns:a14="http://schemas.microsoft.com/office/drawing/2010/main">
+        <mc:Choice Requires="a14">
           <p:sp>
             <p:nvSpPr>
               <p:cNvPr id="3" name="Content Placeholder 2">
@@ -15755,7 +15766,7 @@
             </p:txBody>
           </p:sp>
         </mc:Choice>
-        <mc:Fallback>
+        <mc:Fallback xmlns="">
           <p:sp>
             <p:nvSpPr>
               <p:cNvPr id="3" name="Content Placeholder 2">
@@ -15944,8 +15955,8 @@
           </a:p>
         </p:txBody>
       </p:sp>
-      <mc:AlternateContent xmlns:mc="http://schemas.openxmlformats.org/markup-compatibility/2006">
-        <mc:Choice xmlns:a14="http://schemas.microsoft.com/office/drawing/2010/main" Requires="a14">
+      <mc:AlternateContent xmlns:mc="http://schemas.openxmlformats.org/markup-compatibility/2006" xmlns:a14="http://schemas.microsoft.com/office/drawing/2010/main">
+        <mc:Choice Requires="a14">
           <p:sp>
             <p:nvSpPr>
               <p:cNvPr id="3" name="Espace réservé du contenu 2">
@@ -17607,7 +17618,7 @@
             </p:txBody>
           </p:sp>
         </mc:Choice>
-        <mc:Fallback>
+        <mc:Fallback xmlns="">
           <p:sp>
             <p:nvSpPr>
               <p:cNvPr id="3" name="Espace réservé du contenu 2">
@@ -17793,8 +17804,8 @@
           </a:p>
         </p:txBody>
       </p:sp>
-      <mc:AlternateContent xmlns:mc="http://schemas.openxmlformats.org/markup-compatibility/2006">
-        <mc:Choice xmlns:a14="http://schemas.microsoft.com/office/drawing/2010/main" Requires="a14">
+      <mc:AlternateContent xmlns:mc="http://schemas.openxmlformats.org/markup-compatibility/2006" xmlns:a14="http://schemas.microsoft.com/office/drawing/2010/main">
+        <mc:Choice Requires="a14">
           <p:sp>
             <p:nvSpPr>
               <p:cNvPr id="3" name="Espace réservé du contenu 2">
@@ -18283,7 +18294,7 @@
             </p:txBody>
           </p:sp>
         </mc:Choice>
-        <mc:Fallback>
+        <mc:Fallback xmlns="">
           <p:sp>
             <p:nvSpPr>
               <p:cNvPr id="3" name="Espace réservé du contenu 2">
@@ -18817,8 +18828,8 @@
           </a:p>
         </p:txBody>
       </p:sp>
-      <mc:AlternateContent xmlns:mc="http://schemas.openxmlformats.org/markup-compatibility/2006">
-        <mc:Choice xmlns:a14="http://schemas.microsoft.com/office/drawing/2010/main" Requires="a14">
+      <mc:AlternateContent xmlns:mc="http://schemas.openxmlformats.org/markup-compatibility/2006" xmlns:a14="http://schemas.microsoft.com/office/drawing/2010/main">
+        <mc:Choice Requires="a14">
           <p:sp>
             <p:nvSpPr>
               <p:cNvPr id="3" name="Content Placeholder 2">
@@ -19103,7 +19114,7 @@
             </p:txBody>
           </p:sp>
         </mc:Choice>
-        <mc:Fallback>
+        <mc:Fallback xmlns="">
           <p:sp>
             <p:nvSpPr>
               <p:cNvPr id="3" name="Content Placeholder 2">
@@ -20096,15 +20107,6 @@
 </file>
 
 <file path=customXml/item2.xml><?xml version="1.0" encoding="utf-8"?>
-<?mso-contentType ?>
-<FormTemplates xmlns="http://schemas.microsoft.com/sharepoint/v3/contenttype/forms">
-  <Display>DocumentLibraryForm</Display>
-  <Edit>DocumentLibraryForm</Edit>
-  <New>DocumentLibraryForm</New>
-</FormTemplates>
-</file>
-
-<file path=customXml/item3.xml><?xml version="1.0" encoding="utf-8"?>
 <ct:contentTypeSchema xmlns:ct="http://schemas.microsoft.com/office/2006/metadata/contentType" xmlns:ma="http://schemas.microsoft.com/office/2006/metadata/properties/metaAttributes" ct:_="" ma:_="" ma:contentTypeName="Document" ma:contentTypeID="0x010100E6AA5C57F8EADE4E9CD6BB064C0C3195" ma:contentTypeVersion="16" ma:contentTypeDescription="Create a new document." ma:contentTypeScope="" ma:versionID="bb51c19a58f458ddcddd050a07659236">
   <xsd:schema xmlns:xsd="http://www.w3.org/2001/XMLSchema" xmlns:xs="http://www.w3.org/2001/XMLSchema" xmlns:p="http://schemas.microsoft.com/office/2006/metadata/properties" xmlns:ns2="0e422b70-e85d-4377-8ee0-b6227433d381" xmlns:ns3="199f642e-5af9-486c-ac06-f366742ef41a" targetNamespace="http://schemas.microsoft.com/office/2006/metadata/properties" ma:root="true" ma:fieldsID="0ee7a3bac0352a48a43420936abd968a" ns2:_="" ns3:_="">
     <xsd:import namespace="0e422b70-e85d-4377-8ee0-b6227433d381"/>
@@ -20345,6 +20347,15 @@
 </ct:contentTypeSchema>
 </file>
 
+<file path=customXml/item3.xml><?xml version="1.0" encoding="utf-8"?>
+<?mso-contentType ?>
+<FormTemplates xmlns="http://schemas.microsoft.com/sharepoint/v3/contenttype/forms">
+  <Display>DocumentLibraryForm</Display>
+  <Edit>DocumentLibraryForm</Edit>
+  <New>DocumentLibraryForm</New>
+</FormTemplates>
+</file>
+
 <file path=customXml/itemProps1.xml><?xml version="1.0" encoding="utf-8"?>
 <ds:datastoreItem xmlns:ds="http://schemas.openxmlformats.org/officeDocument/2006/customXml" ds:itemID="{2D6C293B-B8B4-4284-A17E-9F9E4C32B25A}">
   <ds:schemaRefs>
@@ -20363,14 +20374,6 @@
 </file>
 
 <file path=customXml/itemProps2.xml><?xml version="1.0" encoding="utf-8"?>
-<ds:datastoreItem xmlns:ds="http://schemas.openxmlformats.org/officeDocument/2006/customXml" ds:itemID="{67DD9E9F-9EEB-4105-B29B-819486C2855A}">
-  <ds:schemaRefs>
-    <ds:schemaRef ds:uri="http://schemas.microsoft.com/sharepoint/v3/contenttype/forms"/>
-  </ds:schemaRefs>
-</ds:datastoreItem>
-</file>
-
-<file path=customXml/itemProps3.xml><?xml version="1.0" encoding="utf-8"?>
 <ds:datastoreItem xmlns:ds="http://schemas.openxmlformats.org/officeDocument/2006/customXml" ds:itemID="{04B464EA-1576-49DD-9675-1E3399D4D196}">
   <ds:schemaRefs>
     <ds:schemaRef ds:uri="http://schemas.microsoft.com/office/2006/metadata/contentType"/>
@@ -20387,4 +20390,12 @@
     <ds:schemaRef ds:uri="http://schemas.microsoft.com/internal/obd"/>
   </ds:schemaRefs>
 </ds:datastoreItem>
+</file>
+
+<file path=customXml/itemProps3.xml><?xml version="1.0" encoding="utf-8"?>
+<ds:datastoreItem xmlns:ds="http://schemas.openxmlformats.org/officeDocument/2006/customXml" ds:itemID="{67DD9E9F-9EEB-4105-B29B-819486C2855A}">
+  <ds:schemaRefs>
+    <ds:schemaRef ds:uri="http://schemas.microsoft.com/sharepoint/v3/contenttype/forms"/>
+  </ds:schemaRefs>
+</ds:datastoreItem>
 </file>
--- a/1.5 Time series.pptx
+++ b/1.5 Time series.pptx
@@ -5,10 +5,10 @@
     <p:sldMasterId id="2147483648" r:id="rId4"/>
   </p:sldMasterIdLst>
   <p:notesMasterIdLst>
-    <p:notesMasterId r:id="rId23"/>
+    <p:notesMasterId r:id="rId22"/>
   </p:notesMasterIdLst>
   <p:handoutMasterIdLst>
-    <p:handoutMasterId r:id="rId24"/>
+    <p:handoutMasterId r:id="rId23"/>
   </p:handoutMasterIdLst>
   <p:sldIdLst>
     <p:sldId id="256" r:id="rId5"/>
@@ -26,14 +26,13 @@
     <p:sldId id="265" r:id="rId17"/>
     <p:sldId id="266" r:id="rId18"/>
     <p:sldId id="267" r:id="rId19"/>
-    <p:sldId id="270" r:id="rId20"/>
-    <p:sldId id="268" r:id="rId21"/>
-    <p:sldId id="261" r:id="rId22"/>
+    <p:sldId id="268" r:id="rId20"/>
+    <p:sldId id="261" r:id="rId21"/>
   </p:sldIdLst>
   <p:sldSz cx="12192000" cy="6858000"/>
   <p:notesSz cx="6858000" cy="9144000"/>
   <p:custDataLst>
-    <p:tags r:id="rId25"/>
+    <p:tags r:id="rId24"/>
   </p:custDataLst>
   <p:defaultTextStyle>
     <a:defPPr marR="0" lvl="0" algn="l" rtl="0">
@@ -283,7 +282,7 @@
       <p15:notesGuideLst xmlns:p15="http://schemas.microsoft.com/office/powerpoint/2012/main"/>
     </p:ext>
     <p:ext uri="http://customooxmlschemas.google.com/">
-      <go:slidesCustomData xmlns:mc="http://schemas.openxmlformats.org/markup-compatibility/2006" xmlns:mv="urn:schemas-microsoft-com:mac:vml" xmlns:c="http://schemas.openxmlformats.org/drawingml/2006/chart" xmlns:dgm="http://schemas.openxmlformats.org/drawingml/2006/diagram" xmlns:o="urn:schemas-microsoft-com:office:office" xmlns:v="urn:schemas-microsoft-com:vml" xmlns:pvml="urn:schemas-microsoft-com:office:powerpoint" xmlns:com="http://schemas.openxmlformats.org/drawingml/2006/compatibility" xmlns:p14="http://schemas.microsoft.com/office/powerpoint/2010/main" xmlns:p15="http://schemas.microsoft.com/office/powerpoint/2012/main" xmlns:ahyp="http://schemas.microsoft.com/office/drawing/2018/hyperlinkcolor" xmlns:go="http://customooxmlschemas.google.com/" xmlns="" r:id="rId59" roundtripDataSignature="AMtx7mh3YP3xexYcFoahXa2ehi0H5V4Zaw=="/>
+      <go:slidesCustomData xmlns="" xmlns:go="http://customooxmlschemas.google.com/" xmlns:ahyp="http://schemas.microsoft.com/office/drawing/2018/hyperlinkcolor" xmlns:p15="http://schemas.microsoft.com/office/powerpoint/2012/main" xmlns:p14="http://schemas.microsoft.com/office/powerpoint/2010/main" xmlns:com="http://schemas.openxmlformats.org/drawingml/2006/compatibility" xmlns:pvml="urn:schemas-microsoft-com:office:powerpoint" xmlns:v="urn:schemas-microsoft-com:vml" xmlns:o="urn:schemas-microsoft-com:office:office" xmlns:dgm="http://schemas.openxmlformats.org/drawingml/2006/diagram" xmlns:c="http://schemas.openxmlformats.org/drawingml/2006/chart" xmlns:mv="urn:schemas-microsoft-com:mac:vml" xmlns:mc="http://schemas.openxmlformats.org/markup-compatibility/2006" r:id="rId59" roundtripDataSignature="AMtx7mh3YP3xexYcFoahXa2ehi0H5V4Zaw=="/>
     </p:ext>
   </p:extLst>
 </p:presentation>
@@ -383,7 +382,7 @@
           <a:p>
             <a:fld id="{0CBFB8CE-488C-4A7E-87F2-3AF6127C51C1}" type="datetimeFigureOut">
               <a:rPr lang="en-IE" smtClean="0"/>
-              <a:t>29/09/2026</a:t>
+              <a:t>30/09/2026</a:t>
             </a:fld>
             <a:endParaRPr lang="en-IE"/>
           </a:p>
@@ -6327,6 +6326,35 @@
           </a:p>
         </p:txBody>
       </p:sp>
+      <p:sp>
+        <p:nvSpPr>
+          <p:cNvPr id="3" name="Espace réservé du numéro de diapositive 2">
+            <a:extLst>
+              <a:ext uri="{FF2B5EF4-FFF2-40B4-BE49-F238E27FC236}">
+                <a16:creationId xmlns:a16="http://schemas.microsoft.com/office/drawing/2014/main" id="{E85E42A2-CFF8-9648-52A7-28EAE25A4AA3}"/>
+              </a:ext>
+            </a:extLst>
+          </p:cNvPr>
+          <p:cNvSpPr>
+            <a:spLocks noGrp="1"/>
+          </p:cNvSpPr>
+          <p:nvPr>
+            <p:ph type="sldNum" idx="12"/>
+          </p:nvPr>
+        </p:nvSpPr>
+        <p:spPr/>
+        <p:txBody>
+          <a:bodyPr/>
+          <a:lstStyle/>
+          <a:p>
+            <a:fld id="{71CC62B1-FA1F-4849-B719-012F8D8A46B3}" type="slidenum">
+              <a:rPr lang="en-GB" smtClean="0"/>
+              <a:t>10</a:t>
+            </a:fld>
+            <a:endParaRPr lang="en-GB"/>
+          </a:p>
+        </p:txBody>
+      </p:sp>
       <p:pic>
         <p:nvPicPr>
           <p:cNvPr id="7" name="Content Placeholder 6">
@@ -6340,7 +6368,7 @@
             <a:picLocks noGrp="1" noChangeAspect="1"/>
           </p:cNvPicPr>
           <p:nvPr>
-            <p:ph idx="1"/>
+            <p:ph sz="half" idx="2"/>
           </p:nvPr>
         </p:nvPicPr>
         <p:blipFill>
@@ -6351,8 +6379,8 @@
         </p:blipFill>
         <p:spPr>
           <a:xfrm>
-            <a:off x="1925964" y="1825625"/>
-            <a:ext cx="8340071" cy="3881438"/>
+            <a:off x="1478888" y="1437966"/>
+            <a:ext cx="9497750" cy="4420217"/>
           </a:xfrm>
         </p:spPr>
       </p:pic>
@@ -6369,10 +6397,15 @@
             <a:spLocks noGrp="1"/>
           </p:cNvSpPr>
           <p:nvPr>
-            <p:ph type="ftr" sz="quarter" idx="11"/>
+            <p:ph type="ftr" sz="quarter" idx="4294967295"/>
           </p:nvPr>
         </p:nvSpPr>
-        <p:spPr/>
+        <p:spPr>
+          <a:xfrm>
+            <a:off x="0" y="0"/>
+            <a:ext cx="0" cy="0"/>
+          </a:xfrm>
+        </p:spPr>
         <p:txBody>
           <a:bodyPr/>
           <a:lstStyle/>
@@ -6381,35 +6414,6 @@
               <a:rPr lang="en-GB"/>
               <a:t>Time Series</a:t>
             </a:r>
-          </a:p>
-        </p:txBody>
-      </p:sp>
-      <p:sp>
-        <p:nvSpPr>
-          <p:cNvPr id="3" name="Espace réservé du numéro de diapositive 2">
-            <a:extLst>
-              <a:ext uri="{FF2B5EF4-FFF2-40B4-BE49-F238E27FC236}">
-                <a16:creationId xmlns:a16="http://schemas.microsoft.com/office/drawing/2014/main" id="{E85E42A2-CFF8-9648-52A7-28EAE25A4AA3}"/>
-              </a:ext>
-            </a:extLst>
-          </p:cNvPr>
-          <p:cNvSpPr>
-            <a:spLocks noGrp="1"/>
-          </p:cNvSpPr>
-          <p:nvPr>
-            <p:ph type="sldNum" sz="quarter" idx="12"/>
-          </p:nvPr>
-        </p:nvSpPr>
-        <p:spPr/>
-        <p:txBody>
-          <a:bodyPr/>
-          <a:lstStyle/>
-          <a:p>
-            <a:fld id="{71CC62B1-FA1F-4849-B719-012F8D8A46B3}" type="slidenum">
-              <a:rPr lang="en-GB" smtClean="0"/>
-              <a:t>10</a:t>
-            </a:fld>
-            <a:endParaRPr lang="en-GB"/>
           </a:p>
         </p:txBody>
       </p:sp>
@@ -6471,40 +6475,35 @@
           </a:p>
         </p:txBody>
       </p:sp>
-      <p:pic>
-        <p:nvPicPr>
-          <p:cNvPr id="11" name="Content Placeholder 10">
+      <p:sp>
+        <p:nvSpPr>
+          <p:cNvPr id="3" name="Espace réservé du numéro de diapositive 2">
             <a:extLst>
               <a:ext uri="{FF2B5EF4-FFF2-40B4-BE49-F238E27FC236}">
-                <a16:creationId xmlns:a16="http://schemas.microsoft.com/office/drawing/2014/main" id="{BBAA7276-A8BD-40AA-B0C9-6DE541BC7BCD}"/>
+                <a16:creationId xmlns:a16="http://schemas.microsoft.com/office/drawing/2014/main" id="{FFF63AB1-C27D-EAD9-0808-5D190CB592DB}"/>
               </a:ext>
             </a:extLst>
           </p:cNvPr>
-          <p:cNvPicPr>
-            <a:picLocks noGrp="1" noChangeAspect="1"/>
-          </p:cNvPicPr>
+          <p:cNvSpPr>
+            <a:spLocks noGrp="1"/>
+          </p:cNvSpPr>
           <p:nvPr>
-            <p:ph idx="1"/>
+            <p:ph type="sldNum" idx="12"/>
           </p:nvPr>
-        </p:nvPicPr>
-        <p:blipFill>
-          <a:blip r:embed="rId2"/>
-          <a:stretch>
-            <a:fillRect/>
-          </a:stretch>
-        </p:blipFill>
-        <p:spPr>
-          <a:xfrm>
-            <a:off x="838200" y="1452401"/>
-            <a:ext cx="6640519" cy="4351338"/>
-          </a:xfrm>
-          <a:ln>
-            <a:solidFill>
-              <a:schemeClr val="tx1"/>
-            </a:solidFill>
-          </a:ln>
-        </p:spPr>
-      </p:pic>
+        </p:nvSpPr>
+        <p:spPr/>
+        <p:txBody>
+          <a:bodyPr/>
+          <a:lstStyle/>
+          <a:p>
+            <a:fld id="{71CC62B1-FA1F-4849-B719-012F8D8A46B3}" type="slidenum">
+              <a:rPr lang="en-GB" smtClean="0"/>
+              <a:t>11</a:t>
+            </a:fld>
+            <a:endParaRPr lang="en-GB"/>
+          </a:p>
+        </p:txBody>
+      </p:sp>
       <p:sp>
         <p:nvSpPr>
           <p:cNvPr id="5" name="Footer Placeholder 4">
@@ -6518,10 +6517,15 @@
             <a:spLocks noGrp="1"/>
           </p:cNvSpPr>
           <p:nvPr>
-            <p:ph type="ftr" sz="quarter" idx="11"/>
+            <p:ph type="ftr" sz="quarter" idx="4294967295"/>
           </p:nvPr>
         </p:nvSpPr>
-        <p:spPr/>
+        <p:spPr>
+          <a:xfrm>
+            <a:off x="0" y="0"/>
+            <a:ext cx="0" cy="0"/>
+          </a:xfrm>
+        </p:spPr>
         <p:txBody>
           <a:bodyPr/>
           <a:lstStyle/>
@@ -6548,7 +6552,7 @@
           <p:nvPr/>
         </p:nvPicPr>
         <p:blipFill>
-          <a:blip r:embed="rId3"/>
+          <a:blip r:embed="rId2"/>
           <a:stretch>
             <a:fillRect/>
           </a:stretch>
@@ -6578,7 +6582,7 @@
           <p:nvPr/>
         </p:nvPicPr>
         <p:blipFill>
-          <a:blip r:embed="rId4"/>
+          <a:blip r:embed="rId3"/>
           <a:stretch>
             <a:fillRect/>
           </a:stretch>
@@ -6608,7 +6612,7 @@
           <p:nvPr/>
         </p:nvPicPr>
         <p:blipFill>
-          <a:blip r:embed="rId5"/>
+          <a:blip r:embed="rId4"/>
           <a:stretch>
             <a:fillRect/>
           </a:stretch>
@@ -6623,35 +6627,42 @@
           </a:prstGeom>
         </p:spPr>
       </p:pic>
-      <p:sp>
-        <p:nvSpPr>
-          <p:cNvPr id="3" name="Espace réservé du numéro de diapositive 2">
+      <p:pic>
+        <p:nvPicPr>
+          <p:cNvPr id="8" name="Espace réservé du contenu 7">
             <a:extLst>
               <a:ext uri="{FF2B5EF4-FFF2-40B4-BE49-F238E27FC236}">
-                <a16:creationId xmlns:a16="http://schemas.microsoft.com/office/drawing/2014/main" id="{FFF63AB1-C27D-EAD9-0808-5D190CB592DB}"/>
+                <a16:creationId xmlns:a16="http://schemas.microsoft.com/office/drawing/2014/main" id="{959D6E91-461B-94FE-4420-217ABE0BCEDA}"/>
               </a:ext>
             </a:extLst>
           </p:cNvPr>
-          <p:cNvSpPr>
-            <a:spLocks noGrp="1"/>
-          </p:cNvSpPr>
+          <p:cNvPicPr>
+            <a:picLocks noGrp="1" noChangeAspect="1"/>
+          </p:cNvPicPr>
           <p:nvPr>
-            <p:ph type="sldNum" sz="quarter" idx="12"/>
+            <p:ph sz="half" idx="2"/>
           </p:nvPr>
-        </p:nvSpPr>
-        <p:spPr/>
-        <p:txBody>
-          <a:bodyPr/>
-          <a:lstStyle/>
-          <a:p>
-            <a:fld id="{71CC62B1-FA1F-4849-B719-012F8D8A46B3}" type="slidenum">
-              <a:rPr lang="en-GB" smtClean="0"/>
-              <a:t>11</a:t>
-            </a:fld>
-            <a:endParaRPr lang="en-GB"/>
-          </a:p>
-        </p:txBody>
-      </p:sp>
+        </p:nvPicPr>
+        <p:blipFill>
+          <a:blip r:embed="rId5"/>
+          <a:stretch>
+            <a:fillRect/>
+          </a:stretch>
+        </p:blipFill>
+        <p:spPr>
+          <a:xfrm>
+            <a:off x="1102974" y="1257766"/>
+            <a:ext cx="6435758" cy="4034959"/>
+          </a:xfrm>
+          <a:prstGeom prst="rect">
+            <a:avLst/>
+          </a:prstGeom>
+          <a:noFill/>
+          <a:ln>
+            <a:noFill/>
+          </a:ln>
+        </p:spPr>
+      </p:pic>
     </p:spTree>
     <p:extLst>
       <p:ext uri="{BB962C8B-B14F-4D97-AF65-F5344CB8AC3E}">
@@ -6710,8 +6721,37 @@
           </a:p>
         </p:txBody>
       </p:sp>
-      <mc:AlternateContent xmlns:mc="http://schemas.openxmlformats.org/markup-compatibility/2006" xmlns:a14="http://schemas.microsoft.com/office/drawing/2010/main">
-        <mc:Choice Requires="a14">
+      <p:sp>
+        <p:nvSpPr>
+          <p:cNvPr id="4" name="Espace réservé du numéro de diapositive 3">
+            <a:extLst>
+              <a:ext uri="{FF2B5EF4-FFF2-40B4-BE49-F238E27FC236}">
+                <a16:creationId xmlns:a16="http://schemas.microsoft.com/office/drawing/2014/main" id="{0CC0D185-D7F0-B137-7D45-9B731C0BA051}"/>
+              </a:ext>
+            </a:extLst>
+          </p:cNvPr>
+          <p:cNvSpPr>
+            <a:spLocks noGrp="1"/>
+          </p:cNvSpPr>
+          <p:nvPr>
+            <p:ph type="sldNum" idx="12"/>
+          </p:nvPr>
+        </p:nvSpPr>
+        <p:spPr/>
+        <p:txBody>
+          <a:bodyPr/>
+          <a:lstStyle/>
+          <a:p>
+            <a:fld id="{71CC62B1-FA1F-4849-B719-012F8D8A46B3}" type="slidenum">
+              <a:rPr lang="en-GB" smtClean="0"/>
+              <a:t>12</a:t>
+            </a:fld>
+            <a:endParaRPr lang="en-GB"/>
+          </a:p>
+        </p:txBody>
+      </p:sp>
+      <mc:AlternateContent xmlns:mc="http://schemas.openxmlformats.org/markup-compatibility/2006">
+        <mc:Choice xmlns:a14="http://schemas.microsoft.com/office/drawing/2010/main" Requires="a14">
           <p:sp>
             <p:nvSpPr>
               <p:cNvPr id="3" name="Content Placeholder 2">
@@ -6725,7 +6765,7 @@
                 <a:spLocks noGrp="1"/>
               </p:cNvSpPr>
               <p:nvPr>
-                <p:ph idx="1"/>
+                <p:ph sz="half" idx="2"/>
               </p:nvPr>
             </p:nvSpPr>
             <p:spPr/>
@@ -6734,7 +6774,7 @@
               <a:lstStyle/>
               <a:p>
                 <a:r>
-                  <a:rPr lang="en-GB" dirty="0"/>
+                  <a:rPr lang="en-GB" sz="2800" dirty="0"/>
                   <a:t>Auto-projective Models: </a:t>
                 </a:r>
               </a:p>
@@ -6745,14 +6785,14 @@
                     <m:sSub>
                       <m:sSubPr>
                         <m:ctrlPr>
-                          <a:rPr lang="fr-BE" b="0" i="1" smtClean="0">
+                          <a:rPr lang="fr-BE" sz="2400" b="0" i="1" smtClean="0">
                             <a:latin typeface="Cambria Math" panose="02040503050406030204" pitchFamily="18" charset="0"/>
                           </a:rPr>
                         </m:ctrlPr>
                       </m:sSubPr>
                       <m:e>
                         <m:r>
-                          <a:rPr lang="fr-BE" b="0" i="1" smtClean="0">
+                          <a:rPr lang="fr-BE" sz="2400" b="0" i="1" smtClean="0">
                             <a:latin typeface="Cambria Math" panose="02040503050406030204" pitchFamily="18" charset="0"/>
                           </a:rPr>
                           <m:t>𝑥</m:t>
@@ -6760,7 +6800,7 @@
                       </m:e>
                       <m:sub>
                         <m:r>
-                          <a:rPr lang="fr-BE" b="0" i="1" smtClean="0">
+                          <a:rPr lang="fr-BE" sz="2400" b="0" i="1" smtClean="0">
                             <a:latin typeface="Cambria Math" panose="02040503050406030204" pitchFamily="18" charset="0"/>
                           </a:rPr>
                           <m:t>𝑡</m:t>
@@ -6768,19 +6808,19 @@
                       </m:sub>
                     </m:sSub>
                     <m:r>
-                      <a:rPr lang="fr-BE" b="0" i="1" smtClean="0">
+                      <a:rPr lang="fr-BE" sz="2400" b="0" i="1" smtClean="0">
                         <a:latin typeface="Cambria Math" panose="02040503050406030204" pitchFamily="18" charset="0"/>
                       </a:rPr>
                       <m:t>=</m:t>
                     </m:r>
                     <m:r>
-                      <a:rPr lang="fr-BE" b="0" i="1" smtClean="0">
+                      <a:rPr lang="fr-BE" sz="2400" b="0" i="1" smtClean="0">
                         <a:latin typeface="Cambria Math" panose="02040503050406030204" pitchFamily="18" charset="0"/>
                       </a:rPr>
                       <m:t>𝑓</m:t>
                     </m:r>
                     <m:r>
-                      <a:rPr lang="fr-BE" b="0" i="1" smtClean="0">
+                      <a:rPr lang="fr-BE" sz="2400" b="0" i="1" smtClean="0">
                         <a:latin typeface="Cambria Math" panose="02040503050406030204" pitchFamily="18" charset="0"/>
                       </a:rPr>
                       <m:t>(</m:t>
@@ -6788,14 +6828,14 @@
                     <m:sSub>
                       <m:sSubPr>
                         <m:ctrlPr>
-                          <a:rPr lang="fr-BE" b="0" i="1" smtClean="0">
+                          <a:rPr lang="fr-BE" sz="2400" b="0" i="1" smtClean="0">
                             <a:latin typeface="Cambria Math" panose="02040503050406030204" pitchFamily="18" charset="0"/>
                           </a:rPr>
                         </m:ctrlPr>
                       </m:sSubPr>
                       <m:e>
                         <m:r>
-                          <a:rPr lang="fr-BE" b="0" i="1" smtClean="0">
+                          <a:rPr lang="fr-BE" sz="2400" b="0" i="1" smtClean="0">
                             <a:latin typeface="Cambria Math" panose="02040503050406030204" pitchFamily="18" charset="0"/>
                           </a:rPr>
                           <m:t>𝑥</m:t>
@@ -6803,13 +6843,13 @@
                       </m:e>
                       <m:sub>
                         <m:r>
-                          <a:rPr lang="fr-BE" b="0" i="1" smtClean="0">
+                          <a:rPr lang="fr-BE" sz="2400" b="0" i="1" smtClean="0">
                             <a:latin typeface="Cambria Math" panose="02040503050406030204" pitchFamily="18" charset="0"/>
                           </a:rPr>
                           <m:t>𝑡</m:t>
                         </m:r>
                         <m:r>
-                          <a:rPr lang="fr-BE" b="0" i="1" smtClean="0">
+                          <a:rPr lang="fr-BE" sz="2400" b="0" i="1" smtClean="0">
                             <a:latin typeface="Cambria Math" panose="02040503050406030204" pitchFamily="18" charset="0"/>
                           </a:rPr>
                           <m:t>−1</m:t>
@@ -6817,7 +6857,7 @@
                       </m:sub>
                     </m:sSub>
                     <m:r>
-                      <a:rPr lang="fr-BE" b="0" i="1" smtClean="0">
+                      <a:rPr lang="fr-BE" sz="2400" b="0" i="1" smtClean="0">
                         <a:latin typeface="Cambria Math" panose="02040503050406030204" pitchFamily="18" charset="0"/>
                       </a:rPr>
                       <m:t>,</m:t>
@@ -6825,14 +6865,14 @@
                     <m:sSub>
                       <m:sSubPr>
                         <m:ctrlPr>
-                          <a:rPr lang="fr-BE" b="0" i="1" smtClean="0">
+                          <a:rPr lang="fr-BE" sz="2400" b="0" i="1" smtClean="0">
                             <a:latin typeface="Cambria Math" panose="02040503050406030204" pitchFamily="18" charset="0"/>
                           </a:rPr>
                         </m:ctrlPr>
                       </m:sSubPr>
                       <m:e>
                         <m:r>
-                          <a:rPr lang="fr-BE" b="0" i="1" smtClean="0">
+                          <a:rPr lang="fr-BE" sz="2400" b="0" i="1" smtClean="0">
                             <a:latin typeface="Cambria Math" panose="02040503050406030204" pitchFamily="18" charset="0"/>
                           </a:rPr>
                           <m:t>𝑥</m:t>
@@ -6840,13 +6880,13 @@
                       </m:e>
                       <m:sub>
                         <m:r>
-                          <a:rPr lang="fr-BE" b="0" i="1" smtClean="0">
+                          <a:rPr lang="fr-BE" sz="2400" b="0" i="1" smtClean="0">
                             <a:latin typeface="Cambria Math" panose="02040503050406030204" pitchFamily="18" charset="0"/>
                           </a:rPr>
                           <m:t>𝑡</m:t>
                         </m:r>
                         <m:r>
-                          <a:rPr lang="fr-BE" b="0" i="1" smtClean="0">
+                          <a:rPr lang="fr-BE" sz="2400" b="0" i="1" smtClean="0">
                             <a:latin typeface="Cambria Math" panose="02040503050406030204" pitchFamily="18" charset="0"/>
                           </a:rPr>
                           <m:t>−2</m:t>
@@ -6854,7 +6894,7 @@
                       </m:sub>
                     </m:sSub>
                     <m:r>
-                      <a:rPr lang="fr-BE" b="0" i="1" smtClean="0">
+                      <a:rPr lang="fr-BE" sz="2400" b="0" i="1" smtClean="0">
                         <a:latin typeface="Cambria Math" panose="02040503050406030204" pitchFamily="18" charset="0"/>
                       </a:rPr>
                       <m:t>,⋯,</m:t>
@@ -6862,7 +6902,7 @@
                     <m:sSub>
                       <m:sSubPr>
                         <m:ctrlPr>
-                          <a:rPr lang="fr-BE" b="0" i="1" smtClean="0">
+                          <a:rPr lang="fr-BE" sz="2400" b="0" i="1" smtClean="0">
                             <a:latin typeface="Cambria Math" panose="02040503050406030204" pitchFamily="18" charset="0"/>
                             <a:ea typeface="Cambria Math" panose="02040503050406030204" pitchFamily="18" charset="0"/>
                           </a:rPr>
@@ -6870,7 +6910,7 @@
                       </m:sSubPr>
                       <m:e>
                         <m:r>
-                          <a:rPr lang="fr-BE" b="0" i="1" smtClean="0">
+                          <a:rPr lang="fr-BE" sz="2400" b="0" i="1" smtClean="0">
                             <a:latin typeface="Cambria Math" panose="02040503050406030204" pitchFamily="18" charset="0"/>
                             <a:ea typeface="Cambria Math" panose="02040503050406030204" pitchFamily="18" charset="0"/>
                           </a:rPr>
@@ -6879,7 +6919,7 @@
                       </m:e>
                       <m:sub>
                         <m:r>
-                          <a:rPr lang="fr-BE" b="0" i="1" smtClean="0">
+                          <a:rPr lang="fr-BE" sz="2400" b="0" i="1" smtClean="0">
                             <a:latin typeface="Cambria Math" panose="02040503050406030204" pitchFamily="18" charset="0"/>
                           </a:rPr>
                           <m:t>𝑡</m:t>
@@ -6887,50 +6927,51 @@
                       </m:sub>
                     </m:sSub>
                     <m:r>
-                      <a:rPr lang="fr-BE" b="0" i="1" smtClean="0">
+                      <a:rPr lang="fr-BE" sz="2400" b="0" i="1" smtClean="0">
                         <a:latin typeface="Cambria Math" panose="02040503050406030204" pitchFamily="18" charset="0"/>
                       </a:rPr>
                       <m:t>)</m:t>
                     </m:r>
                   </m:oMath>
                 </a14:m>
-                <a:endParaRPr lang="en-GB" dirty="0"/>
+                <a:endParaRPr lang="en-GB" sz="2400" dirty="0"/>
               </a:p>
               <a:p>
                 <a:r>
-                  <a:rPr lang="en-GB" dirty="0"/>
+                  <a:rPr lang="en-GB" sz="2800" dirty="0"/>
                   <a:t>ARIMA models (Box-Jenkins)</a:t>
                 </a:r>
               </a:p>
               <a:p>
                 <a:pPr lvl="1"/>
                 <a:r>
-                  <a:rPr lang="en-GB" dirty="0"/>
+                  <a:rPr lang="en-GB" sz="2400" dirty="0"/>
                   <a:t>Good approximation of </a:t>
                 </a:r>
                 <a14:m>
                   <m:oMath xmlns:m="http://schemas.openxmlformats.org/officeDocument/2006/math">
                     <m:r>
-                      <a:rPr lang="fr-BE" b="0" i="1" smtClean="0">
+                      <a:rPr lang="fr-BE" sz="2400" b="0" i="1" smtClean="0">
                         <a:latin typeface="Cambria Math" panose="02040503050406030204" pitchFamily="18" charset="0"/>
                       </a:rPr>
                       <m:t>𝑓</m:t>
                     </m:r>
                   </m:oMath>
                 </a14:m>
-                <a:endParaRPr lang="en-GB" dirty="0"/>
+                <a:endParaRPr lang="en-GB" sz="2400" dirty="0"/>
               </a:p>
               <a:p>
                 <a:pPr lvl="1"/>
                 <a:r>
-                  <a:rPr lang="en-GB" dirty="0"/>
+                  <a:rPr lang="en-GB" sz="2400" dirty="0"/>
                   <a:t>Flexible, parsimonious</a:t>
                 </a:r>
+                <a:endParaRPr lang="en-GB" dirty="0"/>
               </a:p>
             </p:txBody>
           </p:sp>
         </mc:Choice>
-        <mc:Fallback xmlns="">
+        <mc:Fallback>
           <p:sp>
             <p:nvSpPr>
               <p:cNvPr id="3" name="Content Placeholder 2">
@@ -6944,14 +6985,14 @@
                 <a:spLocks noGrp="1" noRot="1" noChangeAspect="1" noMove="1" noResize="1" noEditPoints="1" noAdjustHandles="1" noChangeArrowheads="1" noChangeShapeType="1" noTextEdit="1"/>
               </p:cNvSpPr>
               <p:nvPr>
-                <p:ph idx="1"/>
+                <p:ph sz="half" idx="2"/>
               </p:nvPr>
             </p:nvSpPr>
             <p:spPr>
               <a:blipFill>
                 <a:blip r:embed="rId2"/>
                 <a:stretch>
-                  <a:fillRect l="-1043" t="-2241"/>
+                  <a:fillRect l="-754" t="-1974"/>
                 </a:stretch>
               </a:blipFill>
             </p:spPr>
@@ -6983,10 +7024,15 @@
             <a:spLocks noGrp="1"/>
           </p:cNvSpPr>
           <p:nvPr>
-            <p:ph type="ftr" sz="quarter" idx="11"/>
+            <p:ph type="ftr" sz="quarter" idx="4294967295"/>
           </p:nvPr>
         </p:nvSpPr>
-        <p:spPr/>
+        <p:spPr>
+          <a:xfrm>
+            <a:off x="0" y="0"/>
+            <a:ext cx="0" cy="0"/>
+          </a:xfrm>
+        </p:spPr>
         <p:txBody>
           <a:bodyPr/>
           <a:lstStyle/>
@@ -6995,35 +7041,6 @@
               <a:rPr lang="en-GB"/>
               <a:t>Time Series</a:t>
             </a:r>
-          </a:p>
-        </p:txBody>
-      </p:sp>
-      <p:sp>
-        <p:nvSpPr>
-          <p:cNvPr id="4" name="Espace réservé du numéro de diapositive 3">
-            <a:extLst>
-              <a:ext uri="{FF2B5EF4-FFF2-40B4-BE49-F238E27FC236}">
-                <a16:creationId xmlns:a16="http://schemas.microsoft.com/office/drawing/2014/main" id="{0CC0D185-D7F0-B137-7D45-9B731C0BA051}"/>
-              </a:ext>
-            </a:extLst>
-          </p:cNvPr>
-          <p:cNvSpPr>
-            <a:spLocks noGrp="1"/>
-          </p:cNvSpPr>
-          <p:nvPr>
-            <p:ph type="sldNum" sz="quarter" idx="12"/>
-          </p:nvPr>
-        </p:nvSpPr>
-        <p:spPr/>
-        <p:txBody>
-          <a:bodyPr/>
-          <a:lstStyle/>
-          <a:p>
-            <a:fld id="{71CC62B1-FA1F-4849-B719-012F8D8A46B3}" type="slidenum">
-              <a:rPr lang="en-GB" smtClean="0"/>
-              <a:t>12</a:t>
-            </a:fld>
-            <a:endParaRPr lang="en-GB"/>
           </a:p>
         </p:txBody>
       </p:sp>
@@ -7085,8 +7102,37 @@
           </a:p>
         </p:txBody>
       </p:sp>
-      <mc:AlternateContent xmlns:mc="http://schemas.openxmlformats.org/markup-compatibility/2006" xmlns:a14="http://schemas.microsoft.com/office/drawing/2010/main">
-        <mc:Choice Requires="a14">
+      <p:sp>
+        <p:nvSpPr>
+          <p:cNvPr id="4" name="Espace réservé du numéro de diapositive 3">
+            <a:extLst>
+              <a:ext uri="{FF2B5EF4-FFF2-40B4-BE49-F238E27FC236}">
+                <a16:creationId xmlns:a16="http://schemas.microsoft.com/office/drawing/2014/main" id="{F698B9C4-D421-3CB5-9B87-B2EE50C86EAB}"/>
+              </a:ext>
+            </a:extLst>
+          </p:cNvPr>
+          <p:cNvSpPr>
+            <a:spLocks noGrp="1"/>
+          </p:cNvSpPr>
+          <p:nvPr>
+            <p:ph type="sldNum" idx="12"/>
+          </p:nvPr>
+        </p:nvSpPr>
+        <p:spPr/>
+        <p:txBody>
+          <a:bodyPr/>
+          <a:lstStyle/>
+          <a:p>
+            <a:fld id="{71CC62B1-FA1F-4849-B719-012F8D8A46B3}" type="slidenum">
+              <a:rPr lang="en-GB" smtClean="0"/>
+              <a:t>13</a:t>
+            </a:fld>
+            <a:endParaRPr lang="en-GB"/>
+          </a:p>
+        </p:txBody>
+      </p:sp>
+      <mc:AlternateContent xmlns:mc="http://schemas.openxmlformats.org/markup-compatibility/2006">
+        <mc:Choice xmlns:a14="http://schemas.microsoft.com/office/drawing/2010/main" Requires="a14">
           <p:sp>
             <p:nvSpPr>
               <p:cNvPr id="3" name="Content Placeholder 2">
@@ -7100,7 +7146,7 @@
                 <a:spLocks noGrp="1"/>
               </p:cNvSpPr>
               <p:nvPr>
-                <p:ph idx="1"/>
+                <p:ph sz="half" idx="2"/>
               </p:nvPr>
             </p:nvSpPr>
             <p:spPr/>
@@ -7109,7 +7155,7 @@
               <a:lstStyle/>
               <a:p>
                 <a:r>
-                  <a:rPr lang="en-GB" dirty="0"/>
+                  <a:rPr lang="en-GB" sz="3200" dirty="0"/>
                   <a:t>Auto-regressive model</a:t>
                 </a:r>
               </a:p>
@@ -7120,14 +7166,14 @@
                     <m:d>
                       <m:dPr>
                         <m:ctrlPr>
-                          <a:rPr lang="fr-BE" b="0" i="1" smtClean="0">
+                          <a:rPr lang="fr-BE" sz="2800" b="0" i="1" smtClean="0">
                             <a:latin typeface="Cambria Math" panose="02040503050406030204" pitchFamily="18" charset="0"/>
                           </a:rPr>
                         </m:ctrlPr>
                       </m:dPr>
                       <m:e>
                         <m:r>
-                          <a:rPr lang="fr-BE" b="0" i="1" smtClean="0">
+                          <a:rPr lang="fr-BE" sz="2800" b="0" i="1" smtClean="0">
                             <a:latin typeface="Cambria Math" panose="02040503050406030204" pitchFamily="18" charset="0"/>
                           </a:rPr>
                           <m:t>1+</m:t>
@@ -7135,7 +7181,7 @@
                         <m:sSub>
                           <m:sSubPr>
                             <m:ctrlPr>
-                              <a:rPr lang="fr-BE" b="0" i="1" smtClean="0">
+                              <a:rPr lang="fr-BE" sz="2800" b="0" i="1" smtClean="0">
                                 <a:latin typeface="Cambria Math" panose="02040503050406030204" pitchFamily="18" charset="0"/>
                                 <a:ea typeface="Cambria Math" panose="02040503050406030204" pitchFamily="18" charset="0"/>
                               </a:rPr>
@@ -7143,7 +7189,7 @@
                           </m:sSubPr>
                           <m:e>
                             <m:r>
-                              <a:rPr lang="fr-BE" b="0" i="1" smtClean="0">
+                              <a:rPr lang="fr-BE" sz="2800" b="0" i="1" smtClean="0">
                                 <a:latin typeface="Cambria Math" panose="02040503050406030204" pitchFamily="18" charset="0"/>
                                 <a:ea typeface="Cambria Math" panose="02040503050406030204" pitchFamily="18" charset="0"/>
                               </a:rPr>
@@ -7152,7 +7198,7 @@
                           </m:e>
                           <m:sub>
                             <m:r>
-                              <a:rPr lang="fr-BE" b="0" i="1" smtClean="0">
+                              <a:rPr lang="fr-BE" sz="2800" b="0" i="1" smtClean="0">
                                 <a:latin typeface="Cambria Math" panose="02040503050406030204" pitchFamily="18" charset="0"/>
                               </a:rPr>
                               <m:t>1</m:t>
@@ -7160,13 +7206,13 @@
                           </m:sub>
                         </m:sSub>
                         <m:r>
-                          <a:rPr lang="fr-BE" b="0" i="1" smtClean="0">
+                          <a:rPr lang="fr-BE" sz="2800" b="0" i="1" smtClean="0">
                             <a:latin typeface="Cambria Math" panose="02040503050406030204" pitchFamily="18" charset="0"/>
                           </a:rPr>
                           <m:t>𝐵</m:t>
                         </m:r>
                         <m:r>
-                          <a:rPr lang="fr-BE" b="0" i="1" smtClean="0">
+                          <a:rPr lang="fr-BE" sz="2800" b="0" i="1" smtClean="0">
                             <a:latin typeface="Cambria Math" panose="02040503050406030204" pitchFamily="18" charset="0"/>
                           </a:rPr>
                           <m:t>+⋯+</m:t>
@@ -7174,7 +7220,7 @@
                         <m:sSub>
                           <m:sSubPr>
                             <m:ctrlPr>
-                              <a:rPr lang="fr-BE" b="0" i="1" smtClean="0">
+                              <a:rPr lang="fr-BE" sz="2800" b="0" i="1" smtClean="0">
                                 <a:latin typeface="Cambria Math" panose="02040503050406030204" pitchFamily="18" charset="0"/>
                                 <a:ea typeface="Cambria Math" panose="02040503050406030204" pitchFamily="18" charset="0"/>
                               </a:rPr>
@@ -7182,7 +7228,7 @@
                           </m:sSubPr>
                           <m:e>
                             <m:r>
-                              <a:rPr lang="fr-BE" b="0" i="1" smtClean="0">
+                              <a:rPr lang="fr-BE" sz="2800" b="0" i="1" smtClean="0">
                                 <a:latin typeface="Cambria Math" panose="02040503050406030204" pitchFamily="18" charset="0"/>
                                 <a:ea typeface="Cambria Math" panose="02040503050406030204" pitchFamily="18" charset="0"/>
                               </a:rPr>
@@ -7191,7 +7237,7 @@
                           </m:e>
                           <m:sub>
                             <m:r>
-                              <a:rPr lang="fr-BE" b="0" i="1" smtClean="0">
+                              <a:rPr lang="fr-BE" sz="2800" b="0" i="1" smtClean="0">
                                 <a:latin typeface="Cambria Math" panose="02040503050406030204" pitchFamily="18" charset="0"/>
                                 <a:ea typeface="Cambria Math" panose="02040503050406030204" pitchFamily="18" charset="0"/>
                               </a:rPr>
@@ -7202,14 +7248,14 @@
                         <m:sSup>
                           <m:sSupPr>
                             <m:ctrlPr>
-                              <a:rPr lang="fr-BE" b="0" i="1" smtClean="0">
+                              <a:rPr lang="fr-BE" sz="2800" b="0" i="1" smtClean="0">
                                 <a:latin typeface="Cambria Math" panose="02040503050406030204" pitchFamily="18" charset="0"/>
                               </a:rPr>
                             </m:ctrlPr>
                           </m:sSupPr>
                           <m:e>
                             <m:r>
-                              <a:rPr lang="fr-BE" b="0" i="1" smtClean="0">
+                              <a:rPr lang="fr-BE" sz="2800" b="0" i="1" smtClean="0">
                                 <a:latin typeface="Cambria Math" panose="02040503050406030204" pitchFamily="18" charset="0"/>
                               </a:rPr>
                               <m:t>𝐵</m:t>
@@ -7217,7 +7263,7 @@
                           </m:e>
                           <m:sup>
                             <m:r>
-                              <a:rPr lang="fr-BE" b="0" i="1" smtClean="0">
+                              <a:rPr lang="fr-BE" sz="2800" b="0" i="1" smtClean="0">
                                 <a:latin typeface="Cambria Math" panose="02040503050406030204" pitchFamily="18" charset="0"/>
                               </a:rPr>
                               <m:t>𝑝</m:t>
@@ -7229,14 +7275,14 @@
                     <m:sSub>
                       <m:sSubPr>
                         <m:ctrlPr>
-                          <a:rPr lang="fr-BE" b="0" i="1" smtClean="0">
+                          <a:rPr lang="fr-BE" sz="2800" b="0" i="1" smtClean="0">
                             <a:latin typeface="Cambria Math" panose="02040503050406030204" pitchFamily="18" charset="0"/>
                           </a:rPr>
                         </m:ctrlPr>
                       </m:sSubPr>
                       <m:e>
                         <m:r>
-                          <a:rPr lang="fr-BE" b="0" i="1" smtClean="0">
+                          <a:rPr lang="fr-BE" sz="2800" b="0" i="1" smtClean="0">
                             <a:latin typeface="Cambria Math" panose="02040503050406030204" pitchFamily="18" charset="0"/>
                           </a:rPr>
                           <m:t>𝑥</m:t>
@@ -7244,7 +7290,7 @@
                       </m:e>
                       <m:sub>
                         <m:r>
-                          <a:rPr lang="fr-BE" b="0" i="1" smtClean="0">
+                          <a:rPr lang="fr-BE" sz="2800" b="0" i="1" smtClean="0">
                             <a:latin typeface="Cambria Math" panose="02040503050406030204" pitchFamily="18" charset="0"/>
                           </a:rPr>
                           <m:t>𝑡</m:t>
@@ -7252,7 +7298,7 @@
                       </m:sub>
                     </m:sSub>
                     <m:r>
-                      <a:rPr lang="fr-BE" b="0" i="1" smtClean="0">
+                      <a:rPr lang="fr-BE" sz="2800" b="0" i="1" smtClean="0">
                         <a:latin typeface="Cambria Math" panose="02040503050406030204" pitchFamily="18" charset="0"/>
                       </a:rPr>
                       <m:t>=</m:t>
@@ -7261,7 +7307,7 @@
                       <m:rPr>
                         <m:sty m:val="p"/>
                       </m:rPr>
-                      <a:rPr lang="el-GR" b="0" i="1" smtClean="0">
+                      <a:rPr lang="el-GR" sz="2800" b="0" i="1" smtClean="0">
                         <a:latin typeface="Cambria Math" panose="02040503050406030204" pitchFamily="18" charset="0"/>
                         <a:ea typeface="Cambria Math" panose="02040503050406030204" pitchFamily="18" charset="0"/>
                       </a:rPr>
@@ -7270,7 +7316,7 @@
                     <m:d>
                       <m:dPr>
                         <m:ctrlPr>
-                          <a:rPr lang="fr-BE" b="0" i="1" smtClean="0">
+                          <a:rPr lang="fr-BE" sz="2800" b="0" i="1" smtClean="0">
                             <a:latin typeface="Cambria Math" panose="02040503050406030204" pitchFamily="18" charset="0"/>
                             <a:ea typeface="Cambria Math" panose="02040503050406030204" pitchFamily="18" charset="0"/>
                           </a:rPr>
@@ -7278,7 +7324,7 @@
                       </m:dPr>
                       <m:e>
                         <m:r>
-                          <a:rPr lang="fr-BE" b="0" i="1" smtClean="0">
+                          <a:rPr lang="fr-BE" sz="2800" b="0" i="1" smtClean="0">
                             <a:latin typeface="Cambria Math" panose="02040503050406030204" pitchFamily="18" charset="0"/>
                             <a:ea typeface="Cambria Math" panose="02040503050406030204" pitchFamily="18" charset="0"/>
                           </a:rPr>
@@ -7289,14 +7335,14 @@
                     <m:sSub>
                       <m:sSubPr>
                         <m:ctrlPr>
-                          <a:rPr lang="fr-BE" b="0" i="1" smtClean="0">
+                          <a:rPr lang="fr-BE" sz="2800" b="0" i="1" smtClean="0">
                             <a:latin typeface="Cambria Math" panose="02040503050406030204" pitchFamily="18" charset="0"/>
                           </a:rPr>
                         </m:ctrlPr>
                       </m:sSubPr>
                       <m:e>
                         <m:r>
-                          <a:rPr lang="fr-BE" b="0" i="1" smtClean="0">
+                          <a:rPr lang="fr-BE" sz="2800" b="0" i="1" smtClean="0">
                             <a:latin typeface="Cambria Math" panose="02040503050406030204" pitchFamily="18" charset="0"/>
                           </a:rPr>
                           <m:t>𝑥</m:t>
@@ -7304,7 +7350,7 @@
                       </m:e>
                       <m:sub>
                         <m:r>
-                          <a:rPr lang="fr-BE" b="0" i="1" smtClean="0">
+                          <a:rPr lang="fr-BE" sz="2800" b="0" i="1" smtClean="0">
                             <a:latin typeface="Cambria Math" panose="02040503050406030204" pitchFamily="18" charset="0"/>
                           </a:rPr>
                           <m:t>𝑡</m:t>
@@ -7312,7 +7358,7 @@
                       </m:sub>
                     </m:sSub>
                     <m:r>
-                      <a:rPr lang="fr-BE" b="0" i="1" smtClean="0">
+                      <a:rPr lang="fr-BE" sz="2800" b="0" i="1" smtClean="0">
                         <a:latin typeface="Cambria Math" panose="02040503050406030204" pitchFamily="18" charset="0"/>
                       </a:rPr>
                       <m:t>=</m:t>
@@ -7320,7 +7366,7 @@
                     <m:sSub>
                       <m:sSubPr>
                         <m:ctrlPr>
-                          <a:rPr lang="fr-BE" b="0" i="1" smtClean="0">
+                          <a:rPr lang="fr-BE" sz="2800" b="0" i="1" smtClean="0">
                             <a:latin typeface="Cambria Math" panose="02040503050406030204" pitchFamily="18" charset="0"/>
                             <a:ea typeface="Cambria Math" panose="02040503050406030204" pitchFamily="18" charset="0"/>
                           </a:rPr>
@@ -7328,7 +7374,7 @@
                       </m:sSubPr>
                       <m:e>
                         <m:r>
-                          <a:rPr lang="fr-BE" b="0" i="1" smtClean="0">
+                          <a:rPr lang="fr-BE" sz="2800" b="0" i="1" smtClean="0">
                             <a:latin typeface="Cambria Math" panose="02040503050406030204" pitchFamily="18" charset="0"/>
                             <a:ea typeface="Cambria Math" panose="02040503050406030204" pitchFamily="18" charset="0"/>
                           </a:rPr>
@@ -7337,7 +7383,7 @@
                       </m:e>
                       <m:sub>
                         <m:r>
-                          <a:rPr lang="fr-BE" b="0" i="1" smtClean="0">
+                          <a:rPr lang="fr-BE" sz="2800" b="0" i="1" smtClean="0">
                             <a:latin typeface="Cambria Math" panose="02040503050406030204" pitchFamily="18" charset="0"/>
                           </a:rPr>
                           <m:t>𝑡</m:t>
@@ -7346,7 +7392,7 @@
                     </m:sSub>
                   </m:oMath>
                 </a14:m>
-                <a:endParaRPr lang="en-GB" dirty="0"/>
+                <a:endParaRPr lang="en-GB" sz="2800" dirty="0"/>
               </a:p>
               <a:p>
                 <a:pPr lvl="1"/>
@@ -7355,14 +7401,14 @@
                     <m:sSub>
                       <m:sSubPr>
                         <m:ctrlPr>
-                          <a:rPr lang="fr-BE" b="0" i="1" smtClean="0">
+                          <a:rPr lang="fr-BE" sz="2800" b="0" i="1" smtClean="0">
                             <a:latin typeface="Cambria Math" panose="02040503050406030204" pitchFamily="18" charset="0"/>
                           </a:rPr>
                         </m:ctrlPr>
                       </m:sSubPr>
                       <m:e>
                         <m:r>
-                          <a:rPr lang="fr-BE" b="0" i="1" smtClean="0">
+                          <a:rPr lang="fr-BE" sz="2800" b="0" i="1" smtClean="0">
                             <a:latin typeface="Cambria Math" panose="02040503050406030204" pitchFamily="18" charset="0"/>
                           </a:rPr>
                           <m:t>𝑥</m:t>
@@ -7370,7 +7416,7 @@
                       </m:e>
                       <m:sub>
                         <m:r>
-                          <a:rPr lang="fr-BE" b="0" i="1" smtClean="0">
+                          <a:rPr lang="fr-BE" sz="2800" b="0" i="1" smtClean="0">
                             <a:latin typeface="Cambria Math" panose="02040503050406030204" pitchFamily="18" charset="0"/>
                           </a:rPr>
                           <m:t>𝑡</m:t>
@@ -7378,7 +7424,7 @@
                       </m:sub>
                     </m:sSub>
                     <m:r>
-                      <a:rPr lang="fr-BE" b="0" i="1" smtClean="0">
+                      <a:rPr lang="fr-BE" sz="2800" b="0" i="1" smtClean="0">
                         <a:latin typeface="Cambria Math" panose="02040503050406030204" pitchFamily="18" charset="0"/>
                       </a:rPr>
                       <m:t>=</m:t>
@@ -7386,7 +7432,7 @@
                     <m:sSub>
                       <m:sSubPr>
                         <m:ctrlPr>
-                          <a:rPr lang="fr-BE" b="0" i="1" smtClean="0">
+                          <a:rPr lang="fr-BE" sz="2800" b="0" i="1" smtClean="0">
                             <a:latin typeface="Cambria Math" panose="02040503050406030204" pitchFamily="18" charset="0"/>
                             <a:ea typeface="Cambria Math" panose="02040503050406030204" pitchFamily="18" charset="0"/>
                           </a:rPr>
@@ -7394,7 +7440,7 @@
                       </m:sSubPr>
                       <m:e>
                         <m:r>
-                          <a:rPr lang="fr-BE" b="0" i="1" smtClean="0">
+                          <a:rPr lang="fr-BE" sz="2800" b="0" i="1" smtClean="0">
                             <a:latin typeface="Cambria Math" panose="02040503050406030204" pitchFamily="18" charset="0"/>
                             <a:ea typeface="Cambria Math" panose="02040503050406030204" pitchFamily="18" charset="0"/>
                           </a:rPr>
@@ -7403,7 +7449,7 @@
                       </m:e>
                       <m:sub>
                         <m:r>
-                          <a:rPr lang="fr-BE" b="0" i="1" smtClean="0">
+                          <a:rPr lang="fr-BE" sz="2800" b="0" i="1" smtClean="0">
                             <a:latin typeface="Cambria Math" panose="02040503050406030204" pitchFamily="18" charset="0"/>
                           </a:rPr>
                           <m:t>𝑡</m:t>
@@ -7411,7 +7457,7 @@
                       </m:sub>
                     </m:sSub>
                     <m:r>
-                      <a:rPr lang="fr-BE" b="0" i="1" smtClean="0">
+                      <a:rPr lang="fr-BE" sz="2800" b="0" i="1" smtClean="0">
                         <a:latin typeface="Cambria Math" panose="02040503050406030204" pitchFamily="18" charset="0"/>
                       </a:rPr>
                       <m:t>−</m:t>
@@ -7419,7 +7465,7 @@
                     <m:sSub>
                       <m:sSubPr>
                         <m:ctrlPr>
-                          <a:rPr lang="fr-BE" b="0" i="1" smtClean="0">
+                          <a:rPr lang="fr-BE" sz="2800" b="0" i="1" smtClean="0">
                             <a:latin typeface="Cambria Math" panose="02040503050406030204" pitchFamily="18" charset="0"/>
                             <a:ea typeface="Cambria Math" panose="02040503050406030204" pitchFamily="18" charset="0"/>
                           </a:rPr>
@@ -7427,7 +7473,7 @@
                       </m:sSubPr>
                       <m:e>
                         <m:r>
-                          <a:rPr lang="fr-BE" b="0" i="1" smtClean="0">
+                          <a:rPr lang="fr-BE" sz="2800" b="0" i="1" smtClean="0">
                             <a:latin typeface="Cambria Math" panose="02040503050406030204" pitchFamily="18" charset="0"/>
                             <a:ea typeface="Cambria Math" panose="02040503050406030204" pitchFamily="18" charset="0"/>
                           </a:rPr>
@@ -7436,7 +7482,7 @@
                       </m:e>
                       <m:sub>
                         <m:r>
-                          <a:rPr lang="fr-BE" b="0" i="1" smtClean="0">
+                          <a:rPr lang="fr-BE" sz="2800" b="0" i="1" smtClean="0">
                             <a:latin typeface="Cambria Math" panose="02040503050406030204" pitchFamily="18" charset="0"/>
                           </a:rPr>
                           <m:t>1</m:t>
@@ -7446,14 +7492,14 @@
                     <m:sSub>
                       <m:sSubPr>
                         <m:ctrlPr>
-                          <a:rPr lang="fr-BE" b="0" i="1" smtClean="0">
+                          <a:rPr lang="fr-BE" sz="2800" b="0" i="1" smtClean="0">
                             <a:latin typeface="Cambria Math" panose="02040503050406030204" pitchFamily="18" charset="0"/>
                           </a:rPr>
                         </m:ctrlPr>
                       </m:sSubPr>
                       <m:e>
                         <m:r>
-                          <a:rPr lang="fr-BE" b="0" i="1" smtClean="0">
+                          <a:rPr lang="fr-BE" sz="2800" b="0" i="1" smtClean="0">
                             <a:latin typeface="Cambria Math" panose="02040503050406030204" pitchFamily="18" charset="0"/>
                           </a:rPr>
                           <m:t>𝑥</m:t>
@@ -7461,13 +7507,13 @@
                       </m:e>
                       <m:sub>
                         <m:r>
-                          <a:rPr lang="fr-BE" b="0" i="1" smtClean="0">
+                          <a:rPr lang="fr-BE" sz="2800" b="0" i="1" smtClean="0">
                             <a:latin typeface="Cambria Math" panose="02040503050406030204" pitchFamily="18" charset="0"/>
                           </a:rPr>
                           <m:t>𝑡</m:t>
                         </m:r>
                         <m:r>
-                          <a:rPr lang="fr-BE" b="0" i="1" smtClean="0">
+                          <a:rPr lang="fr-BE" sz="2800" b="0" i="1" smtClean="0">
                             <a:latin typeface="Cambria Math" panose="02040503050406030204" pitchFamily="18" charset="0"/>
                           </a:rPr>
                           <m:t>−1</m:t>
@@ -7475,7 +7521,7 @@
                       </m:sub>
                     </m:sSub>
                     <m:r>
-                      <a:rPr lang="fr-BE" b="0" i="1" smtClean="0">
+                      <a:rPr lang="fr-BE" sz="2800" b="0" i="1" smtClean="0">
                         <a:latin typeface="Cambria Math" panose="02040503050406030204" pitchFamily="18" charset="0"/>
                       </a:rPr>
                       <m:t>−⋯−</m:t>
@@ -7483,7 +7529,7 @@
                     <m:sSub>
                       <m:sSubPr>
                         <m:ctrlPr>
-                          <a:rPr lang="fr-BE" b="0" i="1" smtClean="0">
+                          <a:rPr lang="fr-BE" sz="2800" b="0" i="1" smtClean="0">
                             <a:latin typeface="Cambria Math" panose="02040503050406030204" pitchFamily="18" charset="0"/>
                             <a:ea typeface="Cambria Math" panose="02040503050406030204" pitchFamily="18" charset="0"/>
                           </a:rPr>
@@ -7491,7 +7537,7 @@
                       </m:sSubPr>
                       <m:e>
                         <m:r>
-                          <a:rPr lang="fr-BE" b="0" i="1" smtClean="0">
+                          <a:rPr lang="fr-BE" sz="2800" b="0" i="1" smtClean="0">
                             <a:latin typeface="Cambria Math" panose="02040503050406030204" pitchFamily="18" charset="0"/>
                             <a:ea typeface="Cambria Math" panose="02040503050406030204" pitchFamily="18" charset="0"/>
                           </a:rPr>
@@ -7500,7 +7546,7 @@
                       </m:e>
                       <m:sub>
                         <m:r>
-                          <a:rPr lang="fr-BE" b="0" i="1" smtClean="0">
+                          <a:rPr lang="fr-BE" sz="2800" b="0" i="1" smtClean="0">
                             <a:latin typeface="Cambria Math" panose="02040503050406030204" pitchFamily="18" charset="0"/>
                             <a:ea typeface="Cambria Math" panose="02040503050406030204" pitchFamily="18" charset="0"/>
                           </a:rPr>
@@ -7511,14 +7557,14 @@
                     <m:sSub>
                       <m:sSubPr>
                         <m:ctrlPr>
-                          <a:rPr lang="fr-BE" b="0" i="1" smtClean="0">
+                          <a:rPr lang="fr-BE" sz="2800" b="0" i="1" smtClean="0">
                             <a:latin typeface="Cambria Math" panose="02040503050406030204" pitchFamily="18" charset="0"/>
                           </a:rPr>
                         </m:ctrlPr>
                       </m:sSubPr>
                       <m:e>
                         <m:r>
-                          <a:rPr lang="fr-BE" b="0" i="1" smtClean="0">
+                          <a:rPr lang="fr-BE" sz="2800" b="0" i="1" smtClean="0">
                             <a:latin typeface="Cambria Math" panose="02040503050406030204" pitchFamily="18" charset="0"/>
                           </a:rPr>
                           <m:t>𝑥</m:t>
@@ -7526,19 +7572,19 @@
                       </m:e>
                       <m:sub>
                         <m:r>
-                          <a:rPr lang="fr-BE" b="0" i="1" smtClean="0">
+                          <a:rPr lang="fr-BE" sz="2800" b="0" i="1" smtClean="0">
                             <a:latin typeface="Cambria Math" panose="02040503050406030204" pitchFamily="18" charset="0"/>
                           </a:rPr>
                           <m:t>𝑡</m:t>
                         </m:r>
                         <m:r>
-                          <a:rPr lang="fr-BE" b="0" i="1" smtClean="0">
+                          <a:rPr lang="fr-BE" sz="2800" b="0" i="1" smtClean="0">
                             <a:latin typeface="Cambria Math" panose="02040503050406030204" pitchFamily="18" charset="0"/>
                           </a:rPr>
                           <m:t>−</m:t>
                         </m:r>
                         <m:r>
-                          <a:rPr lang="fr-BE" b="0" i="1" smtClean="0">
+                          <a:rPr lang="fr-BE" sz="2800" b="0" i="1" smtClean="0">
                             <a:latin typeface="Cambria Math" panose="02040503050406030204" pitchFamily="18" charset="0"/>
                           </a:rPr>
                           <m:t>𝑝</m:t>
@@ -7548,11 +7594,11 @@
                   </m:oMath>
                 </a14:m>
                 <a:r>
-                  <a:rPr lang="en-GB" dirty="0"/>
+                  <a:rPr lang="en-GB" sz="2800" dirty="0"/>
                   <a:t> 			</a:t>
                 </a:r>
                 <a:r>
-                  <a:rPr lang="en-GB" dirty="0">
+                  <a:rPr lang="en-GB" sz="2800" dirty="0">
                     <a:solidFill>
                       <a:srgbClr val="FF0000"/>
                     </a:solidFill>
@@ -7562,7 +7608,7 @@
               </a:p>
               <a:p>
                 <a:r>
-                  <a:rPr lang="en-GB" dirty="0"/>
+                  <a:rPr lang="en-GB" sz="3200" dirty="0"/>
                   <a:t>Moving average model</a:t>
                 </a:r>
               </a:p>
@@ -7573,14 +7619,14 @@
                     <m:sSub>
                       <m:sSubPr>
                         <m:ctrlPr>
-                          <a:rPr lang="fr-BE" b="0" i="1" smtClean="0">
+                          <a:rPr lang="fr-BE" sz="2800" b="0" i="1" smtClean="0">
                             <a:latin typeface="Cambria Math" panose="02040503050406030204" pitchFamily="18" charset="0"/>
                           </a:rPr>
                         </m:ctrlPr>
                       </m:sSubPr>
                       <m:e>
                         <m:r>
-                          <a:rPr lang="fr-BE" b="0" i="1" smtClean="0">
+                          <a:rPr lang="fr-BE" sz="2800" b="0" i="1" smtClean="0">
                             <a:latin typeface="Cambria Math" panose="02040503050406030204" pitchFamily="18" charset="0"/>
                           </a:rPr>
                           <m:t>𝑥</m:t>
@@ -7588,7 +7634,7 @@
                       </m:e>
                       <m:sub>
                         <m:r>
-                          <a:rPr lang="fr-BE" b="0" i="1" smtClean="0">
+                          <a:rPr lang="fr-BE" sz="2800" b="0" i="1" smtClean="0">
                             <a:latin typeface="Cambria Math" panose="02040503050406030204" pitchFamily="18" charset="0"/>
                           </a:rPr>
                           <m:t>𝑡</m:t>
@@ -7596,7 +7642,7 @@
                       </m:sub>
                     </m:sSub>
                     <m:r>
-                      <a:rPr lang="fr-BE" b="0" i="1" smtClean="0">
+                      <a:rPr lang="fr-BE" sz="2800" b="0" i="1" smtClean="0">
                         <a:latin typeface="Cambria Math" panose="02040503050406030204" pitchFamily="18" charset="0"/>
                       </a:rPr>
                       <m:t>=</m:t>
@@ -7605,7 +7651,7 @@
                       <m:rPr>
                         <m:sty m:val="p"/>
                       </m:rPr>
-                      <a:rPr lang="el-GR" b="0" i="1" smtClean="0">
+                      <a:rPr lang="el-GR" sz="2800" b="0" i="1" smtClean="0">
                         <a:latin typeface="Cambria Math" panose="02040503050406030204" pitchFamily="18" charset="0"/>
                         <a:ea typeface="Cambria Math" panose="02040503050406030204" pitchFamily="18" charset="0"/>
                       </a:rPr>
@@ -7614,7 +7660,7 @@
                     <m:d>
                       <m:dPr>
                         <m:ctrlPr>
-                          <a:rPr lang="fr-BE" b="0" i="1" smtClean="0">
+                          <a:rPr lang="fr-BE" sz="2800" b="0" i="1" smtClean="0">
                             <a:latin typeface="Cambria Math" panose="02040503050406030204" pitchFamily="18" charset="0"/>
                             <a:ea typeface="Cambria Math" panose="02040503050406030204" pitchFamily="18" charset="0"/>
                           </a:rPr>
@@ -7622,7 +7668,7 @@
                       </m:dPr>
                       <m:e>
                         <m:r>
-                          <a:rPr lang="fr-BE" b="0" i="1" smtClean="0">
+                          <a:rPr lang="fr-BE" sz="2800" b="0" i="1" smtClean="0">
                             <a:latin typeface="Cambria Math" panose="02040503050406030204" pitchFamily="18" charset="0"/>
                             <a:ea typeface="Cambria Math" panose="02040503050406030204" pitchFamily="18" charset="0"/>
                           </a:rPr>
@@ -7633,14 +7679,14 @@
                     <m:sSub>
                       <m:sSubPr>
                         <m:ctrlPr>
-                          <a:rPr lang="fr-BE" b="0" i="1" smtClean="0">
+                          <a:rPr lang="fr-BE" sz="2800" b="0" i="1" smtClean="0">
                             <a:latin typeface="Cambria Math" panose="02040503050406030204" pitchFamily="18" charset="0"/>
                           </a:rPr>
                         </m:ctrlPr>
                       </m:sSubPr>
                       <m:e>
                         <m:r>
-                          <a:rPr lang="fr-BE" b="0" i="1" smtClean="0">
+                          <a:rPr lang="fr-BE" sz="2800" b="0" i="1" smtClean="0">
                             <a:latin typeface="Cambria Math" panose="02040503050406030204" pitchFamily="18" charset="0"/>
                           </a:rPr>
                           <m:t>𝑥</m:t>
@@ -7648,7 +7694,7 @@
                       </m:e>
                       <m:sub>
                         <m:r>
-                          <a:rPr lang="fr-BE" b="0" i="1" smtClean="0">
+                          <a:rPr lang="fr-BE" sz="2800" b="0" i="1" smtClean="0">
                             <a:latin typeface="Cambria Math" panose="02040503050406030204" pitchFamily="18" charset="0"/>
                           </a:rPr>
                           <m:t>𝑡</m:t>
@@ -7656,7 +7702,7 @@
                       </m:sub>
                     </m:sSub>
                     <m:r>
-                      <a:rPr lang="fr-BE" b="0" i="1" smtClean="0">
+                      <a:rPr lang="fr-BE" sz="2800" b="0" i="1" smtClean="0">
                         <a:latin typeface="Cambria Math" panose="02040503050406030204" pitchFamily="18" charset="0"/>
                       </a:rPr>
                       <m:t>=</m:t>
@@ -7664,7 +7710,7 @@
                     <m:sSub>
                       <m:sSubPr>
                         <m:ctrlPr>
-                          <a:rPr lang="fr-BE" b="0" i="1" smtClean="0">
+                          <a:rPr lang="fr-BE" sz="2800" b="0" i="1" smtClean="0">
                             <a:latin typeface="Cambria Math" panose="02040503050406030204" pitchFamily="18" charset="0"/>
                           </a:rPr>
                         </m:ctrlPr>
@@ -7673,14 +7719,14 @@
                         <m:d>
                           <m:dPr>
                             <m:ctrlPr>
-                              <a:rPr lang="fr-BE" b="0" i="1" smtClean="0">
+                              <a:rPr lang="fr-BE" sz="2800" b="0" i="1" smtClean="0">
                                 <a:latin typeface="Cambria Math" panose="02040503050406030204" pitchFamily="18" charset="0"/>
                               </a:rPr>
                             </m:ctrlPr>
                           </m:dPr>
                           <m:e>
                             <m:r>
-                              <a:rPr lang="fr-BE" b="0" i="1" smtClean="0">
+                              <a:rPr lang="fr-BE" sz="2800" b="0" i="1" smtClean="0">
                                 <a:latin typeface="Cambria Math" panose="02040503050406030204" pitchFamily="18" charset="0"/>
                               </a:rPr>
                               <m:t>1+</m:t>
@@ -7688,7 +7734,7 @@
                             <m:sSub>
                               <m:sSubPr>
                                 <m:ctrlPr>
-                                  <a:rPr lang="fr-BE" b="0" i="1" smtClean="0">
+                                  <a:rPr lang="fr-BE" sz="2800" b="0" i="1" smtClean="0">
                                     <a:latin typeface="Cambria Math" panose="02040503050406030204" pitchFamily="18" charset="0"/>
                                     <a:ea typeface="Cambria Math" panose="02040503050406030204" pitchFamily="18" charset="0"/>
                                   </a:rPr>
@@ -7696,7 +7742,7 @@
                               </m:sSubPr>
                               <m:e>
                                 <m:r>
-                                  <a:rPr lang="fr-BE" b="0" i="1" smtClean="0">
+                                  <a:rPr lang="fr-BE" sz="2800" b="0" i="1" smtClean="0">
                                     <a:latin typeface="Cambria Math" panose="02040503050406030204" pitchFamily="18" charset="0"/>
                                     <a:ea typeface="Cambria Math" panose="02040503050406030204" pitchFamily="18" charset="0"/>
                                   </a:rPr>
@@ -7705,7 +7751,7 @@
                               </m:e>
                               <m:sub>
                                 <m:r>
-                                  <a:rPr lang="fr-BE" b="0" i="1" smtClean="0">
+                                  <a:rPr lang="fr-BE" sz="2800" b="0" i="1" smtClean="0">
                                     <a:latin typeface="Cambria Math" panose="02040503050406030204" pitchFamily="18" charset="0"/>
                                   </a:rPr>
                                   <m:t>1</m:t>
@@ -7713,13 +7759,13 @@
                               </m:sub>
                             </m:sSub>
                             <m:r>
-                              <a:rPr lang="fr-BE" b="0" i="1" smtClean="0">
+                              <a:rPr lang="fr-BE" sz="2800" b="0" i="1" smtClean="0">
                                 <a:latin typeface="Cambria Math" panose="02040503050406030204" pitchFamily="18" charset="0"/>
                               </a:rPr>
                               <m:t>𝐵</m:t>
                             </m:r>
                             <m:r>
-                              <a:rPr lang="fr-BE" b="0" i="1" smtClean="0">
+                              <a:rPr lang="fr-BE" sz="2800" b="0" i="1" smtClean="0">
                                 <a:latin typeface="Cambria Math" panose="02040503050406030204" pitchFamily="18" charset="0"/>
                               </a:rPr>
                               <m:t>+⋯+</m:t>
@@ -7727,7 +7773,7 @@
                             <m:sSub>
                               <m:sSubPr>
                                 <m:ctrlPr>
-                                  <a:rPr lang="fr-BE" b="0" i="1" smtClean="0">
+                                  <a:rPr lang="fr-BE" sz="2800" b="0" i="1" smtClean="0">
                                     <a:latin typeface="Cambria Math" panose="02040503050406030204" pitchFamily="18" charset="0"/>
                                     <a:ea typeface="Cambria Math" panose="02040503050406030204" pitchFamily="18" charset="0"/>
                                   </a:rPr>
@@ -7735,7 +7781,7 @@
                               </m:sSubPr>
                               <m:e>
                                 <m:r>
-                                  <a:rPr lang="fr-BE" b="0" i="1" smtClean="0">
+                                  <a:rPr lang="fr-BE" sz="2800" b="0" i="1" smtClean="0">
                                     <a:latin typeface="Cambria Math" panose="02040503050406030204" pitchFamily="18" charset="0"/>
                                     <a:ea typeface="Cambria Math" panose="02040503050406030204" pitchFamily="18" charset="0"/>
                                   </a:rPr>
@@ -7744,7 +7790,7 @@
                               </m:e>
                               <m:sub>
                                 <m:r>
-                                  <a:rPr lang="fr-BE" b="0" i="1" smtClean="0">
+                                  <a:rPr lang="fr-BE" sz="2800" b="0" i="1" smtClean="0">
                                     <a:latin typeface="Cambria Math" panose="02040503050406030204" pitchFamily="18" charset="0"/>
                                     <a:ea typeface="Cambria Math" panose="02040503050406030204" pitchFamily="18" charset="0"/>
                                   </a:rPr>
@@ -7755,14 +7801,14 @@
                             <m:sSup>
                               <m:sSupPr>
                                 <m:ctrlPr>
-                                  <a:rPr lang="fr-BE" b="0" i="1" smtClean="0">
+                                  <a:rPr lang="fr-BE" sz="2800" b="0" i="1" smtClean="0">
                                     <a:latin typeface="Cambria Math" panose="02040503050406030204" pitchFamily="18" charset="0"/>
                                   </a:rPr>
                                 </m:ctrlPr>
                               </m:sSupPr>
                               <m:e>
                                 <m:r>
-                                  <a:rPr lang="fr-BE" b="0" i="1" smtClean="0">
+                                  <a:rPr lang="fr-BE" sz="2800" b="0" i="1" smtClean="0">
                                     <a:latin typeface="Cambria Math" panose="02040503050406030204" pitchFamily="18" charset="0"/>
                                   </a:rPr>
                                   <m:t>𝐵</m:t>
@@ -7770,7 +7816,7 @@
                               </m:e>
                               <m:sup>
                                 <m:r>
-                                  <a:rPr lang="fr-BE" b="0" i="1" smtClean="0">
+                                  <a:rPr lang="fr-BE" sz="2800" b="0" i="1" smtClean="0">
                                     <a:latin typeface="Cambria Math" panose="02040503050406030204" pitchFamily="18" charset="0"/>
                                   </a:rPr>
                                   <m:t>𝑞</m:t>
@@ -7780,7 +7826,7 @@
                           </m:e>
                         </m:d>
                         <m:r>
-                          <a:rPr lang="fr-BE" b="0" i="1" smtClean="0">
+                          <a:rPr lang="fr-BE" sz="2800" b="0" i="1" smtClean="0">
                             <a:latin typeface="Cambria Math" panose="02040503050406030204" pitchFamily="18" charset="0"/>
                             <a:ea typeface="Cambria Math" panose="02040503050406030204" pitchFamily="18" charset="0"/>
                           </a:rPr>
@@ -7789,7 +7835,7 @@
                       </m:e>
                       <m:sub>
                         <m:r>
-                          <a:rPr lang="fr-BE" b="0" i="1" smtClean="0">
+                          <a:rPr lang="fr-BE" sz="2800" b="0" i="1" smtClean="0">
                             <a:latin typeface="Cambria Math" panose="02040503050406030204" pitchFamily="18" charset="0"/>
                           </a:rPr>
                           <m:t>𝑡</m:t>
@@ -7798,7 +7844,7 @@
                     </m:sSub>
                   </m:oMath>
                 </a14:m>
-                <a:endParaRPr lang="en-GB" dirty="0"/>
+                <a:endParaRPr lang="en-GB" sz="2800" dirty="0"/>
               </a:p>
               <a:p>
                 <a:pPr lvl="1"/>
@@ -7807,14 +7853,14 @@
                     <m:sSub>
                       <m:sSubPr>
                         <m:ctrlPr>
-                          <a:rPr lang="fr-BE" b="0" i="1" smtClean="0">
+                          <a:rPr lang="fr-BE" sz="2800" b="0" i="1" smtClean="0">
                             <a:latin typeface="Cambria Math" panose="02040503050406030204" pitchFamily="18" charset="0"/>
                           </a:rPr>
                         </m:ctrlPr>
                       </m:sSubPr>
                       <m:e>
                         <m:r>
-                          <a:rPr lang="fr-BE" b="0" i="1" smtClean="0">
+                          <a:rPr lang="fr-BE" sz="2800" b="0" i="1" smtClean="0">
                             <a:latin typeface="Cambria Math" panose="02040503050406030204" pitchFamily="18" charset="0"/>
                           </a:rPr>
                           <m:t>𝑥</m:t>
@@ -7822,7 +7868,7 @@
                       </m:e>
                       <m:sub>
                         <m:r>
-                          <a:rPr lang="fr-BE" b="0" i="1" smtClean="0">
+                          <a:rPr lang="fr-BE" sz="2800" b="0" i="1" smtClean="0">
                             <a:latin typeface="Cambria Math" panose="02040503050406030204" pitchFamily="18" charset="0"/>
                           </a:rPr>
                           <m:t>𝑡</m:t>
@@ -7830,7 +7876,7 @@
                       </m:sub>
                     </m:sSub>
                     <m:r>
-                      <a:rPr lang="fr-BE" b="0" i="1" smtClean="0">
+                      <a:rPr lang="fr-BE" sz="2800" b="0" i="1" smtClean="0">
                         <a:latin typeface="Cambria Math" panose="02040503050406030204" pitchFamily="18" charset="0"/>
                       </a:rPr>
                       <m:t>=</m:t>
@@ -7838,7 +7884,7 @@
                     <m:sSub>
                       <m:sSubPr>
                         <m:ctrlPr>
-                          <a:rPr lang="fr-BE" b="0" i="1" smtClean="0">
+                          <a:rPr lang="fr-BE" sz="2800" b="0" i="1" smtClean="0">
                             <a:latin typeface="Cambria Math" panose="02040503050406030204" pitchFamily="18" charset="0"/>
                             <a:ea typeface="Cambria Math" panose="02040503050406030204" pitchFamily="18" charset="0"/>
                           </a:rPr>
@@ -7846,7 +7892,7 @@
                       </m:sSubPr>
                       <m:e>
                         <m:r>
-                          <a:rPr lang="fr-BE" b="0" i="1" smtClean="0">
+                          <a:rPr lang="fr-BE" sz="2800" b="0" i="1" smtClean="0">
                             <a:latin typeface="Cambria Math" panose="02040503050406030204" pitchFamily="18" charset="0"/>
                             <a:ea typeface="Cambria Math" panose="02040503050406030204" pitchFamily="18" charset="0"/>
                           </a:rPr>
@@ -7855,7 +7901,7 @@
                       </m:e>
                       <m:sub>
                         <m:r>
-                          <a:rPr lang="fr-BE" b="0" i="1" smtClean="0">
+                          <a:rPr lang="fr-BE" sz="2800" b="0" i="1" smtClean="0">
                             <a:latin typeface="Cambria Math" panose="02040503050406030204" pitchFamily="18" charset="0"/>
                           </a:rPr>
                           <m:t>𝑡</m:t>
@@ -7863,7 +7909,7 @@
                       </m:sub>
                     </m:sSub>
                     <m:r>
-                      <a:rPr lang="fr-BE" b="0" i="1" smtClean="0">
+                      <a:rPr lang="fr-BE" sz="2800" b="0" i="1" smtClean="0">
                         <a:latin typeface="Cambria Math" panose="02040503050406030204" pitchFamily="18" charset="0"/>
                       </a:rPr>
                       <m:t>+</m:t>
@@ -7871,7 +7917,7 @@
                     <m:sSub>
                       <m:sSubPr>
                         <m:ctrlPr>
-                          <a:rPr lang="fr-BE" b="0" i="1" smtClean="0">
+                          <a:rPr lang="fr-BE" sz="2800" b="0" i="1" smtClean="0">
                             <a:latin typeface="Cambria Math" panose="02040503050406030204" pitchFamily="18" charset="0"/>
                             <a:ea typeface="Cambria Math" panose="02040503050406030204" pitchFamily="18" charset="0"/>
                           </a:rPr>
@@ -7879,7 +7925,7 @@
                       </m:sSubPr>
                       <m:e>
                         <m:r>
-                          <a:rPr lang="fr-BE" b="0" i="1" smtClean="0">
+                          <a:rPr lang="fr-BE" sz="2800" b="0" i="1" smtClean="0">
                             <a:latin typeface="Cambria Math" panose="02040503050406030204" pitchFamily="18" charset="0"/>
                             <a:ea typeface="Cambria Math" panose="02040503050406030204" pitchFamily="18" charset="0"/>
                           </a:rPr>
@@ -7888,7 +7934,7 @@
                       </m:e>
                       <m:sub>
                         <m:r>
-                          <a:rPr lang="fr-BE" b="0" i="1" smtClean="0">
+                          <a:rPr lang="fr-BE" sz="2800" b="0" i="1" smtClean="0">
                             <a:latin typeface="Cambria Math" panose="02040503050406030204" pitchFamily="18" charset="0"/>
                           </a:rPr>
                           <m:t>1</m:t>
@@ -7898,7 +7944,7 @@
                     <m:sSub>
                       <m:sSubPr>
                         <m:ctrlPr>
-                          <a:rPr lang="fr-BE" b="0" i="1" smtClean="0">
+                          <a:rPr lang="fr-BE" sz="2800" b="0" i="1" smtClean="0">
                             <a:latin typeface="Cambria Math" panose="02040503050406030204" pitchFamily="18" charset="0"/>
                             <a:ea typeface="Cambria Math" panose="02040503050406030204" pitchFamily="18" charset="0"/>
                           </a:rPr>
@@ -7906,7 +7952,7 @@
                       </m:sSubPr>
                       <m:e>
                         <m:r>
-                          <a:rPr lang="fr-BE" b="0" i="1" smtClean="0">
+                          <a:rPr lang="fr-BE" sz="2800" b="0" i="1" smtClean="0">
                             <a:latin typeface="Cambria Math" panose="02040503050406030204" pitchFamily="18" charset="0"/>
                             <a:ea typeface="Cambria Math" panose="02040503050406030204" pitchFamily="18" charset="0"/>
                           </a:rPr>
@@ -7915,13 +7961,13 @@
                       </m:e>
                       <m:sub>
                         <m:r>
-                          <a:rPr lang="fr-BE" b="0" i="1" smtClean="0">
+                          <a:rPr lang="fr-BE" sz="2800" b="0" i="1" smtClean="0">
                             <a:latin typeface="Cambria Math" panose="02040503050406030204" pitchFamily="18" charset="0"/>
                           </a:rPr>
                           <m:t>𝑡</m:t>
                         </m:r>
                         <m:r>
-                          <a:rPr lang="fr-BE" b="0" i="1" smtClean="0">
+                          <a:rPr lang="fr-BE" sz="2800" b="0" i="1" smtClean="0">
                             <a:latin typeface="Cambria Math" panose="02040503050406030204" pitchFamily="18" charset="0"/>
                           </a:rPr>
                           <m:t>−1</m:t>
@@ -7929,7 +7975,7 @@
                       </m:sub>
                     </m:sSub>
                     <m:r>
-                      <a:rPr lang="fr-BE" b="0" i="1" smtClean="0">
+                      <a:rPr lang="fr-BE" sz="2800" b="0" i="1" smtClean="0">
                         <a:latin typeface="Cambria Math" panose="02040503050406030204" pitchFamily="18" charset="0"/>
                       </a:rPr>
                       <m:t>+⋯+</m:t>
@@ -7937,7 +7983,7 @@
                     <m:sSub>
                       <m:sSubPr>
                         <m:ctrlPr>
-                          <a:rPr lang="fr-BE" b="0" i="1" smtClean="0">
+                          <a:rPr lang="fr-BE" sz="2800" b="0" i="1" smtClean="0">
                             <a:latin typeface="Cambria Math" panose="02040503050406030204" pitchFamily="18" charset="0"/>
                             <a:ea typeface="Cambria Math" panose="02040503050406030204" pitchFamily="18" charset="0"/>
                           </a:rPr>
@@ -7945,7 +7991,7 @@
                       </m:sSubPr>
                       <m:e>
                         <m:r>
-                          <a:rPr lang="fr-BE" b="0" i="1" smtClean="0">
+                          <a:rPr lang="fr-BE" sz="2800" b="0" i="1" smtClean="0">
                             <a:latin typeface="Cambria Math" panose="02040503050406030204" pitchFamily="18" charset="0"/>
                             <a:ea typeface="Cambria Math" panose="02040503050406030204" pitchFamily="18" charset="0"/>
                           </a:rPr>
@@ -7954,7 +8000,7 @@
                       </m:e>
                       <m:sub>
                         <m:r>
-                          <a:rPr lang="fr-BE" b="0" i="1" smtClean="0">
+                          <a:rPr lang="fr-BE" sz="2800" b="0" i="1" smtClean="0">
                             <a:latin typeface="Cambria Math" panose="02040503050406030204" pitchFamily="18" charset="0"/>
                             <a:ea typeface="Cambria Math" panose="02040503050406030204" pitchFamily="18" charset="0"/>
                           </a:rPr>
@@ -7965,7 +8011,7 @@
                     <m:sSub>
                       <m:sSubPr>
                         <m:ctrlPr>
-                          <a:rPr lang="fr-BE" b="0" i="1" smtClean="0">
+                          <a:rPr lang="fr-BE" sz="2800" b="0" i="1" smtClean="0">
                             <a:latin typeface="Cambria Math" panose="02040503050406030204" pitchFamily="18" charset="0"/>
                             <a:ea typeface="Cambria Math" panose="02040503050406030204" pitchFamily="18" charset="0"/>
                           </a:rPr>
@@ -7973,7 +8019,7 @@
                       </m:sSubPr>
                       <m:e>
                         <m:r>
-                          <a:rPr lang="fr-BE" b="0" i="1" smtClean="0">
+                          <a:rPr lang="fr-BE" sz="2800" b="0" i="1" smtClean="0">
                             <a:latin typeface="Cambria Math" panose="02040503050406030204" pitchFamily="18" charset="0"/>
                             <a:ea typeface="Cambria Math" panose="02040503050406030204" pitchFamily="18" charset="0"/>
                           </a:rPr>
@@ -7982,19 +8028,19 @@
                       </m:e>
                       <m:sub>
                         <m:r>
-                          <a:rPr lang="fr-BE" b="0" i="1" smtClean="0">
+                          <a:rPr lang="fr-BE" sz="2800" b="0" i="1" smtClean="0">
                             <a:latin typeface="Cambria Math" panose="02040503050406030204" pitchFamily="18" charset="0"/>
                           </a:rPr>
                           <m:t>𝑡</m:t>
                         </m:r>
                         <m:r>
-                          <a:rPr lang="fr-BE" b="0" i="1" smtClean="0">
+                          <a:rPr lang="fr-BE" sz="2800" b="0" i="1" smtClean="0">
                             <a:latin typeface="Cambria Math" panose="02040503050406030204" pitchFamily="18" charset="0"/>
                           </a:rPr>
                           <m:t>−</m:t>
                         </m:r>
                         <m:r>
-                          <a:rPr lang="fr-BE" b="0" i="1" smtClean="0">
+                          <a:rPr lang="fr-BE" sz="2800" b="0" i="1" smtClean="0">
                             <a:latin typeface="Cambria Math" panose="02040503050406030204" pitchFamily="18" charset="0"/>
                           </a:rPr>
                           <m:t>𝑞</m:t>
@@ -8004,14 +8050,14 @@
                   </m:oMath>
                 </a14:m>
                 <a:r>
-                  <a:rPr lang="en-GB" dirty="0"/>
+                  <a:rPr lang="en-GB" sz="2800" dirty="0"/>
                   <a:t> 	</a:t>
                 </a:r>
               </a:p>
             </p:txBody>
           </p:sp>
         </mc:Choice>
-        <mc:Fallback xmlns="">
+        <mc:Fallback>
           <p:sp>
             <p:nvSpPr>
               <p:cNvPr id="3" name="Content Placeholder 2">
@@ -8025,14 +8071,14 @@
                 <a:spLocks noGrp="1" noRot="1" noChangeAspect="1" noMove="1" noResize="1" noEditPoints="1" noAdjustHandles="1" noChangeArrowheads="1" noChangeShapeType="1" noTextEdit="1"/>
               </p:cNvSpPr>
               <p:nvPr>
-                <p:ph idx="1"/>
+                <p:ph sz="half" idx="2"/>
               </p:nvPr>
             </p:nvSpPr>
             <p:spPr>
               <a:blipFill>
                 <a:blip r:embed="rId2"/>
                 <a:stretch>
-                  <a:fillRect l="-1043" t="-2241"/>
+                  <a:fillRect l="-754" t="-2439"/>
                 </a:stretch>
               </a:blipFill>
             </p:spPr>
@@ -8064,10 +8110,15 @@
             <a:spLocks noGrp="1"/>
           </p:cNvSpPr>
           <p:nvPr>
-            <p:ph type="ftr" sz="quarter" idx="11"/>
+            <p:ph type="ftr" sz="quarter" idx="4294967295"/>
           </p:nvPr>
         </p:nvSpPr>
-        <p:spPr/>
+        <p:spPr>
+          <a:xfrm>
+            <a:off x="0" y="0"/>
+            <a:ext cx="0" cy="0"/>
+          </a:xfrm>
+        </p:spPr>
         <p:txBody>
           <a:bodyPr/>
           <a:lstStyle/>
@@ -8076,35 +8127,6 @@
               <a:rPr lang="en-GB"/>
               <a:t>Time Series</a:t>
             </a:r>
-          </a:p>
-        </p:txBody>
-      </p:sp>
-      <p:sp>
-        <p:nvSpPr>
-          <p:cNvPr id="4" name="Espace réservé du numéro de diapositive 3">
-            <a:extLst>
-              <a:ext uri="{FF2B5EF4-FFF2-40B4-BE49-F238E27FC236}">
-                <a16:creationId xmlns:a16="http://schemas.microsoft.com/office/drawing/2014/main" id="{F698B9C4-D421-3CB5-9B87-B2EE50C86EAB}"/>
-              </a:ext>
-            </a:extLst>
-          </p:cNvPr>
-          <p:cNvSpPr>
-            <a:spLocks noGrp="1"/>
-          </p:cNvSpPr>
-          <p:nvPr>
-            <p:ph type="sldNum" sz="quarter" idx="12"/>
-          </p:nvPr>
-        </p:nvSpPr>
-        <p:spPr/>
-        <p:txBody>
-          <a:bodyPr/>
-          <a:lstStyle/>
-          <a:p>
-            <a:fld id="{71CC62B1-FA1F-4849-B719-012F8D8A46B3}" type="slidenum">
-              <a:rPr lang="en-GB" smtClean="0"/>
-              <a:t>13</a:t>
-            </a:fld>
-            <a:endParaRPr lang="en-GB"/>
           </a:p>
         </p:txBody>
       </p:sp>
@@ -8166,8 +8188,37 @@
           </a:p>
         </p:txBody>
       </p:sp>
-      <mc:AlternateContent xmlns:mc="http://schemas.openxmlformats.org/markup-compatibility/2006" xmlns:a14="http://schemas.microsoft.com/office/drawing/2010/main">
-        <mc:Choice Requires="a14">
+      <p:sp>
+        <p:nvSpPr>
+          <p:cNvPr id="4" name="Espace réservé du numéro de diapositive 3">
+            <a:extLst>
+              <a:ext uri="{FF2B5EF4-FFF2-40B4-BE49-F238E27FC236}">
+                <a16:creationId xmlns:a16="http://schemas.microsoft.com/office/drawing/2014/main" id="{BADFD712-9779-1A00-8354-49373E4E2A95}"/>
+              </a:ext>
+            </a:extLst>
+          </p:cNvPr>
+          <p:cNvSpPr>
+            <a:spLocks noGrp="1"/>
+          </p:cNvSpPr>
+          <p:nvPr>
+            <p:ph type="sldNum" idx="12"/>
+          </p:nvPr>
+        </p:nvSpPr>
+        <p:spPr/>
+        <p:txBody>
+          <a:bodyPr/>
+          <a:lstStyle/>
+          <a:p>
+            <a:fld id="{71CC62B1-FA1F-4849-B719-012F8D8A46B3}" type="slidenum">
+              <a:rPr lang="en-GB" smtClean="0"/>
+              <a:t>14</a:t>
+            </a:fld>
+            <a:endParaRPr lang="en-GB"/>
+          </a:p>
+        </p:txBody>
+      </p:sp>
+      <mc:AlternateContent xmlns:mc="http://schemas.openxmlformats.org/markup-compatibility/2006">
+        <mc:Choice xmlns:a14="http://schemas.microsoft.com/office/drawing/2010/main" Requires="a14">
           <p:sp>
             <p:nvSpPr>
               <p:cNvPr id="3" name="Content Placeholder 2">
@@ -8181,7 +8232,7 @@
                 <a:spLocks noGrp="1"/>
               </p:cNvSpPr>
               <p:nvPr>
-                <p:ph idx="1"/>
+                <p:ph sz="half" idx="2"/>
               </p:nvPr>
             </p:nvSpPr>
             <p:spPr/>
@@ -8190,48 +8241,48 @@
               <a:lstStyle/>
               <a:p>
                 <a:r>
-                  <a:rPr lang="en-GB" dirty="0"/>
+                  <a:rPr lang="en-GB" sz="2800" dirty="0"/>
                   <a:t>ARMA</a:t>
                 </a:r>
                 <a:r>
-                  <a:rPr lang="fr-BE" b="0" dirty="0"/>
+                  <a:rPr lang="fr-BE" sz="2800" b="0" dirty="0"/>
                   <a:t> </a:t>
                 </a:r>
                 <a14:m>
                   <m:oMath xmlns:m="http://schemas.openxmlformats.org/officeDocument/2006/math">
                     <m:r>
-                      <a:rPr lang="fr-BE" b="0" i="1" smtClean="0">
+                      <a:rPr lang="fr-BE" sz="2800" b="0" i="1" smtClean="0">
                         <a:latin typeface="Cambria Math" panose="02040503050406030204" pitchFamily="18" charset="0"/>
                       </a:rPr>
                       <m:t>(</m:t>
                     </m:r>
                     <m:r>
-                      <a:rPr lang="fr-BE" b="0" i="1" smtClean="0">
+                      <a:rPr lang="fr-BE" sz="2800" b="0" i="1" smtClean="0">
                         <a:latin typeface="Cambria Math" panose="02040503050406030204" pitchFamily="18" charset="0"/>
                       </a:rPr>
                       <m:t>𝑝</m:t>
                     </m:r>
                     <m:r>
-                      <a:rPr lang="fr-BE" b="0" i="1" smtClean="0">
+                      <a:rPr lang="fr-BE" sz="2800" b="0" i="1" smtClean="0">
                         <a:latin typeface="Cambria Math" panose="02040503050406030204" pitchFamily="18" charset="0"/>
                       </a:rPr>
                       <m:t>, </m:t>
                     </m:r>
                     <m:r>
-                      <a:rPr lang="fr-BE" b="0" i="1" smtClean="0">
+                      <a:rPr lang="fr-BE" sz="2800" b="0" i="1" smtClean="0">
                         <a:latin typeface="Cambria Math" panose="02040503050406030204" pitchFamily="18" charset="0"/>
                       </a:rPr>
                       <m:t>𝑞</m:t>
                     </m:r>
                     <m:r>
-                      <a:rPr lang="fr-BE" b="0" i="1" smtClean="0">
+                      <a:rPr lang="fr-BE" sz="2800" b="0" i="1" smtClean="0">
                         <a:latin typeface="Cambria Math" panose="02040503050406030204" pitchFamily="18" charset="0"/>
                       </a:rPr>
                       <m:t>)</m:t>
                     </m:r>
                   </m:oMath>
                 </a14:m>
-                <a:endParaRPr lang="en-GB" dirty="0"/>
+                <a:endParaRPr lang="en-GB" sz="2800" dirty="0"/>
               </a:p>
               <a:p>
                 <a:pPr lvl="1"/>
@@ -8241,7 +8292,7 @@
                       <m:rPr>
                         <m:sty m:val="p"/>
                       </m:rPr>
-                      <a:rPr lang="el-GR" b="0" i="1" smtClean="0">
+                      <a:rPr lang="el-GR" sz="2400" b="0" i="1" smtClean="0">
                         <a:latin typeface="Cambria Math" panose="02040503050406030204" pitchFamily="18" charset="0"/>
                         <a:ea typeface="Cambria Math" panose="02040503050406030204" pitchFamily="18" charset="0"/>
                       </a:rPr>
@@ -8250,7 +8301,7 @@
                     <m:d>
                       <m:dPr>
                         <m:ctrlPr>
-                          <a:rPr lang="fr-BE" b="0" i="1" smtClean="0">
+                          <a:rPr lang="fr-BE" sz="2400" b="0" i="1" smtClean="0">
                             <a:latin typeface="Cambria Math" panose="02040503050406030204" pitchFamily="18" charset="0"/>
                             <a:ea typeface="Cambria Math" panose="02040503050406030204" pitchFamily="18" charset="0"/>
                           </a:rPr>
@@ -8258,7 +8309,7 @@
                       </m:dPr>
                       <m:e>
                         <m:r>
-                          <a:rPr lang="fr-BE" b="0" i="1" smtClean="0">
+                          <a:rPr lang="fr-BE" sz="2400" b="0" i="1" smtClean="0">
                             <a:latin typeface="Cambria Math" panose="02040503050406030204" pitchFamily="18" charset="0"/>
                             <a:ea typeface="Cambria Math" panose="02040503050406030204" pitchFamily="18" charset="0"/>
                           </a:rPr>
@@ -8269,14 +8320,14 @@
                     <m:sSub>
                       <m:sSubPr>
                         <m:ctrlPr>
-                          <a:rPr lang="fr-BE" b="0" i="1" smtClean="0">
+                          <a:rPr lang="fr-BE" sz="2400" b="0" i="1" smtClean="0">
                             <a:latin typeface="Cambria Math" panose="02040503050406030204" pitchFamily="18" charset="0"/>
                           </a:rPr>
                         </m:ctrlPr>
                       </m:sSubPr>
                       <m:e>
                         <m:r>
-                          <a:rPr lang="fr-BE" b="0" i="1" smtClean="0">
+                          <a:rPr lang="fr-BE" sz="2400" b="0" i="1" smtClean="0">
                             <a:latin typeface="Cambria Math" panose="02040503050406030204" pitchFamily="18" charset="0"/>
                           </a:rPr>
                           <m:t>𝑥</m:t>
@@ -8284,7 +8335,7 @@
                       </m:e>
                       <m:sub>
                         <m:r>
-                          <a:rPr lang="fr-BE" b="0" i="1" smtClean="0">
+                          <a:rPr lang="fr-BE" sz="2400" b="0" i="1" smtClean="0">
                             <a:latin typeface="Cambria Math" panose="02040503050406030204" pitchFamily="18" charset="0"/>
                           </a:rPr>
                           <m:t>𝑡</m:t>
@@ -8292,7 +8343,7 @@
                       </m:sub>
                     </m:sSub>
                     <m:r>
-                      <a:rPr lang="fr-BE" b="0" i="1" smtClean="0">
+                      <a:rPr lang="fr-BE" sz="2400" b="0" i="1" smtClean="0">
                         <a:latin typeface="Cambria Math" panose="02040503050406030204" pitchFamily="18" charset="0"/>
                       </a:rPr>
                       <m:t>=</m:t>
@@ -8301,7 +8352,7 @@
                       <m:rPr>
                         <m:sty m:val="p"/>
                       </m:rPr>
-                      <a:rPr lang="el-GR" b="0" i="1" smtClean="0">
+                      <a:rPr lang="el-GR" sz="2400" b="0" i="1" smtClean="0">
                         <a:latin typeface="Cambria Math" panose="02040503050406030204" pitchFamily="18" charset="0"/>
                         <a:ea typeface="Cambria Math" panose="02040503050406030204" pitchFamily="18" charset="0"/>
                       </a:rPr>
@@ -8310,7 +8361,7 @@
                     <m:d>
                       <m:dPr>
                         <m:ctrlPr>
-                          <a:rPr lang="fr-BE" b="0" i="1" smtClean="0">
+                          <a:rPr lang="fr-BE" sz="2400" b="0" i="1" smtClean="0">
                             <a:latin typeface="Cambria Math" panose="02040503050406030204" pitchFamily="18" charset="0"/>
                             <a:ea typeface="Cambria Math" panose="02040503050406030204" pitchFamily="18" charset="0"/>
                           </a:rPr>
@@ -8318,7 +8369,7 @@
                       </m:dPr>
                       <m:e>
                         <m:r>
-                          <a:rPr lang="fr-BE" b="0" i="1" smtClean="0">
+                          <a:rPr lang="fr-BE" sz="2400" b="0" i="1" smtClean="0">
                             <a:latin typeface="Cambria Math" panose="02040503050406030204" pitchFamily="18" charset="0"/>
                             <a:ea typeface="Cambria Math" panose="02040503050406030204" pitchFamily="18" charset="0"/>
                           </a:rPr>
@@ -8329,7 +8380,7 @@
                     <m:sSub>
                       <m:sSubPr>
                         <m:ctrlPr>
-                          <a:rPr lang="fr-BE" b="0" i="1" smtClean="0">
+                          <a:rPr lang="fr-BE" sz="2400" b="0" i="1" smtClean="0">
                             <a:latin typeface="Cambria Math" panose="02040503050406030204" pitchFamily="18" charset="0"/>
                             <a:ea typeface="Cambria Math" panose="02040503050406030204" pitchFamily="18" charset="0"/>
                           </a:rPr>
@@ -8337,7 +8388,7 @@
                       </m:sSubPr>
                       <m:e>
                         <m:r>
-                          <a:rPr lang="fr-BE" b="0" i="1" smtClean="0">
+                          <a:rPr lang="fr-BE" sz="2400" b="0" i="1" smtClean="0">
                             <a:latin typeface="Cambria Math" panose="02040503050406030204" pitchFamily="18" charset="0"/>
                             <a:ea typeface="Cambria Math" panose="02040503050406030204" pitchFamily="18" charset="0"/>
                           </a:rPr>
@@ -8346,7 +8397,7 @@
                       </m:e>
                       <m:sub>
                         <m:r>
-                          <a:rPr lang="fr-BE" b="0" i="1" smtClean="0">
+                          <a:rPr lang="fr-BE" sz="2400" b="0" i="1" smtClean="0">
                             <a:latin typeface="Cambria Math" panose="02040503050406030204" pitchFamily="18" charset="0"/>
                           </a:rPr>
                           <m:t>𝑡</m:t>
@@ -8355,53 +8406,53 @@
                     </m:sSub>
                   </m:oMath>
                 </a14:m>
-                <a:endParaRPr lang="en-GB" dirty="0"/>
+                <a:endParaRPr lang="en-GB" sz="2400" dirty="0"/>
               </a:p>
               <a:p>
                 <a:r>
-                  <a:rPr lang="en-GB" dirty="0"/>
+                  <a:rPr lang="en-GB" sz="2800" dirty="0"/>
                   <a:t>SARIMA</a:t>
                 </a:r>
                 <a14:m>
                   <m:oMath xmlns:m="http://schemas.openxmlformats.org/officeDocument/2006/math">
                     <m:r>
-                      <a:rPr lang="fr-BE" b="0" i="1" smtClean="0">
+                      <a:rPr lang="fr-BE" sz="2800" b="0" i="1" smtClean="0">
                         <a:latin typeface="Cambria Math" panose="02040503050406030204" pitchFamily="18" charset="0"/>
                       </a:rPr>
                       <m:t>(</m:t>
                     </m:r>
                     <m:r>
-                      <a:rPr lang="fr-BE" b="0" i="1" smtClean="0">
+                      <a:rPr lang="fr-BE" sz="2800" b="0" i="1" smtClean="0">
                         <a:latin typeface="Cambria Math" panose="02040503050406030204" pitchFamily="18" charset="0"/>
                       </a:rPr>
                       <m:t>𝑝</m:t>
                     </m:r>
                     <m:r>
-                      <a:rPr lang="fr-BE" b="0" i="1" smtClean="0">
+                      <a:rPr lang="fr-BE" sz="2800" b="0" i="1" smtClean="0">
                         <a:latin typeface="Cambria Math" panose="02040503050406030204" pitchFamily="18" charset="0"/>
                       </a:rPr>
                       <m:t>,</m:t>
                     </m:r>
                     <m:r>
-                      <a:rPr lang="fr-BE" b="0" i="1" smtClean="0">
+                      <a:rPr lang="fr-BE" sz="2800" b="0" i="1" smtClean="0">
                         <a:latin typeface="Cambria Math" panose="02040503050406030204" pitchFamily="18" charset="0"/>
                       </a:rPr>
                       <m:t>𝑑</m:t>
                     </m:r>
                     <m:r>
-                      <a:rPr lang="fr-BE" b="0" i="1" smtClean="0">
+                      <a:rPr lang="fr-BE" sz="2800" b="0" i="1" smtClean="0">
                         <a:latin typeface="Cambria Math" panose="02040503050406030204" pitchFamily="18" charset="0"/>
                       </a:rPr>
                       <m:t>,</m:t>
                     </m:r>
                     <m:r>
-                      <a:rPr lang="fr-BE" b="0" i="1" smtClean="0">
+                      <a:rPr lang="fr-BE" sz="2800" b="0" i="1" smtClean="0">
                         <a:latin typeface="Cambria Math" panose="02040503050406030204" pitchFamily="18" charset="0"/>
                       </a:rPr>
                       <m:t>𝑞</m:t>
                     </m:r>
                     <m:r>
-                      <a:rPr lang="fr-BE" b="0" i="1" smtClean="0">
+                      <a:rPr lang="fr-BE" sz="2800" b="0" i="1" smtClean="0">
                         <a:latin typeface="Cambria Math" panose="02040503050406030204" pitchFamily="18" charset="0"/>
                       </a:rPr>
                       <m:t>)</m:t>
@@ -8409,50 +8460,50 @@
                     <m:sSub>
                       <m:sSubPr>
                         <m:ctrlPr>
-                          <a:rPr lang="fr-BE" b="0" i="1" smtClean="0">
+                          <a:rPr lang="fr-BE" sz="2800" b="0" i="1" smtClean="0">
                             <a:latin typeface="Cambria Math" panose="02040503050406030204" pitchFamily="18" charset="0"/>
                           </a:rPr>
                         </m:ctrlPr>
                       </m:sSubPr>
                       <m:e>
                         <m:r>
-                          <a:rPr lang="fr-BE" b="0" i="1" smtClean="0">
+                          <a:rPr lang="fr-BE" sz="2800" b="0" i="1" smtClean="0">
                             <a:latin typeface="Cambria Math" panose="02040503050406030204" pitchFamily="18" charset="0"/>
                           </a:rPr>
                           <m:t>(</m:t>
                         </m:r>
                         <m:r>
-                          <a:rPr lang="fr-BE" b="0" i="1" smtClean="0">
+                          <a:rPr lang="fr-BE" sz="2800" b="0" i="1" smtClean="0">
                             <a:latin typeface="Cambria Math" panose="02040503050406030204" pitchFamily="18" charset="0"/>
                           </a:rPr>
                           <m:t>𝑏𝑝</m:t>
                         </m:r>
                         <m:r>
-                          <a:rPr lang="fr-BE" b="0" i="1" smtClean="0">
+                          <a:rPr lang="fr-BE" sz="2800" b="0" i="1" smtClean="0">
                             <a:latin typeface="Cambria Math" panose="02040503050406030204" pitchFamily="18" charset="0"/>
                           </a:rPr>
                           <m:t>, </m:t>
                         </m:r>
                         <m:r>
-                          <a:rPr lang="fr-BE" b="0" i="1" smtClean="0">
+                          <a:rPr lang="fr-BE" sz="2800" b="0" i="1" smtClean="0">
                             <a:latin typeface="Cambria Math" panose="02040503050406030204" pitchFamily="18" charset="0"/>
                           </a:rPr>
                           <m:t>𝑏𝑑</m:t>
                         </m:r>
                         <m:r>
-                          <a:rPr lang="fr-BE" b="0" i="1" smtClean="0">
+                          <a:rPr lang="fr-BE" sz="2800" b="0" i="1" smtClean="0">
                             <a:latin typeface="Cambria Math" panose="02040503050406030204" pitchFamily="18" charset="0"/>
                           </a:rPr>
                           <m:t>, </m:t>
                         </m:r>
                         <m:r>
-                          <a:rPr lang="fr-BE" b="0" i="1" smtClean="0">
+                          <a:rPr lang="fr-BE" sz="2800" b="0" i="1" smtClean="0">
                             <a:latin typeface="Cambria Math" panose="02040503050406030204" pitchFamily="18" charset="0"/>
                           </a:rPr>
                           <m:t>𝑏𝑞</m:t>
                         </m:r>
                         <m:r>
-                          <a:rPr lang="fr-BE" b="0" i="1" smtClean="0">
+                          <a:rPr lang="fr-BE" sz="2800" b="0" i="1" smtClean="0">
                             <a:latin typeface="Cambria Math" panose="02040503050406030204" pitchFamily="18" charset="0"/>
                           </a:rPr>
                           <m:t>)</m:t>
@@ -8460,7 +8511,7 @@
                       </m:e>
                       <m:sub>
                         <m:r>
-                          <a:rPr lang="fr-BE" b="0" i="1" smtClean="0">
+                          <a:rPr lang="fr-BE" sz="2800" b="0" i="1" smtClean="0">
                             <a:latin typeface="Cambria Math" panose="02040503050406030204" pitchFamily="18" charset="0"/>
                           </a:rPr>
                           <m:t>𝑠</m:t>
@@ -8469,7 +8520,7 @@
                     </m:sSub>
                   </m:oMath>
                 </a14:m>
-                <a:endParaRPr lang="en-GB" dirty="0"/>
+                <a:endParaRPr lang="en-GB" sz="2800" dirty="0"/>
               </a:p>
               <a:p>
                 <a:pPr lvl="1"/>
@@ -8478,7 +8529,7 @@
                     <m:sSup>
                       <m:sSupPr>
                         <m:ctrlPr>
-                          <a:rPr lang="fr-BE" b="0" i="1" smtClean="0">
+                          <a:rPr lang="fr-BE" sz="2400" b="0" i="1" smtClean="0">
                             <a:latin typeface="Cambria Math" panose="02040503050406030204" pitchFamily="18" charset="0"/>
                             <a:ea typeface="Cambria Math" panose="02040503050406030204" pitchFamily="18" charset="0"/>
                           </a:rPr>
@@ -8486,21 +8537,21 @@
                       </m:sSupPr>
                       <m:e>
                         <m:r>
-                          <a:rPr lang="fr-BE" b="0" i="1" smtClean="0">
+                          <a:rPr lang="fr-BE" sz="2400" b="0" i="1" smtClean="0">
                             <a:latin typeface="Cambria Math" panose="02040503050406030204" pitchFamily="18" charset="0"/>
                             <a:ea typeface="Cambria Math" panose="02040503050406030204" pitchFamily="18" charset="0"/>
                           </a:rPr>
                           <m:t>(1−</m:t>
                         </m:r>
                         <m:r>
-                          <a:rPr lang="fr-BE" b="0" i="1" smtClean="0">
+                          <a:rPr lang="fr-BE" sz="2400" b="0" i="1" smtClean="0">
                             <a:latin typeface="Cambria Math" panose="02040503050406030204" pitchFamily="18" charset="0"/>
                             <a:ea typeface="Cambria Math" panose="02040503050406030204" pitchFamily="18" charset="0"/>
                           </a:rPr>
                           <m:t>𝐵</m:t>
                         </m:r>
                         <m:r>
-                          <a:rPr lang="fr-BE" b="0" i="1" smtClean="0">
+                          <a:rPr lang="fr-BE" sz="2400" b="0" i="1" smtClean="0">
                             <a:latin typeface="Cambria Math" panose="02040503050406030204" pitchFamily="18" charset="0"/>
                             <a:ea typeface="Cambria Math" panose="02040503050406030204" pitchFamily="18" charset="0"/>
                           </a:rPr>
@@ -8509,7 +8560,7 @@
                       </m:e>
                       <m:sup>
                         <m:r>
-                          <a:rPr lang="fr-BE" b="0" i="1" smtClean="0">
+                          <a:rPr lang="fr-BE" sz="2400" b="0" i="1" smtClean="0">
                             <a:latin typeface="Cambria Math" panose="02040503050406030204" pitchFamily="18" charset="0"/>
                             <a:ea typeface="Cambria Math" panose="02040503050406030204" pitchFamily="18" charset="0"/>
                           </a:rPr>
@@ -8520,7 +8571,7 @@
                     <m:sSup>
                       <m:sSupPr>
                         <m:ctrlPr>
-                          <a:rPr lang="fr-BE" b="0" i="1" smtClean="0">
+                          <a:rPr lang="fr-BE" sz="2400" b="0" i="1" smtClean="0">
                             <a:latin typeface="Cambria Math" panose="02040503050406030204" pitchFamily="18" charset="0"/>
                             <a:ea typeface="Cambria Math" panose="02040503050406030204" pitchFamily="18" charset="0"/>
                           </a:rPr>
@@ -8528,7 +8579,7 @@
                       </m:sSupPr>
                       <m:e>
                         <m:r>
-                          <a:rPr lang="fr-BE" b="0" i="1" smtClean="0">
+                          <a:rPr lang="fr-BE" sz="2400" b="0" i="1" smtClean="0">
                             <a:latin typeface="Cambria Math" panose="02040503050406030204" pitchFamily="18" charset="0"/>
                             <a:ea typeface="Cambria Math" panose="02040503050406030204" pitchFamily="18" charset="0"/>
                           </a:rPr>
@@ -8537,7 +8588,7 @@
                         <m:sSup>
                           <m:sSupPr>
                             <m:ctrlPr>
-                              <a:rPr lang="fr-BE" b="0" i="1" smtClean="0">
+                              <a:rPr lang="fr-BE" sz="2400" b="0" i="1" smtClean="0">
                                 <a:latin typeface="Cambria Math" panose="02040503050406030204" pitchFamily="18" charset="0"/>
                                 <a:ea typeface="Cambria Math" panose="02040503050406030204" pitchFamily="18" charset="0"/>
                               </a:rPr>
@@ -8545,7 +8596,7 @@
                           </m:sSupPr>
                           <m:e>
                             <m:r>
-                              <a:rPr lang="fr-BE" b="0" i="1" smtClean="0">
+                              <a:rPr lang="fr-BE" sz="2400" b="0" i="1" smtClean="0">
                                 <a:latin typeface="Cambria Math" panose="02040503050406030204" pitchFamily="18" charset="0"/>
                                 <a:ea typeface="Cambria Math" panose="02040503050406030204" pitchFamily="18" charset="0"/>
                               </a:rPr>
@@ -8554,7 +8605,7 @@
                           </m:e>
                           <m:sup>
                             <m:r>
-                              <a:rPr lang="fr-BE" b="0" i="1" smtClean="0">
+                              <a:rPr lang="fr-BE" sz="2400" b="0" i="1" smtClean="0">
                                 <a:latin typeface="Cambria Math" panose="02040503050406030204" pitchFamily="18" charset="0"/>
                                 <a:ea typeface="Cambria Math" panose="02040503050406030204" pitchFamily="18" charset="0"/>
                               </a:rPr>
@@ -8563,7 +8614,7 @@
                           </m:sup>
                         </m:sSup>
                         <m:r>
-                          <a:rPr lang="fr-BE" b="0" i="1" smtClean="0">
+                          <a:rPr lang="fr-BE" sz="2400" b="0" i="1" smtClean="0">
                             <a:latin typeface="Cambria Math" panose="02040503050406030204" pitchFamily="18" charset="0"/>
                             <a:ea typeface="Cambria Math" panose="02040503050406030204" pitchFamily="18" charset="0"/>
                           </a:rPr>
@@ -8572,7 +8623,7 @@
                       </m:e>
                       <m:sup>
                         <m:r>
-                          <a:rPr lang="fr-BE" b="0" i="1" smtClean="0">
+                          <a:rPr lang="fr-BE" sz="2400" b="0" i="1" smtClean="0">
                             <a:latin typeface="Cambria Math" panose="02040503050406030204" pitchFamily="18" charset="0"/>
                             <a:ea typeface="Cambria Math" panose="02040503050406030204" pitchFamily="18" charset="0"/>
                           </a:rPr>
@@ -8584,7 +8635,7 @@
                       <m:rPr>
                         <m:sty m:val="p"/>
                       </m:rPr>
-                      <a:rPr lang="el-GR" b="0" i="1" smtClean="0">
+                      <a:rPr lang="el-GR" sz="2400" b="0" i="1" smtClean="0">
                         <a:latin typeface="Cambria Math" panose="02040503050406030204" pitchFamily="18" charset="0"/>
                         <a:ea typeface="Cambria Math" panose="02040503050406030204" pitchFamily="18" charset="0"/>
                       </a:rPr>
@@ -8593,7 +8644,7 @@
                     <m:d>
                       <m:dPr>
                         <m:ctrlPr>
-                          <a:rPr lang="fr-BE" b="0" i="1" smtClean="0">
+                          <a:rPr lang="fr-BE" sz="2400" b="0" i="1" smtClean="0">
                             <a:latin typeface="Cambria Math" panose="02040503050406030204" pitchFamily="18" charset="0"/>
                             <a:ea typeface="Cambria Math" panose="02040503050406030204" pitchFamily="18" charset="0"/>
                           </a:rPr>
@@ -8601,7 +8652,7 @@
                       </m:dPr>
                       <m:e>
                         <m:r>
-                          <a:rPr lang="fr-BE" b="0" i="1" smtClean="0">
+                          <a:rPr lang="fr-BE" sz="2400" b="0" i="1" smtClean="0">
                             <a:latin typeface="Cambria Math" panose="02040503050406030204" pitchFamily="18" charset="0"/>
                             <a:ea typeface="Cambria Math" panose="02040503050406030204" pitchFamily="18" charset="0"/>
                           </a:rPr>
@@ -8612,7 +8663,7 @@
                     <m:sSub>
                       <m:sSubPr>
                         <m:ctrlPr>
-                          <a:rPr lang="el-GR" b="0" i="1" smtClean="0">
+                          <a:rPr lang="el-GR" sz="2400" b="0" i="1" smtClean="0">
                             <a:latin typeface="Cambria Math" panose="02040503050406030204" pitchFamily="18" charset="0"/>
                             <a:ea typeface="Cambria Math" panose="02040503050406030204" pitchFamily="18" charset="0"/>
                           </a:rPr>
@@ -8623,7 +8674,7 @@
                           <m:rPr>
                             <m:sty m:val="p"/>
                           </m:rPr>
-                          <a:rPr lang="el-GR" b="0" i="1" smtClean="0">
+                          <a:rPr lang="el-GR" sz="2400" b="0" i="1" smtClean="0">
                             <a:latin typeface="Cambria Math" panose="02040503050406030204" pitchFamily="18" charset="0"/>
                             <a:ea typeface="Cambria Math" panose="02040503050406030204" pitchFamily="18" charset="0"/>
                           </a:rPr>
@@ -8632,7 +8683,7 @@
                       </m:e>
                       <m:sub>
                         <m:r>
-                          <a:rPr lang="fr-BE" b="0" i="1" smtClean="0">
+                          <a:rPr lang="fr-BE" sz="2400" b="0" i="1" smtClean="0">
                             <a:latin typeface="Cambria Math" panose="02040503050406030204" pitchFamily="18" charset="0"/>
                           </a:rPr>
                           <m:t>𝑠</m:t>
@@ -8640,7 +8691,7 @@
                       </m:sub>
                     </m:sSub>
                     <m:r>
-                      <a:rPr lang="fr-BE" b="0" i="1" smtClean="0">
+                      <a:rPr lang="fr-BE" sz="2400" b="0" i="1" smtClean="0">
                         <a:latin typeface="Cambria Math" panose="02040503050406030204" pitchFamily="18" charset="0"/>
                       </a:rPr>
                       <m:t>(</m:t>
@@ -8648,7 +8699,7 @@
                     <m:sSup>
                       <m:sSupPr>
                         <m:ctrlPr>
-                          <a:rPr lang="fr-BE" b="0" i="1" smtClean="0">
+                          <a:rPr lang="fr-BE" sz="2400" b="0" i="1" smtClean="0">
                             <a:latin typeface="Cambria Math" panose="02040503050406030204" pitchFamily="18" charset="0"/>
                             <a:ea typeface="Cambria Math" panose="02040503050406030204" pitchFamily="18" charset="0"/>
                           </a:rPr>
@@ -8656,7 +8707,7 @@
                       </m:sSupPr>
                       <m:e>
                         <m:r>
-                          <a:rPr lang="fr-BE" b="0" i="1" smtClean="0">
+                          <a:rPr lang="fr-BE" sz="2400" b="0" i="1" smtClean="0">
                             <a:latin typeface="Cambria Math" panose="02040503050406030204" pitchFamily="18" charset="0"/>
                             <a:ea typeface="Cambria Math" panose="02040503050406030204" pitchFamily="18" charset="0"/>
                           </a:rPr>
@@ -8665,7 +8716,7 @@
                       </m:e>
                       <m:sup>
                         <m:r>
-                          <a:rPr lang="fr-BE" b="0" i="1" smtClean="0">
+                          <a:rPr lang="fr-BE" sz="2400" b="0" i="1" smtClean="0">
                             <a:latin typeface="Cambria Math" panose="02040503050406030204" pitchFamily="18" charset="0"/>
                             <a:ea typeface="Cambria Math" panose="02040503050406030204" pitchFamily="18" charset="0"/>
                           </a:rPr>
@@ -8674,7 +8725,7 @@
                       </m:sup>
                     </m:sSup>
                     <m:r>
-                      <a:rPr lang="fr-BE" b="0" i="1" smtClean="0">
+                      <a:rPr lang="fr-BE" sz="2400" b="0" i="1" smtClean="0">
                         <a:latin typeface="Cambria Math" panose="02040503050406030204" pitchFamily="18" charset="0"/>
                         <a:ea typeface="Cambria Math" panose="02040503050406030204" pitchFamily="18" charset="0"/>
                       </a:rPr>
@@ -8683,14 +8734,14 @@
                     <m:sSub>
                       <m:sSubPr>
                         <m:ctrlPr>
-                          <a:rPr lang="fr-BE" b="0" i="1" smtClean="0">
+                          <a:rPr lang="fr-BE" sz="2400" b="0" i="1" smtClean="0">
                             <a:latin typeface="Cambria Math" panose="02040503050406030204" pitchFamily="18" charset="0"/>
                           </a:rPr>
                         </m:ctrlPr>
                       </m:sSubPr>
                       <m:e>
                         <m:r>
-                          <a:rPr lang="fr-BE" b="0" i="1" smtClean="0">
+                          <a:rPr lang="fr-BE" sz="2400" b="0" i="1" smtClean="0">
                             <a:latin typeface="Cambria Math" panose="02040503050406030204" pitchFamily="18" charset="0"/>
                           </a:rPr>
                           <m:t>𝑥</m:t>
@@ -8698,7 +8749,7 @@
                       </m:e>
                       <m:sub>
                         <m:r>
-                          <a:rPr lang="fr-BE" b="0" i="1" smtClean="0">
+                          <a:rPr lang="fr-BE" sz="2400" b="0" i="1" smtClean="0">
                             <a:latin typeface="Cambria Math" panose="02040503050406030204" pitchFamily="18" charset="0"/>
                           </a:rPr>
                           <m:t>𝑡</m:t>
@@ -8706,7 +8757,7 @@
                       </m:sub>
                     </m:sSub>
                     <m:r>
-                      <a:rPr lang="fr-BE" b="0" i="1" smtClean="0">
+                      <a:rPr lang="fr-BE" sz="2400" b="0" i="1" smtClean="0">
                         <a:latin typeface="Cambria Math" panose="02040503050406030204" pitchFamily="18" charset="0"/>
                       </a:rPr>
                       <m:t>=</m:t>
@@ -8715,7 +8766,7 @@
                       <m:rPr>
                         <m:sty m:val="p"/>
                       </m:rPr>
-                      <a:rPr lang="el-GR" b="0" i="1" smtClean="0">
+                      <a:rPr lang="el-GR" sz="2400" b="0" i="1" smtClean="0">
                         <a:latin typeface="Cambria Math" panose="02040503050406030204" pitchFamily="18" charset="0"/>
                         <a:ea typeface="Cambria Math" panose="02040503050406030204" pitchFamily="18" charset="0"/>
                       </a:rPr>
@@ -8724,7 +8775,7 @@
                     <m:d>
                       <m:dPr>
                         <m:ctrlPr>
-                          <a:rPr lang="fr-BE" b="0" i="1" smtClean="0">
+                          <a:rPr lang="fr-BE" sz="2400" b="0" i="1" smtClean="0">
                             <a:latin typeface="Cambria Math" panose="02040503050406030204" pitchFamily="18" charset="0"/>
                             <a:ea typeface="Cambria Math" panose="02040503050406030204" pitchFamily="18" charset="0"/>
                           </a:rPr>
@@ -8732,7 +8783,7 @@
                       </m:dPr>
                       <m:e>
                         <m:r>
-                          <a:rPr lang="fr-BE" b="0" i="1" smtClean="0">
+                          <a:rPr lang="fr-BE" sz="2400" b="0" i="1" smtClean="0">
                             <a:latin typeface="Cambria Math" panose="02040503050406030204" pitchFamily="18" charset="0"/>
                             <a:ea typeface="Cambria Math" panose="02040503050406030204" pitchFamily="18" charset="0"/>
                           </a:rPr>
@@ -8743,7 +8794,7 @@
                     <m:sSub>
                       <m:sSubPr>
                         <m:ctrlPr>
-                          <a:rPr lang="el-GR" b="0" i="1" smtClean="0">
+                          <a:rPr lang="el-GR" sz="2400" b="0" i="1" smtClean="0">
                             <a:latin typeface="Cambria Math" panose="02040503050406030204" pitchFamily="18" charset="0"/>
                             <a:ea typeface="Cambria Math" panose="02040503050406030204" pitchFamily="18" charset="0"/>
                           </a:rPr>
@@ -8754,7 +8805,7 @@
                           <m:rPr>
                             <m:sty m:val="p"/>
                           </m:rPr>
-                          <a:rPr lang="el-GR" b="0" i="1" smtClean="0">
+                          <a:rPr lang="el-GR" sz="2400" b="0" i="1" smtClean="0">
                             <a:latin typeface="Cambria Math" panose="02040503050406030204" pitchFamily="18" charset="0"/>
                             <a:ea typeface="Cambria Math" panose="02040503050406030204" pitchFamily="18" charset="0"/>
                           </a:rPr>
@@ -8763,7 +8814,7 @@
                       </m:e>
                       <m:sub>
                         <m:r>
-                          <a:rPr lang="fr-BE" b="0" i="1" smtClean="0">
+                          <a:rPr lang="fr-BE" sz="2400" b="0" i="1" smtClean="0">
                             <a:latin typeface="Cambria Math" panose="02040503050406030204" pitchFamily="18" charset="0"/>
                           </a:rPr>
                           <m:t>𝑠</m:t>
@@ -8771,7 +8822,7 @@
                       </m:sub>
                     </m:sSub>
                     <m:r>
-                      <a:rPr lang="fr-BE" b="0" i="1" smtClean="0">
+                      <a:rPr lang="fr-BE" sz="2400" b="0" i="1" smtClean="0">
                         <a:latin typeface="Cambria Math" panose="02040503050406030204" pitchFamily="18" charset="0"/>
                       </a:rPr>
                       <m:t>(</m:t>
@@ -8779,7 +8830,7 @@
                     <m:sSup>
                       <m:sSupPr>
                         <m:ctrlPr>
-                          <a:rPr lang="fr-BE" b="0" i="1" smtClean="0">
+                          <a:rPr lang="fr-BE" sz="2400" b="0" i="1" smtClean="0">
                             <a:latin typeface="Cambria Math" panose="02040503050406030204" pitchFamily="18" charset="0"/>
                             <a:ea typeface="Cambria Math" panose="02040503050406030204" pitchFamily="18" charset="0"/>
                           </a:rPr>
@@ -8787,7 +8838,7 @@
                       </m:sSupPr>
                       <m:e>
                         <m:r>
-                          <a:rPr lang="fr-BE" b="0" i="1" smtClean="0">
+                          <a:rPr lang="fr-BE" sz="2400" b="0" i="1" smtClean="0">
                             <a:latin typeface="Cambria Math" panose="02040503050406030204" pitchFamily="18" charset="0"/>
                             <a:ea typeface="Cambria Math" panose="02040503050406030204" pitchFamily="18" charset="0"/>
                           </a:rPr>
@@ -8796,7 +8847,7 @@
                       </m:e>
                       <m:sup>
                         <m:r>
-                          <a:rPr lang="fr-BE" b="0" i="1" smtClean="0">
+                          <a:rPr lang="fr-BE" sz="2400" b="0" i="1" smtClean="0">
                             <a:latin typeface="Cambria Math" panose="02040503050406030204" pitchFamily="18" charset="0"/>
                             <a:ea typeface="Cambria Math" panose="02040503050406030204" pitchFamily="18" charset="0"/>
                           </a:rPr>
@@ -8805,7 +8856,7 @@
                       </m:sup>
                     </m:sSup>
                     <m:r>
-                      <a:rPr lang="fr-BE" b="0" i="1" smtClean="0">
+                      <a:rPr lang="fr-BE" sz="2400" b="0" i="1" smtClean="0">
                         <a:latin typeface="Cambria Math" panose="02040503050406030204" pitchFamily="18" charset="0"/>
                         <a:ea typeface="Cambria Math" panose="02040503050406030204" pitchFamily="18" charset="0"/>
                       </a:rPr>
@@ -8814,7 +8865,7 @@
                     <m:sSub>
                       <m:sSubPr>
                         <m:ctrlPr>
-                          <a:rPr lang="fr-BE" b="0" i="1" smtClean="0">
+                          <a:rPr lang="fr-BE" sz="2400" b="0" i="1" smtClean="0">
                             <a:latin typeface="Cambria Math" panose="02040503050406030204" pitchFamily="18" charset="0"/>
                             <a:ea typeface="Cambria Math" panose="02040503050406030204" pitchFamily="18" charset="0"/>
                           </a:rPr>
@@ -8822,7 +8873,7 @@
                       </m:sSubPr>
                       <m:e>
                         <m:r>
-                          <a:rPr lang="fr-BE" b="0" i="1" smtClean="0">
+                          <a:rPr lang="fr-BE" sz="2400" b="0" i="1" smtClean="0">
                             <a:latin typeface="Cambria Math" panose="02040503050406030204" pitchFamily="18" charset="0"/>
                             <a:ea typeface="Cambria Math" panose="02040503050406030204" pitchFamily="18" charset="0"/>
                           </a:rPr>
@@ -8831,7 +8882,7 @@
                       </m:e>
                       <m:sub>
                         <m:r>
-                          <a:rPr lang="fr-BE" b="0" i="1" smtClean="0">
+                          <a:rPr lang="fr-BE" sz="2400" b="0" i="1" smtClean="0">
                             <a:latin typeface="Cambria Math" panose="02040503050406030204" pitchFamily="18" charset="0"/>
                           </a:rPr>
                           <m:t>𝑡</m:t>
@@ -8840,14 +8891,14 @@
                     </m:sSub>
                   </m:oMath>
                 </a14:m>
-                <a:endParaRPr lang="en-GB" dirty="0"/>
+                <a:endParaRPr lang="en-GB" sz="2400" dirty="0"/>
               </a:p>
               <a:p>
-                <a:endParaRPr lang="en-GB" dirty="0"/>
+                <a:endParaRPr lang="en-GB" sz="2800" dirty="0"/>
               </a:p>
               <a:p>
                 <a:r>
-                  <a:rPr lang="en-GB" dirty="0"/>
+                  <a:rPr lang="en-GB" sz="2800" dirty="0"/>
                   <a:t>Airline model</a:t>
                 </a:r>
               </a:p>
@@ -8856,21 +8907,21 @@
                 <a14:m>
                   <m:oMath xmlns:m="http://schemas.openxmlformats.org/officeDocument/2006/math">
                     <m:r>
-                      <a:rPr lang="fr-BE" b="0" i="1" smtClean="0">
+                      <a:rPr lang="fr-BE" sz="2400" b="0" i="1" smtClean="0">
                         <a:latin typeface="Cambria Math" panose="02040503050406030204" pitchFamily="18" charset="0"/>
                         <a:ea typeface="Cambria Math" panose="02040503050406030204" pitchFamily="18" charset="0"/>
                       </a:rPr>
                       <m:t>(1−</m:t>
                     </m:r>
                     <m:r>
-                      <a:rPr lang="fr-BE" b="0" i="1" smtClean="0">
+                      <a:rPr lang="fr-BE" sz="2400" b="0" i="1" smtClean="0">
                         <a:latin typeface="Cambria Math" panose="02040503050406030204" pitchFamily="18" charset="0"/>
                         <a:ea typeface="Cambria Math" panose="02040503050406030204" pitchFamily="18" charset="0"/>
                       </a:rPr>
                       <m:t>𝐵</m:t>
                     </m:r>
                     <m:r>
-                      <a:rPr lang="fr-BE" b="0" i="1" smtClean="0">
+                      <a:rPr lang="fr-BE" sz="2400" b="0" i="1" smtClean="0">
                         <a:latin typeface="Cambria Math" panose="02040503050406030204" pitchFamily="18" charset="0"/>
                         <a:ea typeface="Cambria Math" panose="02040503050406030204" pitchFamily="18" charset="0"/>
                       </a:rPr>
@@ -8879,7 +8930,7 @@
                     <m:sSup>
                       <m:sSupPr>
                         <m:ctrlPr>
-                          <a:rPr lang="fr-BE" b="0" i="1" smtClean="0">
+                          <a:rPr lang="fr-BE" sz="2400" b="0" i="1" smtClean="0">
                             <a:latin typeface="Cambria Math" panose="02040503050406030204" pitchFamily="18" charset="0"/>
                             <a:ea typeface="Cambria Math" panose="02040503050406030204" pitchFamily="18" charset="0"/>
                           </a:rPr>
@@ -8887,7 +8938,7 @@
                       </m:sSupPr>
                       <m:e>
                         <m:r>
-                          <a:rPr lang="fr-BE" b="0" i="1" smtClean="0">
+                          <a:rPr lang="fr-BE" sz="2400" b="0" i="1" smtClean="0">
                             <a:latin typeface="Cambria Math" panose="02040503050406030204" pitchFamily="18" charset="0"/>
                             <a:ea typeface="Cambria Math" panose="02040503050406030204" pitchFamily="18" charset="0"/>
                           </a:rPr>
@@ -8896,7 +8947,7 @@
                       </m:e>
                       <m:sup>
                         <m:r>
-                          <a:rPr lang="fr-BE" b="0" i="1" smtClean="0">
+                          <a:rPr lang="fr-BE" sz="2400" b="0" i="1" smtClean="0">
                             <a:latin typeface="Cambria Math" panose="02040503050406030204" pitchFamily="18" charset="0"/>
                             <a:ea typeface="Cambria Math" panose="02040503050406030204" pitchFamily="18" charset="0"/>
                           </a:rPr>
@@ -8905,7 +8956,7 @@
                       </m:sup>
                     </m:sSup>
                     <m:r>
-                      <a:rPr lang="fr-BE" b="0" i="1" smtClean="0">
+                      <a:rPr lang="fr-BE" sz="2400" b="0" i="1" smtClean="0">
                         <a:latin typeface="Cambria Math" panose="02040503050406030204" pitchFamily="18" charset="0"/>
                         <a:ea typeface="Cambria Math" panose="02040503050406030204" pitchFamily="18" charset="0"/>
                       </a:rPr>
@@ -8914,14 +8965,14 @@
                     <m:sSub>
                       <m:sSubPr>
                         <m:ctrlPr>
-                          <a:rPr lang="fr-BE" b="0" i="1" smtClean="0">
+                          <a:rPr lang="fr-BE" sz="2400" b="0" i="1" smtClean="0">
                             <a:latin typeface="Cambria Math" panose="02040503050406030204" pitchFamily="18" charset="0"/>
                           </a:rPr>
                         </m:ctrlPr>
                       </m:sSubPr>
                       <m:e>
                         <m:r>
-                          <a:rPr lang="fr-BE" b="0" i="1" smtClean="0">
+                          <a:rPr lang="fr-BE" sz="2400" b="0" i="1" smtClean="0">
                             <a:latin typeface="Cambria Math" panose="02040503050406030204" pitchFamily="18" charset="0"/>
                           </a:rPr>
                           <m:t>𝑥</m:t>
@@ -8929,7 +8980,7 @@
                       </m:e>
                       <m:sub>
                         <m:r>
-                          <a:rPr lang="fr-BE" b="0" i="1" smtClean="0">
+                          <a:rPr lang="fr-BE" sz="2400" b="0" i="1" smtClean="0">
                             <a:latin typeface="Cambria Math" panose="02040503050406030204" pitchFamily="18" charset="0"/>
                           </a:rPr>
                           <m:t>𝑡</m:t>
@@ -8937,27 +8988,27 @@
                       </m:sub>
                     </m:sSub>
                     <m:r>
-                      <a:rPr lang="fr-BE" b="0" i="1" smtClean="0">
+                      <a:rPr lang="fr-BE" sz="2400" b="0" i="1" smtClean="0">
                         <a:latin typeface="Cambria Math" panose="02040503050406030204" pitchFamily="18" charset="0"/>
                       </a:rPr>
                       <m:t>=(1+</m:t>
                     </m:r>
                     <m:r>
-                      <a:rPr lang="fr-BE" b="0" i="1" smtClean="0">
+                      <a:rPr lang="fr-BE" sz="2400" b="0" i="1" smtClean="0">
                         <a:latin typeface="Cambria Math" panose="02040503050406030204" pitchFamily="18" charset="0"/>
                         <a:ea typeface="Cambria Math" panose="02040503050406030204" pitchFamily="18" charset="0"/>
                       </a:rPr>
                       <m:t>𝜃</m:t>
                     </m:r>
                     <m:r>
-                      <a:rPr lang="fr-BE" b="0" i="1" smtClean="0">
+                      <a:rPr lang="fr-BE" sz="2400" b="0" i="1" smtClean="0">
                         <a:latin typeface="Cambria Math" panose="02040503050406030204" pitchFamily="18" charset="0"/>
                         <a:ea typeface="Cambria Math" panose="02040503050406030204" pitchFamily="18" charset="0"/>
                       </a:rPr>
                       <m:t>𝐵</m:t>
                     </m:r>
                     <m:r>
-                      <a:rPr lang="fr-BE" b="0" i="1" smtClean="0">
+                      <a:rPr lang="fr-BE" sz="2400" b="0" i="1" smtClean="0">
                         <a:latin typeface="Cambria Math" panose="02040503050406030204" pitchFamily="18" charset="0"/>
                         <a:ea typeface="Cambria Math" panose="02040503050406030204" pitchFamily="18" charset="0"/>
                       </a:rPr>
@@ -8966,7 +9017,7 @@
                     <m:sSub>
                       <m:sSubPr>
                         <m:ctrlPr>
-                          <a:rPr lang="fr-BE" b="0" i="1" smtClean="0">
+                          <a:rPr lang="fr-BE" sz="2400" b="0" i="1" smtClean="0">
                             <a:latin typeface="Cambria Math" panose="02040503050406030204" pitchFamily="18" charset="0"/>
                             <a:ea typeface="Cambria Math" panose="02040503050406030204" pitchFamily="18" charset="0"/>
                           </a:rPr>
@@ -8974,7 +9025,7 @@
                       </m:sSubPr>
                       <m:e>
                         <m:r>
-                          <a:rPr lang="fr-BE" b="0" i="1" smtClean="0">
+                          <a:rPr lang="fr-BE" sz="2400" b="0" i="1" smtClean="0">
                             <a:latin typeface="Cambria Math" panose="02040503050406030204" pitchFamily="18" charset="0"/>
                             <a:ea typeface="Cambria Math" panose="02040503050406030204" pitchFamily="18" charset="0"/>
                           </a:rPr>
@@ -8983,7 +9034,7 @@
                       </m:e>
                       <m:sub>
                         <m:r>
-                          <a:rPr lang="fr-BE" b="0" i="1" smtClean="0">
+                          <a:rPr lang="fr-BE" sz="2400" b="0" i="1" smtClean="0">
                             <a:latin typeface="Cambria Math" panose="02040503050406030204" pitchFamily="18" charset="0"/>
                             <a:ea typeface="Cambria Math" panose="02040503050406030204" pitchFamily="18" charset="0"/>
                           </a:rPr>
@@ -8994,7 +9045,7 @@
                     <m:sSup>
                       <m:sSupPr>
                         <m:ctrlPr>
-                          <a:rPr lang="fr-BE" b="0" i="1" smtClean="0">
+                          <a:rPr lang="fr-BE" sz="2400" b="0" i="1" smtClean="0">
                             <a:latin typeface="Cambria Math" panose="02040503050406030204" pitchFamily="18" charset="0"/>
                             <a:ea typeface="Cambria Math" panose="02040503050406030204" pitchFamily="18" charset="0"/>
                           </a:rPr>
@@ -9002,7 +9053,7 @@
                       </m:sSupPr>
                       <m:e>
                         <m:r>
-                          <a:rPr lang="fr-BE" b="0" i="1" smtClean="0">
+                          <a:rPr lang="fr-BE" sz="2400" b="0" i="1" smtClean="0">
                             <a:latin typeface="Cambria Math" panose="02040503050406030204" pitchFamily="18" charset="0"/>
                             <a:ea typeface="Cambria Math" panose="02040503050406030204" pitchFamily="18" charset="0"/>
                           </a:rPr>
@@ -9011,7 +9062,7 @@
                       </m:e>
                       <m:sup>
                         <m:r>
-                          <a:rPr lang="fr-BE" b="0" i="1" smtClean="0">
+                          <a:rPr lang="fr-BE" sz="2400" b="0" i="1" smtClean="0">
                             <a:latin typeface="Cambria Math" panose="02040503050406030204" pitchFamily="18" charset="0"/>
                             <a:ea typeface="Cambria Math" panose="02040503050406030204" pitchFamily="18" charset="0"/>
                           </a:rPr>
@@ -9020,14 +9071,14 @@
                       </m:sup>
                     </m:sSup>
                     <m:r>
-                      <a:rPr lang="fr-BE" b="0" i="1" smtClean="0">
+                      <a:rPr lang="fr-BE" sz="2400" b="0" i="1" smtClean="0">
                         <a:latin typeface="Cambria Math" panose="02040503050406030204" pitchFamily="18" charset="0"/>
                         <a:ea typeface="Cambria Math" panose="02040503050406030204" pitchFamily="18" charset="0"/>
                       </a:rPr>
                       <m:t>)</m:t>
                     </m:r>
                     <m:r>
-                      <a:rPr lang="el-GR" b="0" i="1" smtClean="0">
+                      <a:rPr lang="el-GR" sz="2400" b="0" i="1" smtClean="0">
                         <a:latin typeface="Cambria Math" panose="02040503050406030204" pitchFamily="18" charset="0"/>
                         <a:ea typeface="Cambria Math" panose="02040503050406030204" pitchFamily="18" charset="0"/>
                       </a:rPr>
@@ -9036,7 +9087,7 @@
                     <m:sSub>
                       <m:sSubPr>
                         <m:ctrlPr>
-                          <a:rPr lang="fr-BE" b="0" i="1" smtClean="0">
+                          <a:rPr lang="fr-BE" sz="2400" b="0" i="1" smtClean="0">
                             <a:latin typeface="Cambria Math" panose="02040503050406030204" pitchFamily="18" charset="0"/>
                             <a:ea typeface="Cambria Math" panose="02040503050406030204" pitchFamily="18" charset="0"/>
                           </a:rPr>
@@ -9044,7 +9095,7 @@
                       </m:sSubPr>
                       <m:e>
                         <m:r>
-                          <a:rPr lang="fr-BE" b="0" i="1" smtClean="0">
+                          <a:rPr lang="fr-BE" sz="2400" b="0" i="1" smtClean="0">
                             <a:latin typeface="Cambria Math" panose="02040503050406030204" pitchFamily="18" charset="0"/>
                             <a:ea typeface="Cambria Math" panose="02040503050406030204" pitchFamily="18" charset="0"/>
                           </a:rPr>
@@ -9053,7 +9104,7 @@
                       </m:e>
                       <m:sub>
                         <m:r>
-                          <a:rPr lang="fr-BE" b="0" i="1" smtClean="0">
+                          <a:rPr lang="fr-BE" sz="2400" b="0" i="1" smtClean="0">
                             <a:latin typeface="Cambria Math" panose="02040503050406030204" pitchFamily="18" charset="0"/>
                           </a:rPr>
                           <m:t>𝑡</m:t>
@@ -9062,16 +9113,16 @@
                     </m:sSub>
                   </m:oMath>
                 </a14:m>
-                <a:endParaRPr lang="en-GB" dirty="0"/>
+                <a:endParaRPr lang="en-GB" sz="2400" dirty="0"/>
               </a:p>
               <a:p>
                 <a:pPr lvl="1"/>
-                <a:endParaRPr lang="en-GB" dirty="0"/>
+                <a:endParaRPr lang="en-GB" sz="2400" dirty="0"/>
               </a:p>
               <a:p>
                 <a:pPr lvl="1"/>
                 <a:r>
-                  <a:rPr lang="en-GB" dirty="0"/>
+                  <a:rPr lang="en-GB" sz="2400" dirty="0"/>
                   <a:t>Interpretation of </a:t>
                 </a:r>
                 <a14:m>
@@ -9079,14 +9130,14 @@
                     <m:sSub>
                       <m:sSubPr>
                         <m:ctrlPr>
-                          <a:rPr lang="fr-BE" b="0" i="1" smtClean="0">
+                          <a:rPr lang="fr-BE" sz="2400" b="0" i="1" smtClean="0">
                             <a:latin typeface="Cambria Math" panose="02040503050406030204" pitchFamily="18" charset="0"/>
                           </a:rPr>
                         </m:ctrlPr>
                       </m:sSubPr>
                       <m:e>
                         <m:r>
-                          <a:rPr lang="fr-BE" b="0" i="1" smtClean="0">
+                          <a:rPr lang="fr-BE" sz="2400" b="0" i="1" smtClean="0">
                             <a:latin typeface="Cambria Math" panose="02040503050406030204" pitchFamily="18" charset="0"/>
                           </a:rPr>
                           <m:t>𝑥</m:t>
@@ -9094,7 +9145,7 @@
                       </m:e>
                       <m:sub>
                         <m:r>
-                          <a:rPr lang="fr-BE" b="0" i="1" smtClean="0">
+                          <a:rPr lang="fr-BE" sz="2400" b="0" i="1" smtClean="0">
                             <a:latin typeface="Cambria Math" panose="02040503050406030204" pitchFamily="18" charset="0"/>
                           </a:rPr>
                           <m:t>𝑡</m:t>
@@ -9102,7 +9153,7 @@
                       </m:sub>
                     </m:sSub>
                     <m:r>
-                      <a:rPr lang="fr-BE" b="0" i="1" smtClean="0">
+                      <a:rPr lang="fr-BE" sz="2400" b="0" i="1" smtClean="0">
                         <a:latin typeface="Cambria Math" panose="02040503050406030204" pitchFamily="18" charset="0"/>
                       </a:rPr>
                       <m:t>=</m:t>
@@ -9110,14 +9161,14 @@
                     <m:sSub>
                       <m:sSubPr>
                         <m:ctrlPr>
-                          <a:rPr lang="fr-BE" b="0" i="1" smtClean="0">
+                          <a:rPr lang="fr-BE" sz="2400" b="0" i="1" smtClean="0">
                             <a:latin typeface="Cambria Math" panose="02040503050406030204" pitchFamily="18" charset="0"/>
                           </a:rPr>
                         </m:ctrlPr>
                       </m:sSubPr>
                       <m:e>
                         <m:r>
-                          <a:rPr lang="fr-BE" b="0" i="1" smtClean="0">
+                          <a:rPr lang="fr-BE" sz="2400" b="0" i="1" smtClean="0">
                             <a:latin typeface="Cambria Math" panose="02040503050406030204" pitchFamily="18" charset="0"/>
                           </a:rPr>
                           <m:t>𝑥</m:t>
@@ -9125,13 +9176,13 @@
                       </m:e>
                       <m:sub>
                         <m:r>
-                          <a:rPr lang="fr-BE" b="0" i="1" smtClean="0">
+                          <a:rPr lang="fr-BE" sz="2400" b="0" i="1" smtClean="0">
                             <a:latin typeface="Cambria Math" panose="02040503050406030204" pitchFamily="18" charset="0"/>
                           </a:rPr>
                           <m:t>𝑡</m:t>
                         </m:r>
                         <m:r>
-                          <a:rPr lang="fr-BE" b="0" i="1" smtClean="0">
+                          <a:rPr lang="fr-BE" sz="2400" b="0" i="1" smtClean="0">
                             <a:latin typeface="Cambria Math" panose="02040503050406030204" pitchFamily="18" charset="0"/>
                           </a:rPr>
                           <m:t>−12</m:t>
@@ -9139,7 +9190,7 @@
                       </m:sub>
                     </m:sSub>
                     <m:r>
-                      <a:rPr lang="fr-BE" b="0" i="1" smtClean="0">
+                      <a:rPr lang="fr-BE" sz="2400" b="0" i="1" smtClean="0">
                         <a:latin typeface="Cambria Math" panose="02040503050406030204" pitchFamily="18" charset="0"/>
                       </a:rPr>
                       <m:t>+</m:t>
@@ -9147,7 +9198,7 @@
                     <m:sSub>
                       <m:sSubPr>
                         <m:ctrlPr>
-                          <a:rPr lang="fr-BE" b="0" i="1" smtClean="0">
+                          <a:rPr lang="fr-BE" sz="2400" b="0" i="1" smtClean="0">
                             <a:latin typeface="Cambria Math" panose="02040503050406030204" pitchFamily="18" charset="0"/>
                             <a:ea typeface="Cambria Math" panose="02040503050406030204" pitchFamily="18" charset="0"/>
                           </a:rPr>
@@ -9155,7 +9206,7 @@
                       </m:sSubPr>
                       <m:e>
                         <m:r>
-                          <a:rPr lang="fr-BE" b="0" i="1" smtClean="0">
+                          <a:rPr lang="fr-BE" sz="2400" b="0" i="1" smtClean="0">
                             <a:latin typeface="Cambria Math" panose="02040503050406030204" pitchFamily="18" charset="0"/>
                             <a:ea typeface="Cambria Math" panose="02040503050406030204" pitchFamily="18" charset="0"/>
                           </a:rPr>
@@ -9164,7 +9215,7 @@
                       </m:e>
                       <m:sub>
                         <m:r>
-                          <a:rPr lang="fr-BE" b="0" i="1" smtClean="0">
+                          <a:rPr lang="fr-BE" sz="2400" b="0" i="1" smtClean="0">
                             <a:latin typeface="Cambria Math" panose="02040503050406030204" pitchFamily="18" charset="0"/>
                             <a:ea typeface="Cambria Math" panose="02040503050406030204" pitchFamily="18" charset="0"/>
                           </a:rPr>
@@ -9175,7 +9226,7 @@
                     <m:sSub>
                       <m:sSubPr>
                         <m:ctrlPr>
-                          <a:rPr lang="fr-BE" b="0" i="1" smtClean="0">
+                          <a:rPr lang="fr-BE" sz="2400" b="0" i="1" smtClean="0">
                             <a:latin typeface="Cambria Math" panose="02040503050406030204" pitchFamily="18" charset="0"/>
                             <a:ea typeface="Cambria Math" panose="02040503050406030204" pitchFamily="18" charset="0"/>
                           </a:rPr>
@@ -9183,7 +9234,7 @@
                       </m:sSubPr>
                       <m:e>
                         <m:r>
-                          <a:rPr lang="fr-BE" b="0" i="1" smtClean="0">
+                          <a:rPr lang="fr-BE" sz="2400" b="0" i="1" smtClean="0">
                             <a:latin typeface="Cambria Math" panose="02040503050406030204" pitchFamily="18" charset="0"/>
                             <a:ea typeface="Cambria Math" panose="02040503050406030204" pitchFamily="18" charset="0"/>
                           </a:rPr>
@@ -9192,13 +9243,13 @@
                       </m:e>
                       <m:sub>
                         <m:r>
-                          <a:rPr lang="fr-BE" b="0" i="1" smtClean="0">
+                          <a:rPr lang="fr-BE" sz="2400" b="0" i="1" smtClean="0">
                             <a:latin typeface="Cambria Math" panose="02040503050406030204" pitchFamily="18" charset="0"/>
                           </a:rPr>
                           <m:t>𝑡</m:t>
                         </m:r>
                         <m:r>
-                          <a:rPr lang="fr-BE" b="0" i="1" smtClean="0">
+                          <a:rPr lang="fr-BE" sz="2400" b="0" i="1" smtClean="0">
                             <a:latin typeface="Cambria Math" panose="02040503050406030204" pitchFamily="18" charset="0"/>
                           </a:rPr>
                           <m:t>−12</m:t>
@@ -9206,7 +9257,7 @@
                       </m:sub>
                     </m:sSub>
                     <m:r>
-                      <a:rPr lang="fr-BE" b="0" i="1" smtClean="0">
+                      <a:rPr lang="fr-BE" sz="2400" b="0" i="1" smtClean="0">
                         <a:latin typeface="Cambria Math" panose="02040503050406030204" pitchFamily="18" charset="0"/>
                       </a:rPr>
                       <m:t>+</m:t>
@@ -9214,7 +9265,7 @@
                     <m:sSub>
                       <m:sSubPr>
                         <m:ctrlPr>
-                          <a:rPr lang="fr-BE" b="0" i="1" smtClean="0">
+                          <a:rPr lang="fr-BE" sz="2400" b="0" i="1" smtClean="0">
                             <a:latin typeface="Cambria Math" panose="02040503050406030204" pitchFamily="18" charset="0"/>
                             <a:ea typeface="Cambria Math" panose="02040503050406030204" pitchFamily="18" charset="0"/>
                           </a:rPr>
@@ -9222,7 +9273,7 @@
                       </m:sSubPr>
                       <m:e>
                         <m:r>
-                          <a:rPr lang="fr-BE" b="0" i="1" smtClean="0">
+                          <a:rPr lang="fr-BE" sz="2400" b="0" i="1" smtClean="0">
                             <a:latin typeface="Cambria Math" panose="02040503050406030204" pitchFamily="18" charset="0"/>
                             <a:ea typeface="Cambria Math" panose="02040503050406030204" pitchFamily="18" charset="0"/>
                           </a:rPr>
@@ -9231,7 +9282,7 @@
                       </m:e>
                       <m:sub>
                         <m:r>
-                          <a:rPr lang="fr-BE" b="0" i="1" smtClean="0">
+                          <a:rPr lang="fr-BE" sz="2400" b="0" i="1" smtClean="0">
                             <a:latin typeface="Cambria Math" panose="02040503050406030204" pitchFamily="18" charset="0"/>
                           </a:rPr>
                           <m:t>𝑡</m:t>
@@ -9241,14 +9292,13 @@
                   </m:oMath>
                 </a14:m>
                 <a:r>
-                  <a:rPr lang="en-GB" dirty="0"/>
+                  <a:rPr lang="en-GB" sz="2400" dirty="0"/>
                   <a:t> : </a:t>
                 </a:r>
                 <a:r>
-                  <a:rPr lang="en-GB" sz="1800" i="1" dirty="0"/>
+                  <a:rPr lang="en-GB" sz="2400" i="1" dirty="0"/>
                   <a:t>same as previous year, partially corrected for the “committed error”</a:t>
                 </a:r>
-                <a:endParaRPr lang="en-GB" i="1" dirty="0"/>
               </a:p>
               <a:p>
                 <a:endParaRPr lang="en-GB" dirty="0"/>
@@ -9256,7 +9306,7 @@
             </p:txBody>
           </p:sp>
         </mc:Choice>
-        <mc:Fallback xmlns="">
+        <mc:Fallback>
           <p:sp>
             <p:nvSpPr>
               <p:cNvPr id="3" name="Content Placeholder 2">
@@ -9270,14 +9320,14 @@
                 <a:spLocks noGrp="1" noRot="1" noChangeAspect="1" noMove="1" noResize="1" noEditPoints="1" noAdjustHandles="1" noChangeArrowheads="1" noChangeShapeType="1" noTextEdit="1"/>
               </p:cNvSpPr>
               <p:nvPr>
-                <p:ph idx="1"/>
+                <p:ph sz="half" idx="2"/>
               </p:nvPr>
             </p:nvSpPr>
             <p:spPr>
               <a:blipFill>
                 <a:blip r:embed="rId2"/>
                 <a:stretch>
-                  <a:fillRect l="-1043" t="-2241"/>
+                  <a:fillRect l="-754" t="-1974"/>
                 </a:stretch>
               </a:blipFill>
             </p:spPr>
@@ -9309,10 +9359,15 @@
             <a:spLocks noGrp="1"/>
           </p:cNvSpPr>
           <p:nvPr>
-            <p:ph type="ftr" sz="quarter" idx="11"/>
+            <p:ph type="ftr" sz="quarter" idx="4294967295"/>
           </p:nvPr>
         </p:nvSpPr>
-        <p:spPr/>
+        <p:spPr>
+          <a:xfrm>
+            <a:off x="0" y="0"/>
+            <a:ext cx="0" cy="0"/>
+          </a:xfrm>
+        </p:spPr>
         <p:txBody>
           <a:bodyPr/>
           <a:lstStyle/>
@@ -9321,35 +9376,6 @@
               <a:rPr lang="en-GB"/>
               <a:t>Time Series</a:t>
             </a:r>
-          </a:p>
-        </p:txBody>
-      </p:sp>
-      <p:sp>
-        <p:nvSpPr>
-          <p:cNvPr id="4" name="Espace réservé du numéro de diapositive 3">
-            <a:extLst>
-              <a:ext uri="{FF2B5EF4-FFF2-40B4-BE49-F238E27FC236}">
-                <a16:creationId xmlns:a16="http://schemas.microsoft.com/office/drawing/2014/main" id="{BADFD712-9779-1A00-8354-49373E4E2A95}"/>
-              </a:ext>
-            </a:extLst>
-          </p:cNvPr>
-          <p:cNvSpPr>
-            <a:spLocks noGrp="1"/>
-          </p:cNvSpPr>
-          <p:nvPr>
-            <p:ph type="sldNum" sz="quarter" idx="12"/>
-          </p:nvPr>
-        </p:nvSpPr>
-        <p:spPr/>
-        <p:txBody>
-          <a:bodyPr/>
-          <a:lstStyle/>
-          <a:p>
-            <a:fld id="{71CC62B1-FA1F-4849-B719-012F8D8A46B3}" type="slidenum">
-              <a:rPr lang="en-GB" smtClean="0"/>
-              <a:t>14</a:t>
-            </a:fld>
-            <a:endParaRPr lang="en-GB"/>
           </a:p>
         </p:txBody>
       </p:sp>
@@ -9411,8 +9437,37 @@
           </a:p>
         </p:txBody>
       </p:sp>
-      <mc:AlternateContent xmlns:mc="http://schemas.openxmlformats.org/markup-compatibility/2006" xmlns:a14="http://schemas.microsoft.com/office/drawing/2010/main">
-        <mc:Choice Requires="a14">
+      <p:sp>
+        <p:nvSpPr>
+          <p:cNvPr id="4" name="Espace réservé du numéro de diapositive 3">
+            <a:extLst>
+              <a:ext uri="{FF2B5EF4-FFF2-40B4-BE49-F238E27FC236}">
+                <a16:creationId xmlns:a16="http://schemas.microsoft.com/office/drawing/2014/main" id="{51987D7A-EEE8-4602-2E49-EF97D6AEE52B}"/>
+              </a:ext>
+            </a:extLst>
+          </p:cNvPr>
+          <p:cNvSpPr>
+            <a:spLocks noGrp="1"/>
+          </p:cNvSpPr>
+          <p:nvPr>
+            <p:ph type="sldNum" idx="12"/>
+          </p:nvPr>
+        </p:nvSpPr>
+        <p:spPr/>
+        <p:txBody>
+          <a:bodyPr/>
+          <a:lstStyle/>
+          <a:p>
+            <a:fld id="{71CC62B1-FA1F-4849-B719-012F8D8A46B3}" type="slidenum">
+              <a:rPr lang="en-GB" smtClean="0"/>
+              <a:t>15</a:t>
+            </a:fld>
+            <a:endParaRPr lang="en-GB"/>
+          </a:p>
+        </p:txBody>
+      </p:sp>
+      <mc:AlternateContent xmlns:mc="http://schemas.openxmlformats.org/markup-compatibility/2006">
+        <mc:Choice xmlns:a14="http://schemas.microsoft.com/office/drawing/2010/main" Requires="a14">
           <p:sp>
             <p:nvSpPr>
               <p:cNvPr id="3" name="Content Placeholder 2">
@@ -9426,13 +9481,13 @@
                 <a:spLocks noGrp="1"/>
               </p:cNvSpPr>
               <p:nvPr>
-                <p:ph idx="1"/>
+                <p:ph sz="half" idx="2"/>
               </p:nvPr>
             </p:nvSpPr>
             <p:spPr/>
             <p:txBody>
               <a:bodyPr>
-                <a:normAutofit fontScale="85000" lnSpcReduction="20000"/>
+                <a:normAutofit/>
               </a:bodyPr>
               <a:lstStyle/>
               <a:p>
@@ -10370,13 +10425,6 @@
                                           <a:latin typeface="Cambria Math" panose="02040503050406030204" pitchFamily="18" charset="0"/>
                                           <a:ea typeface="Cambria Math" panose="02040503050406030204" pitchFamily="18" charset="0"/>
                                         </a:rPr>
-                                        <m:t>−</m:t>
-                                      </m:r>
-                                      <m:r>
-                                        <a:rPr lang="en-GB" sz="2400" b="0" i="1" smtClean="0">
-                                          <a:latin typeface="Cambria Math" panose="02040503050406030204" pitchFamily="18" charset="0"/>
-                                          <a:ea typeface="Cambria Math" panose="02040503050406030204" pitchFamily="18" charset="0"/>
-                                        </a:rPr>
                                         <m:t>𝑖</m:t>
                                       </m:r>
                                       <m:r>
@@ -10471,13 +10519,6 @@
                                           <a:latin typeface="Cambria Math" panose="02040503050406030204" pitchFamily="18" charset="0"/>
                                           <a:ea typeface="Cambria Math" panose="02040503050406030204" pitchFamily="18" charset="0"/>
                                         </a:rPr>
-                                        <m:t>−</m:t>
-                                      </m:r>
-                                      <m:r>
-                                        <a:rPr lang="en-GB" sz="2400" i="1" smtClean="0">
-                                          <a:latin typeface="Cambria Math" panose="02040503050406030204" pitchFamily="18" charset="0"/>
-                                          <a:ea typeface="Cambria Math" panose="02040503050406030204" pitchFamily="18" charset="0"/>
-                                        </a:rPr>
                                         <m:t>𝑖</m:t>
                                       </m:r>
                                       <m:r>
@@ -10527,15 +10568,7 @@
                 <a:pPr lvl="1"/>
                 <a:r>
                   <a:rPr lang="en-GB" dirty="0"/>
-                  <a:t>Counterpart of the periodogram</a:t>
-                </a:r>
-                <a:r>
-                  <a:rPr lang="en-GB"/>
-                  <a:t>, contribution </a:t>
-                </a:r>
-                <a:r>
-                  <a:rPr lang="en-GB" dirty="0"/>
-                  <a:t>of each frequency to the variance of the series</a:t>
+                  <a:t>Counterpart of the periodogram, contribution of each frequency to the variance of the series</a:t>
                 </a:r>
               </a:p>
               <a:p>
@@ -10545,7 +10578,7 @@
             </p:txBody>
           </p:sp>
         </mc:Choice>
-        <mc:Fallback xmlns="">
+        <mc:Fallback>
           <p:sp>
             <p:nvSpPr>
               <p:cNvPr id="3" name="Content Placeholder 2">
@@ -10559,14 +10592,14 @@
                 <a:spLocks noGrp="1" noRot="1" noChangeAspect="1" noMove="1" noResize="1" noEditPoints="1" noAdjustHandles="1" noChangeArrowheads="1" noChangeShapeType="1" noTextEdit="1"/>
               </p:cNvSpPr>
               <p:nvPr>
-                <p:ph idx="1"/>
+                <p:ph sz="half" idx="2"/>
               </p:nvPr>
             </p:nvSpPr>
             <p:spPr>
               <a:blipFill>
                 <a:blip r:embed="rId2"/>
                 <a:stretch>
-                  <a:fillRect l="-58" t="-2983" b="-1099"/>
+                  <a:fillRect l="-754" t="-1974"/>
                 </a:stretch>
               </a:blipFill>
             </p:spPr>
@@ -10598,10 +10631,15 @@
             <a:spLocks noGrp="1"/>
           </p:cNvSpPr>
           <p:nvPr>
-            <p:ph type="ftr" sz="quarter" idx="11"/>
+            <p:ph type="ftr" sz="quarter" idx="4294967295"/>
           </p:nvPr>
         </p:nvSpPr>
-        <p:spPr/>
+        <p:spPr>
+          <a:xfrm>
+            <a:off x="0" y="0"/>
+            <a:ext cx="0" cy="0"/>
+          </a:xfrm>
+        </p:spPr>
         <p:txBody>
           <a:bodyPr/>
           <a:lstStyle/>
@@ -10610,35 +10648,6 @@
               <a:rPr lang="en-GB"/>
               <a:t>Time Series</a:t>
             </a:r>
-          </a:p>
-        </p:txBody>
-      </p:sp>
-      <p:sp>
-        <p:nvSpPr>
-          <p:cNvPr id="4" name="Espace réservé du numéro de diapositive 3">
-            <a:extLst>
-              <a:ext uri="{FF2B5EF4-FFF2-40B4-BE49-F238E27FC236}">
-                <a16:creationId xmlns:a16="http://schemas.microsoft.com/office/drawing/2014/main" id="{51987D7A-EEE8-4602-2E49-EF97D6AEE52B}"/>
-              </a:ext>
-            </a:extLst>
-          </p:cNvPr>
-          <p:cNvSpPr>
-            <a:spLocks noGrp="1"/>
-          </p:cNvSpPr>
-          <p:nvPr>
-            <p:ph type="sldNum" sz="quarter" idx="12"/>
-          </p:nvPr>
-        </p:nvSpPr>
-        <p:spPr/>
-        <p:txBody>
-          <a:bodyPr/>
-          <a:lstStyle/>
-          <a:p>
-            <a:fld id="{71CC62B1-FA1F-4849-B719-012F8D8A46B3}" type="slidenum">
-              <a:rPr lang="en-GB" smtClean="0"/>
-              <a:t>15</a:t>
-            </a:fld>
-            <a:endParaRPr lang="en-GB"/>
           </a:p>
         </p:txBody>
       </p:sp>
@@ -10656,1267 +10665,6 @@
 </file>
 
 <file path=ppt/slides/slide16.xml><?xml version="1.0" encoding="utf-8"?>
-<p:sld xmlns:a="http://schemas.openxmlformats.org/drawingml/2006/main" xmlns:r="http://schemas.openxmlformats.org/officeDocument/2006/relationships" xmlns:p="http://schemas.openxmlformats.org/presentationml/2006/main">
-  <p:cSld>
-    <p:spTree>
-      <p:nvGrpSpPr>
-        <p:cNvPr id="1" name=""/>
-        <p:cNvGrpSpPr/>
-        <p:nvPr/>
-      </p:nvGrpSpPr>
-      <p:grpSpPr>
-        <a:xfrm>
-          <a:off x="0" y="0"/>
-          <a:ext cx="0" cy="0"/>
-          <a:chOff x="0" y="0"/>
-          <a:chExt cx="0" cy="0"/>
-        </a:xfrm>
-      </p:grpSpPr>
-      <p:sp>
-        <p:nvSpPr>
-          <p:cNvPr id="2" name="Titre 1">
-            <a:extLst>
-              <a:ext uri="{FF2B5EF4-FFF2-40B4-BE49-F238E27FC236}">
-                <a16:creationId xmlns:a16="http://schemas.microsoft.com/office/drawing/2014/main" id="{20B7DF51-014D-E317-BD55-60469F3ACB10}"/>
-              </a:ext>
-            </a:extLst>
-          </p:cNvPr>
-          <p:cNvSpPr>
-            <a:spLocks noGrp="1"/>
-          </p:cNvSpPr>
-          <p:nvPr>
-            <p:ph type="title"/>
-          </p:nvPr>
-        </p:nvSpPr>
-        <p:spPr/>
-        <p:txBody>
-          <a:bodyPr/>
-          <a:lstStyle/>
-          <a:p>
-            <a:endParaRPr lang="en-GB"/>
-          </a:p>
-        </p:txBody>
-      </p:sp>
-      <mc:AlternateContent xmlns:mc="http://schemas.openxmlformats.org/markup-compatibility/2006" xmlns:a14="http://schemas.microsoft.com/office/drawing/2010/main">
-        <mc:Choice Requires="a14">
-          <p:sp>
-            <p:nvSpPr>
-              <p:cNvPr id="3" name="Espace réservé du contenu 2">
-                <a:extLst>
-                  <a:ext uri="{FF2B5EF4-FFF2-40B4-BE49-F238E27FC236}">
-                    <a16:creationId xmlns:a16="http://schemas.microsoft.com/office/drawing/2014/main" id="{27D576E3-CFEC-BCE2-A098-9DB253DE5F00}"/>
-                  </a:ext>
-                </a:extLst>
-              </p:cNvPr>
-              <p:cNvSpPr>
-                <a:spLocks noGrp="1"/>
-              </p:cNvSpPr>
-              <p:nvPr>
-                <p:ph idx="1"/>
-              </p:nvPr>
-            </p:nvSpPr>
-            <p:spPr/>
-            <p:txBody>
-              <a:bodyPr/>
-              <a:lstStyle/>
-              <a:p>
-                <a:r>
-                  <a:rPr lang="en-GB" sz="2800" dirty="0"/>
-                  <a:t>Wold representation of an ARMA model</a:t>
-                </a:r>
-              </a:p>
-              <a:p>
-                <a:pPr marL="457200" lvl="1" indent="0">
-                  <a:buNone/>
-                </a:pPr>
-                <a14:m>
-                  <m:oMathPara xmlns:m="http://schemas.openxmlformats.org/officeDocument/2006/math">
-                    <m:oMathParaPr>
-                      <m:jc m:val="left"/>
-                    </m:oMathParaPr>
-                    <m:oMath>
-                      <m:r>
-                        <m:rPr>
-                          <m:sty m:val="p"/>
-                        </m:rPr>
-                        <a:rPr lang="en-GB" sz="2400" b="0" i="1" smtClean="0">
-                          <a:latin typeface="Cambria Math" panose="02040503050406030204" pitchFamily="18" charset="0"/>
-                          <a:ea typeface="Cambria Math" panose="02040503050406030204" pitchFamily="18" charset="0"/>
-                        </a:rPr>
-                        <m:t>Φ</m:t>
-                      </m:r>
-                      <m:d>
-                        <m:dPr>
-                          <m:ctrlPr>
-                            <a:rPr lang="en-GB" sz="2400" b="0" i="1" smtClean="0">
-                              <a:latin typeface="Cambria Math" panose="02040503050406030204" pitchFamily="18" charset="0"/>
-                              <a:ea typeface="Cambria Math" panose="02040503050406030204" pitchFamily="18" charset="0"/>
-                            </a:rPr>
-                          </m:ctrlPr>
-                        </m:dPr>
-                        <m:e>
-                          <m:r>
-                            <a:rPr lang="en-GB" sz="2400" b="0" i="1" smtClean="0">
-                              <a:latin typeface="Cambria Math" panose="02040503050406030204" pitchFamily="18" charset="0"/>
-                              <a:ea typeface="Cambria Math" panose="02040503050406030204" pitchFamily="18" charset="0"/>
-                            </a:rPr>
-                            <m:t>𝐵</m:t>
-                          </m:r>
-                        </m:e>
-                      </m:d>
-                      <m:sSub>
-                        <m:sSubPr>
-                          <m:ctrlPr>
-                            <a:rPr lang="en-GB" sz="2400" i="1">
-                              <a:latin typeface="Cambria Math" panose="02040503050406030204" pitchFamily="18" charset="0"/>
-                            </a:rPr>
-                          </m:ctrlPr>
-                        </m:sSubPr>
-                        <m:e>
-                          <m:r>
-                            <a:rPr lang="en-GB" sz="2400" i="1">
-                              <a:latin typeface="Cambria Math" panose="02040503050406030204" pitchFamily="18" charset="0"/>
-                            </a:rPr>
-                            <m:t>𝑦</m:t>
-                          </m:r>
-                        </m:e>
-                        <m:sub>
-                          <m:r>
-                            <a:rPr lang="en-GB" sz="2400" i="1">
-                              <a:latin typeface="Cambria Math" panose="02040503050406030204" pitchFamily="18" charset="0"/>
-                            </a:rPr>
-                            <m:t>𝑡</m:t>
-                          </m:r>
-                        </m:sub>
-                      </m:sSub>
-                      <m:r>
-                        <a:rPr lang="en-GB" sz="2400" b="0" i="1" smtClean="0">
-                          <a:latin typeface="Cambria Math" panose="02040503050406030204" pitchFamily="18" charset="0"/>
-                        </a:rPr>
-                        <m:t>=</m:t>
-                      </m:r>
-                      <m:r>
-                        <m:rPr>
-                          <m:sty m:val="p"/>
-                        </m:rPr>
-                        <a:rPr lang="en-GB" sz="2400" b="0" i="1" smtClean="0">
-                          <a:latin typeface="Cambria Math" panose="02040503050406030204" pitchFamily="18" charset="0"/>
-                          <a:ea typeface="Cambria Math" panose="02040503050406030204" pitchFamily="18" charset="0"/>
-                        </a:rPr>
-                        <m:t>Θ</m:t>
-                      </m:r>
-                      <m:d>
-                        <m:dPr>
-                          <m:ctrlPr>
-                            <a:rPr lang="en-GB" sz="2400" b="0" i="1" smtClean="0">
-                              <a:latin typeface="Cambria Math" panose="02040503050406030204" pitchFamily="18" charset="0"/>
-                              <a:ea typeface="Cambria Math" panose="02040503050406030204" pitchFamily="18" charset="0"/>
-                            </a:rPr>
-                          </m:ctrlPr>
-                        </m:dPr>
-                        <m:e>
-                          <m:r>
-                            <a:rPr lang="en-GB" sz="2400" b="0" i="1" smtClean="0">
-                              <a:latin typeface="Cambria Math" panose="02040503050406030204" pitchFamily="18" charset="0"/>
-                              <a:ea typeface="Cambria Math" panose="02040503050406030204" pitchFamily="18" charset="0"/>
-                            </a:rPr>
-                            <m:t>𝐵</m:t>
-                          </m:r>
-                        </m:e>
-                      </m:d>
-                      <m:sSub>
-                        <m:sSubPr>
-                          <m:ctrlPr>
-                            <a:rPr lang="en-GB" sz="2400" i="1" smtClean="0">
-                              <a:latin typeface="Cambria Math" panose="02040503050406030204" pitchFamily="18" charset="0"/>
-                              <a:ea typeface="Cambria Math" panose="02040503050406030204" pitchFamily="18" charset="0"/>
-                            </a:rPr>
-                          </m:ctrlPr>
-                        </m:sSubPr>
-                        <m:e>
-                          <m:r>
-                            <a:rPr lang="en-GB" sz="2400" i="1" smtClean="0">
-                              <a:latin typeface="Cambria Math" panose="02040503050406030204" pitchFamily="18" charset="0"/>
-                              <a:ea typeface="Cambria Math" panose="02040503050406030204" pitchFamily="18" charset="0"/>
-                            </a:rPr>
-                            <m:t>𝜀</m:t>
-                          </m:r>
-                        </m:e>
-                        <m:sub>
-                          <m:r>
-                            <a:rPr lang="en-GB" sz="2400" i="1">
-                              <a:latin typeface="Cambria Math" panose="02040503050406030204" pitchFamily="18" charset="0"/>
-                            </a:rPr>
-                            <m:t>𝑡</m:t>
-                          </m:r>
-                        </m:sub>
-                      </m:sSub>
-                      <m:r>
-                        <a:rPr lang="en-GB" sz="2400" i="1" smtClean="0">
-                          <a:latin typeface="Cambria Math" panose="02040503050406030204" pitchFamily="18" charset="0"/>
-                          <a:ea typeface="Cambria Math" panose="02040503050406030204" pitchFamily="18" charset="0"/>
-                        </a:rPr>
-                        <m:t>⇔</m:t>
-                      </m:r>
-                      <m:sSub>
-                        <m:sSubPr>
-                          <m:ctrlPr>
-                            <a:rPr lang="en-GB" sz="2400" i="1">
-                              <a:latin typeface="Cambria Math" panose="02040503050406030204" pitchFamily="18" charset="0"/>
-                            </a:rPr>
-                          </m:ctrlPr>
-                        </m:sSubPr>
-                        <m:e>
-                          <m:r>
-                            <a:rPr lang="en-GB" sz="2400" i="1">
-                              <a:latin typeface="Cambria Math" panose="02040503050406030204" pitchFamily="18" charset="0"/>
-                            </a:rPr>
-                            <m:t>𝑦</m:t>
-                          </m:r>
-                        </m:e>
-                        <m:sub>
-                          <m:r>
-                            <a:rPr lang="en-GB" sz="2400" i="1">
-                              <a:latin typeface="Cambria Math" panose="02040503050406030204" pitchFamily="18" charset="0"/>
-                            </a:rPr>
-                            <m:t>𝑡</m:t>
-                          </m:r>
-                        </m:sub>
-                      </m:sSub>
-                      <m:r>
-                        <a:rPr lang="en-GB" sz="2400" b="0" i="1" smtClean="0">
-                          <a:latin typeface="Cambria Math" panose="02040503050406030204" pitchFamily="18" charset="0"/>
-                        </a:rPr>
-                        <m:t>=</m:t>
-                      </m:r>
-                      <m:r>
-                        <m:rPr>
-                          <m:sty m:val="p"/>
-                        </m:rPr>
-                        <a:rPr lang="en-GB" sz="2400" b="0" i="1" smtClean="0">
-                          <a:latin typeface="Cambria Math" panose="02040503050406030204" pitchFamily="18" charset="0"/>
-                          <a:ea typeface="Cambria Math" panose="02040503050406030204" pitchFamily="18" charset="0"/>
-                        </a:rPr>
-                        <m:t>Ψ</m:t>
-                      </m:r>
-                      <m:d>
-                        <m:dPr>
-                          <m:ctrlPr>
-                            <a:rPr lang="en-GB" sz="2400" b="0" i="1" smtClean="0">
-                              <a:latin typeface="Cambria Math" panose="02040503050406030204" pitchFamily="18" charset="0"/>
-                              <a:ea typeface="Cambria Math" panose="02040503050406030204" pitchFamily="18" charset="0"/>
-                            </a:rPr>
-                          </m:ctrlPr>
-                        </m:dPr>
-                        <m:e>
-                          <m:r>
-                            <a:rPr lang="en-GB" sz="2400" b="0" i="1" smtClean="0">
-                              <a:latin typeface="Cambria Math" panose="02040503050406030204" pitchFamily="18" charset="0"/>
-                              <a:ea typeface="Cambria Math" panose="02040503050406030204" pitchFamily="18" charset="0"/>
-                            </a:rPr>
-                            <m:t>𝐵</m:t>
-                          </m:r>
-                        </m:e>
-                      </m:d>
-                      <m:sSub>
-                        <m:sSubPr>
-                          <m:ctrlPr>
-                            <a:rPr lang="en-GB" sz="2400" b="0" i="1" smtClean="0">
-                              <a:latin typeface="Cambria Math" panose="02040503050406030204" pitchFamily="18" charset="0"/>
-                              <a:ea typeface="Cambria Math" panose="02040503050406030204" pitchFamily="18" charset="0"/>
-                            </a:rPr>
-                          </m:ctrlPr>
-                        </m:sSubPr>
-                        <m:e>
-                          <m:r>
-                            <a:rPr lang="en-GB" sz="2400" b="0" i="1" smtClean="0">
-                              <a:latin typeface="Cambria Math" panose="02040503050406030204" pitchFamily="18" charset="0"/>
-                              <a:ea typeface="Cambria Math" panose="02040503050406030204" pitchFamily="18" charset="0"/>
-                            </a:rPr>
-                            <m:t>𝜀</m:t>
-                          </m:r>
-                        </m:e>
-                        <m:sub>
-                          <m:r>
-                            <a:rPr lang="en-GB" sz="2400" b="0" i="1" smtClean="0">
-                              <a:latin typeface="Cambria Math" panose="02040503050406030204" pitchFamily="18" charset="0"/>
-                              <a:ea typeface="Cambria Math" panose="02040503050406030204" pitchFamily="18" charset="0"/>
-                            </a:rPr>
-                            <m:t>𝑡</m:t>
-                          </m:r>
-                        </m:sub>
-                      </m:sSub>
-                      <m:r>
-                        <a:rPr lang="en-GB" sz="2400" b="0" i="1" smtClean="0">
-                          <a:latin typeface="Cambria Math" panose="02040503050406030204" pitchFamily="18" charset="0"/>
-                          <a:ea typeface="Cambria Math" panose="02040503050406030204" pitchFamily="18" charset="0"/>
-                        </a:rPr>
-                        <m:t>,</m:t>
-                      </m:r>
-                      <m:r>
-                        <m:rPr>
-                          <m:sty m:val="p"/>
-                        </m:rPr>
-                        <a:rPr lang="en-GB" sz="2400" i="1" smtClean="0">
-                          <a:latin typeface="Cambria Math" panose="02040503050406030204" pitchFamily="18" charset="0"/>
-                          <a:ea typeface="Cambria Math" panose="02040503050406030204" pitchFamily="18" charset="0"/>
-                        </a:rPr>
-                        <m:t>Ψ</m:t>
-                      </m:r>
-                      <m:d>
-                        <m:dPr>
-                          <m:ctrlPr>
-                            <a:rPr lang="en-GB" sz="2400" i="1" smtClean="0">
-                              <a:latin typeface="Cambria Math" panose="02040503050406030204" pitchFamily="18" charset="0"/>
-                              <a:ea typeface="Cambria Math" panose="02040503050406030204" pitchFamily="18" charset="0"/>
-                            </a:rPr>
-                          </m:ctrlPr>
-                        </m:dPr>
-                        <m:e>
-                          <m:r>
-                            <a:rPr lang="en-GB" sz="2400" i="1" smtClean="0">
-                              <a:latin typeface="Cambria Math" panose="02040503050406030204" pitchFamily="18" charset="0"/>
-                              <a:ea typeface="Cambria Math" panose="02040503050406030204" pitchFamily="18" charset="0"/>
-                            </a:rPr>
-                            <m:t>𝐵</m:t>
-                          </m:r>
-                        </m:e>
-                      </m:d>
-                      <m:r>
-                        <a:rPr lang="en-GB" sz="2400" b="0" i="1" smtClean="0">
-                          <a:latin typeface="Cambria Math" panose="02040503050406030204" pitchFamily="18" charset="0"/>
-                          <a:ea typeface="Cambria Math" panose="02040503050406030204" pitchFamily="18" charset="0"/>
-                        </a:rPr>
-                        <m:t>=</m:t>
-                      </m:r>
-                      <m:f>
-                        <m:fPr>
-                          <m:ctrlPr>
-                            <a:rPr lang="en-GB" sz="2400" i="1" smtClean="0">
-                              <a:latin typeface="Cambria Math" panose="02040503050406030204" pitchFamily="18" charset="0"/>
-                              <a:ea typeface="Cambria Math" panose="02040503050406030204" pitchFamily="18" charset="0"/>
-                            </a:rPr>
-                          </m:ctrlPr>
-                        </m:fPr>
-                        <m:num>
-                          <m:r>
-                            <m:rPr>
-                              <m:sty m:val="p"/>
-                            </m:rPr>
-                            <a:rPr lang="en-GB" sz="2400" i="1" smtClean="0">
-                              <a:latin typeface="Cambria Math" panose="02040503050406030204" pitchFamily="18" charset="0"/>
-                              <a:ea typeface="Cambria Math" panose="02040503050406030204" pitchFamily="18" charset="0"/>
-                            </a:rPr>
-                            <m:t>Θ</m:t>
-                          </m:r>
-                          <m:d>
-                            <m:dPr>
-                              <m:ctrlPr>
-                                <a:rPr lang="en-GB" sz="2400" i="1" smtClean="0">
-                                  <a:latin typeface="Cambria Math" panose="02040503050406030204" pitchFamily="18" charset="0"/>
-                                  <a:ea typeface="Cambria Math" panose="02040503050406030204" pitchFamily="18" charset="0"/>
-                                </a:rPr>
-                              </m:ctrlPr>
-                            </m:dPr>
-                            <m:e>
-                              <m:r>
-                                <a:rPr lang="en-GB" sz="2400" i="1" smtClean="0">
-                                  <a:latin typeface="Cambria Math" panose="02040503050406030204" pitchFamily="18" charset="0"/>
-                                  <a:ea typeface="Cambria Math" panose="02040503050406030204" pitchFamily="18" charset="0"/>
-                                </a:rPr>
-                                <m:t>𝐵</m:t>
-                              </m:r>
-                            </m:e>
-                          </m:d>
-                        </m:num>
-                        <m:den>
-                          <m:r>
-                            <m:rPr>
-                              <m:sty m:val="p"/>
-                            </m:rPr>
-                            <a:rPr lang="en-GB" sz="2400" i="1" smtClean="0">
-                              <a:latin typeface="Cambria Math" panose="02040503050406030204" pitchFamily="18" charset="0"/>
-                              <a:ea typeface="Cambria Math" panose="02040503050406030204" pitchFamily="18" charset="0"/>
-                            </a:rPr>
-                            <m:t>Φ</m:t>
-                          </m:r>
-                          <m:d>
-                            <m:dPr>
-                              <m:ctrlPr>
-                                <a:rPr lang="en-GB" sz="2400" i="1" smtClean="0">
-                                  <a:latin typeface="Cambria Math" panose="02040503050406030204" pitchFamily="18" charset="0"/>
-                                  <a:ea typeface="Cambria Math" panose="02040503050406030204" pitchFamily="18" charset="0"/>
-                                </a:rPr>
-                              </m:ctrlPr>
-                            </m:dPr>
-                            <m:e>
-                              <m:r>
-                                <a:rPr lang="en-GB" sz="2400" i="1" smtClean="0">
-                                  <a:latin typeface="Cambria Math" panose="02040503050406030204" pitchFamily="18" charset="0"/>
-                                  <a:ea typeface="Cambria Math" panose="02040503050406030204" pitchFamily="18" charset="0"/>
-                                </a:rPr>
-                                <m:t>𝐵</m:t>
-                              </m:r>
-                            </m:e>
-                          </m:d>
-                        </m:den>
-                      </m:f>
-                    </m:oMath>
-                  </m:oMathPara>
-                </a14:m>
-                <a:endParaRPr lang="en-GB" dirty="0"/>
-              </a:p>
-              <a:p>
-                <a:r>
-                  <a:rPr lang="en-GB" sz="2800" dirty="0"/>
-                  <a:t>Auto-covariance generating function (</a:t>
-                </a:r>
-                <a:r>
-                  <a:rPr lang="en-GB" sz="2800" dirty="0" err="1"/>
-                  <a:t>acgf</a:t>
-                </a:r>
-                <a:r>
-                  <a:rPr lang="en-GB" sz="2800" dirty="0"/>
-                  <a:t>)</a:t>
-                </a:r>
-              </a:p>
-              <a:p>
-                <a:pPr marL="457200" lvl="1" indent="0">
-                  <a:buNone/>
-                </a:pPr>
-                <a14:m>
-                  <m:oMathPara xmlns:m="http://schemas.openxmlformats.org/officeDocument/2006/math">
-                    <m:oMathParaPr>
-                      <m:jc m:val="left"/>
-                    </m:oMathParaPr>
-                    <m:oMath>
-                      <m:r>
-                        <a:rPr lang="en-GB" sz="2400" b="0" i="1" smtClean="0">
-                          <a:latin typeface="Cambria Math" panose="02040503050406030204" pitchFamily="18" charset="0"/>
-                          <a:ea typeface="Cambria Math" panose="02040503050406030204" pitchFamily="18" charset="0"/>
-                        </a:rPr>
-                        <m:t>𝑎𝑐𝑔𝑓</m:t>
-                      </m:r>
-                      <m:d>
-                        <m:dPr>
-                          <m:ctrlPr>
-                            <a:rPr lang="en-GB" sz="2400" i="1">
-                              <a:latin typeface="Cambria Math" panose="02040503050406030204" pitchFamily="18" charset="0"/>
-                            </a:rPr>
-                          </m:ctrlPr>
-                        </m:dPr>
-                        <m:e>
-                          <m:sSub>
-                            <m:sSubPr>
-                              <m:ctrlPr>
-                                <a:rPr lang="en-GB" sz="2400" i="1">
-                                  <a:latin typeface="Cambria Math" panose="02040503050406030204" pitchFamily="18" charset="0"/>
-                                </a:rPr>
-                              </m:ctrlPr>
-                            </m:sSubPr>
-                            <m:e>
-                              <m:r>
-                                <a:rPr lang="en-GB" sz="2400" i="1">
-                                  <a:latin typeface="Cambria Math" panose="02040503050406030204" pitchFamily="18" charset="0"/>
-                                </a:rPr>
-                                <m:t>𝑦</m:t>
-                              </m:r>
-                            </m:e>
-                            <m:sub>
-                              <m:r>
-                                <a:rPr lang="en-GB" sz="2400" i="1">
-                                  <a:latin typeface="Cambria Math" panose="02040503050406030204" pitchFamily="18" charset="0"/>
-                                </a:rPr>
-                                <m:t>𝑡</m:t>
-                              </m:r>
-                            </m:sub>
-                          </m:sSub>
-                        </m:e>
-                      </m:d>
-                      <m:r>
-                        <a:rPr lang="en-GB" sz="2400" i="1">
-                          <a:latin typeface="Cambria Math" panose="02040503050406030204" pitchFamily="18" charset="0"/>
-                        </a:rPr>
-                        <m:t>=</m:t>
-                      </m:r>
-                      <m:sSup>
-                        <m:sSupPr>
-                          <m:ctrlPr>
-                            <a:rPr lang="en-GB" sz="2400" i="1" smtClean="0">
-                              <a:latin typeface="Cambria Math" panose="02040503050406030204" pitchFamily="18" charset="0"/>
-                              <a:ea typeface="Cambria Math" panose="02040503050406030204" pitchFamily="18" charset="0"/>
-                            </a:rPr>
-                          </m:ctrlPr>
-                        </m:sSupPr>
-                        <m:e>
-                          <m:r>
-                            <a:rPr lang="en-GB" sz="2400" i="1" smtClean="0">
-                              <a:latin typeface="Cambria Math" panose="02040503050406030204" pitchFamily="18" charset="0"/>
-                              <a:ea typeface="Cambria Math" panose="02040503050406030204" pitchFamily="18" charset="0"/>
-                            </a:rPr>
-                            <m:t>𝜎</m:t>
-                          </m:r>
-                        </m:e>
-                        <m:sup>
-                          <m:r>
-                            <a:rPr lang="en-GB" sz="2400" b="0" i="1" smtClean="0">
-                              <a:latin typeface="Cambria Math" panose="02040503050406030204" pitchFamily="18" charset="0"/>
-                            </a:rPr>
-                            <m:t>2</m:t>
-                          </m:r>
-                        </m:sup>
-                      </m:sSup>
-                      <m:r>
-                        <m:rPr>
-                          <m:sty m:val="p"/>
-                        </m:rPr>
-                        <a:rPr lang="en-GB" sz="2400" i="1" smtClean="0">
-                          <a:latin typeface="Cambria Math" panose="02040503050406030204" pitchFamily="18" charset="0"/>
-                          <a:ea typeface="Cambria Math" panose="02040503050406030204" pitchFamily="18" charset="0"/>
-                        </a:rPr>
-                        <m:t>Ψ</m:t>
-                      </m:r>
-                      <m:d>
-                        <m:dPr>
-                          <m:ctrlPr>
-                            <a:rPr lang="en-GB" sz="2400" b="0" i="1" smtClean="0">
-                              <a:latin typeface="Cambria Math" panose="02040503050406030204" pitchFamily="18" charset="0"/>
-                              <a:ea typeface="Cambria Math" panose="02040503050406030204" pitchFamily="18" charset="0"/>
-                            </a:rPr>
-                          </m:ctrlPr>
-                        </m:dPr>
-                        <m:e>
-                          <m:r>
-                            <a:rPr lang="en-GB" sz="2400" b="0" i="1" smtClean="0">
-                              <a:latin typeface="Cambria Math" panose="02040503050406030204" pitchFamily="18" charset="0"/>
-                              <a:ea typeface="Cambria Math" panose="02040503050406030204" pitchFamily="18" charset="0"/>
-                            </a:rPr>
-                            <m:t>𝑧</m:t>
-                          </m:r>
-                        </m:e>
-                      </m:d>
-                      <m:r>
-                        <m:rPr>
-                          <m:sty m:val="p"/>
-                        </m:rPr>
-                        <a:rPr lang="en-GB" sz="2400" i="1" smtClean="0">
-                          <a:latin typeface="Cambria Math" panose="02040503050406030204" pitchFamily="18" charset="0"/>
-                          <a:ea typeface="Cambria Math" panose="02040503050406030204" pitchFamily="18" charset="0"/>
-                        </a:rPr>
-                        <m:t>Ψ</m:t>
-                      </m:r>
-                      <m:d>
-                        <m:dPr>
-                          <m:ctrlPr>
-                            <a:rPr lang="en-GB" sz="2400" b="0" i="1" smtClean="0">
-                              <a:latin typeface="Cambria Math" panose="02040503050406030204" pitchFamily="18" charset="0"/>
-                              <a:ea typeface="Cambria Math" panose="02040503050406030204" pitchFamily="18" charset="0"/>
-                            </a:rPr>
-                          </m:ctrlPr>
-                        </m:dPr>
-                        <m:e>
-                          <m:sSup>
-                            <m:sSupPr>
-                              <m:ctrlPr>
-                                <a:rPr lang="en-GB" sz="2400" b="0" i="1" smtClean="0">
-                                  <a:latin typeface="Cambria Math" panose="02040503050406030204" pitchFamily="18" charset="0"/>
-                                  <a:ea typeface="Cambria Math" panose="02040503050406030204" pitchFamily="18" charset="0"/>
-                                </a:rPr>
-                              </m:ctrlPr>
-                            </m:sSupPr>
-                            <m:e>
-                              <m:r>
-                                <a:rPr lang="en-GB" sz="2400" b="0" i="1" smtClean="0">
-                                  <a:latin typeface="Cambria Math" panose="02040503050406030204" pitchFamily="18" charset="0"/>
-                                  <a:ea typeface="Cambria Math" panose="02040503050406030204" pitchFamily="18" charset="0"/>
-                                </a:rPr>
-                                <m:t>𝑧</m:t>
-                              </m:r>
-                            </m:e>
-                            <m:sup>
-                              <m:r>
-                                <a:rPr lang="en-GB" sz="2400" b="0" i="1" smtClean="0">
-                                  <a:latin typeface="Cambria Math" panose="02040503050406030204" pitchFamily="18" charset="0"/>
-                                  <a:ea typeface="Cambria Math" panose="02040503050406030204" pitchFamily="18" charset="0"/>
-                                </a:rPr>
-                                <m:t>−1</m:t>
-                              </m:r>
-                            </m:sup>
-                          </m:sSup>
-                        </m:e>
-                      </m:d>
-                      <m:r>
-                        <a:rPr lang="en-GB" sz="2400" b="0" i="1" smtClean="0">
-                          <a:latin typeface="Cambria Math" panose="02040503050406030204" pitchFamily="18" charset="0"/>
-                          <a:ea typeface="Cambria Math" panose="02040503050406030204" pitchFamily="18" charset="0"/>
-                        </a:rPr>
-                        <m:t>=</m:t>
-                      </m:r>
-                      <m:sSup>
-                        <m:sSupPr>
-                          <m:ctrlPr>
-                            <a:rPr lang="en-GB" sz="2400" i="1">
-                              <a:latin typeface="Cambria Math" panose="02040503050406030204" pitchFamily="18" charset="0"/>
-                              <a:ea typeface="Cambria Math" panose="02040503050406030204" pitchFamily="18" charset="0"/>
-                            </a:rPr>
-                          </m:ctrlPr>
-                        </m:sSupPr>
-                        <m:e>
-                          <m:r>
-                            <a:rPr lang="en-GB" sz="2400" i="1">
-                              <a:latin typeface="Cambria Math" panose="02040503050406030204" pitchFamily="18" charset="0"/>
-                              <a:ea typeface="Cambria Math" panose="02040503050406030204" pitchFamily="18" charset="0"/>
-                            </a:rPr>
-                            <m:t>𝜎</m:t>
-                          </m:r>
-                        </m:e>
-                        <m:sup>
-                          <m:r>
-                            <a:rPr lang="en-GB" sz="2400" i="1" smtClean="0">
-                              <a:latin typeface="Cambria Math" panose="02040503050406030204" pitchFamily="18" charset="0"/>
-                            </a:rPr>
-                            <m:t>2</m:t>
-                          </m:r>
-                        </m:sup>
-                      </m:sSup>
-                      <m:f>
-                        <m:fPr>
-                          <m:ctrlPr>
-                            <a:rPr lang="en-GB" sz="2400" i="1" smtClean="0">
-                              <a:latin typeface="Cambria Math" panose="02040503050406030204" pitchFamily="18" charset="0"/>
-                              <a:ea typeface="Cambria Math" panose="02040503050406030204" pitchFamily="18" charset="0"/>
-                            </a:rPr>
-                          </m:ctrlPr>
-                        </m:fPr>
-                        <m:num>
-                          <m:r>
-                            <m:rPr>
-                              <m:sty m:val="p"/>
-                            </m:rPr>
-                            <a:rPr lang="en-GB" sz="2400" i="1" smtClean="0">
-                              <a:latin typeface="Cambria Math" panose="02040503050406030204" pitchFamily="18" charset="0"/>
-                              <a:ea typeface="Cambria Math" panose="02040503050406030204" pitchFamily="18" charset="0"/>
-                            </a:rPr>
-                            <m:t>Θ</m:t>
-                          </m:r>
-                          <m:d>
-                            <m:dPr>
-                              <m:ctrlPr>
-                                <a:rPr lang="en-GB" sz="2400" b="0" i="1" smtClean="0">
-                                  <a:latin typeface="Cambria Math" panose="02040503050406030204" pitchFamily="18" charset="0"/>
-                                  <a:ea typeface="Cambria Math" panose="02040503050406030204" pitchFamily="18" charset="0"/>
-                                </a:rPr>
-                              </m:ctrlPr>
-                            </m:dPr>
-                            <m:e>
-                              <m:r>
-                                <a:rPr lang="en-GB" sz="2400" b="0" i="1" smtClean="0">
-                                  <a:latin typeface="Cambria Math" panose="02040503050406030204" pitchFamily="18" charset="0"/>
-                                  <a:ea typeface="Cambria Math" panose="02040503050406030204" pitchFamily="18" charset="0"/>
-                                </a:rPr>
-                                <m:t>𝑧</m:t>
-                              </m:r>
-                            </m:e>
-                          </m:d>
-                          <m:r>
-                            <m:rPr>
-                              <m:sty m:val="p"/>
-                            </m:rPr>
-                            <a:rPr lang="en-GB" sz="2400" i="1" smtClean="0">
-                              <a:latin typeface="Cambria Math" panose="02040503050406030204" pitchFamily="18" charset="0"/>
-                              <a:ea typeface="Cambria Math" panose="02040503050406030204" pitchFamily="18" charset="0"/>
-                            </a:rPr>
-                            <m:t>Θ</m:t>
-                          </m:r>
-                          <m:d>
-                            <m:dPr>
-                              <m:ctrlPr>
-                                <a:rPr lang="en-GB" sz="2400" i="1" smtClean="0">
-                                  <a:latin typeface="Cambria Math" panose="02040503050406030204" pitchFamily="18" charset="0"/>
-                                  <a:ea typeface="Cambria Math" panose="02040503050406030204" pitchFamily="18" charset="0"/>
-                                </a:rPr>
-                              </m:ctrlPr>
-                            </m:dPr>
-                            <m:e>
-                              <m:sSup>
-                                <m:sSupPr>
-                                  <m:ctrlPr>
-                                    <a:rPr lang="en-GB" sz="2400" i="1" smtClean="0">
-                                      <a:latin typeface="Cambria Math" panose="02040503050406030204" pitchFamily="18" charset="0"/>
-                                      <a:ea typeface="Cambria Math" panose="02040503050406030204" pitchFamily="18" charset="0"/>
-                                    </a:rPr>
-                                  </m:ctrlPr>
-                                </m:sSupPr>
-                                <m:e>
-                                  <m:r>
-                                    <a:rPr lang="en-GB" sz="2400" i="1" smtClean="0">
-                                      <a:latin typeface="Cambria Math" panose="02040503050406030204" pitchFamily="18" charset="0"/>
-                                      <a:ea typeface="Cambria Math" panose="02040503050406030204" pitchFamily="18" charset="0"/>
-                                    </a:rPr>
-                                    <m:t>𝑧</m:t>
-                                  </m:r>
-                                </m:e>
-                                <m:sup>
-                                  <m:r>
-                                    <a:rPr lang="en-GB" sz="2400" i="1" smtClean="0">
-                                      <a:latin typeface="Cambria Math" panose="02040503050406030204" pitchFamily="18" charset="0"/>
-                                      <a:ea typeface="Cambria Math" panose="02040503050406030204" pitchFamily="18" charset="0"/>
-                                    </a:rPr>
-                                    <m:t>−1</m:t>
-                                  </m:r>
-                                </m:sup>
-                              </m:sSup>
-                            </m:e>
-                          </m:d>
-                        </m:num>
-                        <m:den>
-                          <m:r>
-                            <m:rPr>
-                              <m:sty m:val="p"/>
-                            </m:rPr>
-                            <a:rPr lang="en-GB" sz="2400" i="1" smtClean="0">
-                              <a:latin typeface="Cambria Math" panose="02040503050406030204" pitchFamily="18" charset="0"/>
-                              <a:ea typeface="Cambria Math" panose="02040503050406030204" pitchFamily="18" charset="0"/>
-                            </a:rPr>
-                            <m:t>Φ</m:t>
-                          </m:r>
-                          <m:d>
-                            <m:dPr>
-                              <m:ctrlPr>
-                                <a:rPr lang="en-GB" sz="2400" b="0" i="1" smtClean="0">
-                                  <a:latin typeface="Cambria Math" panose="02040503050406030204" pitchFamily="18" charset="0"/>
-                                  <a:ea typeface="Cambria Math" panose="02040503050406030204" pitchFamily="18" charset="0"/>
-                                </a:rPr>
-                              </m:ctrlPr>
-                            </m:dPr>
-                            <m:e>
-                              <m:r>
-                                <a:rPr lang="en-GB" sz="2400" b="0" i="1" smtClean="0">
-                                  <a:latin typeface="Cambria Math" panose="02040503050406030204" pitchFamily="18" charset="0"/>
-                                  <a:ea typeface="Cambria Math" panose="02040503050406030204" pitchFamily="18" charset="0"/>
-                                </a:rPr>
-                                <m:t>𝑧</m:t>
-                              </m:r>
-                            </m:e>
-                          </m:d>
-                          <m:r>
-                            <m:rPr>
-                              <m:sty m:val="p"/>
-                            </m:rPr>
-                            <a:rPr lang="en-GB" sz="2400" i="1" smtClean="0">
-                              <a:latin typeface="Cambria Math" panose="02040503050406030204" pitchFamily="18" charset="0"/>
-                              <a:ea typeface="Cambria Math" panose="02040503050406030204" pitchFamily="18" charset="0"/>
-                            </a:rPr>
-                            <m:t>Φ</m:t>
-                          </m:r>
-                          <m:d>
-                            <m:dPr>
-                              <m:ctrlPr>
-                                <a:rPr lang="en-GB" sz="2400" i="1" smtClean="0">
-                                  <a:latin typeface="Cambria Math" panose="02040503050406030204" pitchFamily="18" charset="0"/>
-                                  <a:ea typeface="Cambria Math" panose="02040503050406030204" pitchFamily="18" charset="0"/>
-                                </a:rPr>
-                              </m:ctrlPr>
-                            </m:dPr>
-                            <m:e>
-                              <m:sSup>
-                                <m:sSupPr>
-                                  <m:ctrlPr>
-                                    <a:rPr lang="en-GB" sz="2400" i="1" smtClean="0">
-                                      <a:latin typeface="Cambria Math" panose="02040503050406030204" pitchFamily="18" charset="0"/>
-                                      <a:ea typeface="Cambria Math" panose="02040503050406030204" pitchFamily="18" charset="0"/>
-                                    </a:rPr>
-                                  </m:ctrlPr>
-                                </m:sSupPr>
-                                <m:e>
-                                  <m:r>
-                                    <a:rPr lang="en-GB" sz="2400" i="1" smtClean="0">
-                                      <a:latin typeface="Cambria Math" panose="02040503050406030204" pitchFamily="18" charset="0"/>
-                                      <a:ea typeface="Cambria Math" panose="02040503050406030204" pitchFamily="18" charset="0"/>
-                                    </a:rPr>
-                                    <m:t>𝑧</m:t>
-                                  </m:r>
-                                </m:e>
-                                <m:sup>
-                                  <m:r>
-                                    <a:rPr lang="en-GB" sz="2400" i="1" smtClean="0">
-                                      <a:latin typeface="Cambria Math" panose="02040503050406030204" pitchFamily="18" charset="0"/>
-                                      <a:ea typeface="Cambria Math" panose="02040503050406030204" pitchFamily="18" charset="0"/>
-                                    </a:rPr>
-                                    <m:t>−1</m:t>
-                                  </m:r>
-                                </m:sup>
-                              </m:sSup>
-                            </m:e>
-                          </m:d>
-                        </m:den>
-                      </m:f>
-                    </m:oMath>
-                  </m:oMathPara>
-                </a14:m>
-                <a:endParaRPr lang="en-GB" sz="2400" dirty="0"/>
-              </a:p>
-              <a:p>
-                <a:r>
-                  <a:rPr lang="en-GB" sz="2800" dirty="0"/>
-                  <a:t>Spectrum ≡ Fourier transform of the </a:t>
-                </a:r>
-                <a:r>
-                  <a:rPr lang="en-GB" sz="2800" dirty="0" err="1"/>
-                  <a:t>acgf</a:t>
-                </a:r>
-                <a:endParaRPr lang="en-GB" sz="2800" dirty="0"/>
-              </a:p>
-              <a:p>
-                <a:pPr marL="457200" lvl="1" indent="0">
-                  <a:buNone/>
-                </a:pPr>
-                <a14:m>
-                  <m:oMathPara xmlns:m="http://schemas.openxmlformats.org/officeDocument/2006/math">
-                    <m:oMathParaPr>
-                      <m:jc m:val="left"/>
-                    </m:oMathParaPr>
-                    <m:oMath>
-                      <m:sSub>
-                        <m:sSubPr>
-                          <m:ctrlPr>
-                            <a:rPr lang="en-GB" sz="2400" b="0" i="1" smtClean="0">
-                              <a:latin typeface="Cambria Math" panose="02040503050406030204" pitchFamily="18" charset="0"/>
-                            </a:rPr>
-                          </m:ctrlPr>
-                        </m:sSubPr>
-                        <m:e>
-                          <m:r>
-                            <a:rPr lang="en-GB" sz="2400" b="0" i="1" smtClean="0">
-                              <a:latin typeface="Cambria Math" panose="02040503050406030204" pitchFamily="18" charset="0"/>
-                            </a:rPr>
-                            <m:t>𝑔</m:t>
-                          </m:r>
-                        </m:e>
-                        <m:sub>
-                          <m:r>
-                            <a:rPr lang="en-GB" sz="2400" b="0" i="1" smtClean="0">
-                              <a:latin typeface="Cambria Math" panose="02040503050406030204" pitchFamily="18" charset="0"/>
-                            </a:rPr>
-                            <m:t>𝑦</m:t>
-                          </m:r>
-                        </m:sub>
-                      </m:sSub>
-                      <m:d>
-                        <m:dPr>
-                          <m:ctrlPr>
-                            <a:rPr lang="en-GB" sz="2400" b="0" i="1" smtClean="0">
-                              <a:latin typeface="Cambria Math" panose="02040503050406030204" pitchFamily="18" charset="0"/>
-                              <a:ea typeface="Cambria Math" panose="02040503050406030204" pitchFamily="18" charset="0"/>
-                            </a:rPr>
-                          </m:ctrlPr>
-                        </m:dPr>
-                        <m:e>
-                          <m:r>
-                            <a:rPr lang="en-GB" sz="2400" b="0" i="1" smtClean="0">
-                              <a:latin typeface="Cambria Math" panose="02040503050406030204" pitchFamily="18" charset="0"/>
-                              <a:ea typeface="Cambria Math" panose="02040503050406030204" pitchFamily="18" charset="0"/>
-                            </a:rPr>
-                            <m:t>𝜆</m:t>
-                          </m:r>
-                        </m:e>
-                      </m:d>
-                      <m:r>
-                        <a:rPr lang="en-GB" sz="2400" b="0" i="1" smtClean="0">
-                          <a:latin typeface="Cambria Math" panose="02040503050406030204" pitchFamily="18" charset="0"/>
-                          <a:ea typeface="Cambria Math" panose="02040503050406030204" pitchFamily="18" charset="0"/>
-                        </a:rPr>
-                        <m:t>=</m:t>
-                      </m:r>
-                      <m:f>
-                        <m:fPr>
-                          <m:ctrlPr>
-                            <a:rPr lang="en-GB" sz="2400" i="1">
-                              <a:latin typeface="Cambria Math" panose="02040503050406030204" pitchFamily="18" charset="0"/>
-                              <a:ea typeface="Cambria Math" panose="02040503050406030204" pitchFamily="18" charset="0"/>
-                            </a:rPr>
-                          </m:ctrlPr>
-                        </m:fPr>
-                        <m:num>
-                          <m:sSup>
-                            <m:sSupPr>
-                              <m:ctrlPr>
-                                <a:rPr lang="en-GB" sz="2400" i="1">
-                                  <a:latin typeface="Cambria Math" panose="02040503050406030204" pitchFamily="18" charset="0"/>
-                                  <a:ea typeface="Cambria Math" panose="02040503050406030204" pitchFamily="18" charset="0"/>
-                                </a:rPr>
-                              </m:ctrlPr>
-                            </m:sSupPr>
-                            <m:e>
-                              <m:r>
-                                <a:rPr lang="en-GB" sz="2400" i="1">
-                                  <a:latin typeface="Cambria Math" panose="02040503050406030204" pitchFamily="18" charset="0"/>
-                                  <a:ea typeface="Cambria Math" panose="02040503050406030204" pitchFamily="18" charset="0"/>
-                                </a:rPr>
-                                <m:t>𝜎</m:t>
-                              </m:r>
-                            </m:e>
-                            <m:sup>
-                              <m:r>
-                                <a:rPr lang="en-GB" sz="2400" i="1" smtClean="0">
-                                  <a:latin typeface="Cambria Math" panose="02040503050406030204" pitchFamily="18" charset="0"/>
-                                </a:rPr>
-                                <m:t>2</m:t>
-                              </m:r>
-                            </m:sup>
-                          </m:sSup>
-                        </m:num>
-                        <m:den>
-                          <m:r>
-                            <a:rPr lang="en-GB" sz="2400" b="0" i="1" smtClean="0">
-                              <a:latin typeface="Cambria Math" panose="02040503050406030204" pitchFamily="18" charset="0"/>
-                              <a:ea typeface="Cambria Math" panose="02040503050406030204" pitchFamily="18" charset="0"/>
-                            </a:rPr>
-                            <m:t>2</m:t>
-                          </m:r>
-                          <m:r>
-                            <a:rPr lang="en-GB" sz="2400" b="0" i="1" smtClean="0">
-                              <a:latin typeface="Cambria Math" panose="02040503050406030204" pitchFamily="18" charset="0"/>
-                              <a:ea typeface="Cambria Math" panose="02040503050406030204" pitchFamily="18" charset="0"/>
-                            </a:rPr>
-                            <m:t>𝜋</m:t>
-                          </m:r>
-                        </m:den>
-                      </m:f>
-                      <m:f>
-                        <m:fPr>
-                          <m:ctrlPr>
-                            <a:rPr lang="en-GB" sz="2400" b="0" i="1" smtClean="0">
-                              <a:latin typeface="Cambria Math" panose="02040503050406030204" pitchFamily="18" charset="0"/>
-                              <a:ea typeface="Cambria Math" panose="02040503050406030204" pitchFamily="18" charset="0"/>
-                            </a:rPr>
-                          </m:ctrlPr>
-                        </m:fPr>
-                        <m:num>
-                          <m:sSup>
-                            <m:sSupPr>
-                              <m:ctrlPr>
-                                <a:rPr lang="en-GB" sz="2400" b="0" i="1" smtClean="0">
-                                  <a:latin typeface="Cambria Math" panose="02040503050406030204" pitchFamily="18" charset="0"/>
-                                  <a:ea typeface="Cambria Math" panose="02040503050406030204" pitchFamily="18" charset="0"/>
-                                </a:rPr>
-                              </m:ctrlPr>
-                            </m:sSupPr>
-                            <m:e>
-                              <m:r>
-                                <a:rPr lang="en-GB" sz="2400" b="0" i="1" smtClean="0">
-                                  <a:latin typeface="Cambria Math" panose="02040503050406030204" pitchFamily="18" charset="0"/>
-                                  <a:ea typeface="Cambria Math" panose="02040503050406030204" pitchFamily="18" charset="0"/>
-                                </a:rPr>
-                                <m:t>|</m:t>
-                              </m:r>
-                              <m:r>
-                                <m:rPr>
-                                  <m:sty m:val="p"/>
-                                </m:rPr>
-                                <a:rPr lang="en-GB" sz="2400" b="0" i="1" smtClean="0">
-                                  <a:latin typeface="Cambria Math" panose="02040503050406030204" pitchFamily="18" charset="0"/>
-                                  <a:ea typeface="Cambria Math" panose="02040503050406030204" pitchFamily="18" charset="0"/>
-                                </a:rPr>
-                                <m:t>Θ</m:t>
-                              </m:r>
-                              <m:d>
-                                <m:dPr>
-                                  <m:ctrlPr>
-                                    <a:rPr lang="en-GB" sz="2400" b="0" i="1" smtClean="0">
-                                      <a:latin typeface="Cambria Math" panose="02040503050406030204" pitchFamily="18" charset="0"/>
-                                      <a:ea typeface="Cambria Math" panose="02040503050406030204" pitchFamily="18" charset="0"/>
-                                    </a:rPr>
-                                  </m:ctrlPr>
-                                </m:dPr>
-                                <m:e>
-                                  <m:sSup>
-                                    <m:sSupPr>
-                                      <m:ctrlPr>
-                                        <a:rPr lang="en-GB" sz="2400" b="0" i="1" smtClean="0">
-                                          <a:latin typeface="Cambria Math" panose="02040503050406030204" pitchFamily="18" charset="0"/>
-                                          <a:ea typeface="Cambria Math" panose="02040503050406030204" pitchFamily="18" charset="0"/>
-                                        </a:rPr>
-                                      </m:ctrlPr>
-                                    </m:sSupPr>
-                                    <m:e>
-                                      <m:r>
-                                        <a:rPr lang="en-GB" sz="2400" b="0" i="1" smtClean="0">
-                                          <a:latin typeface="Cambria Math" panose="02040503050406030204" pitchFamily="18" charset="0"/>
-                                          <a:ea typeface="Cambria Math" panose="02040503050406030204" pitchFamily="18" charset="0"/>
-                                        </a:rPr>
-                                        <m:t>𝑒</m:t>
-                                      </m:r>
-                                    </m:e>
-                                    <m:sup>
-                                      <m:r>
-                                        <a:rPr lang="en-GB" sz="2400" b="0" i="1" smtClean="0">
-                                          <a:latin typeface="Cambria Math" panose="02040503050406030204" pitchFamily="18" charset="0"/>
-                                          <a:ea typeface="Cambria Math" panose="02040503050406030204" pitchFamily="18" charset="0"/>
-                                        </a:rPr>
-                                        <m:t>−</m:t>
-                                      </m:r>
-                                      <m:r>
-                                        <a:rPr lang="en-GB" sz="2400" b="0" i="1" smtClean="0">
-                                          <a:latin typeface="Cambria Math" panose="02040503050406030204" pitchFamily="18" charset="0"/>
-                                          <a:ea typeface="Cambria Math" panose="02040503050406030204" pitchFamily="18" charset="0"/>
-                                        </a:rPr>
-                                        <m:t>𝑖</m:t>
-                                      </m:r>
-                                      <m:r>
-                                        <a:rPr lang="en-GB" sz="2400" b="0" i="1" smtClean="0">
-                                          <a:latin typeface="Cambria Math" panose="02040503050406030204" pitchFamily="18" charset="0"/>
-                                          <a:ea typeface="Cambria Math" panose="02040503050406030204" pitchFamily="18" charset="0"/>
-                                        </a:rPr>
-                                        <m:t>𝜆</m:t>
-                                      </m:r>
-                                    </m:sup>
-                                  </m:sSup>
-                                </m:e>
-                              </m:d>
-                              <m:r>
-                                <a:rPr lang="en-GB" sz="2400" b="0" i="1" smtClean="0">
-                                  <a:latin typeface="Cambria Math" panose="02040503050406030204" pitchFamily="18" charset="0"/>
-                                  <a:ea typeface="Cambria Math" panose="02040503050406030204" pitchFamily="18" charset="0"/>
-                                </a:rPr>
-                                <m:t>|</m:t>
-                              </m:r>
-                            </m:e>
-                            <m:sup>
-                              <m:r>
-                                <a:rPr lang="en-GB" sz="2400" b="0" i="1" smtClean="0">
-                                  <a:latin typeface="Cambria Math" panose="02040503050406030204" pitchFamily="18" charset="0"/>
-                                  <a:ea typeface="Cambria Math" panose="02040503050406030204" pitchFamily="18" charset="0"/>
-                                </a:rPr>
-                                <m:t>2</m:t>
-                              </m:r>
-                            </m:sup>
-                          </m:sSup>
-                        </m:num>
-                        <m:den>
-                          <m:sSup>
-                            <m:sSupPr>
-                              <m:ctrlPr>
-                                <a:rPr lang="en-GB" sz="2400" i="1" smtClean="0">
-                                  <a:latin typeface="Cambria Math" panose="02040503050406030204" pitchFamily="18" charset="0"/>
-                                  <a:ea typeface="Cambria Math" panose="02040503050406030204" pitchFamily="18" charset="0"/>
-                                </a:rPr>
-                              </m:ctrlPr>
-                            </m:sSupPr>
-                            <m:e>
-                              <m:r>
-                                <a:rPr lang="en-GB" sz="2400" i="1" smtClean="0">
-                                  <a:latin typeface="Cambria Math" panose="02040503050406030204" pitchFamily="18" charset="0"/>
-                                  <a:ea typeface="Cambria Math" panose="02040503050406030204" pitchFamily="18" charset="0"/>
-                                </a:rPr>
-                                <m:t>|</m:t>
-                              </m:r>
-                              <m:r>
-                                <m:rPr>
-                                  <m:sty m:val="p"/>
-                                </m:rPr>
-                                <a:rPr lang="en-GB" sz="2400" i="1" smtClean="0">
-                                  <a:latin typeface="Cambria Math" panose="02040503050406030204" pitchFamily="18" charset="0"/>
-                                  <a:ea typeface="Cambria Math" panose="02040503050406030204" pitchFamily="18" charset="0"/>
-                                </a:rPr>
-                                <m:t>Φ</m:t>
-                              </m:r>
-                              <m:d>
-                                <m:dPr>
-                                  <m:ctrlPr>
-                                    <a:rPr lang="en-GB" sz="2400" i="1" smtClean="0">
-                                      <a:latin typeface="Cambria Math" panose="02040503050406030204" pitchFamily="18" charset="0"/>
-                                      <a:ea typeface="Cambria Math" panose="02040503050406030204" pitchFamily="18" charset="0"/>
-                                    </a:rPr>
-                                  </m:ctrlPr>
-                                </m:dPr>
-                                <m:e>
-                                  <m:sSup>
-                                    <m:sSupPr>
-                                      <m:ctrlPr>
-                                        <a:rPr lang="en-GB" sz="2400" i="1" smtClean="0">
-                                          <a:latin typeface="Cambria Math" panose="02040503050406030204" pitchFamily="18" charset="0"/>
-                                          <a:ea typeface="Cambria Math" panose="02040503050406030204" pitchFamily="18" charset="0"/>
-                                        </a:rPr>
-                                      </m:ctrlPr>
-                                    </m:sSupPr>
-                                    <m:e>
-                                      <m:r>
-                                        <a:rPr lang="en-GB" sz="2400" i="1" smtClean="0">
-                                          <a:latin typeface="Cambria Math" panose="02040503050406030204" pitchFamily="18" charset="0"/>
-                                          <a:ea typeface="Cambria Math" panose="02040503050406030204" pitchFamily="18" charset="0"/>
-                                        </a:rPr>
-                                        <m:t>𝑒</m:t>
-                                      </m:r>
-                                    </m:e>
-                                    <m:sup>
-                                      <m:r>
-                                        <a:rPr lang="en-GB" sz="2400" i="1" smtClean="0">
-                                          <a:latin typeface="Cambria Math" panose="02040503050406030204" pitchFamily="18" charset="0"/>
-                                          <a:ea typeface="Cambria Math" panose="02040503050406030204" pitchFamily="18" charset="0"/>
-                                        </a:rPr>
-                                        <m:t>−</m:t>
-                                      </m:r>
-                                      <m:r>
-                                        <a:rPr lang="en-GB" sz="2400" i="1" smtClean="0">
-                                          <a:latin typeface="Cambria Math" panose="02040503050406030204" pitchFamily="18" charset="0"/>
-                                          <a:ea typeface="Cambria Math" panose="02040503050406030204" pitchFamily="18" charset="0"/>
-                                        </a:rPr>
-                                        <m:t>𝑖</m:t>
-                                      </m:r>
-                                      <m:r>
-                                        <a:rPr lang="en-GB" sz="2400" i="1" smtClean="0">
-                                          <a:latin typeface="Cambria Math" panose="02040503050406030204" pitchFamily="18" charset="0"/>
-                                          <a:ea typeface="Cambria Math" panose="02040503050406030204" pitchFamily="18" charset="0"/>
-                                        </a:rPr>
-                                        <m:t>𝜆</m:t>
-                                      </m:r>
-                                    </m:sup>
-                                  </m:sSup>
-                                </m:e>
-                              </m:d>
-                              <m:r>
-                                <a:rPr lang="en-GB" sz="2400" i="1" smtClean="0">
-                                  <a:latin typeface="Cambria Math" panose="02040503050406030204" pitchFamily="18" charset="0"/>
-                                  <a:ea typeface="Cambria Math" panose="02040503050406030204" pitchFamily="18" charset="0"/>
-                                </a:rPr>
-                                <m:t>|</m:t>
-                              </m:r>
-                            </m:e>
-                            <m:sup>
-                              <m:r>
-                                <a:rPr lang="en-GB" sz="2400" i="1" smtClean="0">
-                                  <a:latin typeface="Cambria Math" panose="02040503050406030204" pitchFamily="18" charset="0"/>
-                                  <a:ea typeface="Cambria Math" panose="02040503050406030204" pitchFamily="18" charset="0"/>
-                                </a:rPr>
-                                <m:t>2</m:t>
-                              </m:r>
-                            </m:sup>
-                          </m:sSup>
-                        </m:den>
-                      </m:f>
-                    </m:oMath>
-                  </m:oMathPara>
-                </a14:m>
-                <a:endParaRPr lang="en-GB" sz="2400" dirty="0"/>
-              </a:p>
-              <a:p>
-                <a:endParaRPr lang="en-GB" dirty="0"/>
-              </a:p>
-            </p:txBody>
-          </p:sp>
-        </mc:Choice>
-        <mc:Fallback xmlns="">
-          <p:sp>
-            <p:nvSpPr>
-              <p:cNvPr id="3" name="Espace réservé du contenu 2">
-                <a:extLst>
-                  <a:ext uri="{FF2B5EF4-FFF2-40B4-BE49-F238E27FC236}">
-                    <a16:creationId xmlns:a16="http://schemas.microsoft.com/office/drawing/2014/main" id="{27D576E3-CFEC-BCE2-A098-9DB253DE5F00}"/>
-                  </a:ext>
-                </a:extLst>
-              </p:cNvPr>
-              <p:cNvSpPr>
-                <a:spLocks noGrp="1" noRot="1" noChangeAspect="1" noMove="1" noResize="1" noEditPoints="1" noAdjustHandles="1" noChangeArrowheads="1" noChangeShapeType="1" noTextEdit="1"/>
-              </p:cNvSpPr>
-              <p:nvPr>
-                <p:ph idx="1"/>
-              </p:nvPr>
-            </p:nvSpPr>
-            <p:spPr>
-              <a:blipFill>
-                <a:blip r:embed="rId2"/>
-                <a:stretch>
-                  <a:fillRect l="-1043" t="-2241"/>
-                </a:stretch>
-              </a:blipFill>
-            </p:spPr>
-            <p:txBody>
-              <a:bodyPr/>
-              <a:lstStyle/>
-              <a:p>
-                <a:r>
-                  <a:rPr lang="en-GB">
-                    <a:noFill/>
-                  </a:rPr>
-                  <a:t> </a:t>
-                </a:r>
-              </a:p>
-            </p:txBody>
-          </p:sp>
-        </mc:Fallback>
-      </mc:AlternateContent>
-      <p:sp>
-        <p:nvSpPr>
-          <p:cNvPr id="5" name="Espace réservé du pied de page 4">
-            <a:extLst>
-              <a:ext uri="{FF2B5EF4-FFF2-40B4-BE49-F238E27FC236}">
-                <a16:creationId xmlns:a16="http://schemas.microsoft.com/office/drawing/2014/main" id="{0A4EEF6C-B802-D118-0B5B-13608697BB19}"/>
-              </a:ext>
-            </a:extLst>
-          </p:cNvPr>
-          <p:cNvSpPr>
-            <a:spLocks noGrp="1"/>
-          </p:cNvSpPr>
-          <p:nvPr>
-            <p:ph type="ftr" sz="quarter" idx="11"/>
-          </p:nvPr>
-        </p:nvSpPr>
-        <p:spPr/>
-        <p:txBody>
-          <a:bodyPr/>
-          <a:lstStyle/>
-          <a:p>
-            <a:r>
-              <a:rPr lang="en-GB"/>
-              <a:t>Time Series</a:t>
-            </a:r>
-          </a:p>
-        </p:txBody>
-      </p:sp>
-      <p:sp>
-        <p:nvSpPr>
-          <p:cNvPr id="4" name="Espace réservé du numéro de diapositive 3">
-            <a:extLst>
-              <a:ext uri="{FF2B5EF4-FFF2-40B4-BE49-F238E27FC236}">
-                <a16:creationId xmlns:a16="http://schemas.microsoft.com/office/drawing/2014/main" id="{8F7B091E-430F-8C59-94B1-A2EFB2B55329}"/>
-              </a:ext>
-            </a:extLst>
-          </p:cNvPr>
-          <p:cNvSpPr>
-            <a:spLocks noGrp="1"/>
-          </p:cNvSpPr>
-          <p:nvPr>
-            <p:ph type="sldNum" sz="quarter" idx="12"/>
-          </p:nvPr>
-        </p:nvSpPr>
-        <p:spPr/>
-        <p:txBody>
-          <a:bodyPr/>
-          <a:lstStyle/>
-          <a:p>
-            <a:fld id="{71CC62B1-FA1F-4849-B719-012F8D8A46B3}" type="slidenum">
-              <a:rPr lang="en-GB" smtClean="0"/>
-              <a:t>16</a:t>
-            </a:fld>
-            <a:endParaRPr lang="en-GB"/>
-          </a:p>
-        </p:txBody>
-      </p:sp>
-    </p:spTree>
-    <p:extLst>
-      <p:ext uri="{BB962C8B-B14F-4D97-AF65-F5344CB8AC3E}">
-        <p14:creationId xmlns:p14="http://schemas.microsoft.com/office/powerpoint/2010/main" val="2341758213"/>
-      </p:ext>
-    </p:extLst>
-  </p:cSld>
-  <p:clrMapOvr>
-    <a:masterClrMapping/>
-  </p:clrMapOvr>
-</p:sld>
-</file>
-
-<file path=ppt/slides/slide17.xml><?xml version="1.0" encoding="utf-8"?>
 <p:sld xmlns:a="http://schemas.openxmlformats.org/drawingml/2006/main" xmlns:r="http://schemas.openxmlformats.org/officeDocument/2006/relationships" xmlns:p="http://schemas.openxmlformats.org/presentationml/2006/main">
   <p:cSld>
     <p:spTree>
@@ -11963,6 +10711,35 @@
       </p:sp>
       <p:sp>
         <p:nvSpPr>
+          <p:cNvPr id="4" name="Espace réservé du numéro de diapositive 3">
+            <a:extLst>
+              <a:ext uri="{FF2B5EF4-FFF2-40B4-BE49-F238E27FC236}">
+                <a16:creationId xmlns:a16="http://schemas.microsoft.com/office/drawing/2014/main" id="{F746840B-23EB-74E9-F545-AC1E0DB273D4}"/>
+              </a:ext>
+            </a:extLst>
+          </p:cNvPr>
+          <p:cNvSpPr>
+            <a:spLocks noGrp="1"/>
+          </p:cNvSpPr>
+          <p:nvPr>
+            <p:ph type="sldNum" idx="12"/>
+          </p:nvPr>
+        </p:nvSpPr>
+        <p:spPr/>
+        <p:txBody>
+          <a:bodyPr/>
+          <a:lstStyle/>
+          <a:p>
+            <a:fld id="{71CC62B1-FA1F-4849-B719-012F8D8A46B3}" type="slidenum">
+              <a:rPr lang="en-GB" smtClean="0"/>
+              <a:t>16</a:t>
+            </a:fld>
+            <a:endParaRPr lang="en-GB"/>
+          </a:p>
+        </p:txBody>
+      </p:sp>
+      <p:sp>
+        <p:nvSpPr>
           <p:cNvPr id="3" name="Content Placeholder 2">
             <a:extLst>
               <a:ext uri="{FF2B5EF4-FFF2-40B4-BE49-F238E27FC236}">
@@ -11974,7 +10751,7 @@
             <a:spLocks noGrp="1"/>
           </p:cNvSpPr>
           <p:nvPr>
-            <p:ph idx="1"/>
+            <p:ph sz="half" idx="2"/>
           </p:nvPr>
         </p:nvSpPr>
         <p:spPr/>
@@ -11984,38 +10761,38 @@
           <a:p>
             <a:pPr algn="l"/>
             <a:r>
-              <a:rPr lang="en-GB" dirty="0"/>
+              <a:rPr lang="en-GB" sz="2800" dirty="0"/>
               <a:t>Importance of the representation in the frequency domain for series decomposition</a:t>
             </a:r>
           </a:p>
           <a:p>
             <a:pPr lvl="1"/>
             <a:r>
-              <a:rPr lang="en-GB" dirty="0"/>
+              <a:rPr lang="en-GB" sz="2400" dirty="0"/>
               <a:t>Trend ≈ low frequencies</a:t>
             </a:r>
           </a:p>
           <a:p>
             <a:pPr lvl="1"/>
             <a:r>
-              <a:rPr lang="en-GB" dirty="0"/>
+              <a:rPr lang="en-GB" sz="2400" dirty="0"/>
               <a:t>Seasonal ≈ seasonal frequencies (related to the periodicity)</a:t>
             </a:r>
           </a:p>
           <a:p>
             <a:pPr lvl="1"/>
             <a:r>
-              <a:rPr lang="en-GB" dirty="0"/>
+              <a:rPr lang="en-GB" sz="2400" dirty="0"/>
               <a:t>Irregular ≈ high-frequencies</a:t>
             </a:r>
           </a:p>
           <a:p>
             <a:pPr lvl="1"/>
-            <a:endParaRPr lang="en-GB" dirty="0"/>
+            <a:endParaRPr lang="en-GB" sz="2400" dirty="0"/>
           </a:p>
           <a:p>
             <a:r>
-              <a:rPr lang="en-GB" dirty="0"/>
+              <a:rPr lang="en-GB" sz="2800" dirty="0"/>
               <a:t>Especially true for SEATS</a:t>
             </a:r>
           </a:p>
@@ -12034,10 +10811,15 @@
             <a:spLocks noGrp="1"/>
           </p:cNvSpPr>
           <p:nvPr>
-            <p:ph type="ftr" sz="quarter" idx="11"/>
+            <p:ph type="ftr" sz="quarter" idx="4294967295"/>
           </p:nvPr>
         </p:nvSpPr>
-        <p:spPr/>
+        <p:spPr>
+          <a:xfrm>
+            <a:off x="0" y="0"/>
+            <a:ext cx="0" cy="0"/>
+          </a:xfrm>
+        </p:spPr>
         <p:txBody>
           <a:bodyPr/>
           <a:lstStyle/>
@@ -12046,35 +10828,6 @@
               <a:rPr lang="en-GB"/>
               <a:t>Time Series</a:t>
             </a:r>
-          </a:p>
-        </p:txBody>
-      </p:sp>
-      <p:sp>
-        <p:nvSpPr>
-          <p:cNvPr id="4" name="Espace réservé du numéro de diapositive 3">
-            <a:extLst>
-              <a:ext uri="{FF2B5EF4-FFF2-40B4-BE49-F238E27FC236}">
-                <a16:creationId xmlns:a16="http://schemas.microsoft.com/office/drawing/2014/main" id="{F746840B-23EB-74E9-F545-AC1E0DB273D4}"/>
-              </a:ext>
-            </a:extLst>
-          </p:cNvPr>
-          <p:cNvSpPr>
-            <a:spLocks noGrp="1"/>
-          </p:cNvSpPr>
-          <p:nvPr>
-            <p:ph type="sldNum" sz="quarter" idx="12"/>
-          </p:nvPr>
-        </p:nvSpPr>
-        <p:spPr/>
-        <p:txBody>
-          <a:bodyPr/>
-          <a:lstStyle/>
-          <a:p>
-            <a:fld id="{71CC62B1-FA1F-4849-B719-012F8D8A46B3}" type="slidenum">
-              <a:rPr lang="en-GB" smtClean="0"/>
-              <a:t>17</a:t>
-            </a:fld>
-            <a:endParaRPr lang="en-GB"/>
           </a:p>
         </p:txBody>
       </p:sp>
@@ -12091,7 +10844,7 @@
 </p:sld>
 </file>
 
-<file path=ppt/slides/slide18.xml><?xml version="1.0" encoding="utf-8"?>
+<file path=ppt/slides/slide17.xml><?xml version="1.0" encoding="utf-8"?>
 <p:sld xmlns:a="http://schemas.openxmlformats.org/drawingml/2006/main" xmlns:r="http://schemas.openxmlformats.org/officeDocument/2006/relationships" xmlns:p="http://schemas.openxmlformats.org/presentationml/2006/main">
   <p:cSld>
     <p:spTree>
@@ -12182,7 +10935,7 @@
             <a:fld id="{00000000-1234-1234-1234-123412341234}" type="slidenum">
               <a:rPr lang="en-GB" smtClean="0"/>
               <a:pPr/>
-              <a:t>18</a:t>
+              <a:t>17</a:t>
             </a:fld>
             <a:endParaRPr lang="en-GB"/>
           </a:p>
@@ -12699,8 +11452,8 @@
           </a:p>
         </p:txBody>
       </p:sp>
-      <mc:AlternateContent xmlns:mc="http://schemas.openxmlformats.org/markup-compatibility/2006">
-        <mc:Choice xmlns:a14="http://schemas.microsoft.com/office/drawing/2010/main" Requires="a14">
+      <mc:AlternateContent xmlns:mc="http://schemas.openxmlformats.org/markup-compatibility/2006" xmlns:a14="http://schemas.microsoft.com/office/drawing/2010/main">
+        <mc:Choice Requires="a14">
           <p:sp>
             <p:nvSpPr>
               <p:cNvPr id="3" name="Content Placeholder 2">
@@ -13520,7 +12273,7 @@
             </p:txBody>
           </p:sp>
         </mc:Choice>
-        <mc:Fallback>
+        <mc:Fallback xmlns="">
           <p:sp>
             <p:nvSpPr>
               <p:cNvPr id="3" name="Content Placeholder 2">
@@ -13657,2159 +12410,127 @@
           </a:p>
         </p:txBody>
       </p:sp>
-      <mc:AlternateContent xmlns:mc="http://schemas.openxmlformats.org/markup-compatibility/2006" xmlns:a14="http://schemas.microsoft.com/office/drawing/2010/main">
-        <mc:Choice Requires="a14">
-          <p:sp>
-            <p:nvSpPr>
-              <p:cNvPr id="3" name="Content Placeholder 2">
-                <a:extLst>
-                  <a:ext uri="{FF2B5EF4-FFF2-40B4-BE49-F238E27FC236}">
-                    <a16:creationId xmlns:a16="http://schemas.microsoft.com/office/drawing/2014/main" id="{E508C413-EA68-1DAB-E5A5-BF537176310E}"/>
-                  </a:ext>
-                </a:extLst>
-              </p:cNvPr>
-              <p:cNvSpPr>
-                <a:spLocks noGrp="1"/>
-              </p:cNvSpPr>
-              <p:nvPr>
-                <p:ph sz="half" idx="2"/>
-              </p:nvPr>
-            </p:nvSpPr>
-            <p:spPr>
-              <a:xfrm>
-                <a:off x="970722" y="1280160"/>
-                <a:ext cx="10515597" cy="4815967"/>
-              </a:xfrm>
-            </p:spPr>
-            <p:txBody>
-              <a:bodyPr>
-                <a:normAutofit fontScale="92500" lnSpcReduction="10000"/>
-              </a:bodyPr>
-              <a:lstStyle/>
-              <a:p>
-                <a:r>
-                  <a:rPr lang="en-GB" dirty="0"/>
-                  <a:t>Periodogram </a:t>
-                </a:r>
-                <a:r>
-                  <a:rPr lang="en-GB" sz="1800" dirty="0">
-                    <a:solidFill>
-                      <a:srgbClr val="0070C0"/>
-                    </a:solidFill>
-                  </a:rPr>
-                  <a:t>(see JD+_Seasonality_final_version.docx, pages 12-14)</a:t>
-                </a:r>
-                <a:r>
-                  <a:rPr lang="en-GB" dirty="0"/>
-                  <a:t>.</a:t>
-                </a:r>
-              </a:p>
-              <a:p>
-                <a:pPr lvl="1"/>
-                <a:r>
-                  <a:rPr lang="en-GB" dirty="0"/>
-                  <a:t>Discrete Fourier’s transform of the series </a:t>
-                </a:r>
-                <a14:m>
-                  <m:oMath xmlns:m="http://schemas.openxmlformats.org/officeDocument/2006/math">
-                    <m:sSub>
-                      <m:sSubPr>
-                        <m:ctrlPr>
-                          <a:rPr lang="fr-BE" b="0" i="1" smtClean="0">
-                            <a:latin typeface="Cambria Math" panose="02040503050406030204" pitchFamily="18" charset="0"/>
-                          </a:rPr>
-                        </m:ctrlPr>
-                      </m:sSubPr>
-                      <m:e>
-                        <m:d>
-                          <m:dPr>
-                            <m:begChr m:val="{"/>
-                            <m:endChr m:val="}"/>
-                            <m:ctrlPr>
-                              <a:rPr lang="fr-BE" b="0" i="1" smtClean="0">
-                                <a:latin typeface="Cambria Math" panose="02040503050406030204" pitchFamily="18" charset="0"/>
-                              </a:rPr>
-                            </m:ctrlPr>
-                          </m:dPr>
-                          <m:e>
-                            <m:sSub>
-                              <m:sSubPr>
-                                <m:ctrlPr>
-                                  <a:rPr lang="fr-BE" b="0" i="1" smtClean="0">
-                                    <a:latin typeface="Cambria Math" panose="02040503050406030204" pitchFamily="18" charset="0"/>
-                                  </a:rPr>
-                                </m:ctrlPr>
-                              </m:sSubPr>
-                              <m:e>
-                                <m:r>
-                                  <a:rPr lang="fr-BE" b="0" i="1" smtClean="0">
-                                    <a:latin typeface="Cambria Math" panose="02040503050406030204" pitchFamily="18" charset="0"/>
-                                  </a:rPr>
-                                  <m:t>𝑥</m:t>
-                                </m:r>
-                              </m:e>
-                              <m:sub>
-                                <m:r>
-                                  <a:rPr lang="fr-BE" i="1">
-                                    <a:latin typeface="Cambria Math" panose="02040503050406030204" pitchFamily="18" charset="0"/>
-                                  </a:rPr>
-                                  <m:t>𝑗</m:t>
-                                </m:r>
-                              </m:sub>
-                            </m:sSub>
-                          </m:e>
-                        </m:d>
-                      </m:e>
-                      <m:sub>
-                        <m:r>
-                          <a:rPr lang="fr-BE" i="1">
-                            <a:latin typeface="Cambria Math" panose="02040503050406030204" pitchFamily="18" charset="0"/>
-                            <a:ea typeface="Cambria Math" panose="02040503050406030204" pitchFamily="18" charset="0"/>
-                          </a:rPr>
-                          <m:t>0≤</m:t>
-                        </m:r>
-                        <m:r>
-                          <a:rPr lang="fr-BE" i="1">
-                            <a:latin typeface="Cambria Math" panose="02040503050406030204" pitchFamily="18" charset="0"/>
-                            <a:ea typeface="Cambria Math" panose="02040503050406030204" pitchFamily="18" charset="0"/>
-                          </a:rPr>
-                          <m:t>𝑗</m:t>
-                        </m:r>
-                        <m:r>
-                          <a:rPr lang="fr-BE" i="1">
-                            <a:latin typeface="Cambria Math" panose="02040503050406030204" pitchFamily="18" charset="0"/>
-                            <a:ea typeface="Cambria Math" panose="02040503050406030204" pitchFamily="18" charset="0"/>
-                          </a:rPr>
-                          <m:t>&lt;</m:t>
-                        </m:r>
-                        <m:r>
-                          <a:rPr lang="fr-BE" i="1">
-                            <a:latin typeface="Cambria Math" panose="02040503050406030204" pitchFamily="18" charset="0"/>
-                            <a:ea typeface="Cambria Math" panose="02040503050406030204" pitchFamily="18" charset="0"/>
-                          </a:rPr>
-                          <m:t>𝑛</m:t>
-                        </m:r>
-                        <m:r>
-                          <m:rPr>
-                            <m:nor/>
-                          </m:rPr>
-                          <a:rPr lang="en-GB" i="0" dirty="0"/>
-                          <m:t> </m:t>
-                        </m:r>
-                      </m:sub>
-                    </m:sSub>
-                  </m:oMath>
-                </a14:m>
-                <a:endParaRPr lang="en-GB" dirty="0"/>
-              </a:p>
-              <a:p>
-                <a:pPr marL="1028700" lvl="2" indent="0">
-                  <a:buNone/>
-                </a:pPr>
-                <a:r>
-                  <a:rPr lang="en-GB" dirty="0"/>
-                  <a:t>Fourier frequencies: </a:t>
-                </a:r>
-                <a14:m>
-                  <m:oMath xmlns:m="http://schemas.openxmlformats.org/officeDocument/2006/math">
-                    <m:sSub>
-                      <m:sSubPr>
-                        <m:ctrlPr>
-                          <a:rPr lang="en-GB" i="1" smtClean="0">
-                            <a:latin typeface="Cambria Math" panose="02040503050406030204" pitchFamily="18" charset="0"/>
-                            <a:ea typeface="Cambria Math" panose="02040503050406030204" pitchFamily="18" charset="0"/>
-                          </a:rPr>
-                        </m:ctrlPr>
-                      </m:sSubPr>
-                      <m:e>
-                        <m:r>
-                          <a:rPr lang="en-GB" i="1" smtClean="0">
-                            <a:latin typeface="Cambria Math" panose="02040503050406030204" pitchFamily="18" charset="0"/>
-                            <a:ea typeface="Cambria Math" panose="02040503050406030204" pitchFamily="18" charset="0"/>
-                          </a:rPr>
-                          <m:t>𝜔</m:t>
-                        </m:r>
-                      </m:e>
-                      <m:sub>
-                        <m:r>
-                          <a:rPr lang="fr-BE" b="0" i="1" smtClean="0">
-                            <a:latin typeface="Cambria Math" panose="02040503050406030204" pitchFamily="18" charset="0"/>
-                          </a:rPr>
-                          <m:t>𝑘</m:t>
-                        </m:r>
-                      </m:sub>
-                    </m:sSub>
-                    <m:r>
-                      <a:rPr lang="fr-BE" b="0" i="1" smtClean="0">
-                        <a:latin typeface="Cambria Math" panose="02040503050406030204" pitchFamily="18" charset="0"/>
-                      </a:rPr>
-                      <m:t>=</m:t>
-                    </m:r>
-                    <m:f>
-                      <m:fPr>
-                        <m:ctrlPr>
-                          <a:rPr lang="fr-BE" i="1">
-                            <a:latin typeface="Cambria Math" panose="02040503050406030204" pitchFamily="18" charset="0"/>
-                            <a:ea typeface="Cambria Math" panose="02040503050406030204" pitchFamily="18" charset="0"/>
-                          </a:rPr>
-                        </m:ctrlPr>
-                      </m:fPr>
-                      <m:num>
-                        <m:r>
-                          <a:rPr lang="fr-BE" i="1">
-                            <a:latin typeface="Cambria Math" panose="02040503050406030204" pitchFamily="18" charset="0"/>
-                            <a:ea typeface="Cambria Math" panose="02040503050406030204" pitchFamily="18" charset="0"/>
-                          </a:rPr>
-                          <m:t>2</m:t>
-                        </m:r>
-                        <m:r>
-                          <a:rPr lang="fr-BE" i="1">
-                            <a:latin typeface="Cambria Math" panose="02040503050406030204" pitchFamily="18" charset="0"/>
-                            <a:ea typeface="Cambria Math" panose="02040503050406030204" pitchFamily="18" charset="0"/>
-                          </a:rPr>
-                          <m:t>𝜋</m:t>
-                        </m:r>
-                      </m:num>
-                      <m:den>
-                        <m:r>
-                          <a:rPr lang="fr-BE" i="1">
-                            <a:latin typeface="Cambria Math" panose="02040503050406030204" pitchFamily="18" charset="0"/>
-                            <a:ea typeface="Cambria Math" panose="02040503050406030204" pitchFamily="18" charset="0"/>
-                          </a:rPr>
-                          <m:t>𝑛</m:t>
-                        </m:r>
-                      </m:den>
-                    </m:f>
-                    <m:r>
-                      <a:rPr lang="fr-BE" i="1">
-                        <a:latin typeface="Cambria Math" panose="02040503050406030204" pitchFamily="18" charset="0"/>
-                        <a:ea typeface="Cambria Math" panose="02040503050406030204" pitchFamily="18" charset="0"/>
-                      </a:rPr>
-                      <m:t>𝑗</m:t>
-                    </m:r>
-                    <m:r>
-                      <a:rPr lang="fr-BE" i="1">
-                        <a:latin typeface="Cambria Math" panose="02040503050406030204" pitchFamily="18" charset="0"/>
-                        <a:ea typeface="Cambria Math" panose="02040503050406030204" pitchFamily="18" charset="0"/>
-                      </a:rPr>
-                      <m:t>,     0≤</m:t>
-                    </m:r>
-                    <m:r>
-                      <a:rPr lang="fr-BE" i="1">
-                        <a:latin typeface="Cambria Math" panose="02040503050406030204" pitchFamily="18" charset="0"/>
-                        <a:ea typeface="Cambria Math" panose="02040503050406030204" pitchFamily="18" charset="0"/>
-                      </a:rPr>
-                      <m:t>𝑗</m:t>
-                    </m:r>
-                    <m:r>
-                      <a:rPr lang="fr-BE" i="1">
-                        <a:latin typeface="Cambria Math" panose="02040503050406030204" pitchFamily="18" charset="0"/>
-                        <a:ea typeface="Cambria Math" panose="02040503050406030204" pitchFamily="18" charset="0"/>
-                      </a:rPr>
-                      <m:t>&lt;</m:t>
-                    </m:r>
-                    <m:r>
-                      <a:rPr lang="fr-BE" i="1">
-                        <a:latin typeface="Cambria Math" panose="02040503050406030204" pitchFamily="18" charset="0"/>
-                        <a:ea typeface="Cambria Math" panose="02040503050406030204" pitchFamily="18" charset="0"/>
-                      </a:rPr>
-                      <m:t>𝑛</m:t>
-                    </m:r>
-                  </m:oMath>
-                </a14:m>
-                <a:endParaRPr lang="en-GB" dirty="0"/>
-              </a:p>
-              <a:p>
-                <a:pPr marL="1028700" lvl="2" indent="0">
-                  <a:buNone/>
-                </a:pPr>
-                <a14:m>
-                  <m:oMath xmlns:m="http://schemas.openxmlformats.org/officeDocument/2006/math">
-                    <m:sSub>
-                      <m:sSubPr>
-                        <m:ctrlPr>
-                          <a:rPr lang="fr-BE" b="1" i="1" smtClean="0">
-                            <a:latin typeface="Cambria Math" panose="02040503050406030204" pitchFamily="18" charset="0"/>
-                          </a:rPr>
-                        </m:ctrlPr>
-                      </m:sSubPr>
-                      <m:e>
-                        <m:r>
-                          <a:rPr lang="fr-BE" b="1" i="1" smtClean="0">
-                            <a:latin typeface="Cambria Math" panose="02040503050406030204" pitchFamily="18" charset="0"/>
-                          </a:rPr>
-                          <m:t>𝒆</m:t>
-                        </m:r>
-                      </m:e>
-                      <m:sub>
-                        <m:r>
-                          <a:rPr lang="fr-BE" b="0" i="1" smtClean="0">
-                            <a:latin typeface="Cambria Math" panose="02040503050406030204" pitchFamily="18" charset="0"/>
-                          </a:rPr>
-                          <m:t>𝑗</m:t>
-                        </m:r>
-                      </m:sub>
-                    </m:sSub>
-                    <m:r>
-                      <a:rPr lang="fr-BE" b="0" i="1" smtClean="0">
-                        <a:latin typeface="Cambria Math" panose="02040503050406030204" pitchFamily="18" charset="0"/>
-                      </a:rPr>
-                      <m:t>=</m:t>
-                    </m:r>
-                  </m:oMath>
-                </a14:m>
-                <a:r>
-                  <a:rPr lang="fr-BE" dirty="0"/>
-                  <a:t> </a:t>
-                </a:r>
-                <a14:m>
-                  <m:oMath xmlns:m="http://schemas.openxmlformats.org/officeDocument/2006/math">
-                    <m:sSup>
-                      <m:sSupPr>
-                        <m:ctrlPr>
-                          <a:rPr lang="fr-BE" i="1">
-                            <a:latin typeface="Cambria Math" panose="02040503050406030204" pitchFamily="18" charset="0"/>
-                          </a:rPr>
-                        </m:ctrlPr>
-                      </m:sSupPr>
-                      <m:e>
-                        <m:r>
-                          <a:rPr lang="fr-BE" i="1">
-                            <a:latin typeface="Cambria Math" panose="02040503050406030204" pitchFamily="18" charset="0"/>
-                          </a:rPr>
-                          <m:t>𝑛</m:t>
-                        </m:r>
-                      </m:e>
-                      <m:sup>
-                        <m:r>
-                          <a:rPr lang="fr-BE" i="1">
-                            <a:latin typeface="Cambria Math" panose="02040503050406030204" pitchFamily="18" charset="0"/>
-                          </a:rPr>
-                          <m:t>−</m:t>
-                        </m:r>
-                        <m:f>
-                          <m:fPr>
-                            <m:type m:val="skw"/>
-                            <m:ctrlPr>
-                              <a:rPr lang="fr-BE" i="1">
-                                <a:latin typeface="Cambria Math" panose="02040503050406030204" pitchFamily="18" charset="0"/>
-                              </a:rPr>
-                            </m:ctrlPr>
-                          </m:fPr>
-                          <m:num>
-                            <m:r>
-                              <a:rPr lang="fr-BE" i="1">
-                                <a:latin typeface="Cambria Math" panose="02040503050406030204" pitchFamily="18" charset="0"/>
-                              </a:rPr>
-                              <m:t>1</m:t>
-                            </m:r>
-                          </m:num>
-                          <m:den>
-                            <m:r>
-                              <a:rPr lang="fr-BE" i="1">
-                                <a:latin typeface="Cambria Math" panose="02040503050406030204" pitchFamily="18" charset="0"/>
-                              </a:rPr>
-                              <m:t>2</m:t>
-                            </m:r>
-                          </m:den>
-                        </m:f>
-                      </m:sup>
-                    </m:sSup>
-                    <m:r>
-                      <a:rPr lang="fr-BE" b="0" i="0" smtClean="0">
-                        <a:latin typeface="Cambria Math" panose="02040503050406030204" pitchFamily="18" charset="0"/>
-                      </a:rPr>
-                      <m:t>(</m:t>
-                    </m:r>
-                    <m:sSup>
-                      <m:sSupPr>
-                        <m:ctrlPr>
-                          <a:rPr lang="fr-BE" b="0" i="1" smtClean="0">
-                            <a:latin typeface="Cambria Math" panose="02040503050406030204" pitchFamily="18" charset="0"/>
-                          </a:rPr>
-                        </m:ctrlPr>
-                      </m:sSupPr>
-                      <m:e>
-                        <m:r>
-                          <a:rPr lang="fr-BE" b="0" i="1" smtClean="0">
-                            <a:latin typeface="Cambria Math" panose="02040503050406030204" pitchFamily="18" charset="0"/>
-                          </a:rPr>
-                          <m:t>𝑒</m:t>
-                        </m:r>
-                      </m:e>
-                      <m:sup>
-                        <m:r>
-                          <a:rPr lang="fr-BE" b="0" i="1" smtClean="0">
-                            <a:latin typeface="Cambria Math" panose="02040503050406030204" pitchFamily="18" charset="0"/>
-                          </a:rPr>
-                          <m:t>𝑖</m:t>
-                        </m:r>
-                        <m:sSub>
-                          <m:sSubPr>
-                            <m:ctrlPr>
-                              <a:rPr lang="fr-BE" b="0" i="1" smtClean="0">
-                                <a:latin typeface="Cambria Math" panose="02040503050406030204" pitchFamily="18" charset="0"/>
-                                <a:ea typeface="Cambria Math" panose="02040503050406030204" pitchFamily="18" charset="0"/>
-                              </a:rPr>
-                            </m:ctrlPr>
-                          </m:sSubPr>
-                          <m:e>
-                            <m:r>
-                              <a:rPr lang="fr-BE" b="0" i="1" smtClean="0">
-                                <a:latin typeface="Cambria Math" panose="02040503050406030204" pitchFamily="18" charset="0"/>
-                                <a:ea typeface="Cambria Math" panose="02040503050406030204" pitchFamily="18" charset="0"/>
-                              </a:rPr>
-                              <m:t>𝜔</m:t>
-                            </m:r>
-                          </m:e>
-                          <m:sub>
-                            <m:r>
-                              <a:rPr lang="fr-BE" b="0" i="1" smtClean="0">
-                                <a:latin typeface="Cambria Math" panose="02040503050406030204" pitchFamily="18" charset="0"/>
-                              </a:rPr>
-                              <m:t>𝑗</m:t>
-                            </m:r>
-                          </m:sub>
-                        </m:sSub>
-                      </m:sup>
-                    </m:sSup>
-                    <m:r>
-                      <a:rPr lang="fr-BE" b="0" i="1" smtClean="0">
-                        <a:latin typeface="Cambria Math" panose="02040503050406030204" pitchFamily="18" charset="0"/>
-                      </a:rPr>
-                      <m:t>,</m:t>
-                    </m:r>
-                    <m:sSup>
-                      <m:sSupPr>
-                        <m:ctrlPr>
-                          <a:rPr lang="fr-BE" i="1">
-                            <a:latin typeface="Cambria Math" panose="02040503050406030204" pitchFamily="18" charset="0"/>
-                          </a:rPr>
-                        </m:ctrlPr>
-                      </m:sSupPr>
-                      <m:e>
-                        <m:r>
-                          <a:rPr lang="fr-BE" i="1">
-                            <a:latin typeface="Cambria Math" panose="02040503050406030204" pitchFamily="18" charset="0"/>
-                          </a:rPr>
-                          <m:t>𝑒</m:t>
-                        </m:r>
-                      </m:e>
-                      <m:sup>
-                        <m:r>
-                          <a:rPr lang="fr-BE" i="1">
-                            <a:latin typeface="Cambria Math" panose="02040503050406030204" pitchFamily="18" charset="0"/>
-                          </a:rPr>
-                          <m:t>𝑖</m:t>
-                        </m:r>
-                        <m:r>
-                          <a:rPr lang="fr-BE" b="0" i="1" smtClean="0">
-                            <a:latin typeface="Cambria Math" panose="02040503050406030204" pitchFamily="18" charset="0"/>
-                          </a:rPr>
-                          <m:t>2</m:t>
-                        </m:r>
-                        <m:sSub>
-                          <m:sSubPr>
-                            <m:ctrlPr>
-                              <a:rPr lang="fr-BE" i="1">
-                                <a:latin typeface="Cambria Math" panose="02040503050406030204" pitchFamily="18" charset="0"/>
-                                <a:ea typeface="Cambria Math" panose="02040503050406030204" pitchFamily="18" charset="0"/>
-                              </a:rPr>
-                            </m:ctrlPr>
-                          </m:sSubPr>
-                          <m:e>
-                            <m:r>
-                              <a:rPr lang="fr-BE" i="1">
-                                <a:latin typeface="Cambria Math" panose="02040503050406030204" pitchFamily="18" charset="0"/>
-                                <a:ea typeface="Cambria Math" panose="02040503050406030204" pitchFamily="18" charset="0"/>
-                              </a:rPr>
-                              <m:t>𝜔</m:t>
-                            </m:r>
-                          </m:e>
-                          <m:sub>
-                            <m:r>
-                              <a:rPr lang="fr-BE" b="0" i="1" smtClean="0">
-                                <a:latin typeface="Cambria Math" panose="02040503050406030204" pitchFamily="18" charset="0"/>
-                                <a:ea typeface="Cambria Math" panose="02040503050406030204" pitchFamily="18" charset="0"/>
-                              </a:rPr>
-                              <m:t>𝑗</m:t>
-                            </m:r>
-                          </m:sub>
-                        </m:sSub>
-                      </m:sup>
-                    </m:sSup>
-                    <m:r>
-                      <a:rPr lang="fr-BE" b="0" i="1" smtClean="0">
-                        <a:latin typeface="Cambria Math" panose="02040503050406030204" pitchFamily="18" charset="0"/>
-                      </a:rPr>
-                      <m:t>,…</m:t>
-                    </m:r>
-                  </m:oMath>
-                </a14:m>
-                <a:r>
-                  <a:rPr lang="fr-BE" dirty="0"/>
-                  <a:t> </a:t>
-                </a:r>
-                <a14:m>
-                  <m:oMath xmlns:m="http://schemas.openxmlformats.org/officeDocument/2006/math">
-                    <m:r>
-                      <a:rPr lang="fr-BE">
-                        <a:latin typeface="Cambria Math" panose="02040503050406030204" pitchFamily="18" charset="0"/>
-                      </a:rPr>
-                      <m:t>,</m:t>
-                    </m:r>
-                    <m:sSup>
-                      <m:sSupPr>
-                        <m:ctrlPr>
-                          <a:rPr lang="fr-BE" i="1">
-                            <a:latin typeface="Cambria Math" panose="02040503050406030204" pitchFamily="18" charset="0"/>
-                          </a:rPr>
-                        </m:ctrlPr>
-                      </m:sSupPr>
-                      <m:e>
-                        <m:r>
-                          <a:rPr lang="fr-BE" i="1">
-                            <a:latin typeface="Cambria Math" panose="02040503050406030204" pitchFamily="18" charset="0"/>
-                          </a:rPr>
-                          <m:t>𝑒</m:t>
-                        </m:r>
-                      </m:e>
-                      <m:sup>
-                        <m:r>
-                          <a:rPr lang="fr-BE" i="1">
-                            <a:latin typeface="Cambria Math" panose="02040503050406030204" pitchFamily="18" charset="0"/>
-                          </a:rPr>
-                          <m:t>𝑖</m:t>
-                        </m:r>
-                        <m:r>
-                          <a:rPr lang="fr-BE" b="0" i="1" smtClean="0">
-                            <a:latin typeface="Cambria Math" panose="02040503050406030204" pitchFamily="18" charset="0"/>
-                          </a:rPr>
-                          <m:t>𝑛</m:t>
-                        </m:r>
-                        <m:sSub>
-                          <m:sSubPr>
-                            <m:ctrlPr>
-                              <a:rPr lang="fr-BE" i="1">
-                                <a:latin typeface="Cambria Math" panose="02040503050406030204" pitchFamily="18" charset="0"/>
-                                <a:ea typeface="Cambria Math" panose="02040503050406030204" pitchFamily="18" charset="0"/>
-                              </a:rPr>
-                            </m:ctrlPr>
-                          </m:sSubPr>
-                          <m:e>
-                            <m:r>
-                              <a:rPr lang="fr-BE" i="1">
-                                <a:latin typeface="Cambria Math" panose="02040503050406030204" pitchFamily="18" charset="0"/>
-                                <a:ea typeface="Cambria Math" panose="02040503050406030204" pitchFamily="18" charset="0"/>
-                              </a:rPr>
-                              <m:t>𝜔</m:t>
-                            </m:r>
-                          </m:e>
-                          <m:sub>
-                            <m:r>
-                              <a:rPr lang="fr-BE" b="0" i="1" smtClean="0">
-                                <a:latin typeface="Cambria Math" panose="02040503050406030204" pitchFamily="18" charset="0"/>
-                                <a:ea typeface="Cambria Math" panose="02040503050406030204" pitchFamily="18" charset="0"/>
-                              </a:rPr>
-                              <m:t>𝑗</m:t>
-                            </m:r>
-                          </m:sub>
-                        </m:sSub>
-                      </m:sup>
-                    </m:sSup>
-                  </m:oMath>
-                </a14:m>
-                <a:r>
-                  <a:rPr lang="en-GB" dirty="0"/>
-                  <a:t>),    </a:t>
-                </a:r>
-                <a14:m>
-                  <m:oMath xmlns:m="http://schemas.openxmlformats.org/officeDocument/2006/math">
-                    <m:sSub>
-                      <m:sSubPr>
-                        <m:ctrlPr>
-                          <a:rPr lang="fr-BE" b="1" i="1" smtClean="0">
-                            <a:latin typeface="Cambria Math" panose="02040503050406030204" pitchFamily="18" charset="0"/>
-                          </a:rPr>
-                        </m:ctrlPr>
-                      </m:sSubPr>
-                      <m:e>
-                        <m:r>
-                          <a:rPr lang="fr-BE" b="1" i="1" smtClean="0">
-                            <a:latin typeface="Cambria Math" panose="02040503050406030204" pitchFamily="18" charset="0"/>
-                          </a:rPr>
-                          <m:t>𝑭</m:t>
-                        </m:r>
-                      </m:e>
-                      <m:sub>
-                        <m:r>
-                          <a:rPr lang="fr-BE" b="1" i="1" smtClean="0">
-                            <a:latin typeface="Cambria Math" panose="02040503050406030204" pitchFamily="18" charset="0"/>
-                          </a:rPr>
-                          <m:t>𝒏</m:t>
-                        </m:r>
-                      </m:sub>
-                    </m:sSub>
-                    <m:r>
-                      <a:rPr lang="fr-BE" b="1" i="1" smtClean="0">
-                        <a:latin typeface="Cambria Math" panose="02040503050406030204" pitchFamily="18" charset="0"/>
-                      </a:rPr>
-                      <m:t>=</m:t>
-                    </m:r>
-                    <m:d>
-                      <m:dPr>
-                        <m:begChr m:val="{"/>
-                        <m:endChr m:val="}"/>
-                        <m:ctrlPr>
-                          <a:rPr lang="fr-BE" b="1" i="1">
-                            <a:latin typeface="Cambria Math" panose="02040503050406030204" pitchFamily="18" charset="0"/>
-                          </a:rPr>
-                        </m:ctrlPr>
-                      </m:dPr>
-                      <m:e>
-                        <m:sSub>
-                          <m:sSubPr>
-                            <m:ctrlPr>
-                              <a:rPr lang="fr-BE" b="1" i="1">
-                                <a:latin typeface="Cambria Math" panose="02040503050406030204" pitchFamily="18" charset="0"/>
-                              </a:rPr>
-                            </m:ctrlPr>
-                          </m:sSubPr>
-                          <m:e>
-                            <m:r>
-                              <a:rPr lang="fr-BE" b="1" i="1">
-                                <a:latin typeface="Cambria Math" panose="02040503050406030204" pitchFamily="18" charset="0"/>
-                              </a:rPr>
-                              <m:t>𝒆</m:t>
-                            </m:r>
-                          </m:e>
-                          <m:sub>
-                            <m:r>
-                              <a:rPr lang="fr-BE" b="1" i="1">
-                                <a:latin typeface="Cambria Math" panose="02040503050406030204" pitchFamily="18" charset="0"/>
-                              </a:rPr>
-                              <m:t>𝒋</m:t>
-                            </m:r>
-                          </m:sub>
-                        </m:sSub>
-                      </m:e>
-                    </m:d>
-                  </m:oMath>
-                </a14:m>
-                <a:r>
-                  <a:rPr lang="en-GB" dirty="0"/>
-                  <a:t> orthonormal basis of </a:t>
-                </a:r>
-                <a14:m>
-                  <m:oMath xmlns:m="http://schemas.openxmlformats.org/officeDocument/2006/math">
-                    <m:sSup>
-                      <m:sSupPr>
-                        <m:ctrlPr>
-                          <a:rPr lang="en-GB" i="1" smtClean="0">
-                            <a:latin typeface="Cambria Math" panose="02040503050406030204" pitchFamily="18" charset="0"/>
-                            <a:ea typeface="Cambria Math" panose="02040503050406030204" pitchFamily="18" charset="0"/>
-                          </a:rPr>
-                        </m:ctrlPr>
-                      </m:sSupPr>
-                      <m:e>
-                        <m:r>
-                          <a:rPr lang="en-GB" i="1" smtClean="0">
-                            <a:latin typeface="Cambria Math" panose="02040503050406030204" pitchFamily="18" charset="0"/>
-                            <a:ea typeface="Cambria Math" panose="02040503050406030204" pitchFamily="18" charset="0"/>
-                          </a:rPr>
-                          <m:t>ℂ</m:t>
-                        </m:r>
-                      </m:e>
-                      <m:sup>
-                        <m:r>
-                          <a:rPr lang="fr-BE" b="0" i="1" smtClean="0">
-                            <a:latin typeface="Cambria Math" panose="02040503050406030204" pitchFamily="18" charset="0"/>
-                          </a:rPr>
-                          <m:t>𝑛</m:t>
-                        </m:r>
-                      </m:sup>
-                    </m:sSup>
-                  </m:oMath>
-                </a14:m>
-                <a:r>
-                  <a:rPr lang="en-GB" dirty="0"/>
-                  <a:t> 	</a:t>
-                </a:r>
-                <a14:m>
-                  <m:oMath xmlns:m="http://schemas.openxmlformats.org/officeDocument/2006/math">
-                    <m:sSup>
-                      <m:sSupPr>
-                        <m:ctrlPr>
-                          <a:rPr lang="fr-BE" sz="1500" b="0" i="1" smtClean="0">
-                            <a:latin typeface="Cambria Math" panose="02040503050406030204" pitchFamily="18" charset="0"/>
-                          </a:rPr>
-                        </m:ctrlPr>
-                      </m:sSupPr>
-                      <m:e>
-                        <m:r>
-                          <a:rPr lang="fr-BE" sz="1500" b="0" i="1" smtClean="0">
-                            <a:latin typeface="Cambria Math" panose="02040503050406030204" pitchFamily="18" charset="0"/>
-                          </a:rPr>
-                          <m:t>(</m:t>
-                        </m:r>
-                        <m:r>
-                          <a:rPr lang="fr-BE" sz="1500" b="0" i="1" smtClean="0">
-                            <a:latin typeface="Cambria Math" panose="02040503050406030204" pitchFamily="18" charset="0"/>
-                          </a:rPr>
-                          <m:t>𝑒</m:t>
-                        </m:r>
-                      </m:e>
-                      <m:sup>
-                        <m:r>
-                          <a:rPr lang="fr-BE" sz="1500" b="0" i="1" smtClean="0">
-                            <a:latin typeface="Cambria Math" panose="02040503050406030204" pitchFamily="18" charset="0"/>
-                          </a:rPr>
-                          <m:t>𝑖</m:t>
-                        </m:r>
-                        <m:r>
-                          <a:rPr lang="fr-BE" sz="1500" i="1">
-                            <a:latin typeface="Cambria Math" panose="02040503050406030204" pitchFamily="18" charset="0"/>
-                            <a:ea typeface="Cambria Math" panose="02040503050406030204" pitchFamily="18" charset="0"/>
-                          </a:rPr>
-                          <m:t>𝜔</m:t>
-                        </m:r>
-                      </m:sup>
-                    </m:sSup>
-                    <m:r>
-                      <a:rPr lang="fr-BE" sz="1500" b="0" i="1" smtClean="0">
-                        <a:latin typeface="Cambria Math" panose="02040503050406030204" pitchFamily="18" charset="0"/>
-                      </a:rPr>
-                      <m:t>=</m:t>
-                    </m:r>
-                    <m:r>
-                      <a:rPr lang="fr-BE" sz="1500" b="0" i="1" smtClean="0">
-                        <a:latin typeface="Cambria Math" panose="02040503050406030204" pitchFamily="18" charset="0"/>
-                      </a:rPr>
-                      <m:t>𝑐𝑜𝑠</m:t>
-                    </m:r>
-                    <m:r>
-                      <a:rPr lang="fr-BE" sz="1500" b="0" i="1" smtClean="0">
-                        <a:latin typeface="Cambria Math" panose="02040503050406030204" pitchFamily="18" charset="0"/>
-                        <a:ea typeface="Cambria Math" panose="02040503050406030204" pitchFamily="18" charset="0"/>
-                      </a:rPr>
-                      <m:t>𝜔</m:t>
-                    </m:r>
-                    <m:r>
-                      <a:rPr lang="fr-BE" sz="1500" b="0" i="1" smtClean="0">
-                        <a:latin typeface="Cambria Math" panose="02040503050406030204" pitchFamily="18" charset="0"/>
-                        <a:ea typeface="Cambria Math" panose="02040503050406030204" pitchFamily="18" charset="0"/>
-                      </a:rPr>
-                      <m:t>+</m:t>
-                    </m:r>
-                    <m:r>
-                      <a:rPr lang="fr-BE" sz="1500" b="0" i="1" smtClean="0">
-                        <a:latin typeface="Cambria Math" panose="02040503050406030204" pitchFamily="18" charset="0"/>
-                        <a:ea typeface="Cambria Math" panose="02040503050406030204" pitchFamily="18" charset="0"/>
-                      </a:rPr>
-                      <m:t>𝑖𝑠𝑖𝑛</m:t>
-                    </m:r>
-                    <m:r>
-                      <a:rPr lang="fr-BE" sz="1500" b="0" i="1" smtClean="0">
-                        <a:latin typeface="Cambria Math" panose="02040503050406030204" pitchFamily="18" charset="0"/>
-                        <a:ea typeface="Cambria Math" panose="02040503050406030204" pitchFamily="18" charset="0"/>
-                      </a:rPr>
-                      <m:t>𝜔</m:t>
-                    </m:r>
-                    <m:r>
-                      <a:rPr lang="fr-BE" sz="1500" b="0" i="1" smtClean="0">
-                        <a:latin typeface="Cambria Math" panose="02040503050406030204" pitchFamily="18" charset="0"/>
-                        <a:ea typeface="Cambria Math" panose="02040503050406030204" pitchFamily="18" charset="0"/>
-                      </a:rPr>
-                      <m:t>)</m:t>
-                    </m:r>
-                  </m:oMath>
-                </a14:m>
-                <a:endParaRPr lang="en-GB" dirty="0"/>
-              </a:p>
-              <a:p>
-                <a:pPr marL="1028700" lvl="2" indent="0">
-                  <a:buNone/>
-                </a:pPr>
-                <a14:m>
-                  <m:oMath xmlns:m="http://schemas.openxmlformats.org/officeDocument/2006/math">
-                    <m:r>
-                      <a:rPr lang="fr-BE" i="1" smtClean="0">
-                        <a:latin typeface="Cambria Math" panose="02040503050406030204" pitchFamily="18" charset="0"/>
-                      </a:rPr>
-                      <m:t>𝑥</m:t>
-                    </m:r>
-                    <m:r>
-                      <a:rPr lang="fr-BE" b="0" i="1" smtClean="0">
-                        <a:latin typeface="Cambria Math" panose="02040503050406030204" pitchFamily="18" charset="0"/>
-                      </a:rPr>
-                      <m:t>=</m:t>
-                    </m:r>
-                    <m:nary>
-                      <m:naryPr>
-                        <m:chr m:val="∑"/>
-                        <m:limLoc m:val="subSup"/>
-                        <m:supHide m:val="on"/>
-                        <m:ctrlPr>
-                          <a:rPr lang="fr-BE" i="1">
-                            <a:latin typeface="Cambria Math" panose="02040503050406030204" pitchFamily="18" charset="0"/>
-                            <a:ea typeface="Cambria Math" panose="02040503050406030204" pitchFamily="18" charset="0"/>
-                          </a:rPr>
-                        </m:ctrlPr>
-                      </m:naryPr>
-                      <m:sub>
-                        <m:r>
-                          <a:rPr lang="fr-BE" i="1">
-                            <a:latin typeface="Cambria Math" panose="02040503050406030204" pitchFamily="18" charset="0"/>
-                            <a:ea typeface="Cambria Math" panose="02040503050406030204" pitchFamily="18" charset="0"/>
-                          </a:rPr>
-                          <m:t>0≤</m:t>
-                        </m:r>
-                        <m:r>
-                          <a:rPr lang="fr-BE" i="1">
-                            <a:latin typeface="Cambria Math" panose="02040503050406030204" pitchFamily="18" charset="0"/>
-                            <a:ea typeface="Cambria Math" panose="02040503050406030204" pitchFamily="18" charset="0"/>
-                          </a:rPr>
-                          <m:t>𝑗</m:t>
-                        </m:r>
-                        <m:r>
-                          <a:rPr lang="fr-BE" i="1">
-                            <a:latin typeface="Cambria Math" panose="02040503050406030204" pitchFamily="18" charset="0"/>
-                            <a:ea typeface="Cambria Math" panose="02040503050406030204" pitchFamily="18" charset="0"/>
-                          </a:rPr>
-                          <m:t>&lt;</m:t>
-                        </m:r>
-                        <m:r>
-                          <a:rPr lang="fr-BE" i="1">
-                            <a:latin typeface="Cambria Math" panose="02040503050406030204" pitchFamily="18" charset="0"/>
-                            <a:ea typeface="Cambria Math" panose="02040503050406030204" pitchFamily="18" charset="0"/>
-                          </a:rPr>
-                          <m:t>𝑛</m:t>
-                        </m:r>
-                        <m:r>
-                          <m:rPr>
-                            <m:nor/>
-                          </m:rPr>
-                          <a:rPr lang="en-GB" i="0" dirty="0"/>
-                          <m:t> </m:t>
-                        </m:r>
-                      </m:sub>
-                      <m:sup/>
-                      <m:e>
-                        <m:sSub>
-                          <m:sSubPr>
-                            <m:ctrlPr>
-                              <a:rPr lang="fr-BE" b="0" i="1" smtClean="0">
-                                <a:latin typeface="Cambria Math" panose="02040503050406030204" pitchFamily="18" charset="0"/>
-                              </a:rPr>
-                            </m:ctrlPr>
-                          </m:sSubPr>
-                          <m:e>
-                            <m:r>
-                              <a:rPr lang="fr-BE" b="0" i="1" smtClean="0">
-                                <a:latin typeface="Cambria Math" panose="02040503050406030204" pitchFamily="18" charset="0"/>
-                              </a:rPr>
-                              <m:t>𝑎</m:t>
-                            </m:r>
-                          </m:e>
-                          <m:sub>
-                            <m:r>
-                              <a:rPr lang="fr-BE" b="0" i="1" smtClean="0">
-                                <a:latin typeface="Cambria Math" panose="02040503050406030204" pitchFamily="18" charset="0"/>
-                              </a:rPr>
-                              <m:t>𝑗</m:t>
-                            </m:r>
-                          </m:sub>
-                        </m:sSub>
-                        <m:sSub>
-                          <m:sSubPr>
-                            <m:ctrlPr>
-                              <a:rPr lang="fr-BE" b="1" i="1" smtClean="0">
-                                <a:latin typeface="Cambria Math" panose="02040503050406030204" pitchFamily="18" charset="0"/>
-                              </a:rPr>
-                            </m:ctrlPr>
-                          </m:sSubPr>
-                          <m:e>
-                            <m:r>
-                              <a:rPr lang="fr-BE" b="1" i="1" smtClean="0">
-                                <a:latin typeface="Cambria Math" panose="02040503050406030204" pitchFamily="18" charset="0"/>
-                              </a:rPr>
-                              <m:t>𝒆</m:t>
-                            </m:r>
-                          </m:e>
-                          <m:sub>
-                            <m:r>
-                              <a:rPr lang="fr-BE" b="0" i="1" smtClean="0">
-                                <a:latin typeface="Cambria Math" panose="02040503050406030204" pitchFamily="18" charset="0"/>
-                              </a:rPr>
-                              <m:t>𝑗</m:t>
-                            </m:r>
-                          </m:sub>
-                        </m:sSub>
-                      </m:e>
-                    </m:nary>
-                    <m:r>
-                      <a:rPr lang="fr-BE" b="0" i="1" smtClean="0">
-                        <a:latin typeface="Cambria Math" panose="02040503050406030204" pitchFamily="18" charset="0"/>
-                      </a:rPr>
-                      <m:t>=</m:t>
-                    </m:r>
-                    <m:nary>
-                      <m:naryPr>
-                        <m:chr m:val="∑"/>
-                        <m:limLoc m:val="subSup"/>
-                        <m:supHide m:val="on"/>
-                        <m:ctrlPr>
-                          <a:rPr lang="fr-BE" i="1">
-                            <a:latin typeface="Cambria Math" panose="02040503050406030204" pitchFamily="18" charset="0"/>
-                            <a:ea typeface="Cambria Math" panose="02040503050406030204" pitchFamily="18" charset="0"/>
-                          </a:rPr>
-                        </m:ctrlPr>
-                      </m:naryPr>
-                      <m:sub>
-                        <m:r>
-                          <a:rPr lang="fr-BE" i="1">
-                            <a:latin typeface="Cambria Math" panose="02040503050406030204" pitchFamily="18" charset="0"/>
-                            <a:ea typeface="Cambria Math" panose="02040503050406030204" pitchFamily="18" charset="0"/>
-                          </a:rPr>
-                          <m:t>0≤</m:t>
-                        </m:r>
-                        <m:r>
-                          <a:rPr lang="fr-BE" b="0" i="1" smtClean="0">
-                            <a:latin typeface="Cambria Math" panose="02040503050406030204" pitchFamily="18" charset="0"/>
-                            <a:ea typeface="Cambria Math" panose="02040503050406030204" pitchFamily="18" charset="0"/>
-                          </a:rPr>
-                          <m:t>𝑘</m:t>
-                        </m:r>
-                        <m:r>
-                          <a:rPr lang="fr-BE" i="1">
-                            <a:latin typeface="Cambria Math" panose="02040503050406030204" pitchFamily="18" charset="0"/>
-                            <a:ea typeface="Cambria Math" panose="02040503050406030204" pitchFamily="18" charset="0"/>
-                          </a:rPr>
-                          <m:t>&lt;</m:t>
-                        </m:r>
-                        <m:r>
-                          <a:rPr lang="fr-BE" i="1">
-                            <a:latin typeface="Cambria Math" panose="02040503050406030204" pitchFamily="18" charset="0"/>
-                            <a:ea typeface="Cambria Math" panose="02040503050406030204" pitchFamily="18" charset="0"/>
-                          </a:rPr>
-                          <m:t>𝑛</m:t>
-                        </m:r>
-                        <m:r>
-                          <m:rPr>
-                            <m:nor/>
-                          </m:rPr>
-                          <a:rPr lang="en-GB" i="0" dirty="0"/>
-                          <m:t> </m:t>
-                        </m:r>
-                      </m:sub>
-                      <m:sup/>
-                      <m:e>
-                        <m:sSub>
-                          <m:sSubPr>
-                            <m:ctrlPr>
-                              <a:rPr lang="fr-BE" b="0" i="1" smtClean="0">
-                                <a:latin typeface="Cambria Math" panose="02040503050406030204" pitchFamily="18" charset="0"/>
-                              </a:rPr>
-                            </m:ctrlPr>
-                          </m:sSubPr>
-                          <m:e>
-                            <m:r>
-                              <a:rPr lang="fr-BE" b="0" i="1" smtClean="0">
-                                <a:latin typeface="Cambria Math" panose="02040503050406030204" pitchFamily="18" charset="0"/>
-                              </a:rPr>
-                              <m:t>𝑥</m:t>
-                            </m:r>
-                          </m:e>
-                          <m:sub>
-                            <m:r>
-                              <a:rPr lang="fr-BE" b="0" i="1" smtClean="0">
-                                <a:latin typeface="Cambria Math" panose="02040503050406030204" pitchFamily="18" charset="0"/>
-                              </a:rPr>
-                              <m:t>𝑘</m:t>
-                            </m:r>
-                          </m:sub>
-                        </m:sSub>
-                        <m:sSub>
-                          <m:sSubPr>
-                            <m:ctrlPr>
-                              <a:rPr lang="fr-BE" b="1" i="1" smtClean="0">
-                                <a:latin typeface="Cambria Math" panose="02040503050406030204" pitchFamily="18" charset="0"/>
-                              </a:rPr>
-                            </m:ctrlPr>
-                          </m:sSubPr>
-                          <m:e>
-                            <m:r>
-                              <a:rPr lang="fr-BE" b="1" i="1" smtClean="0">
-                                <a:latin typeface="Cambria Math" panose="02040503050406030204" pitchFamily="18" charset="0"/>
-                              </a:rPr>
-                              <m:t>𝒖</m:t>
-                            </m:r>
-                          </m:e>
-                          <m:sub>
-                            <m:r>
-                              <a:rPr lang="fr-BE" b="0" i="1" smtClean="0">
-                                <a:latin typeface="Cambria Math" panose="02040503050406030204" pitchFamily="18" charset="0"/>
-                              </a:rPr>
-                              <m:t>𝑘</m:t>
-                            </m:r>
-                          </m:sub>
-                        </m:sSub>
-                      </m:e>
-                    </m:nary>
-                  </m:oMath>
-                </a14:m>
-                <a:r>
-                  <a:rPr lang="en-GB" dirty="0"/>
-                  <a:t>, </a:t>
-                </a:r>
-                <a14:m>
-                  <m:oMath xmlns:m="http://schemas.openxmlformats.org/officeDocument/2006/math">
-                    <m:sSub>
-                      <m:sSubPr>
-                        <m:ctrlPr>
-                          <a:rPr lang="fr-BE" b="1" i="1">
-                            <a:latin typeface="Cambria Math" panose="02040503050406030204" pitchFamily="18" charset="0"/>
-                          </a:rPr>
-                        </m:ctrlPr>
-                      </m:sSubPr>
-                      <m:e>
-                        <m:r>
-                          <a:rPr lang="fr-BE" b="1" i="1">
-                            <a:latin typeface="Cambria Math" panose="02040503050406030204" pitchFamily="18" charset="0"/>
-                          </a:rPr>
-                          <m:t>𝒖</m:t>
-                        </m:r>
-                      </m:e>
-                      <m:sub>
-                        <m:r>
-                          <a:rPr lang="fr-BE" i="1">
-                            <a:latin typeface="Cambria Math" panose="02040503050406030204" pitchFamily="18" charset="0"/>
-                          </a:rPr>
-                          <m:t>𝑘</m:t>
-                        </m:r>
-                      </m:sub>
-                    </m:sSub>
-                    <m:r>
-                      <a:rPr lang="fr-BE" b="0" i="1" smtClean="0">
-                        <a:latin typeface="Cambria Math" panose="02040503050406030204" pitchFamily="18" charset="0"/>
-                      </a:rPr>
-                      <m:t>=</m:t>
-                    </m:r>
-                    <m:r>
-                      <a:rPr lang="fr-BE">
-                        <a:latin typeface="Cambria Math" panose="02040503050406030204" pitchFamily="18" charset="0"/>
-                      </a:rPr>
-                      <m:t>(</m:t>
-                    </m:r>
-                    <m:r>
-                      <a:rPr lang="fr-BE" b="0" i="0" smtClean="0">
-                        <a:latin typeface="Cambria Math" panose="02040503050406030204" pitchFamily="18" charset="0"/>
-                      </a:rPr>
-                      <m:t>0,…, 0, </m:t>
-                    </m:r>
-                    <m:sSub>
-                      <m:sSubPr>
-                        <m:ctrlPr>
-                          <a:rPr lang="fr-BE" b="0" i="1" smtClean="0">
-                            <a:latin typeface="Cambria Math" panose="02040503050406030204" pitchFamily="18" charset="0"/>
-                          </a:rPr>
-                        </m:ctrlPr>
-                      </m:sSubPr>
-                      <m:e>
-                        <m:r>
-                          <a:rPr lang="fr-BE" b="0" i="1" smtClean="0">
-                            <a:latin typeface="Cambria Math" panose="02040503050406030204" pitchFamily="18" charset="0"/>
-                          </a:rPr>
-                          <m:t>1</m:t>
-                        </m:r>
-                      </m:e>
-                      <m:sub>
-                        <m:r>
-                          <a:rPr lang="fr-BE" b="0" i="1" smtClean="0">
-                            <a:latin typeface="Cambria Math" panose="02040503050406030204" pitchFamily="18" charset="0"/>
-                          </a:rPr>
-                          <m:t>𝑘</m:t>
-                        </m:r>
-                      </m:sub>
-                    </m:sSub>
-                    <m:r>
-                      <a:rPr lang="fr-BE" b="0" i="1" smtClean="0">
-                        <a:latin typeface="Cambria Math" panose="02040503050406030204" pitchFamily="18" charset="0"/>
-                      </a:rPr>
-                      <m:t>, 0, …,0)</m:t>
-                    </m:r>
-                  </m:oMath>
-                </a14:m>
-                <a:endParaRPr lang="en-GB" dirty="0"/>
-              </a:p>
-              <a:p>
-                <a:pPr marL="1028700" lvl="2" indent="0">
-                  <a:buNone/>
-                </a:pPr>
-                <a14:m>
-                  <m:oMathPara xmlns:m="http://schemas.openxmlformats.org/officeDocument/2006/math">
-                    <m:oMath>
-                      <m:sSub>
-                        <m:sSubPr>
-                          <m:ctrlPr>
-                            <a:rPr lang="fr-BE" b="0" i="1" smtClean="0">
-                              <a:latin typeface="Cambria Math" panose="02040503050406030204" pitchFamily="18" charset="0"/>
-                            </a:rPr>
-                          </m:ctrlPr>
-                        </m:sSubPr>
-                        <m:e>
-                          <m:r>
-                            <a:rPr lang="fr-BE" b="0" i="1" smtClean="0">
-                              <a:latin typeface="Cambria Math" panose="02040503050406030204" pitchFamily="18" charset="0"/>
-                            </a:rPr>
-                            <m:t>𝑎</m:t>
-                          </m:r>
-                        </m:e>
-                        <m:sub>
-                          <m:r>
-                            <a:rPr lang="fr-BE" b="0" i="1" smtClean="0">
-                              <a:latin typeface="Cambria Math" panose="02040503050406030204" pitchFamily="18" charset="0"/>
-                            </a:rPr>
-                            <m:t>𝑗</m:t>
-                          </m:r>
-                        </m:sub>
-                      </m:sSub>
-                      <m:r>
-                        <a:rPr lang="fr-BE" b="0" i="1" smtClean="0">
-                          <a:latin typeface="Cambria Math" panose="02040503050406030204" pitchFamily="18" charset="0"/>
-                        </a:rPr>
-                        <m:t>=</m:t>
-                      </m:r>
-                      <m:sSup>
-                        <m:sSupPr>
-                          <m:ctrlPr>
-                            <a:rPr lang="fr-BE" b="0" i="1" smtClean="0">
-                              <a:latin typeface="Cambria Math" panose="02040503050406030204" pitchFamily="18" charset="0"/>
-                            </a:rPr>
-                          </m:ctrlPr>
-                        </m:sSupPr>
-                        <m:e>
-                          <m:r>
-                            <a:rPr lang="fr-BE" b="0" i="1" smtClean="0">
-                              <a:latin typeface="Cambria Math" panose="02040503050406030204" pitchFamily="18" charset="0"/>
-                            </a:rPr>
-                            <m:t>𝑛</m:t>
-                          </m:r>
-                        </m:e>
-                        <m:sup>
-                          <m:r>
-                            <a:rPr lang="fr-BE" b="0" i="1" smtClean="0">
-                              <a:latin typeface="Cambria Math" panose="02040503050406030204" pitchFamily="18" charset="0"/>
-                            </a:rPr>
-                            <m:t>−</m:t>
-                          </m:r>
-                          <m:f>
-                            <m:fPr>
-                              <m:type m:val="skw"/>
-                              <m:ctrlPr>
-                                <a:rPr lang="fr-BE" b="0" i="1" smtClean="0">
-                                  <a:latin typeface="Cambria Math" panose="02040503050406030204" pitchFamily="18" charset="0"/>
-                                </a:rPr>
-                              </m:ctrlPr>
-                            </m:fPr>
-                            <m:num>
-                              <m:r>
-                                <a:rPr lang="fr-BE" b="0" i="1" smtClean="0">
-                                  <a:latin typeface="Cambria Math" panose="02040503050406030204" pitchFamily="18" charset="0"/>
-                                </a:rPr>
-                                <m:t>1</m:t>
-                              </m:r>
-                            </m:num>
-                            <m:den>
-                              <m:r>
-                                <a:rPr lang="fr-BE" b="0" i="1" smtClean="0">
-                                  <a:latin typeface="Cambria Math" panose="02040503050406030204" pitchFamily="18" charset="0"/>
-                                </a:rPr>
-                                <m:t>2</m:t>
-                              </m:r>
-                            </m:den>
-                          </m:f>
-                        </m:sup>
-                      </m:sSup>
-                      <m:nary>
-                        <m:naryPr>
-                          <m:chr m:val="∑"/>
-                          <m:ctrlPr>
-                            <a:rPr lang="fr-BE" b="0" i="1" smtClean="0">
-                              <a:latin typeface="Cambria Math" panose="02040503050406030204" pitchFamily="18" charset="0"/>
-                            </a:rPr>
-                          </m:ctrlPr>
-                        </m:naryPr>
-                        <m:sub>
-                          <m:r>
-                            <a:rPr lang="fr-BE" b="0" i="1" smtClean="0">
-                              <a:latin typeface="Cambria Math" panose="02040503050406030204" pitchFamily="18" charset="0"/>
-                            </a:rPr>
-                            <m:t>𝑘</m:t>
-                          </m:r>
-                          <m:r>
-                            <a:rPr lang="fr-BE" b="0" i="1" smtClean="0">
-                              <a:latin typeface="Cambria Math" panose="02040503050406030204" pitchFamily="18" charset="0"/>
-                            </a:rPr>
-                            <m:t>=0</m:t>
-                          </m:r>
-                        </m:sub>
-                        <m:sup>
-                          <m:r>
-                            <a:rPr lang="fr-BE" b="0" i="1" smtClean="0">
-                              <a:latin typeface="Cambria Math" panose="02040503050406030204" pitchFamily="18" charset="0"/>
-                            </a:rPr>
-                            <m:t>𝑘</m:t>
-                          </m:r>
-                          <m:r>
-                            <a:rPr lang="fr-BE" b="0" i="1" smtClean="0">
-                              <a:latin typeface="Cambria Math" panose="02040503050406030204" pitchFamily="18" charset="0"/>
-                              <a:ea typeface="Cambria Math" panose="02040503050406030204" pitchFamily="18" charset="0"/>
-                            </a:rPr>
-                            <m:t>&lt;</m:t>
-                          </m:r>
-                          <m:r>
-                            <a:rPr lang="fr-BE" b="0" i="1" smtClean="0">
-                              <a:latin typeface="Cambria Math" panose="02040503050406030204" pitchFamily="18" charset="0"/>
-                              <a:ea typeface="Cambria Math" panose="02040503050406030204" pitchFamily="18" charset="0"/>
-                            </a:rPr>
-                            <m:t>𝑛</m:t>
-                          </m:r>
-                        </m:sup>
-                        <m:e>
-                          <m:sSub>
-                            <m:sSubPr>
-                              <m:ctrlPr>
-                                <a:rPr lang="fr-BE" b="0" i="1" smtClean="0">
-                                  <a:latin typeface="Cambria Math" panose="02040503050406030204" pitchFamily="18" charset="0"/>
-                                </a:rPr>
-                              </m:ctrlPr>
-                            </m:sSubPr>
-                            <m:e>
-                              <m:r>
-                                <a:rPr lang="fr-BE" b="0" i="1" smtClean="0">
-                                  <a:latin typeface="Cambria Math" panose="02040503050406030204" pitchFamily="18" charset="0"/>
-                                </a:rPr>
-                                <m:t>𝑥</m:t>
-                              </m:r>
-                            </m:e>
-                            <m:sub>
-                              <m:r>
-                                <a:rPr lang="fr-BE" b="0" i="1" smtClean="0">
-                                  <a:latin typeface="Cambria Math" panose="02040503050406030204" pitchFamily="18" charset="0"/>
-                                </a:rPr>
-                                <m:t>𝑘</m:t>
-                              </m:r>
-                            </m:sub>
-                          </m:sSub>
-                          <m:sSup>
-                            <m:sSupPr>
-                              <m:ctrlPr>
-                                <a:rPr lang="fr-BE" b="0" i="1" smtClean="0">
-                                  <a:latin typeface="Cambria Math" panose="02040503050406030204" pitchFamily="18" charset="0"/>
-                                </a:rPr>
-                              </m:ctrlPr>
-                            </m:sSupPr>
-                            <m:e>
-                              <m:r>
-                                <a:rPr lang="fr-BE" b="0" i="1" smtClean="0">
-                                  <a:latin typeface="Cambria Math" panose="02040503050406030204" pitchFamily="18" charset="0"/>
-                                </a:rPr>
-                                <m:t>𝑒</m:t>
-                              </m:r>
-                            </m:e>
-                            <m:sup>
-                              <m:r>
-                                <a:rPr lang="fr-BE" b="0" i="1" smtClean="0">
-                                  <a:latin typeface="Cambria Math" panose="02040503050406030204" pitchFamily="18" charset="0"/>
-                                </a:rPr>
-                                <m:t>−</m:t>
-                              </m:r>
-                              <m:r>
-                                <a:rPr lang="fr-BE" b="0" i="1" smtClean="0">
-                                  <a:latin typeface="Cambria Math" panose="02040503050406030204" pitchFamily="18" charset="0"/>
-                                </a:rPr>
-                                <m:t>𝑖</m:t>
-                              </m:r>
-                              <m:sSub>
-                                <m:sSubPr>
-                                  <m:ctrlPr>
-                                    <a:rPr lang="fr-BE" b="0" i="1" smtClean="0">
-                                      <a:latin typeface="Cambria Math" panose="02040503050406030204" pitchFamily="18" charset="0"/>
-                                    </a:rPr>
-                                  </m:ctrlPr>
-                                </m:sSubPr>
-                                <m:e>
-                                  <m:r>
-                                    <a:rPr lang="fr-BE" b="0" i="1" smtClean="0">
-                                      <a:latin typeface="Cambria Math" panose="02040503050406030204" pitchFamily="18" charset="0"/>
-                                    </a:rPr>
-                                    <m:t>𝑘</m:t>
-                                  </m:r>
-                                  <m:r>
-                                    <a:rPr lang="fr-BE" b="0" i="1" smtClean="0">
-                                      <a:latin typeface="Cambria Math" panose="02040503050406030204" pitchFamily="18" charset="0"/>
-                                      <a:ea typeface="Cambria Math" panose="02040503050406030204" pitchFamily="18" charset="0"/>
-                                    </a:rPr>
-                                    <m:t>𝜔</m:t>
-                                  </m:r>
-                                </m:e>
-                                <m:sub>
-                                  <m:r>
-                                    <a:rPr lang="fr-BE" b="0" i="1" smtClean="0">
-                                      <a:latin typeface="Cambria Math" panose="02040503050406030204" pitchFamily="18" charset="0"/>
-                                      <a:ea typeface="Cambria Math" panose="02040503050406030204" pitchFamily="18" charset="0"/>
-                                    </a:rPr>
-                                    <m:t>𝑗</m:t>
-                                  </m:r>
-                                </m:sub>
-                              </m:sSub>
-                            </m:sup>
-                          </m:sSup>
-                        </m:e>
-                      </m:nary>
-                      <m:r>
-                        <a:rPr lang="fr-BE" b="0" i="1" smtClean="0">
-                          <a:latin typeface="Cambria Math" panose="02040503050406030204" pitchFamily="18" charset="0"/>
-                        </a:rPr>
-                        <m:t>     [</m:t>
-                      </m:r>
-                      <m:r>
-                        <a:rPr lang="fr-BE" b="0" i="1" smtClean="0">
-                          <a:latin typeface="Cambria Math" panose="02040503050406030204" pitchFamily="18" charset="0"/>
-                        </a:rPr>
-                        <m:t>𝑜𝑟</m:t>
-                      </m:r>
-                      <m:r>
-                        <a:rPr lang="fr-BE" b="0" i="1" smtClean="0">
-                          <a:latin typeface="Cambria Math" panose="02040503050406030204" pitchFamily="18" charset="0"/>
-                        </a:rPr>
-                        <m:t>      </m:t>
-                      </m:r>
-                      <m:sSub>
-                        <m:sSubPr>
-                          <m:ctrlPr>
-                            <a:rPr lang="fr-BE" i="1">
-                              <a:latin typeface="Cambria Math" panose="02040503050406030204" pitchFamily="18" charset="0"/>
-                            </a:rPr>
-                          </m:ctrlPr>
-                        </m:sSubPr>
-                        <m:e>
-                          <m:r>
-                            <a:rPr lang="fr-BE" i="1">
-                              <a:latin typeface="Cambria Math" panose="02040503050406030204" pitchFamily="18" charset="0"/>
-                            </a:rPr>
-                            <m:t>𝑎</m:t>
-                          </m:r>
-                        </m:e>
-                        <m:sub>
-                          <m:r>
-                            <a:rPr lang="fr-BE" i="1">
-                              <a:latin typeface="Cambria Math" panose="02040503050406030204" pitchFamily="18" charset="0"/>
-                            </a:rPr>
-                            <m:t>𝑗</m:t>
-                          </m:r>
-                        </m:sub>
-                      </m:sSub>
-                      <m:r>
-                        <a:rPr lang="fr-BE" i="1">
-                          <a:latin typeface="Cambria Math" panose="02040503050406030204" pitchFamily="18" charset="0"/>
-                        </a:rPr>
-                        <m:t>=</m:t>
-                      </m:r>
-                      <m:nary>
-                        <m:naryPr>
-                          <m:chr m:val="∑"/>
-                          <m:ctrlPr>
-                            <a:rPr lang="fr-BE" i="1">
-                              <a:latin typeface="Cambria Math" panose="02040503050406030204" pitchFamily="18" charset="0"/>
-                            </a:rPr>
-                          </m:ctrlPr>
-                        </m:naryPr>
-                        <m:sub>
-                          <m:r>
-                            <a:rPr lang="fr-BE" i="1">
-                              <a:latin typeface="Cambria Math" panose="02040503050406030204" pitchFamily="18" charset="0"/>
-                            </a:rPr>
-                            <m:t>𝑘</m:t>
-                          </m:r>
-                          <m:r>
-                            <a:rPr lang="fr-BE" i="1">
-                              <a:latin typeface="Cambria Math" panose="02040503050406030204" pitchFamily="18" charset="0"/>
-                            </a:rPr>
-                            <m:t>=0</m:t>
-                          </m:r>
-                        </m:sub>
-                        <m:sup>
-                          <m:r>
-                            <a:rPr lang="fr-BE" i="1">
-                              <a:latin typeface="Cambria Math" panose="02040503050406030204" pitchFamily="18" charset="0"/>
-                            </a:rPr>
-                            <m:t>𝑘</m:t>
-                          </m:r>
-                          <m:r>
-                            <a:rPr lang="fr-BE" i="1">
-                              <a:latin typeface="Cambria Math" panose="02040503050406030204" pitchFamily="18" charset="0"/>
-                              <a:ea typeface="Cambria Math" panose="02040503050406030204" pitchFamily="18" charset="0"/>
-                            </a:rPr>
-                            <m:t>&lt;</m:t>
-                          </m:r>
-                          <m:r>
-                            <a:rPr lang="fr-BE" i="1">
-                              <a:latin typeface="Cambria Math" panose="02040503050406030204" pitchFamily="18" charset="0"/>
-                              <a:ea typeface="Cambria Math" panose="02040503050406030204" pitchFamily="18" charset="0"/>
-                            </a:rPr>
-                            <m:t>𝑛</m:t>
-                          </m:r>
-                        </m:sup>
-                        <m:e>
-                          <m:sSub>
-                            <m:sSubPr>
-                              <m:ctrlPr>
-                                <a:rPr lang="fr-BE" i="1">
-                                  <a:latin typeface="Cambria Math" panose="02040503050406030204" pitchFamily="18" charset="0"/>
-                                </a:rPr>
-                              </m:ctrlPr>
-                            </m:sSubPr>
-                            <m:e>
-                              <m:r>
-                                <a:rPr lang="fr-BE" i="1">
-                                  <a:latin typeface="Cambria Math" panose="02040503050406030204" pitchFamily="18" charset="0"/>
-                                </a:rPr>
-                                <m:t>𝑥</m:t>
-                              </m:r>
-                            </m:e>
-                            <m:sub>
-                              <m:r>
-                                <a:rPr lang="fr-BE" i="1">
-                                  <a:latin typeface="Cambria Math" panose="02040503050406030204" pitchFamily="18" charset="0"/>
-                                </a:rPr>
-                                <m:t>𝑘</m:t>
-                              </m:r>
-                            </m:sub>
-                          </m:sSub>
-                          <m:sSup>
-                            <m:sSupPr>
-                              <m:ctrlPr>
-                                <a:rPr lang="fr-BE" i="1">
-                                  <a:latin typeface="Cambria Math" panose="02040503050406030204" pitchFamily="18" charset="0"/>
-                                </a:rPr>
-                              </m:ctrlPr>
-                            </m:sSupPr>
-                            <m:e>
-                              <m:r>
-                                <a:rPr lang="fr-BE" i="1">
-                                  <a:latin typeface="Cambria Math" panose="02040503050406030204" pitchFamily="18" charset="0"/>
-                                </a:rPr>
-                                <m:t>𝑒</m:t>
-                              </m:r>
-                            </m:e>
-                            <m:sup>
-                              <m:r>
-                                <a:rPr lang="fr-BE" i="1">
-                                  <a:latin typeface="Cambria Math" panose="02040503050406030204" pitchFamily="18" charset="0"/>
-                                </a:rPr>
-                                <m:t>−</m:t>
-                              </m:r>
-                              <m:r>
-                                <a:rPr lang="fr-BE" i="1">
-                                  <a:latin typeface="Cambria Math" panose="02040503050406030204" pitchFamily="18" charset="0"/>
-                                </a:rPr>
-                                <m:t>𝑖</m:t>
-                              </m:r>
-                              <m:sSub>
-                                <m:sSubPr>
-                                  <m:ctrlPr>
-                                    <a:rPr lang="fr-BE" i="1">
-                                      <a:latin typeface="Cambria Math" panose="02040503050406030204" pitchFamily="18" charset="0"/>
-                                    </a:rPr>
-                                  </m:ctrlPr>
-                                </m:sSubPr>
-                                <m:e>
-                                  <m:r>
-                                    <a:rPr lang="fr-BE" i="1">
-                                      <a:latin typeface="Cambria Math" panose="02040503050406030204" pitchFamily="18" charset="0"/>
-                                    </a:rPr>
-                                    <m:t>𝑘</m:t>
-                                  </m:r>
-                                  <m:r>
-                                    <a:rPr lang="fr-BE" i="1">
-                                      <a:latin typeface="Cambria Math" panose="02040503050406030204" pitchFamily="18" charset="0"/>
-                                      <a:ea typeface="Cambria Math" panose="02040503050406030204" pitchFamily="18" charset="0"/>
-                                    </a:rPr>
-                                    <m:t>𝜔</m:t>
-                                  </m:r>
-                                </m:e>
-                                <m:sub>
-                                  <m:r>
-                                    <a:rPr lang="fr-BE" i="1">
-                                      <a:latin typeface="Cambria Math" panose="02040503050406030204" pitchFamily="18" charset="0"/>
-                                      <a:ea typeface="Cambria Math" panose="02040503050406030204" pitchFamily="18" charset="0"/>
-                                    </a:rPr>
-                                    <m:t>𝑗</m:t>
-                                  </m:r>
-                                </m:sub>
-                              </m:sSub>
-                            </m:sup>
-                          </m:sSup>
-                        </m:e>
-                      </m:nary>
-                      <m:r>
-                        <a:rPr lang="fr-BE" b="0" i="1" smtClean="0">
-                          <a:latin typeface="Cambria Math" panose="02040503050406030204" pitchFamily="18" charset="0"/>
-                          <a:ea typeface="Cambria Math" panose="02040503050406030204" pitchFamily="18" charset="0"/>
-                        </a:rPr>
-                        <m:t>]</m:t>
-                      </m:r>
-                    </m:oMath>
-                  </m:oMathPara>
-                </a14:m>
-                <a:endParaRPr lang="en-GB" dirty="0"/>
-              </a:p>
-              <a:p>
-                <a:pPr marL="1028700" lvl="2" indent="0">
-                  <a:buNone/>
-                </a:pPr>
-                <a14:m>
-                  <m:oMathPara xmlns:m="http://schemas.openxmlformats.org/officeDocument/2006/math">
-                    <m:oMath>
-                      <m:sSub>
-                        <m:sSubPr>
-                          <m:ctrlPr>
-                            <a:rPr lang="fr-BE" b="0" i="1" smtClean="0">
-                              <a:latin typeface="Cambria Math" panose="02040503050406030204" pitchFamily="18" charset="0"/>
-                            </a:rPr>
-                          </m:ctrlPr>
-                        </m:sSubPr>
-                        <m:e>
-                          <m:r>
-                            <a:rPr lang="fr-BE" b="0" i="1" smtClean="0">
-                              <a:latin typeface="Cambria Math" panose="02040503050406030204" pitchFamily="18" charset="0"/>
-                            </a:rPr>
-                            <m:t>𝑥</m:t>
-                          </m:r>
-                        </m:e>
-                        <m:sub>
-                          <m:r>
-                            <a:rPr lang="fr-BE" b="0" i="1" smtClean="0">
-                              <a:latin typeface="Cambria Math" panose="02040503050406030204" pitchFamily="18" charset="0"/>
-                            </a:rPr>
-                            <m:t>𝑘</m:t>
-                          </m:r>
-                        </m:sub>
-                      </m:sSub>
-                      <m:r>
-                        <a:rPr lang="fr-BE" b="0" i="1" smtClean="0">
-                          <a:latin typeface="Cambria Math" panose="02040503050406030204" pitchFamily="18" charset="0"/>
-                        </a:rPr>
-                        <m:t>=</m:t>
-                      </m:r>
-                      <m:sSup>
-                        <m:sSupPr>
-                          <m:ctrlPr>
-                            <a:rPr lang="fr-BE" b="0" i="1" smtClean="0">
-                              <a:latin typeface="Cambria Math" panose="02040503050406030204" pitchFamily="18" charset="0"/>
-                            </a:rPr>
-                          </m:ctrlPr>
-                        </m:sSupPr>
-                        <m:e>
-                          <m:r>
-                            <a:rPr lang="fr-BE" b="0" i="1" smtClean="0">
-                              <a:latin typeface="Cambria Math" panose="02040503050406030204" pitchFamily="18" charset="0"/>
-                            </a:rPr>
-                            <m:t>𝑛</m:t>
-                          </m:r>
-                        </m:e>
-                        <m:sup>
-                          <m:r>
-                            <a:rPr lang="fr-BE" b="0" i="1" smtClean="0">
-                              <a:latin typeface="Cambria Math" panose="02040503050406030204" pitchFamily="18" charset="0"/>
-                            </a:rPr>
-                            <m:t>−</m:t>
-                          </m:r>
-                          <m:f>
-                            <m:fPr>
-                              <m:type m:val="skw"/>
-                              <m:ctrlPr>
-                                <a:rPr lang="fr-BE" b="0" i="1" smtClean="0">
-                                  <a:latin typeface="Cambria Math" panose="02040503050406030204" pitchFamily="18" charset="0"/>
-                                </a:rPr>
-                              </m:ctrlPr>
-                            </m:fPr>
-                            <m:num>
-                              <m:r>
-                                <a:rPr lang="fr-BE" b="0" i="1" smtClean="0">
-                                  <a:latin typeface="Cambria Math" panose="02040503050406030204" pitchFamily="18" charset="0"/>
-                                </a:rPr>
-                                <m:t>1</m:t>
-                              </m:r>
-                            </m:num>
-                            <m:den>
-                              <m:r>
-                                <a:rPr lang="fr-BE" b="0" i="1" smtClean="0">
-                                  <a:latin typeface="Cambria Math" panose="02040503050406030204" pitchFamily="18" charset="0"/>
-                                </a:rPr>
-                                <m:t>2</m:t>
-                              </m:r>
-                            </m:den>
-                          </m:f>
-                        </m:sup>
-                      </m:sSup>
-                      <m:nary>
-                        <m:naryPr>
-                          <m:chr m:val="∑"/>
-                          <m:ctrlPr>
-                            <a:rPr lang="fr-BE" b="0" i="1" smtClean="0">
-                              <a:latin typeface="Cambria Math" panose="02040503050406030204" pitchFamily="18" charset="0"/>
-                            </a:rPr>
-                          </m:ctrlPr>
-                        </m:naryPr>
-                        <m:sub>
-                          <m:r>
-                            <m:rPr>
-                              <m:brk m:alnAt="23"/>
-                            </m:rPr>
-                            <a:rPr lang="fr-BE" b="0" i="1" smtClean="0">
-                              <a:latin typeface="Cambria Math" panose="02040503050406030204" pitchFamily="18" charset="0"/>
-                            </a:rPr>
-                            <m:t>𝑗</m:t>
-                          </m:r>
-                          <m:r>
-                            <a:rPr lang="fr-BE" b="0" i="1" smtClean="0">
-                              <a:latin typeface="Cambria Math" panose="02040503050406030204" pitchFamily="18" charset="0"/>
-                            </a:rPr>
-                            <m:t>=0</m:t>
-                          </m:r>
-                        </m:sub>
-                        <m:sup>
-                          <m:r>
-                            <a:rPr lang="fr-BE" b="0" i="1" smtClean="0">
-                              <a:latin typeface="Cambria Math" panose="02040503050406030204" pitchFamily="18" charset="0"/>
-                            </a:rPr>
-                            <m:t>𝑗</m:t>
-                          </m:r>
-                          <m:r>
-                            <a:rPr lang="fr-BE" b="0" i="1" smtClean="0">
-                              <a:latin typeface="Cambria Math" panose="02040503050406030204" pitchFamily="18" charset="0"/>
-                              <a:ea typeface="Cambria Math" panose="02040503050406030204" pitchFamily="18" charset="0"/>
-                            </a:rPr>
-                            <m:t>&lt;</m:t>
-                          </m:r>
-                          <m:r>
-                            <a:rPr lang="fr-BE" b="0" i="1" smtClean="0">
-                              <a:latin typeface="Cambria Math" panose="02040503050406030204" pitchFamily="18" charset="0"/>
-                              <a:ea typeface="Cambria Math" panose="02040503050406030204" pitchFamily="18" charset="0"/>
-                            </a:rPr>
-                            <m:t>𝑛</m:t>
-                          </m:r>
-                        </m:sup>
-                        <m:e>
-                          <m:sSub>
-                            <m:sSubPr>
-                              <m:ctrlPr>
-                                <a:rPr lang="fr-BE" b="0" i="1" smtClean="0">
-                                  <a:latin typeface="Cambria Math" panose="02040503050406030204" pitchFamily="18" charset="0"/>
-                                </a:rPr>
-                              </m:ctrlPr>
-                            </m:sSubPr>
-                            <m:e>
-                              <m:r>
-                                <a:rPr lang="fr-BE" b="0" i="1" smtClean="0">
-                                  <a:latin typeface="Cambria Math" panose="02040503050406030204" pitchFamily="18" charset="0"/>
-                                </a:rPr>
-                                <m:t>𝑎</m:t>
-                              </m:r>
-                            </m:e>
-                            <m:sub>
-                              <m:r>
-                                <a:rPr lang="fr-BE" b="0" i="1" smtClean="0">
-                                  <a:latin typeface="Cambria Math" panose="02040503050406030204" pitchFamily="18" charset="0"/>
-                                </a:rPr>
-                                <m:t>𝑗</m:t>
-                              </m:r>
-                            </m:sub>
-                          </m:sSub>
-                          <m:sSup>
-                            <m:sSupPr>
-                              <m:ctrlPr>
-                                <a:rPr lang="fr-BE" b="0" i="1" smtClean="0">
-                                  <a:latin typeface="Cambria Math" panose="02040503050406030204" pitchFamily="18" charset="0"/>
-                                </a:rPr>
-                              </m:ctrlPr>
-                            </m:sSupPr>
-                            <m:e>
-                              <m:r>
-                                <a:rPr lang="fr-BE" b="0" i="1" smtClean="0">
-                                  <a:latin typeface="Cambria Math" panose="02040503050406030204" pitchFamily="18" charset="0"/>
-                                </a:rPr>
-                                <m:t>𝑒</m:t>
-                              </m:r>
-                            </m:e>
-                            <m:sup>
-                              <m:r>
-                                <a:rPr lang="fr-BE" b="0" i="1" smtClean="0">
-                                  <a:latin typeface="Cambria Math" panose="02040503050406030204" pitchFamily="18" charset="0"/>
-                                </a:rPr>
-                                <m:t>𝑖𝑗</m:t>
-                              </m:r>
-                              <m:sSub>
-                                <m:sSubPr>
-                                  <m:ctrlPr>
-                                    <a:rPr lang="fr-BE" b="0" i="1" smtClean="0">
-                                      <a:latin typeface="Cambria Math" panose="02040503050406030204" pitchFamily="18" charset="0"/>
-                                      <a:ea typeface="Cambria Math" panose="02040503050406030204" pitchFamily="18" charset="0"/>
-                                    </a:rPr>
-                                  </m:ctrlPr>
-                                </m:sSubPr>
-                                <m:e>
-                                  <m:r>
-                                    <a:rPr lang="fr-BE" b="0" i="1" smtClean="0">
-                                      <a:latin typeface="Cambria Math" panose="02040503050406030204" pitchFamily="18" charset="0"/>
-                                      <a:ea typeface="Cambria Math" panose="02040503050406030204" pitchFamily="18" charset="0"/>
-                                    </a:rPr>
-                                    <m:t>𝜔</m:t>
-                                  </m:r>
-                                </m:e>
-                                <m:sub>
-                                  <m:r>
-                                    <a:rPr lang="fr-BE" b="0" i="1" smtClean="0">
-                                      <a:latin typeface="Cambria Math" panose="02040503050406030204" pitchFamily="18" charset="0"/>
-                                    </a:rPr>
-                                    <m:t>𝑘</m:t>
-                                  </m:r>
-                                </m:sub>
-                              </m:sSub>
-                            </m:sup>
-                          </m:sSup>
-                        </m:e>
-                      </m:nary>
-                      <m:r>
-                        <a:rPr lang="fr-BE" b="0" i="1" smtClean="0">
-                          <a:latin typeface="Cambria Math" panose="02040503050406030204" pitchFamily="18" charset="0"/>
-                        </a:rPr>
-                        <m:t>        [</m:t>
-                      </m:r>
-                      <m:r>
-                        <a:rPr lang="fr-BE" i="1">
-                          <a:latin typeface="Cambria Math" panose="02040503050406030204" pitchFamily="18" charset="0"/>
-                        </a:rPr>
-                        <m:t>𝑜𝑟</m:t>
-                      </m:r>
-                      <m:r>
-                        <a:rPr lang="fr-BE" b="0" i="1" smtClean="0">
-                          <a:latin typeface="Cambria Math" panose="02040503050406030204" pitchFamily="18" charset="0"/>
-                        </a:rPr>
-                        <m:t>      </m:t>
-                      </m:r>
-                      <m:sSub>
-                        <m:sSubPr>
-                          <m:ctrlPr>
-                            <a:rPr lang="fr-BE" i="1">
-                              <a:latin typeface="Cambria Math" panose="02040503050406030204" pitchFamily="18" charset="0"/>
-                            </a:rPr>
-                          </m:ctrlPr>
-                        </m:sSubPr>
-                        <m:e>
-                          <m:r>
-                            <a:rPr lang="fr-BE" i="1">
-                              <a:latin typeface="Cambria Math" panose="02040503050406030204" pitchFamily="18" charset="0"/>
-                            </a:rPr>
-                            <m:t>𝑥</m:t>
-                          </m:r>
-                        </m:e>
-                        <m:sub>
-                          <m:r>
-                            <a:rPr lang="fr-BE" i="1">
-                              <a:latin typeface="Cambria Math" panose="02040503050406030204" pitchFamily="18" charset="0"/>
-                            </a:rPr>
-                            <m:t>𝑘</m:t>
-                          </m:r>
-                        </m:sub>
-                      </m:sSub>
-                      <m:r>
-                        <a:rPr lang="fr-BE" i="1">
-                          <a:latin typeface="Cambria Math" panose="02040503050406030204" pitchFamily="18" charset="0"/>
-                        </a:rPr>
-                        <m:t>=</m:t>
-                      </m:r>
-                      <m:sSup>
-                        <m:sSupPr>
-                          <m:ctrlPr>
-                            <a:rPr lang="fr-BE" i="1">
-                              <a:latin typeface="Cambria Math" panose="02040503050406030204" pitchFamily="18" charset="0"/>
-                            </a:rPr>
-                          </m:ctrlPr>
-                        </m:sSupPr>
-                        <m:e>
-                          <m:r>
-                            <a:rPr lang="fr-BE" i="1">
-                              <a:latin typeface="Cambria Math" panose="02040503050406030204" pitchFamily="18" charset="0"/>
-                            </a:rPr>
-                            <m:t>𝑛</m:t>
-                          </m:r>
-                        </m:e>
-                        <m:sup>
-                          <m:r>
-                            <a:rPr lang="fr-BE" i="1">
-                              <a:latin typeface="Cambria Math" panose="02040503050406030204" pitchFamily="18" charset="0"/>
-                            </a:rPr>
-                            <m:t>−</m:t>
-                          </m:r>
-                          <m:r>
-                            <a:rPr lang="fr-BE" b="0" i="1" smtClean="0">
-                              <a:latin typeface="Cambria Math" panose="02040503050406030204" pitchFamily="18" charset="0"/>
-                            </a:rPr>
-                            <m:t>1</m:t>
-                          </m:r>
-                        </m:sup>
-                      </m:sSup>
-                      <m:nary>
-                        <m:naryPr>
-                          <m:chr m:val="∑"/>
-                          <m:ctrlPr>
-                            <a:rPr lang="fr-BE" i="1">
-                              <a:latin typeface="Cambria Math" panose="02040503050406030204" pitchFamily="18" charset="0"/>
-                            </a:rPr>
-                          </m:ctrlPr>
-                        </m:naryPr>
-                        <m:sub>
-                          <m:r>
-                            <m:rPr>
-                              <m:brk m:alnAt="23"/>
-                            </m:rPr>
-                            <a:rPr lang="fr-BE" i="1">
-                              <a:latin typeface="Cambria Math" panose="02040503050406030204" pitchFamily="18" charset="0"/>
-                            </a:rPr>
-                            <m:t>𝑗</m:t>
-                          </m:r>
-                          <m:r>
-                            <a:rPr lang="fr-BE" i="1">
-                              <a:latin typeface="Cambria Math" panose="02040503050406030204" pitchFamily="18" charset="0"/>
-                            </a:rPr>
-                            <m:t>=0</m:t>
-                          </m:r>
-                        </m:sub>
-                        <m:sup>
-                          <m:r>
-                            <a:rPr lang="fr-BE" i="1">
-                              <a:latin typeface="Cambria Math" panose="02040503050406030204" pitchFamily="18" charset="0"/>
-                            </a:rPr>
-                            <m:t>𝑗</m:t>
-                          </m:r>
-                          <m:r>
-                            <a:rPr lang="fr-BE" i="1">
-                              <a:latin typeface="Cambria Math" panose="02040503050406030204" pitchFamily="18" charset="0"/>
-                              <a:ea typeface="Cambria Math" panose="02040503050406030204" pitchFamily="18" charset="0"/>
-                            </a:rPr>
-                            <m:t>&lt;</m:t>
-                          </m:r>
-                          <m:r>
-                            <a:rPr lang="fr-BE" i="1">
-                              <a:latin typeface="Cambria Math" panose="02040503050406030204" pitchFamily="18" charset="0"/>
-                              <a:ea typeface="Cambria Math" panose="02040503050406030204" pitchFamily="18" charset="0"/>
-                            </a:rPr>
-                            <m:t>𝑛</m:t>
-                          </m:r>
-                        </m:sup>
-                        <m:e>
-                          <m:sSub>
-                            <m:sSubPr>
-                              <m:ctrlPr>
-                                <a:rPr lang="fr-BE" i="1">
-                                  <a:latin typeface="Cambria Math" panose="02040503050406030204" pitchFamily="18" charset="0"/>
-                                </a:rPr>
-                              </m:ctrlPr>
-                            </m:sSubPr>
-                            <m:e>
-                              <m:r>
-                                <a:rPr lang="fr-BE" i="1">
-                                  <a:latin typeface="Cambria Math" panose="02040503050406030204" pitchFamily="18" charset="0"/>
-                                </a:rPr>
-                                <m:t>𝑎</m:t>
-                              </m:r>
-                            </m:e>
-                            <m:sub>
-                              <m:r>
-                                <a:rPr lang="fr-BE" i="1">
-                                  <a:latin typeface="Cambria Math" panose="02040503050406030204" pitchFamily="18" charset="0"/>
-                                </a:rPr>
-                                <m:t>𝑗</m:t>
-                              </m:r>
-                            </m:sub>
-                          </m:sSub>
-                          <m:sSup>
-                            <m:sSupPr>
-                              <m:ctrlPr>
-                                <a:rPr lang="fr-BE" i="1">
-                                  <a:latin typeface="Cambria Math" panose="02040503050406030204" pitchFamily="18" charset="0"/>
-                                </a:rPr>
-                              </m:ctrlPr>
-                            </m:sSupPr>
-                            <m:e>
-                              <m:r>
-                                <a:rPr lang="fr-BE" i="1">
-                                  <a:latin typeface="Cambria Math" panose="02040503050406030204" pitchFamily="18" charset="0"/>
-                                </a:rPr>
-                                <m:t>𝑒</m:t>
-                              </m:r>
-                            </m:e>
-                            <m:sup>
-                              <m:r>
-                                <a:rPr lang="fr-BE" i="1">
-                                  <a:latin typeface="Cambria Math" panose="02040503050406030204" pitchFamily="18" charset="0"/>
-                                </a:rPr>
-                                <m:t>𝑖𝑗</m:t>
-                              </m:r>
-                              <m:sSub>
-                                <m:sSubPr>
-                                  <m:ctrlPr>
-                                    <a:rPr lang="fr-BE" i="1">
-                                      <a:latin typeface="Cambria Math" panose="02040503050406030204" pitchFamily="18" charset="0"/>
-                                      <a:ea typeface="Cambria Math" panose="02040503050406030204" pitchFamily="18" charset="0"/>
-                                    </a:rPr>
-                                  </m:ctrlPr>
-                                </m:sSubPr>
-                                <m:e>
-                                  <m:r>
-                                    <a:rPr lang="fr-BE" i="1">
-                                      <a:latin typeface="Cambria Math" panose="02040503050406030204" pitchFamily="18" charset="0"/>
-                                      <a:ea typeface="Cambria Math" panose="02040503050406030204" pitchFamily="18" charset="0"/>
-                                    </a:rPr>
-                                    <m:t>𝜔</m:t>
-                                  </m:r>
-                                </m:e>
-                                <m:sub>
-                                  <m:r>
-                                    <a:rPr lang="fr-BE" i="1">
-                                      <a:latin typeface="Cambria Math" panose="02040503050406030204" pitchFamily="18" charset="0"/>
-                                    </a:rPr>
-                                    <m:t>𝑘</m:t>
-                                  </m:r>
-                                </m:sub>
-                              </m:sSub>
-                            </m:sup>
-                          </m:sSup>
-                        </m:e>
-                      </m:nary>
-                      <m:r>
-                        <a:rPr lang="fr-BE" b="0" i="1" smtClean="0">
-                          <a:latin typeface="Cambria Math" panose="02040503050406030204" pitchFamily="18" charset="0"/>
-                        </a:rPr>
-                        <m:t>]</m:t>
-                      </m:r>
-                    </m:oMath>
-                  </m:oMathPara>
-                </a14:m>
-                <a:endParaRPr lang="en-GB" dirty="0"/>
-              </a:p>
-              <a:p>
-                <a:pPr marL="1028700" lvl="2" indent="0">
-                  <a:buNone/>
-                </a:pPr>
-                <a14:m>
-                  <m:oMathPara xmlns:m="http://schemas.openxmlformats.org/officeDocument/2006/math">
-                    <m:oMath>
-                      <m:sSub>
-                        <m:sSubPr>
-                          <m:ctrlPr>
-                            <a:rPr lang="fr-BE" b="0" i="1" smtClean="0">
-                              <a:latin typeface="Cambria Math" panose="02040503050406030204" pitchFamily="18" charset="0"/>
-                            </a:rPr>
-                          </m:ctrlPr>
-                        </m:sSubPr>
-                        <m:e>
-                          <m:r>
-                            <a:rPr lang="fr-BE" b="0" i="1" smtClean="0">
-                              <a:latin typeface="Cambria Math" panose="02040503050406030204" pitchFamily="18" charset="0"/>
-                            </a:rPr>
-                            <m:t>𝑝</m:t>
-                          </m:r>
-                        </m:e>
-                        <m:sub>
-                          <m:sSub>
-                            <m:sSubPr>
-                              <m:ctrlPr>
-                                <a:rPr lang="fr-BE" b="0" i="1" smtClean="0">
-                                  <a:latin typeface="Cambria Math" panose="02040503050406030204" pitchFamily="18" charset="0"/>
-                                  <a:ea typeface="Cambria Math" panose="02040503050406030204" pitchFamily="18" charset="0"/>
-                                </a:rPr>
-                              </m:ctrlPr>
-                            </m:sSubPr>
-                            <m:e>
-                              <m:r>
-                                <a:rPr lang="fr-BE" b="0" i="1" smtClean="0">
-                                  <a:latin typeface="Cambria Math" panose="02040503050406030204" pitchFamily="18" charset="0"/>
-                                  <a:ea typeface="Cambria Math" panose="02040503050406030204" pitchFamily="18" charset="0"/>
-                                </a:rPr>
-                                <m:t>𝜔</m:t>
-                              </m:r>
-                            </m:e>
-                            <m:sub>
-                              <m:r>
-                                <a:rPr lang="fr-BE" b="0" i="1" smtClean="0">
-                                  <a:latin typeface="Cambria Math" panose="02040503050406030204" pitchFamily="18" charset="0"/>
-                                </a:rPr>
-                                <m:t>𝑘</m:t>
-                              </m:r>
-                            </m:sub>
-                          </m:sSub>
-                        </m:sub>
-                      </m:sSub>
-                      <m:r>
-                        <a:rPr lang="fr-BE" b="0" i="1" smtClean="0">
-                          <a:latin typeface="Cambria Math" panose="02040503050406030204" pitchFamily="18" charset="0"/>
-                        </a:rPr>
-                        <m:t>=</m:t>
-                      </m:r>
-                      <m:sSup>
-                        <m:sSupPr>
-                          <m:ctrlPr>
-                            <a:rPr lang="fr-BE" b="0" i="1" smtClean="0">
-                              <a:latin typeface="Cambria Math" panose="02040503050406030204" pitchFamily="18" charset="0"/>
-                            </a:rPr>
-                          </m:ctrlPr>
-                        </m:sSupPr>
-                        <m:e>
-                          <m:d>
-                            <m:dPr>
-                              <m:begChr m:val="|"/>
-                              <m:endChr m:val="|"/>
-                              <m:ctrlPr>
-                                <a:rPr lang="fr-BE" b="0" i="1" smtClean="0">
-                                  <a:latin typeface="Cambria Math" panose="02040503050406030204" pitchFamily="18" charset="0"/>
-                                </a:rPr>
-                              </m:ctrlPr>
-                            </m:dPr>
-                            <m:e>
-                              <m:sSub>
-                                <m:sSubPr>
-                                  <m:ctrlPr>
-                                    <a:rPr lang="fr-BE" b="0" i="1" smtClean="0">
-                                      <a:latin typeface="Cambria Math" panose="02040503050406030204" pitchFamily="18" charset="0"/>
-                                    </a:rPr>
-                                  </m:ctrlPr>
-                                </m:sSubPr>
-                                <m:e>
-                                  <m:r>
-                                    <a:rPr lang="fr-BE" b="0" i="1" smtClean="0">
-                                      <a:latin typeface="Cambria Math" panose="02040503050406030204" pitchFamily="18" charset="0"/>
-                                    </a:rPr>
-                                    <m:t>𝑎</m:t>
-                                  </m:r>
-                                </m:e>
-                                <m:sub>
-                                  <m:r>
-                                    <a:rPr lang="fr-BE" b="0" i="1" smtClean="0">
-                                      <a:latin typeface="Cambria Math" panose="02040503050406030204" pitchFamily="18" charset="0"/>
-                                    </a:rPr>
-                                    <m:t>𝑘</m:t>
-                                  </m:r>
-                                </m:sub>
-                              </m:sSub>
-                            </m:e>
-                          </m:d>
-                        </m:e>
-                        <m:sup>
-                          <m:r>
-                            <a:rPr lang="fr-BE" b="0" i="1" smtClean="0">
-                              <a:latin typeface="Cambria Math" panose="02040503050406030204" pitchFamily="18" charset="0"/>
-                              <a:ea typeface="Cambria Math" panose="02040503050406030204" pitchFamily="18" charset="0"/>
-                            </a:rPr>
-                            <m:t>2</m:t>
-                          </m:r>
-                        </m:sup>
-                      </m:sSup>
-                    </m:oMath>
-                  </m:oMathPara>
-                </a14:m>
-                <a:endParaRPr lang="en-GB" sz="1800" dirty="0"/>
-              </a:p>
-              <a:p>
-                <a:pPr lvl="2"/>
-                <a:endParaRPr lang="en-GB" sz="1800" dirty="0"/>
-              </a:p>
-              <a:p>
-                <a:pPr lvl="1"/>
-                <a:r>
-                  <a:rPr lang="en-GB" dirty="0"/>
-                  <a:t>The periodogram gives the importance of each (Fourier) frequency in the series</a:t>
-                </a:r>
-              </a:p>
-              <a:p>
-                <a:pPr lvl="1"/>
-                <a:r>
-                  <a:rPr lang="en-GB" sz="1900" dirty="0">
-                    <a:solidFill>
-                      <a:srgbClr val="0070C0"/>
-                    </a:solidFill>
-                  </a:rPr>
-                  <a:t>Code in </a:t>
-                </a:r>
-                <a:r>
-                  <a:rPr lang="it-IT" sz="1900" dirty="0">
-                    <a:solidFill>
-                      <a:srgbClr val="0070C0"/>
-                    </a:solidFill>
-                  </a:rPr>
-                  <a:t>toolkit/base/core/data/analysis/Periodogram.java</a:t>
-                </a:r>
-                <a:endParaRPr lang="en-GB" sz="1900" dirty="0">
-                  <a:solidFill>
-                    <a:srgbClr val="0070C0"/>
-                  </a:solidFill>
-                </a:endParaRPr>
-              </a:p>
-              <a:p>
-                <a:pPr lvl="1"/>
-                <a:endParaRPr lang="en-GB" dirty="0"/>
-              </a:p>
-            </p:txBody>
-          </p:sp>
-        </mc:Choice>
-        <mc:Fallback xmlns="">
-          <p:sp>
-            <p:nvSpPr>
-              <p:cNvPr id="3" name="Content Placeholder 2">
-                <a:extLst>
-                  <a:ext uri="{FF2B5EF4-FFF2-40B4-BE49-F238E27FC236}">
-                    <a16:creationId xmlns:a16="http://schemas.microsoft.com/office/drawing/2014/main" id="{E508C413-EA68-1DAB-E5A5-BF537176310E}"/>
-                  </a:ext>
-                </a:extLst>
-              </p:cNvPr>
-              <p:cNvSpPr>
-                <a:spLocks noGrp="1" noRot="1" noChangeAspect="1" noMove="1" noResize="1" noEditPoints="1" noAdjustHandles="1" noChangeArrowheads="1" noChangeShapeType="1" noTextEdit="1"/>
-              </p:cNvSpPr>
-              <p:nvPr>
-                <p:ph sz="half" idx="2"/>
-              </p:nvPr>
-            </p:nvSpPr>
-            <p:spPr>
-              <a:xfrm>
-                <a:off x="970722" y="1280160"/>
-                <a:ext cx="10515597" cy="4815967"/>
-              </a:xfrm>
-              <a:blipFill>
-                <a:blip r:embed="rId2"/>
-                <a:stretch>
-                  <a:fillRect l="-754" t="-2911"/>
-                </a:stretch>
-              </a:blipFill>
-            </p:spPr>
-            <p:txBody>
-              <a:bodyPr/>
-              <a:lstStyle/>
-              <a:p>
-                <a:r>
-                  <a:rPr lang="en-GB">
-                    <a:noFill/>
-                  </a:rPr>
-                  <a:t> </a:t>
-                </a:r>
-              </a:p>
-            </p:txBody>
-          </p:sp>
-        </mc:Fallback>
-      </mc:AlternateContent>
+      <p:sp>
+        <p:nvSpPr>
+          <p:cNvPr id="3" name="Content Placeholder 2">
+            <a:extLst>
+              <a:ext uri="{FF2B5EF4-FFF2-40B4-BE49-F238E27FC236}">
+                <a16:creationId xmlns:a16="http://schemas.microsoft.com/office/drawing/2014/main" id="{E508C413-EA68-1DAB-E5A5-BF537176310E}"/>
+              </a:ext>
+            </a:extLst>
+          </p:cNvPr>
+          <p:cNvSpPr>
+            <a:spLocks noGrp="1"/>
+          </p:cNvSpPr>
+          <p:nvPr>
+            <p:ph sz="half" idx="2"/>
+          </p:nvPr>
+        </p:nvSpPr>
+        <p:spPr>
+          <a:xfrm>
+            <a:off x="970722" y="1280160"/>
+            <a:ext cx="10515597" cy="4815967"/>
+          </a:xfrm>
+        </p:spPr>
+        <p:txBody>
+          <a:bodyPr>
+            <a:normAutofit/>
+          </a:bodyPr>
+          <a:lstStyle/>
+          <a:p>
+            <a:r>
+              <a:rPr lang="en-GB" dirty="0"/>
+              <a:t>Periodogram </a:t>
+            </a:r>
+            <a:r>
+              <a:rPr lang="en-GB" sz="1800" dirty="0">
+                <a:solidFill>
+                  <a:srgbClr val="0070C0"/>
+                </a:solidFill>
+              </a:rPr>
+              <a:t>(see JD+_Seasonality_final_version.docx, pages 12-14)</a:t>
+            </a:r>
+            <a:r>
+              <a:rPr lang="en-GB" dirty="0"/>
+              <a:t>.</a:t>
+            </a:r>
+          </a:p>
+          <a:p>
+            <a:pPr lvl="1"/>
+            <a:r>
+              <a:rPr lang="en-GB" sz="1800" dirty="0"/>
+              <a:t>“Frequency view” of a time series (based on a Fourier transform)</a:t>
+            </a:r>
+          </a:p>
+          <a:p>
+            <a:pPr lvl="1"/>
+            <a:endParaRPr lang="en-GB" dirty="0"/>
+          </a:p>
+          <a:p>
+            <a:pPr lvl="1"/>
+            <a:endParaRPr lang="en-GB" dirty="0"/>
+          </a:p>
+          <a:p>
+            <a:pPr lvl="1"/>
+            <a:endParaRPr lang="en-GB" sz="1800" dirty="0"/>
+          </a:p>
+          <a:p>
+            <a:pPr lvl="1"/>
+            <a:endParaRPr lang="en-GB" dirty="0"/>
+          </a:p>
+          <a:p>
+            <a:pPr lvl="1"/>
+            <a:endParaRPr lang="en-GB" sz="1800" dirty="0"/>
+          </a:p>
+          <a:p>
+            <a:pPr lvl="2"/>
+            <a:endParaRPr lang="en-GB" sz="1800" dirty="0"/>
+          </a:p>
+          <a:p>
+            <a:pPr lvl="1"/>
+            <a:endParaRPr lang="en-GB" dirty="0"/>
+          </a:p>
+          <a:p>
+            <a:pPr lvl="1"/>
+            <a:endParaRPr lang="en-GB" dirty="0"/>
+          </a:p>
+          <a:p>
+            <a:pPr lvl="1"/>
+            <a:r>
+              <a:rPr lang="en-GB" dirty="0"/>
+              <a:t>The periodogram gives the importance of each (Fourier) frequency in the series</a:t>
+            </a:r>
+          </a:p>
+          <a:p>
+            <a:pPr lvl="1"/>
+            <a:r>
+              <a:rPr lang="en-GB" sz="1900" dirty="0">
+                <a:solidFill>
+                  <a:srgbClr val="0070C0"/>
+                </a:solidFill>
+              </a:rPr>
+              <a:t>Code in </a:t>
+            </a:r>
+            <a:r>
+              <a:rPr lang="it-IT" sz="1900" dirty="0">
+                <a:solidFill>
+                  <a:srgbClr val="0070C0"/>
+                </a:solidFill>
+              </a:rPr>
+              <a:t>toolkit/base/core/data/analysis/Periodogram.java</a:t>
+            </a:r>
+            <a:endParaRPr lang="en-GB" sz="1900" dirty="0">
+              <a:solidFill>
+                <a:srgbClr val="0070C0"/>
+              </a:solidFill>
+            </a:endParaRPr>
+          </a:p>
+          <a:p>
+            <a:pPr lvl="1"/>
+            <a:endParaRPr lang="en-GB" dirty="0"/>
+          </a:p>
+        </p:txBody>
+      </p:sp>
       <p:sp>
         <p:nvSpPr>
           <p:cNvPr id="5" name="Footer Placeholder 4">
@@ -15870,6 +12591,312 @@
               <a:t>5</a:t>
             </a:fld>
             <a:endParaRPr lang="en-GB"/>
+          </a:p>
+        </p:txBody>
+      </p:sp>
+      <p:graphicFrame>
+        <p:nvGraphicFramePr>
+          <p:cNvPr id="8" name="Tableau 7">
+            <a:extLst>
+              <a:ext uri="{FF2B5EF4-FFF2-40B4-BE49-F238E27FC236}">
+                <a16:creationId xmlns:a16="http://schemas.microsoft.com/office/drawing/2014/main" id="{6A47F0A5-B757-AA60-85F5-959810032E99}"/>
+              </a:ext>
+            </a:extLst>
+          </p:cNvPr>
+          <p:cNvGraphicFramePr>
+            <a:graphicFrameLocks noGrp="1"/>
+          </p:cNvGraphicFramePr>
+          <p:nvPr>
+            <p:extLst>
+              <p:ext uri="{D42A27DB-BD31-4B8C-83A1-F6EECF244321}">
+                <p14:modId xmlns:p14="http://schemas.microsoft.com/office/powerpoint/2010/main" val="3985401344"/>
+              </p:ext>
+            </p:extLst>
+          </p:nvPr>
+        </p:nvGraphicFramePr>
+        <p:xfrm>
+          <a:off x="523875" y="2253189"/>
+          <a:ext cx="11220450" cy="2334970"/>
+        </p:xfrm>
+        <a:graphic>
+          <a:graphicData uri="http://schemas.openxmlformats.org/drawingml/2006/table">
+            <a:tbl>
+              <a:tblPr firstRow="1" bandRow="1">
+                <a:tableStyleId>{5940675A-B579-460E-94D1-54222C63F5DA}</a:tableStyleId>
+              </a:tblPr>
+              <a:tblGrid>
+                <a:gridCol w="3781425">
+                  <a:extLst>
+                    <a:ext uri="{9D8B030D-6E8A-4147-A177-3AD203B41FA5}">
+                      <a16:colId xmlns:a16="http://schemas.microsoft.com/office/drawing/2014/main" val="654316397"/>
+                    </a:ext>
+                  </a:extLst>
+                </a:gridCol>
+                <a:gridCol w="3698875">
+                  <a:extLst>
+                    <a:ext uri="{9D8B030D-6E8A-4147-A177-3AD203B41FA5}">
+                      <a16:colId xmlns:a16="http://schemas.microsoft.com/office/drawing/2014/main" val="3123978172"/>
+                    </a:ext>
+                  </a:extLst>
+                </a:gridCol>
+                <a:gridCol w="3740150">
+                  <a:extLst>
+                    <a:ext uri="{9D8B030D-6E8A-4147-A177-3AD203B41FA5}">
+                      <a16:colId xmlns:a16="http://schemas.microsoft.com/office/drawing/2014/main" val="3790043320"/>
+                    </a:ext>
+                  </a:extLst>
+                </a:gridCol>
+              </a:tblGrid>
+              <a:tr h="394761">
+                <a:tc>
+                  <a:txBody>
+                    <a:bodyPr/>
+                    <a:lstStyle/>
+                    <a:p>
+                      <a:r>
+                        <a:rPr lang="en-GB" dirty="0"/>
+                        <a:t>No differencing</a:t>
+                      </a:r>
+                    </a:p>
+                  </a:txBody>
+                  <a:tcPr/>
+                </a:tc>
+                <a:tc>
+                  <a:txBody>
+                    <a:bodyPr/>
+                    <a:lstStyle/>
+                    <a:p>
+                      <a:r>
+                        <a:rPr lang="en-GB" dirty="0"/>
+                        <a:t>Regular differencing</a:t>
+                      </a:r>
+                    </a:p>
+                  </a:txBody>
+                  <a:tcPr/>
+                </a:tc>
+                <a:tc>
+                  <a:txBody>
+                    <a:bodyPr/>
+                    <a:lstStyle/>
+                    <a:p>
+                      <a:r>
+                        <a:rPr lang="en-GB" dirty="0"/>
+                        <a:t>Regular + seasonal differencing</a:t>
+                      </a:r>
+                    </a:p>
+                  </a:txBody>
+                  <a:tcPr/>
+                </a:tc>
+                <a:extLst>
+                  <a:ext uri="{0D108BD9-81ED-4DB2-BD59-A6C34878D82A}">
+                    <a16:rowId xmlns:a16="http://schemas.microsoft.com/office/drawing/2014/main" val="2692188683"/>
+                  </a:ext>
+                </a:extLst>
+              </a:tr>
+              <a:tr h="1940209">
+                <a:tc>
+                  <a:txBody>
+                    <a:bodyPr/>
+                    <a:lstStyle/>
+                    <a:p>
+                      <a:endParaRPr lang="en-GB" dirty="0"/>
+                    </a:p>
+                  </a:txBody>
+                  <a:tcPr/>
+                </a:tc>
+                <a:tc>
+                  <a:txBody>
+                    <a:bodyPr/>
+                    <a:lstStyle/>
+                    <a:p>
+                      <a:endParaRPr lang="en-GB" dirty="0"/>
+                    </a:p>
+                  </a:txBody>
+                  <a:tcPr/>
+                </a:tc>
+                <a:tc>
+                  <a:txBody>
+                    <a:bodyPr/>
+                    <a:lstStyle/>
+                    <a:p>
+                      <a:endParaRPr lang="en-GB" dirty="0"/>
+                    </a:p>
+                  </a:txBody>
+                  <a:tcPr/>
+                </a:tc>
+                <a:extLst>
+                  <a:ext uri="{0D108BD9-81ED-4DB2-BD59-A6C34878D82A}">
+                    <a16:rowId xmlns:a16="http://schemas.microsoft.com/office/drawing/2014/main" val="2489991484"/>
+                  </a:ext>
+                </a:extLst>
+              </a:tr>
+            </a:tbl>
+          </a:graphicData>
+        </a:graphic>
+      </p:graphicFrame>
+      <p:pic>
+        <p:nvPicPr>
+          <p:cNvPr id="10" name="Image 9">
+            <a:extLst>
+              <a:ext uri="{FF2B5EF4-FFF2-40B4-BE49-F238E27FC236}">
+                <a16:creationId xmlns:a16="http://schemas.microsoft.com/office/drawing/2014/main" id="{9967F530-8D16-289B-B760-1E99D95305A1}"/>
+              </a:ext>
+            </a:extLst>
+          </p:cNvPr>
+          <p:cNvPicPr>
+            <a:picLocks noChangeAspect="1"/>
+          </p:cNvPicPr>
+          <p:nvPr/>
+        </p:nvPicPr>
+        <p:blipFill>
+          <a:blip r:embed="rId2"/>
+          <a:stretch>
+            <a:fillRect/>
+          </a:stretch>
+        </p:blipFill>
+        <p:spPr>
+          <a:xfrm>
+            <a:off x="619125" y="2787086"/>
+            <a:ext cx="3561653" cy="1651450"/>
+          </a:xfrm>
+          <a:prstGeom prst="rect">
+            <a:avLst/>
+          </a:prstGeom>
+        </p:spPr>
+      </p:pic>
+      <p:pic>
+        <p:nvPicPr>
+          <p:cNvPr id="12" name="Image 11">
+            <a:extLst>
+              <a:ext uri="{FF2B5EF4-FFF2-40B4-BE49-F238E27FC236}">
+                <a16:creationId xmlns:a16="http://schemas.microsoft.com/office/drawing/2014/main" id="{E1ABB6AC-FD54-34F0-519E-7AAA9F2E4003}"/>
+              </a:ext>
+            </a:extLst>
+          </p:cNvPr>
+          <p:cNvPicPr>
+            <a:picLocks noChangeAspect="1"/>
+          </p:cNvPicPr>
+          <p:nvPr/>
+        </p:nvPicPr>
+        <p:blipFill>
+          <a:blip r:embed="rId3"/>
+          <a:stretch>
+            <a:fillRect/>
+          </a:stretch>
+        </p:blipFill>
+        <p:spPr>
+          <a:xfrm>
+            <a:off x="4362799" y="2787086"/>
+            <a:ext cx="3561653" cy="1651450"/>
+          </a:xfrm>
+          <a:prstGeom prst="rect">
+            <a:avLst/>
+          </a:prstGeom>
+        </p:spPr>
+      </p:pic>
+      <p:pic>
+        <p:nvPicPr>
+          <p:cNvPr id="14" name="Graphique 13">
+            <a:extLst>
+              <a:ext uri="{FF2B5EF4-FFF2-40B4-BE49-F238E27FC236}">
+                <a16:creationId xmlns:a16="http://schemas.microsoft.com/office/drawing/2014/main" id="{E44BA438-B1AB-8256-9BDE-A4A246EE38D5}"/>
+              </a:ext>
+            </a:extLst>
+          </p:cNvPr>
+          <p:cNvPicPr>
+            <a:picLocks noChangeAspect="1"/>
+          </p:cNvPicPr>
+          <p:nvPr/>
+        </p:nvPicPr>
+        <p:blipFill>
+          <a:blip>
+            <a:extLst>
+              <a:ext uri="{96DAC541-7B7A-43D3-8B79-37D633B846F1}">
+                <asvg:svgBlip xmlns:asvg="http://schemas.microsoft.com/office/drawing/2016/SVG/main" r:embed="rId4"/>
+              </a:ext>
+            </a:extLst>
+          </a:blip>
+          <a:stretch>
+            <a:fillRect/>
+          </a:stretch>
+        </p:blipFill>
+        <p:spPr>
+          <a:xfrm>
+            <a:off x="8106473" y="2787087"/>
+            <a:ext cx="3561653" cy="1651450"/>
+          </a:xfrm>
+          <a:prstGeom prst="rect">
+            <a:avLst/>
+          </a:prstGeom>
+        </p:spPr>
+      </p:pic>
+      <p:pic>
+        <p:nvPicPr>
+          <p:cNvPr id="16" name="Image 15">
+            <a:extLst>
+              <a:ext uri="{FF2B5EF4-FFF2-40B4-BE49-F238E27FC236}">
+                <a16:creationId xmlns:a16="http://schemas.microsoft.com/office/drawing/2014/main" id="{F5239066-EC0B-38DE-B82A-9E7A1417DAA4}"/>
+              </a:ext>
+            </a:extLst>
+          </p:cNvPr>
+          <p:cNvPicPr>
+            <a:picLocks noChangeAspect="1"/>
+          </p:cNvPicPr>
+          <p:nvPr/>
+        </p:nvPicPr>
+        <p:blipFill>
+          <a:blip r:embed="rId5"/>
+          <a:stretch>
+            <a:fillRect/>
+          </a:stretch>
+        </p:blipFill>
+        <p:spPr>
+          <a:xfrm>
+            <a:off x="4144458" y="6096127"/>
+            <a:ext cx="5036834" cy="341204"/>
+          </a:xfrm>
+          <a:prstGeom prst="rect">
+            <a:avLst/>
+          </a:prstGeom>
+          <a:ln>
+            <a:solidFill>
+              <a:schemeClr val="tx1"/>
+            </a:solidFill>
+          </a:ln>
+        </p:spPr>
+      </p:pic>
+      <p:sp>
+        <p:nvSpPr>
+          <p:cNvPr id="17" name="ZoneTexte 16">
+            <a:extLst>
+              <a:ext uri="{FF2B5EF4-FFF2-40B4-BE49-F238E27FC236}">
+                <a16:creationId xmlns:a16="http://schemas.microsoft.com/office/drawing/2014/main" id="{25E8C394-6604-C2F7-1B8F-52FAA3388CE9}"/>
+              </a:ext>
+            </a:extLst>
+          </p:cNvPr>
+          <p:cNvSpPr txBox="1"/>
+          <p:nvPr/>
+        </p:nvSpPr>
+        <p:spPr>
+          <a:xfrm>
+            <a:off x="2314575" y="6096127"/>
+            <a:ext cx="1627369" cy="307777"/>
+          </a:xfrm>
+          <a:prstGeom prst="rect">
+            <a:avLst/>
+          </a:prstGeom>
+          <a:noFill/>
+        </p:spPr>
+        <p:txBody>
+          <a:bodyPr wrap="none" rtlCol="0">
+            <a:spAutoFit/>
+          </a:bodyPr>
+          <a:lstStyle/>
+          <a:p>
+            <a:r>
+              <a:rPr lang="en-GB" dirty="0"/>
+              <a:t>Tip in R: same as </a:t>
+            </a:r>
           </a:p>
         </p:txBody>
       </p:sp>
@@ -15955,8 +12982,8 @@
           </a:p>
         </p:txBody>
       </p:sp>
-      <mc:AlternateContent xmlns:mc="http://schemas.openxmlformats.org/markup-compatibility/2006" xmlns:a14="http://schemas.microsoft.com/office/drawing/2010/main">
-        <mc:Choice Requires="a14">
+      <mc:AlternateContent xmlns:mc="http://schemas.openxmlformats.org/markup-compatibility/2006">
+        <mc:Choice xmlns:a14="http://schemas.microsoft.com/office/drawing/2010/main" Requires="a14">
           <p:sp>
             <p:nvSpPr>
               <p:cNvPr id="3" name="Espace réservé du contenu 2">
@@ -16419,283 +13446,12 @@
               <a:p>
                 <a14:m>
                   <m:oMath xmlns:m="http://schemas.openxmlformats.org/officeDocument/2006/math">
-                    <m:sSub>
-                      <m:sSubPr>
-                        <m:ctrlPr>
-                          <a:rPr lang="fr-BE" sz="2800" b="0" i="1" smtClean="0">
-                            <a:latin typeface="Cambria Math" panose="02040503050406030204" pitchFamily="18" charset="0"/>
-                          </a:rPr>
-                        </m:ctrlPr>
-                      </m:sSubPr>
-                      <m:e>
-                        <m:r>
-                          <a:rPr lang="fr-BE" sz="2800" b="0" i="1" smtClean="0">
-                            <a:latin typeface="Cambria Math" panose="02040503050406030204" pitchFamily="18" charset="0"/>
-                          </a:rPr>
-                          <m:t>𝑦</m:t>
-                        </m:r>
-                      </m:e>
-                      <m:sub>
-                        <m:r>
-                          <a:rPr lang="fr-BE" sz="2800" b="0" i="1" smtClean="0">
-                            <a:latin typeface="Cambria Math" panose="02040503050406030204" pitchFamily="18" charset="0"/>
-                          </a:rPr>
-                          <m:t>𝑡</m:t>
-                        </m:r>
-                      </m:sub>
-                    </m:sSub>
                     <m:r>
                       <a:rPr lang="fr-BE" sz="2800" b="0" i="1" smtClean="0">
                         <a:latin typeface="Cambria Math" panose="02040503050406030204" pitchFamily="18" charset="0"/>
                       </a:rPr>
-                      <m:t>=</m:t>
+                      <m:t>𝐸𝑥𝑎𝑚𝑝𝑙𝑒𝑠</m:t>
                     </m:r>
-                    <m:r>
-                      <a:rPr lang="fr-BE" sz="2800" b="0" i="1" smtClean="0">
-                        <a:latin typeface="Cambria Math" panose="02040503050406030204" pitchFamily="18" charset="0"/>
-                      </a:rPr>
-                      <m:t>𝑃</m:t>
-                    </m:r>
-                    <m:d>
-                      <m:dPr>
-                        <m:ctrlPr>
-                          <a:rPr lang="fr-BE" sz="2800" b="0" i="1" smtClean="0">
-                            <a:latin typeface="Cambria Math" panose="02040503050406030204" pitchFamily="18" charset="0"/>
-                          </a:rPr>
-                        </m:ctrlPr>
-                      </m:dPr>
-                      <m:e>
-                        <m:r>
-                          <a:rPr lang="fr-BE" sz="2800" b="0" i="1" smtClean="0">
-                            <a:latin typeface="Cambria Math" panose="02040503050406030204" pitchFamily="18" charset="0"/>
-                          </a:rPr>
-                          <m:t>𝐵</m:t>
-                        </m:r>
-                      </m:e>
-                    </m:d>
-                    <m:sSub>
-                      <m:sSubPr>
-                        <m:ctrlPr>
-                          <a:rPr lang="fr-BE" sz="2800" b="0" i="1" smtClean="0">
-                            <a:latin typeface="Cambria Math" panose="02040503050406030204" pitchFamily="18" charset="0"/>
-                          </a:rPr>
-                        </m:ctrlPr>
-                      </m:sSubPr>
-                      <m:e>
-                        <m:r>
-                          <a:rPr lang="fr-BE" sz="2800" b="0" i="1" smtClean="0">
-                            <a:latin typeface="Cambria Math" panose="02040503050406030204" pitchFamily="18" charset="0"/>
-                          </a:rPr>
-                          <m:t>𝑥</m:t>
-                        </m:r>
-                      </m:e>
-                      <m:sub>
-                        <m:r>
-                          <a:rPr lang="fr-BE" sz="2800" b="0" i="1" smtClean="0">
-                            <a:latin typeface="Cambria Math" panose="02040503050406030204" pitchFamily="18" charset="0"/>
-                          </a:rPr>
-                          <m:t>𝑡</m:t>
-                        </m:r>
-                      </m:sub>
-                    </m:sSub>
-                  </m:oMath>
-                </a14:m>
-                <a:r>
-                  <a:rPr lang="en-GB" sz="2800" dirty="0"/>
-                  <a:t>, </a:t>
-                </a:r>
-                <a14:m>
-                  <m:oMath xmlns:m="http://schemas.openxmlformats.org/officeDocument/2006/math">
-                    <m:r>
-                      <a:rPr lang="fr-BE" sz="2800" i="1">
-                        <a:latin typeface="Cambria Math" panose="02040503050406030204" pitchFamily="18" charset="0"/>
-                      </a:rPr>
-                      <m:t>𝑃</m:t>
-                    </m:r>
-                    <m:d>
-                      <m:dPr>
-                        <m:ctrlPr>
-                          <a:rPr lang="fr-BE" sz="2800" i="1">
-                            <a:latin typeface="Cambria Math" panose="02040503050406030204" pitchFamily="18" charset="0"/>
-                          </a:rPr>
-                        </m:ctrlPr>
-                      </m:dPr>
-                      <m:e>
-                        <m:r>
-                          <a:rPr lang="fr-BE" sz="2800" i="1">
-                            <a:latin typeface="Cambria Math" panose="02040503050406030204" pitchFamily="18" charset="0"/>
-                          </a:rPr>
-                          <m:t>𝐵</m:t>
-                        </m:r>
-                      </m:e>
-                    </m:d>
-                    <m:sSub>
-                      <m:sSubPr>
-                        <m:ctrlPr>
-                          <a:rPr lang="fr-BE" sz="2800" i="1">
-                            <a:latin typeface="Cambria Math" panose="02040503050406030204" pitchFamily="18" charset="0"/>
-                          </a:rPr>
-                        </m:ctrlPr>
-                      </m:sSubPr>
-                      <m:e>
-                        <m:r>
-                          <a:rPr lang="fr-BE" sz="2800" i="1">
-                            <a:latin typeface="Cambria Math" panose="02040503050406030204" pitchFamily="18" charset="0"/>
-                          </a:rPr>
-                          <m:t>𝑦</m:t>
-                        </m:r>
-                      </m:e>
-                      <m:sub>
-                        <m:r>
-                          <a:rPr lang="fr-BE" sz="2800" i="1">
-                            <a:latin typeface="Cambria Math" panose="02040503050406030204" pitchFamily="18" charset="0"/>
-                          </a:rPr>
-                          <m:t>𝑡</m:t>
-                        </m:r>
-                      </m:sub>
-                    </m:sSub>
-                    <m:r>
-                      <a:rPr lang="fr-BE" sz="2800" i="1">
-                        <a:latin typeface="Cambria Math" panose="02040503050406030204" pitchFamily="18" charset="0"/>
-                      </a:rPr>
-                      <m:t>=</m:t>
-                    </m:r>
-                    <m:sSub>
-                      <m:sSubPr>
-                        <m:ctrlPr>
-                          <a:rPr lang="fr-BE" sz="2800" i="1">
-                            <a:latin typeface="Cambria Math" panose="02040503050406030204" pitchFamily="18" charset="0"/>
-                          </a:rPr>
-                        </m:ctrlPr>
-                      </m:sSubPr>
-                      <m:e>
-                        <m:r>
-                          <a:rPr lang="fr-BE" sz="2800" i="1">
-                            <a:latin typeface="Cambria Math" panose="02040503050406030204" pitchFamily="18" charset="0"/>
-                          </a:rPr>
-                          <m:t>𝑥</m:t>
-                        </m:r>
-                      </m:e>
-                      <m:sub>
-                        <m:r>
-                          <a:rPr lang="fr-BE" sz="2800" i="1">
-                            <a:latin typeface="Cambria Math" panose="02040503050406030204" pitchFamily="18" charset="0"/>
-                          </a:rPr>
-                          <m:t>𝑡</m:t>
-                        </m:r>
-                      </m:sub>
-                    </m:sSub>
-                  </m:oMath>
-                </a14:m>
-                <a:r>
-                  <a:rPr lang="en-GB" sz="2800" dirty="0"/>
-                  <a:t>, </a:t>
-                </a:r>
-                <a14:m>
-                  <m:oMath xmlns:m="http://schemas.openxmlformats.org/officeDocument/2006/math">
-                    <m:r>
-                      <a:rPr lang="fr-BE" sz="2800" i="1">
-                        <a:latin typeface="Cambria Math" panose="02040503050406030204" pitchFamily="18" charset="0"/>
-                      </a:rPr>
-                      <m:t>𝑃</m:t>
-                    </m:r>
-                    <m:d>
-                      <m:dPr>
-                        <m:ctrlPr>
-                          <a:rPr lang="fr-BE" sz="2800" i="1">
-                            <a:latin typeface="Cambria Math" panose="02040503050406030204" pitchFamily="18" charset="0"/>
-                          </a:rPr>
-                        </m:ctrlPr>
-                      </m:dPr>
-                      <m:e>
-                        <m:r>
-                          <a:rPr lang="fr-BE" sz="2800" i="1">
-                            <a:latin typeface="Cambria Math" panose="02040503050406030204" pitchFamily="18" charset="0"/>
-                          </a:rPr>
-                          <m:t>𝐵</m:t>
-                        </m:r>
-                      </m:e>
-                    </m:d>
-                    <m:sSub>
-                      <m:sSubPr>
-                        <m:ctrlPr>
-                          <a:rPr lang="fr-BE" sz="2800" i="1">
-                            <a:latin typeface="Cambria Math" panose="02040503050406030204" pitchFamily="18" charset="0"/>
-                          </a:rPr>
-                        </m:ctrlPr>
-                      </m:sSubPr>
-                      <m:e>
-                        <m:r>
-                          <a:rPr lang="fr-BE" sz="2800" i="1">
-                            <a:latin typeface="Cambria Math" panose="02040503050406030204" pitchFamily="18" charset="0"/>
-                          </a:rPr>
-                          <m:t>𝑦</m:t>
-                        </m:r>
-                      </m:e>
-                      <m:sub>
-                        <m:r>
-                          <a:rPr lang="fr-BE" sz="2800" i="1">
-                            <a:latin typeface="Cambria Math" panose="02040503050406030204" pitchFamily="18" charset="0"/>
-                          </a:rPr>
-                          <m:t>𝑡</m:t>
-                        </m:r>
-                      </m:sub>
-                    </m:sSub>
-                    <m:r>
-                      <a:rPr lang="fr-BE" sz="2800" i="1">
-                        <a:latin typeface="Cambria Math" panose="02040503050406030204" pitchFamily="18" charset="0"/>
-                      </a:rPr>
-                      <m:t>=</m:t>
-                    </m:r>
-                    <m:sSub>
-                      <m:sSubPr>
-                        <m:ctrlPr>
-                          <a:rPr lang="fr-BE" sz="2800" b="0" i="1" smtClean="0">
-                            <a:latin typeface="Cambria Math" panose="02040503050406030204" pitchFamily="18" charset="0"/>
-                          </a:rPr>
-                        </m:ctrlPr>
-                      </m:sSubPr>
-                      <m:e>
-                        <m:r>
-                          <a:rPr lang="fr-BE" sz="2800" b="0" i="1" smtClean="0">
-                            <a:latin typeface="Cambria Math" panose="02040503050406030204" pitchFamily="18" charset="0"/>
-                          </a:rPr>
-                          <m:t>𝑄</m:t>
-                        </m:r>
-                        <m:r>
-                          <a:rPr lang="fr-BE" sz="2800" b="0" i="1" smtClean="0">
-                            <a:latin typeface="Cambria Math" panose="02040503050406030204" pitchFamily="18" charset="0"/>
-                          </a:rPr>
-                          <m:t>(</m:t>
-                        </m:r>
-                        <m:r>
-                          <a:rPr lang="fr-BE" sz="2800" b="0" i="1" smtClean="0">
-                            <a:latin typeface="Cambria Math" panose="02040503050406030204" pitchFamily="18" charset="0"/>
-                          </a:rPr>
-                          <m:t>𝐵</m:t>
-                        </m:r>
-                        <m:r>
-                          <a:rPr lang="fr-BE" sz="2800" b="0" i="1" smtClean="0">
-                            <a:latin typeface="Cambria Math" panose="02040503050406030204" pitchFamily="18" charset="0"/>
-                          </a:rPr>
-                          <m:t>)</m:t>
-                        </m:r>
-                        <m:r>
-                          <a:rPr lang="fr-BE" sz="2800" i="1">
-                            <a:latin typeface="Cambria Math" panose="02040503050406030204" pitchFamily="18" charset="0"/>
-                          </a:rPr>
-                          <m:t>𝑥</m:t>
-                        </m:r>
-                      </m:e>
-                      <m:sub>
-                        <m:r>
-                          <a:rPr lang="fr-BE" sz="2800" i="1">
-                            <a:latin typeface="Cambria Math" panose="02040503050406030204" pitchFamily="18" charset="0"/>
-                          </a:rPr>
-                          <m:t>𝑡</m:t>
-                        </m:r>
-                      </m:sub>
-                    </m:sSub>
                   </m:oMath>
                 </a14:m>
                 <a:endParaRPr lang="en-GB" sz="2800" dirty="0"/>
@@ -16800,604 +13556,6 @@
                   </m:oMath>
                 </a14:m>
                 <a:endParaRPr lang="en-GB" sz="2400" dirty="0"/>
-              </a:p>
-              <a:p>
-                <a:pPr lvl="1"/>
-                <a14:m>
-                  <m:oMath xmlns:m="http://schemas.openxmlformats.org/officeDocument/2006/math">
-                    <m:sSub>
-                      <m:sSubPr>
-                        <m:ctrlPr>
-                          <a:rPr lang="fr-BE" sz="2400" i="1">
-                            <a:latin typeface="Cambria Math" panose="02040503050406030204" pitchFamily="18" charset="0"/>
-                          </a:rPr>
-                        </m:ctrlPr>
-                      </m:sSubPr>
-                      <m:e>
-                        <m:r>
-                          <a:rPr lang="fr-BE" sz="2400" i="1">
-                            <a:latin typeface="Cambria Math" panose="02040503050406030204" pitchFamily="18" charset="0"/>
-                          </a:rPr>
-                          <m:t>𝑦</m:t>
-                        </m:r>
-                      </m:e>
-                      <m:sub>
-                        <m:r>
-                          <a:rPr lang="fr-BE" sz="2400" i="1">
-                            <a:latin typeface="Cambria Math" panose="02040503050406030204" pitchFamily="18" charset="0"/>
-                          </a:rPr>
-                          <m:t>𝑡</m:t>
-                        </m:r>
-                      </m:sub>
-                    </m:sSub>
-                    <m:r>
-                      <a:rPr lang="fr-BE" sz="2400" b="0" i="1" smtClean="0">
-                        <a:latin typeface="Cambria Math" panose="02040503050406030204" pitchFamily="18" charset="0"/>
-                      </a:rPr>
-                      <m:t>−0.9</m:t>
-                    </m:r>
-                    <m:sSub>
-                      <m:sSubPr>
-                        <m:ctrlPr>
-                          <a:rPr lang="fr-BE" sz="2400" i="1">
-                            <a:latin typeface="Cambria Math" panose="02040503050406030204" pitchFamily="18" charset="0"/>
-                          </a:rPr>
-                        </m:ctrlPr>
-                      </m:sSubPr>
-                      <m:e>
-                        <m:r>
-                          <a:rPr lang="fr-BE" sz="2400" i="1">
-                            <a:latin typeface="Cambria Math" panose="02040503050406030204" pitchFamily="18" charset="0"/>
-                          </a:rPr>
-                          <m:t>𝑦</m:t>
-                        </m:r>
-                      </m:e>
-                      <m:sub>
-                        <m:r>
-                          <a:rPr lang="fr-BE" sz="2400" i="1">
-                            <a:latin typeface="Cambria Math" panose="02040503050406030204" pitchFamily="18" charset="0"/>
-                          </a:rPr>
-                          <m:t>𝑡</m:t>
-                        </m:r>
-                        <m:r>
-                          <a:rPr lang="fr-BE" sz="2400" b="0" i="1" smtClean="0">
-                            <a:latin typeface="Cambria Math" panose="02040503050406030204" pitchFamily="18" charset="0"/>
-                          </a:rPr>
-                          <m:t>−1</m:t>
-                        </m:r>
-                      </m:sub>
-                    </m:sSub>
-                    <m:r>
-                      <a:rPr lang="fr-BE" sz="2400" i="1">
-                        <a:latin typeface="Cambria Math" panose="02040503050406030204" pitchFamily="18" charset="0"/>
-                      </a:rPr>
-                      <m:t>=</m:t>
-                    </m:r>
-                    <m:sSub>
-                      <m:sSubPr>
-                        <m:ctrlPr>
-                          <a:rPr lang="fr-BE" sz="2400" i="1">
-                            <a:latin typeface="Cambria Math" panose="02040503050406030204" pitchFamily="18" charset="0"/>
-                          </a:rPr>
-                        </m:ctrlPr>
-                      </m:sSubPr>
-                      <m:e>
-                        <m:r>
-                          <a:rPr lang="fr-BE" sz="2400" i="1">
-                            <a:latin typeface="Cambria Math" panose="02040503050406030204" pitchFamily="18" charset="0"/>
-                          </a:rPr>
-                          <m:t>𝑥</m:t>
-                        </m:r>
-                      </m:e>
-                      <m:sub>
-                        <m:r>
-                          <a:rPr lang="fr-BE" sz="2400" i="1">
-                            <a:latin typeface="Cambria Math" panose="02040503050406030204" pitchFamily="18" charset="0"/>
-                          </a:rPr>
-                          <m:t>𝑡</m:t>
-                        </m:r>
-                      </m:sub>
-                    </m:sSub>
-                  </m:oMath>
-                </a14:m>
-                <a:r>
-                  <a:rPr lang="en-GB" sz="2400" dirty="0"/>
-                  <a:t> or </a:t>
-                </a:r>
-                <a14:m>
-                  <m:oMath xmlns:m="http://schemas.openxmlformats.org/officeDocument/2006/math">
-                    <m:sSub>
-                      <m:sSubPr>
-                        <m:ctrlPr>
-                          <a:rPr lang="fr-BE" sz="2400" i="1">
-                            <a:latin typeface="Cambria Math" panose="02040503050406030204" pitchFamily="18" charset="0"/>
-                          </a:rPr>
-                        </m:ctrlPr>
-                      </m:sSubPr>
-                      <m:e>
-                        <m:r>
-                          <a:rPr lang="fr-BE" sz="2400" i="1">
-                            <a:latin typeface="Cambria Math" panose="02040503050406030204" pitchFamily="18" charset="0"/>
-                          </a:rPr>
-                          <m:t>𝑦</m:t>
-                        </m:r>
-                      </m:e>
-                      <m:sub>
-                        <m:r>
-                          <a:rPr lang="fr-BE" sz="2400" i="1">
-                            <a:latin typeface="Cambria Math" panose="02040503050406030204" pitchFamily="18" charset="0"/>
-                          </a:rPr>
-                          <m:t>𝑡</m:t>
-                        </m:r>
-                      </m:sub>
-                    </m:sSub>
-                    <m:r>
-                      <a:rPr lang="fr-BE" sz="2400" b="0" i="1" smtClean="0">
-                        <a:latin typeface="Cambria Math" panose="02040503050406030204" pitchFamily="18" charset="0"/>
-                      </a:rPr>
-                      <m:t>=</m:t>
-                    </m:r>
-                    <m:sSub>
-                      <m:sSubPr>
-                        <m:ctrlPr>
-                          <a:rPr lang="fr-BE" sz="2400" i="1">
-                            <a:latin typeface="Cambria Math" panose="02040503050406030204" pitchFamily="18" charset="0"/>
-                          </a:rPr>
-                        </m:ctrlPr>
-                      </m:sSubPr>
-                      <m:e>
-                        <m:r>
-                          <a:rPr lang="fr-BE" sz="2400" i="1">
-                            <a:latin typeface="Cambria Math" panose="02040503050406030204" pitchFamily="18" charset="0"/>
-                          </a:rPr>
-                          <m:t>𝑥</m:t>
-                        </m:r>
-                      </m:e>
-                      <m:sub>
-                        <m:r>
-                          <a:rPr lang="fr-BE" sz="2400" i="1">
-                            <a:latin typeface="Cambria Math" panose="02040503050406030204" pitchFamily="18" charset="0"/>
-                          </a:rPr>
-                          <m:t>𝑡</m:t>
-                        </m:r>
-                      </m:sub>
-                    </m:sSub>
-                    <m:r>
-                      <a:rPr lang="fr-BE" sz="2400" b="0" i="1" smtClean="0">
-                        <a:latin typeface="Cambria Math" panose="02040503050406030204" pitchFamily="18" charset="0"/>
-                      </a:rPr>
-                      <m:t>+</m:t>
-                    </m:r>
-                    <m:r>
-                      <a:rPr lang="fr-BE" sz="2400" i="1">
-                        <a:latin typeface="Cambria Math" panose="02040503050406030204" pitchFamily="18" charset="0"/>
-                      </a:rPr>
-                      <m:t>0.9</m:t>
-                    </m:r>
-                    <m:sSub>
-                      <m:sSubPr>
-                        <m:ctrlPr>
-                          <a:rPr lang="fr-BE" sz="2400" b="0" i="1" smtClean="0">
-                            <a:latin typeface="Cambria Math" panose="02040503050406030204" pitchFamily="18" charset="0"/>
-                          </a:rPr>
-                        </m:ctrlPr>
-                      </m:sSubPr>
-                      <m:e>
-                        <m:r>
-                          <a:rPr lang="fr-BE" sz="2400" b="0" i="1" smtClean="0">
-                            <a:latin typeface="Cambria Math" panose="02040503050406030204" pitchFamily="18" charset="0"/>
-                          </a:rPr>
-                          <m:t>𝑥</m:t>
-                        </m:r>
-                      </m:e>
-                      <m:sub>
-                        <m:r>
-                          <a:rPr lang="fr-BE" sz="2400" i="1">
-                            <a:latin typeface="Cambria Math" panose="02040503050406030204" pitchFamily="18" charset="0"/>
-                          </a:rPr>
-                          <m:t>𝑡</m:t>
-                        </m:r>
-                        <m:r>
-                          <a:rPr lang="fr-BE" sz="2400" i="1">
-                            <a:latin typeface="Cambria Math" panose="02040503050406030204" pitchFamily="18" charset="0"/>
-                          </a:rPr>
-                          <m:t>−1</m:t>
-                        </m:r>
-                      </m:sub>
-                    </m:sSub>
-                    <m:r>
-                      <a:rPr lang="fr-BE" sz="2400" b="0" i="1" smtClean="0">
-                        <a:latin typeface="Cambria Math" panose="02040503050406030204" pitchFamily="18" charset="0"/>
-                      </a:rPr>
-                      <m:t>+</m:t>
-                    </m:r>
-                    <m:r>
-                      <a:rPr lang="fr-BE" sz="2400" i="1">
-                        <a:latin typeface="Cambria Math" panose="02040503050406030204" pitchFamily="18" charset="0"/>
-                      </a:rPr>
-                      <m:t>0.</m:t>
-                    </m:r>
-                    <m:r>
-                      <a:rPr lang="fr-BE" sz="2400" b="0" i="1" smtClean="0">
-                        <a:latin typeface="Cambria Math" panose="02040503050406030204" pitchFamily="18" charset="0"/>
-                      </a:rPr>
-                      <m:t>81</m:t>
-                    </m:r>
-                    <m:sSub>
-                      <m:sSubPr>
-                        <m:ctrlPr>
-                          <a:rPr lang="fr-BE" sz="2400" i="1">
-                            <a:latin typeface="Cambria Math" panose="02040503050406030204" pitchFamily="18" charset="0"/>
-                          </a:rPr>
-                        </m:ctrlPr>
-                      </m:sSubPr>
-                      <m:e>
-                        <m:r>
-                          <a:rPr lang="fr-BE" sz="2400" i="1">
-                            <a:latin typeface="Cambria Math" panose="02040503050406030204" pitchFamily="18" charset="0"/>
-                          </a:rPr>
-                          <m:t>𝑥</m:t>
-                        </m:r>
-                      </m:e>
-                      <m:sub>
-                        <m:r>
-                          <a:rPr lang="fr-BE" sz="2400" i="1">
-                            <a:latin typeface="Cambria Math" panose="02040503050406030204" pitchFamily="18" charset="0"/>
-                          </a:rPr>
-                          <m:t>𝑡</m:t>
-                        </m:r>
-                        <m:r>
-                          <a:rPr lang="fr-BE" sz="2400" i="1">
-                            <a:latin typeface="Cambria Math" panose="02040503050406030204" pitchFamily="18" charset="0"/>
-                          </a:rPr>
-                          <m:t>−2</m:t>
-                        </m:r>
-                      </m:sub>
-                    </m:sSub>
-                    <m:r>
-                      <a:rPr lang="fr-BE" sz="2400" i="1">
-                        <a:latin typeface="Cambria Math" panose="02040503050406030204" pitchFamily="18" charset="0"/>
-                      </a:rPr>
-                      <m:t>+</m:t>
-                    </m:r>
-                  </m:oMath>
-                </a14:m>
-                <a:r>
-                  <a:rPr lang="en-GB" sz="2400" dirty="0"/>
-                  <a:t>…</a:t>
-                </a:r>
-              </a:p>
-              <a:p>
-                <a14:m>
-                  <m:oMath xmlns:m="http://schemas.openxmlformats.org/officeDocument/2006/math">
-                    <m:sSub>
-                      <m:sSubPr>
-                        <m:ctrlPr>
-                          <a:rPr lang="fr-BE" sz="2800" b="0" i="1" smtClean="0">
-                            <a:latin typeface="Cambria Math" panose="02040503050406030204" pitchFamily="18" charset="0"/>
-                          </a:rPr>
-                        </m:ctrlPr>
-                      </m:sSubPr>
-                      <m:e>
-                        <m:r>
-                          <a:rPr lang="fr-BE" sz="2800" b="0" i="1" smtClean="0">
-                            <a:latin typeface="Cambria Math" panose="02040503050406030204" pitchFamily="18" charset="0"/>
-                          </a:rPr>
-                          <m:t>𝑦</m:t>
-                        </m:r>
-                      </m:e>
-                      <m:sub>
-                        <m:r>
-                          <a:rPr lang="fr-BE" sz="2800" b="0" i="1" smtClean="0">
-                            <a:latin typeface="Cambria Math" panose="02040503050406030204" pitchFamily="18" charset="0"/>
-                          </a:rPr>
-                          <m:t>𝑡</m:t>
-                        </m:r>
-                      </m:sub>
-                    </m:sSub>
-                    <m:r>
-                      <a:rPr lang="fr-BE" sz="2800" b="0" i="1" smtClean="0">
-                        <a:latin typeface="Cambria Math" panose="02040503050406030204" pitchFamily="18" charset="0"/>
-                      </a:rPr>
-                      <m:t>=</m:t>
-                    </m:r>
-                    <m:r>
-                      <a:rPr lang="fr-BE" sz="2800" b="0" i="1" smtClean="0">
-                        <a:latin typeface="Cambria Math" panose="02040503050406030204" pitchFamily="18" charset="0"/>
-                      </a:rPr>
-                      <m:t>𝑃</m:t>
-                    </m:r>
-                    <m:d>
-                      <m:dPr>
-                        <m:ctrlPr>
-                          <a:rPr lang="fr-BE" sz="2800" b="0" i="1" smtClean="0">
-                            <a:latin typeface="Cambria Math" panose="02040503050406030204" pitchFamily="18" charset="0"/>
-                          </a:rPr>
-                        </m:ctrlPr>
-                      </m:dPr>
-                      <m:e>
-                        <m:r>
-                          <a:rPr lang="fr-BE" sz="2800" b="0" i="1" smtClean="0">
-                            <a:latin typeface="Cambria Math" panose="02040503050406030204" pitchFamily="18" charset="0"/>
-                          </a:rPr>
-                          <m:t>𝐵</m:t>
-                        </m:r>
-                        <m:r>
-                          <a:rPr lang="fr-BE" sz="2800" b="0" i="1" smtClean="0">
-                            <a:latin typeface="Cambria Math" panose="02040503050406030204" pitchFamily="18" charset="0"/>
-                          </a:rPr>
-                          <m:t>, </m:t>
-                        </m:r>
-                        <m:r>
-                          <a:rPr lang="fr-BE" sz="2800" b="0" i="1" smtClean="0">
-                            <a:latin typeface="Cambria Math" panose="02040503050406030204" pitchFamily="18" charset="0"/>
-                          </a:rPr>
-                          <m:t>𝐹</m:t>
-                        </m:r>
-                      </m:e>
-                    </m:d>
-                    <m:sSub>
-                      <m:sSubPr>
-                        <m:ctrlPr>
-                          <a:rPr lang="fr-BE" sz="2800" b="0" i="1" smtClean="0">
-                            <a:latin typeface="Cambria Math" panose="02040503050406030204" pitchFamily="18" charset="0"/>
-                          </a:rPr>
-                        </m:ctrlPr>
-                      </m:sSubPr>
-                      <m:e>
-                        <m:r>
-                          <a:rPr lang="fr-BE" sz="2800" b="0" i="1" smtClean="0">
-                            <a:latin typeface="Cambria Math" panose="02040503050406030204" pitchFamily="18" charset="0"/>
-                          </a:rPr>
-                          <m:t>𝑥</m:t>
-                        </m:r>
-                      </m:e>
-                      <m:sub>
-                        <m:r>
-                          <a:rPr lang="fr-BE" sz="2800" b="0" i="1" smtClean="0">
-                            <a:latin typeface="Cambria Math" panose="02040503050406030204" pitchFamily="18" charset="0"/>
-                          </a:rPr>
-                          <m:t>𝑡</m:t>
-                        </m:r>
-                      </m:sub>
-                    </m:sSub>
-                  </m:oMath>
-                </a14:m>
-                <a:r>
-                  <a:rPr lang="en-GB" sz="2800" dirty="0"/>
-                  <a:t>, </a:t>
-                </a:r>
-                <a14:m>
-                  <m:oMath xmlns:m="http://schemas.openxmlformats.org/officeDocument/2006/math">
-                    <m:r>
-                      <a:rPr lang="fr-BE" sz="2800" i="1">
-                        <a:latin typeface="Cambria Math" panose="02040503050406030204" pitchFamily="18" charset="0"/>
-                      </a:rPr>
-                      <m:t>𝑃</m:t>
-                    </m:r>
-                    <m:d>
-                      <m:dPr>
-                        <m:ctrlPr>
-                          <a:rPr lang="fr-BE" sz="2800" i="1">
-                            <a:latin typeface="Cambria Math" panose="02040503050406030204" pitchFamily="18" charset="0"/>
-                          </a:rPr>
-                        </m:ctrlPr>
-                      </m:dPr>
-                      <m:e>
-                        <m:r>
-                          <a:rPr lang="fr-BE" sz="2800" i="1">
-                            <a:latin typeface="Cambria Math" panose="02040503050406030204" pitchFamily="18" charset="0"/>
-                          </a:rPr>
-                          <m:t>𝐵</m:t>
-                        </m:r>
-                        <m:r>
-                          <a:rPr lang="fr-BE" sz="2800" b="0" i="1" smtClean="0">
-                            <a:latin typeface="Cambria Math" panose="02040503050406030204" pitchFamily="18" charset="0"/>
-                          </a:rPr>
-                          <m:t>, </m:t>
-                        </m:r>
-                        <m:r>
-                          <a:rPr lang="fr-BE" sz="2800" b="0" i="1" smtClean="0">
-                            <a:latin typeface="Cambria Math" panose="02040503050406030204" pitchFamily="18" charset="0"/>
-                          </a:rPr>
-                          <m:t>𝐹</m:t>
-                        </m:r>
-                      </m:e>
-                    </m:d>
-                    <m:sSub>
-                      <m:sSubPr>
-                        <m:ctrlPr>
-                          <a:rPr lang="fr-BE" sz="2800" i="1">
-                            <a:latin typeface="Cambria Math" panose="02040503050406030204" pitchFamily="18" charset="0"/>
-                          </a:rPr>
-                        </m:ctrlPr>
-                      </m:sSubPr>
-                      <m:e>
-                        <m:r>
-                          <a:rPr lang="fr-BE" sz="2800" i="1">
-                            <a:latin typeface="Cambria Math" panose="02040503050406030204" pitchFamily="18" charset="0"/>
-                          </a:rPr>
-                          <m:t>𝑦</m:t>
-                        </m:r>
-                      </m:e>
-                      <m:sub>
-                        <m:r>
-                          <a:rPr lang="fr-BE" sz="2800" i="1">
-                            <a:latin typeface="Cambria Math" panose="02040503050406030204" pitchFamily="18" charset="0"/>
-                          </a:rPr>
-                          <m:t>𝑡</m:t>
-                        </m:r>
-                      </m:sub>
-                    </m:sSub>
-                    <m:r>
-                      <a:rPr lang="fr-BE" sz="2800" i="1">
-                        <a:latin typeface="Cambria Math" panose="02040503050406030204" pitchFamily="18" charset="0"/>
-                      </a:rPr>
-                      <m:t>=</m:t>
-                    </m:r>
-                    <m:sSub>
-                      <m:sSubPr>
-                        <m:ctrlPr>
-                          <a:rPr lang="fr-BE" sz="2800" i="1">
-                            <a:latin typeface="Cambria Math" panose="02040503050406030204" pitchFamily="18" charset="0"/>
-                          </a:rPr>
-                        </m:ctrlPr>
-                      </m:sSubPr>
-                      <m:e>
-                        <m:r>
-                          <a:rPr lang="fr-BE" sz="2800" i="1">
-                            <a:latin typeface="Cambria Math" panose="02040503050406030204" pitchFamily="18" charset="0"/>
-                          </a:rPr>
-                          <m:t>𝑥</m:t>
-                        </m:r>
-                      </m:e>
-                      <m:sub>
-                        <m:r>
-                          <a:rPr lang="fr-BE" sz="2800" i="1">
-                            <a:latin typeface="Cambria Math" panose="02040503050406030204" pitchFamily="18" charset="0"/>
-                          </a:rPr>
-                          <m:t>𝑡</m:t>
-                        </m:r>
-                      </m:sub>
-                    </m:sSub>
-                  </m:oMath>
-                </a14:m>
-                <a:r>
-                  <a:rPr lang="en-GB" sz="2800" dirty="0"/>
-                  <a:t>, </a:t>
-                </a:r>
-                <a14:m>
-                  <m:oMath xmlns:m="http://schemas.openxmlformats.org/officeDocument/2006/math">
-                    <m:r>
-                      <a:rPr lang="fr-BE" sz="2800" i="1">
-                        <a:latin typeface="Cambria Math" panose="02040503050406030204" pitchFamily="18" charset="0"/>
-                      </a:rPr>
-                      <m:t>𝑃</m:t>
-                    </m:r>
-                    <m:d>
-                      <m:dPr>
-                        <m:ctrlPr>
-                          <a:rPr lang="fr-BE" sz="2800" i="1">
-                            <a:latin typeface="Cambria Math" panose="02040503050406030204" pitchFamily="18" charset="0"/>
-                          </a:rPr>
-                        </m:ctrlPr>
-                      </m:dPr>
-                      <m:e>
-                        <m:r>
-                          <a:rPr lang="fr-BE" sz="2800" i="1">
-                            <a:latin typeface="Cambria Math" panose="02040503050406030204" pitchFamily="18" charset="0"/>
-                          </a:rPr>
-                          <m:t>𝐵</m:t>
-                        </m:r>
-                        <m:r>
-                          <a:rPr lang="fr-BE" sz="2800" b="0" i="1" smtClean="0">
-                            <a:latin typeface="Cambria Math" panose="02040503050406030204" pitchFamily="18" charset="0"/>
-                          </a:rPr>
-                          <m:t>, </m:t>
-                        </m:r>
-                        <m:r>
-                          <a:rPr lang="fr-BE" sz="2800" b="0" i="1" smtClean="0">
-                            <a:latin typeface="Cambria Math" panose="02040503050406030204" pitchFamily="18" charset="0"/>
-                          </a:rPr>
-                          <m:t>𝐹</m:t>
-                        </m:r>
-                      </m:e>
-                    </m:d>
-                    <m:sSub>
-                      <m:sSubPr>
-                        <m:ctrlPr>
-                          <a:rPr lang="fr-BE" sz="2800" i="1">
-                            <a:latin typeface="Cambria Math" panose="02040503050406030204" pitchFamily="18" charset="0"/>
-                          </a:rPr>
-                        </m:ctrlPr>
-                      </m:sSubPr>
-                      <m:e>
-                        <m:r>
-                          <a:rPr lang="fr-BE" sz="2800" i="1">
-                            <a:latin typeface="Cambria Math" panose="02040503050406030204" pitchFamily="18" charset="0"/>
-                          </a:rPr>
-                          <m:t>𝑦</m:t>
-                        </m:r>
-                      </m:e>
-                      <m:sub>
-                        <m:r>
-                          <a:rPr lang="fr-BE" sz="2800" i="1">
-                            <a:latin typeface="Cambria Math" panose="02040503050406030204" pitchFamily="18" charset="0"/>
-                          </a:rPr>
-                          <m:t>𝑡</m:t>
-                        </m:r>
-                      </m:sub>
-                    </m:sSub>
-                    <m:r>
-                      <a:rPr lang="fr-BE" sz="2800" i="1">
-                        <a:latin typeface="Cambria Math" panose="02040503050406030204" pitchFamily="18" charset="0"/>
-                      </a:rPr>
-                      <m:t>=</m:t>
-                    </m:r>
-                    <m:sSub>
-                      <m:sSubPr>
-                        <m:ctrlPr>
-                          <a:rPr lang="fr-BE" sz="2800" b="0" i="1" smtClean="0">
-                            <a:latin typeface="Cambria Math" panose="02040503050406030204" pitchFamily="18" charset="0"/>
-                          </a:rPr>
-                        </m:ctrlPr>
-                      </m:sSubPr>
-                      <m:e>
-                        <m:r>
-                          <a:rPr lang="fr-BE" sz="2800" b="0" i="1" smtClean="0">
-                            <a:latin typeface="Cambria Math" panose="02040503050406030204" pitchFamily="18" charset="0"/>
-                          </a:rPr>
-                          <m:t>𝑄</m:t>
-                        </m:r>
-                        <m:r>
-                          <a:rPr lang="fr-BE" sz="2800" b="0" i="1" smtClean="0">
-                            <a:latin typeface="Cambria Math" panose="02040503050406030204" pitchFamily="18" charset="0"/>
-                          </a:rPr>
-                          <m:t>(</m:t>
-                        </m:r>
-                        <m:r>
-                          <a:rPr lang="fr-BE" sz="2800" b="0" i="1" smtClean="0">
-                            <a:latin typeface="Cambria Math" panose="02040503050406030204" pitchFamily="18" charset="0"/>
-                          </a:rPr>
-                          <m:t>𝐵</m:t>
-                        </m:r>
-                        <m:r>
-                          <a:rPr lang="fr-BE" sz="2800" b="0" i="1" smtClean="0">
-                            <a:latin typeface="Cambria Math" panose="02040503050406030204" pitchFamily="18" charset="0"/>
-                          </a:rPr>
-                          <m:t>, </m:t>
-                        </m:r>
-                        <m:r>
-                          <a:rPr lang="fr-BE" sz="2800" b="0" i="1" smtClean="0">
-                            <a:latin typeface="Cambria Math" panose="02040503050406030204" pitchFamily="18" charset="0"/>
-                          </a:rPr>
-                          <m:t>𝐹</m:t>
-                        </m:r>
-                        <m:r>
-                          <a:rPr lang="fr-BE" sz="2800" b="0" i="1" smtClean="0">
-                            <a:latin typeface="Cambria Math" panose="02040503050406030204" pitchFamily="18" charset="0"/>
-                          </a:rPr>
-                          <m:t>)</m:t>
-                        </m:r>
-                        <m:r>
-                          <a:rPr lang="fr-BE" sz="2800" i="1">
-                            <a:latin typeface="Cambria Math" panose="02040503050406030204" pitchFamily="18" charset="0"/>
-                          </a:rPr>
-                          <m:t>𝑥</m:t>
-                        </m:r>
-                      </m:e>
-                      <m:sub>
-                        <m:r>
-                          <a:rPr lang="fr-BE" sz="2800" i="1">
-                            <a:latin typeface="Cambria Math" panose="02040503050406030204" pitchFamily="18" charset="0"/>
-                          </a:rPr>
-                          <m:t>𝑡</m:t>
-                        </m:r>
-                      </m:sub>
-                    </m:sSub>
-                  </m:oMath>
-                </a14:m>
-                <a:endParaRPr lang="en-GB" sz="2800" dirty="0"/>
               </a:p>
               <a:p>
                 <a:pPr lvl="1"/>
@@ -17615,10 +13773,362 @@
                 </a14:m>
                 <a:endParaRPr lang="en-GB" sz="2400" dirty="0"/>
               </a:p>
+              <a:p>
+                <a:pPr lvl="1"/>
+                <a14:m>
+                  <m:oMath xmlns:m="http://schemas.openxmlformats.org/officeDocument/2006/math">
+                    <m:sSub>
+                      <m:sSubPr>
+                        <m:ctrlPr>
+                          <a:rPr lang="fr-BE" sz="2400" i="1">
+                            <a:latin typeface="Cambria Math" panose="02040503050406030204" pitchFamily="18" charset="0"/>
+                          </a:rPr>
+                        </m:ctrlPr>
+                      </m:sSubPr>
+                      <m:e>
+                        <m:r>
+                          <a:rPr lang="fr-BE" sz="2400" i="1">
+                            <a:latin typeface="Cambria Math" panose="02040503050406030204" pitchFamily="18" charset="0"/>
+                          </a:rPr>
+                          <m:t>𝑦</m:t>
+                        </m:r>
+                      </m:e>
+                      <m:sub>
+                        <m:r>
+                          <a:rPr lang="fr-BE" sz="2400" i="1">
+                            <a:latin typeface="Cambria Math" panose="02040503050406030204" pitchFamily="18" charset="0"/>
+                          </a:rPr>
+                          <m:t>𝑡</m:t>
+                        </m:r>
+                      </m:sub>
+                    </m:sSub>
+                    <m:r>
+                      <a:rPr lang="fr-BE" sz="2400" i="1">
+                        <a:latin typeface="Cambria Math" panose="02040503050406030204" pitchFamily="18" charset="0"/>
+                      </a:rPr>
+                      <m:t>=</m:t>
+                    </m:r>
+                    <m:sSub>
+                      <m:sSubPr>
+                        <m:ctrlPr>
+                          <a:rPr lang="fr-BE" sz="2400" i="1">
+                            <a:latin typeface="Cambria Math" panose="02040503050406030204" pitchFamily="18" charset="0"/>
+                          </a:rPr>
+                        </m:ctrlPr>
+                      </m:sSubPr>
+                      <m:e>
+                        <m:f>
+                          <m:fPr>
+                            <m:type m:val="skw"/>
+                            <m:ctrlPr>
+                              <a:rPr lang="fr-BE" sz="2400" i="1">
+                                <a:latin typeface="Cambria Math" panose="02040503050406030204" pitchFamily="18" charset="0"/>
+                              </a:rPr>
+                            </m:ctrlPr>
+                          </m:fPr>
+                          <m:num>
+                            <m:r>
+                              <a:rPr lang="fr-BE" sz="2400" i="1">
+                                <a:latin typeface="Cambria Math" panose="02040503050406030204" pitchFamily="18" charset="0"/>
+                              </a:rPr>
+                              <m:t>1</m:t>
+                            </m:r>
+                          </m:num>
+                          <m:den>
+                            <m:r>
+                              <a:rPr lang="fr-BE" sz="2400" b="0" i="1" smtClean="0">
+                                <a:latin typeface="Cambria Math" panose="02040503050406030204" pitchFamily="18" charset="0"/>
+                              </a:rPr>
+                              <m:t>8</m:t>
+                            </m:r>
+                          </m:den>
+                        </m:f>
+                        <m:r>
+                          <a:rPr lang="fr-BE" sz="2400" i="1">
+                            <a:latin typeface="Cambria Math" panose="02040503050406030204" pitchFamily="18" charset="0"/>
+                          </a:rPr>
+                          <m:t>𝑥</m:t>
+                        </m:r>
+                      </m:e>
+                      <m:sub>
+                        <m:r>
+                          <a:rPr lang="fr-BE" sz="2400" i="1">
+                            <a:latin typeface="Cambria Math" panose="02040503050406030204" pitchFamily="18" charset="0"/>
+                          </a:rPr>
+                          <m:t>𝑡</m:t>
+                        </m:r>
+                        <m:r>
+                          <a:rPr lang="fr-BE" sz="2400" b="0" i="1" smtClean="0">
+                            <a:latin typeface="Cambria Math" panose="02040503050406030204" pitchFamily="18" charset="0"/>
+                          </a:rPr>
+                          <m:t>−2</m:t>
+                        </m:r>
+                      </m:sub>
+                    </m:sSub>
+                    <m:r>
+                      <a:rPr lang="fr-BE" sz="2400" i="1">
+                        <a:latin typeface="Cambria Math" panose="02040503050406030204" pitchFamily="18" charset="0"/>
+                      </a:rPr>
+                      <m:t>+</m:t>
+                    </m:r>
+                    <m:f>
+                      <m:fPr>
+                        <m:type m:val="skw"/>
+                        <m:ctrlPr>
+                          <a:rPr lang="fr-BE" sz="2400" i="1">
+                            <a:latin typeface="Cambria Math" panose="02040503050406030204" pitchFamily="18" charset="0"/>
+                          </a:rPr>
+                        </m:ctrlPr>
+                      </m:fPr>
+                      <m:num>
+                        <m:r>
+                          <a:rPr lang="fr-BE" sz="2400" i="1">
+                            <a:latin typeface="Cambria Math" panose="02040503050406030204" pitchFamily="18" charset="0"/>
+                          </a:rPr>
+                          <m:t>1</m:t>
+                        </m:r>
+                      </m:num>
+                      <m:den>
+                        <m:r>
+                          <a:rPr lang="fr-BE" sz="2400" b="0" i="1" smtClean="0">
+                            <a:latin typeface="Cambria Math" panose="02040503050406030204" pitchFamily="18" charset="0"/>
+                          </a:rPr>
+                          <m:t>4</m:t>
+                        </m:r>
+                      </m:den>
+                    </m:f>
+                    <m:sSub>
+                      <m:sSubPr>
+                        <m:ctrlPr>
+                          <a:rPr lang="fr-BE" sz="2400" i="1">
+                            <a:latin typeface="Cambria Math" panose="02040503050406030204" pitchFamily="18" charset="0"/>
+                          </a:rPr>
+                        </m:ctrlPr>
+                      </m:sSubPr>
+                      <m:e>
+                        <m:r>
+                          <a:rPr lang="fr-BE" sz="2400" i="1">
+                            <a:latin typeface="Cambria Math" panose="02040503050406030204" pitchFamily="18" charset="0"/>
+                          </a:rPr>
+                          <m:t>𝑥</m:t>
+                        </m:r>
+                      </m:e>
+                      <m:sub>
+                        <m:r>
+                          <a:rPr lang="fr-BE" sz="2400" i="1">
+                            <a:latin typeface="Cambria Math" panose="02040503050406030204" pitchFamily="18" charset="0"/>
+                          </a:rPr>
+                          <m:t>𝑡</m:t>
+                        </m:r>
+                        <m:r>
+                          <a:rPr lang="fr-BE" sz="2400" b="0" i="1" smtClean="0">
+                            <a:latin typeface="Cambria Math" panose="02040503050406030204" pitchFamily="18" charset="0"/>
+                          </a:rPr>
+                          <m:t>−1</m:t>
+                        </m:r>
+                      </m:sub>
+                    </m:sSub>
+                    <m:r>
+                      <a:rPr lang="fr-BE" sz="2400" i="1">
+                        <a:latin typeface="Cambria Math" panose="02040503050406030204" pitchFamily="18" charset="0"/>
+                      </a:rPr>
+                      <m:t>+</m:t>
+                    </m:r>
+                    <m:f>
+                      <m:fPr>
+                        <m:type m:val="skw"/>
+                        <m:ctrlPr>
+                          <a:rPr lang="fr-BE" sz="2400" i="1">
+                            <a:latin typeface="Cambria Math" panose="02040503050406030204" pitchFamily="18" charset="0"/>
+                          </a:rPr>
+                        </m:ctrlPr>
+                      </m:fPr>
+                      <m:num>
+                        <m:r>
+                          <a:rPr lang="fr-BE" sz="2400" i="1">
+                            <a:latin typeface="Cambria Math" panose="02040503050406030204" pitchFamily="18" charset="0"/>
+                          </a:rPr>
+                          <m:t>1</m:t>
+                        </m:r>
+                      </m:num>
+                      <m:den>
+                        <m:r>
+                          <a:rPr lang="fr-BE" sz="2400" i="1">
+                            <a:latin typeface="Cambria Math" panose="02040503050406030204" pitchFamily="18" charset="0"/>
+                          </a:rPr>
+                          <m:t>4</m:t>
+                        </m:r>
+                      </m:den>
+                    </m:f>
+                    <m:sSub>
+                      <m:sSubPr>
+                        <m:ctrlPr>
+                          <a:rPr lang="fr-BE" sz="2400" i="1">
+                            <a:latin typeface="Cambria Math" panose="02040503050406030204" pitchFamily="18" charset="0"/>
+                          </a:rPr>
+                        </m:ctrlPr>
+                      </m:sSubPr>
+                      <m:e>
+                        <m:r>
+                          <a:rPr lang="fr-BE" sz="2400" i="1">
+                            <a:latin typeface="Cambria Math" panose="02040503050406030204" pitchFamily="18" charset="0"/>
+                          </a:rPr>
+                          <m:t>𝑥</m:t>
+                        </m:r>
+                      </m:e>
+                      <m:sub>
+                        <m:r>
+                          <a:rPr lang="fr-BE" sz="2400" i="1">
+                            <a:latin typeface="Cambria Math" panose="02040503050406030204" pitchFamily="18" charset="0"/>
+                          </a:rPr>
+                          <m:t>𝑡</m:t>
+                        </m:r>
+                      </m:sub>
+                    </m:sSub>
+                    <m:r>
+                      <a:rPr lang="fr-BE" sz="2400" b="0" i="1" smtClean="0">
+                        <a:latin typeface="Cambria Math" panose="02040503050406030204" pitchFamily="18" charset="0"/>
+                      </a:rPr>
+                      <m:t>+</m:t>
+                    </m:r>
+                    <m:f>
+                      <m:fPr>
+                        <m:type m:val="skw"/>
+                        <m:ctrlPr>
+                          <a:rPr lang="fr-BE" sz="2400" i="1">
+                            <a:latin typeface="Cambria Math" panose="02040503050406030204" pitchFamily="18" charset="0"/>
+                          </a:rPr>
+                        </m:ctrlPr>
+                      </m:fPr>
+                      <m:num>
+                        <m:r>
+                          <a:rPr lang="fr-BE" sz="2400" i="1">
+                            <a:latin typeface="Cambria Math" panose="02040503050406030204" pitchFamily="18" charset="0"/>
+                          </a:rPr>
+                          <m:t>1</m:t>
+                        </m:r>
+                      </m:num>
+                      <m:den>
+                        <m:r>
+                          <a:rPr lang="fr-BE" sz="2400" i="1">
+                            <a:latin typeface="Cambria Math" panose="02040503050406030204" pitchFamily="18" charset="0"/>
+                          </a:rPr>
+                          <m:t>4</m:t>
+                        </m:r>
+                      </m:den>
+                    </m:f>
+                    <m:sSub>
+                      <m:sSubPr>
+                        <m:ctrlPr>
+                          <a:rPr lang="fr-BE" sz="2400" i="1">
+                            <a:latin typeface="Cambria Math" panose="02040503050406030204" pitchFamily="18" charset="0"/>
+                          </a:rPr>
+                        </m:ctrlPr>
+                      </m:sSubPr>
+                      <m:e>
+                        <m:r>
+                          <a:rPr lang="fr-BE" sz="2400" i="1">
+                            <a:latin typeface="Cambria Math" panose="02040503050406030204" pitchFamily="18" charset="0"/>
+                          </a:rPr>
+                          <m:t>𝑥</m:t>
+                        </m:r>
+                      </m:e>
+                      <m:sub>
+                        <m:r>
+                          <a:rPr lang="fr-BE" sz="2400" i="1">
+                            <a:latin typeface="Cambria Math" panose="02040503050406030204" pitchFamily="18" charset="0"/>
+                          </a:rPr>
+                          <m:t>𝑡</m:t>
+                        </m:r>
+                        <m:r>
+                          <a:rPr lang="fr-BE" sz="2400" b="0" i="1" smtClean="0">
+                            <a:latin typeface="Cambria Math" panose="02040503050406030204" pitchFamily="18" charset="0"/>
+                          </a:rPr>
+                          <m:t>+</m:t>
+                        </m:r>
+                        <m:r>
+                          <a:rPr lang="fr-BE" sz="2400" i="1">
+                            <a:latin typeface="Cambria Math" panose="02040503050406030204" pitchFamily="18" charset="0"/>
+                          </a:rPr>
+                          <m:t>1</m:t>
+                        </m:r>
+                      </m:sub>
+                    </m:sSub>
+                    <m:r>
+                      <a:rPr lang="fr-BE" sz="2400" b="0" i="1" smtClean="0">
+                        <a:latin typeface="Cambria Math" panose="02040503050406030204" pitchFamily="18" charset="0"/>
+                      </a:rPr>
+                      <m:t>+</m:t>
+                    </m:r>
+                    <m:f>
+                      <m:fPr>
+                        <m:type m:val="skw"/>
+                        <m:ctrlPr>
+                          <a:rPr lang="fr-BE" sz="2400" i="1">
+                            <a:latin typeface="Cambria Math" panose="02040503050406030204" pitchFamily="18" charset="0"/>
+                          </a:rPr>
+                        </m:ctrlPr>
+                      </m:fPr>
+                      <m:num>
+                        <m:r>
+                          <a:rPr lang="fr-BE" sz="2400" i="1">
+                            <a:latin typeface="Cambria Math" panose="02040503050406030204" pitchFamily="18" charset="0"/>
+                          </a:rPr>
+                          <m:t>1</m:t>
+                        </m:r>
+                      </m:num>
+                      <m:den>
+                        <m:r>
+                          <a:rPr lang="fr-BE" sz="2400" b="0" i="1" smtClean="0">
+                            <a:latin typeface="Cambria Math" panose="02040503050406030204" pitchFamily="18" charset="0"/>
+                          </a:rPr>
+                          <m:t>8</m:t>
+                        </m:r>
+                      </m:den>
+                    </m:f>
+                    <m:sSub>
+                      <m:sSubPr>
+                        <m:ctrlPr>
+                          <a:rPr lang="fr-BE" sz="2400" i="1">
+                            <a:latin typeface="Cambria Math" panose="02040503050406030204" pitchFamily="18" charset="0"/>
+                          </a:rPr>
+                        </m:ctrlPr>
+                      </m:sSubPr>
+                      <m:e>
+                        <m:r>
+                          <a:rPr lang="fr-BE" sz="2400" i="1">
+                            <a:latin typeface="Cambria Math" panose="02040503050406030204" pitchFamily="18" charset="0"/>
+                          </a:rPr>
+                          <m:t>𝑥</m:t>
+                        </m:r>
+                      </m:e>
+                      <m:sub>
+                        <m:r>
+                          <a:rPr lang="fr-BE" sz="2400" i="1">
+                            <a:latin typeface="Cambria Math" panose="02040503050406030204" pitchFamily="18" charset="0"/>
+                          </a:rPr>
+                          <m:t>𝑡</m:t>
+                        </m:r>
+                        <m:r>
+                          <a:rPr lang="fr-BE" sz="2400" b="0" i="1" smtClean="0">
+                            <a:latin typeface="Cambria Math" panose="02040503050406030204" pitchFamily="18" charset="0"/>
+                          </a:rPr>
+                          <m:t>+2</m:t>
+                        </m:r>
+                      </m:sub>
+                    </m:sSub>
+                  </m:oMath>
+                </a14:m>
+                <a:endParaRPr lang="en-GB" sz="2400" dirty="0"/>
+              </a:p>
+              <a:p>
+                <a:pPr lvl="1"/>
+                <a:endParaRPr lang="en-GB" sz="2400" dirty="0"/>
+              </a:p>
             </p:txBody>
           </p:sp>
         </mc:Choice>
-        <mc:Fallback xmlns="">
+        <mc:Fallback>
           <p:sp>
             <p:nvSpPr>
               <p:cNvPr id="3" name="Espace réservé du contenu 2">
@@ -17643,7 +14153,7 @@
               <a:blipFill>
                 <a:blip r:embed="rId2"/>
                 <a:stretch>
-                  <a:fillRect l="-754" t="-2299" b="-12644"/>
+                  <a:fillRect l="-754" t="-2299" b="-1916"/>
                 </a:stretch>
               </a:blipFill>
             </p:spPr>
@@ -17804,8 +14314,8 @@
           </a:p>
         </p:txBody>
       </p:sp>
-      <mc:AlternateContent xmlns:mc="http://schemas.openxmlformats.org/markup-compatibility/2006" xmlns:a14="http://schemas.microsoft.com/office/drawing/2010/main">
-        <mc:Choice Requires="a14">
+      <mc:AlternateContent xmlns:mc="http://schemas.openxmlformats.org/markup-compatibility/2006">
+        <mc:Choice xmlns:a14="http://schemas.microsoft.com/office/drawing/2010/main" Requires="a14">
           <p:sp>
             <p:nvSpPr>
               <p:cNvPr id="3" name="Espace réservé du contenu 2">
@@ -17967,7 +14477,7 @@
                                 <a:rPr lang="fr-BE" sz="2800" b="0" i="1" smtClean="0">
                                   <a:latin typeface="Cambria Math" panose="02040503050406030204" pitchFamily="18" charset="0"/>
                                 </a:rPr>
-                                <m:t>−</m:t>
+                                <m:t>+</m:t>
                               </m:r>
                               <m:r>
                                 <a:rPr lang="fr-BE" sz="2800" b="0" i="1" smtClean="0">
@@ -17995,7 +14505,15 @@
                 </a:r>
                 <a:r>
                   <a:rPr lang="fr-BE" sz="2800" dirty="0"/>
-                  <a:t>:</a:t>
+                  <a:t> (= Fourier </a:t>
+                </a:r>
+                <a:r>
+                  <a:rPr lang="fr-BE" sz="2800" dirty="0" err="1"/>
+                  <a:t>transform</a:t>
+                </a:r>
+                <a:r>
+                  <a:rPr lang="fr-BE" sz="2800" dirty="0"/>
+                  <a:t>):</a:t>
                 </a:r>
               </a:p>
               <a:p>
@@ -18119,12 +14637,6 @@
                                 <a:rPr lang="fr-BE" sz="2800" b="0" i="1" smtClean="0">
                                   <a:latin typeface="Cambria Math" panose="02040503050406030204" pitchFamily="18" charset="0"/>
                                 </a:rPr>
-                                <m:t>−</m:t>
-                              </m:r>
-                              <m:r>
-                                <a:rPr lang="fr-BE" sz="2800" b="0" i="1" smtClean="0">
-                                  <a:latin typeface="Cambria Math" panose="02040503050406030204" pitchFamily="18" charset="0"/>
-                                </a:rPr>
                                 <m:t>𝑖</m:t>
                               </m:r>
                               <m:r>
@@ -18294,7 +14806,7 @@
             </p:txBody>
           </p:sp>
         </mc:Choice>
-        <mc:Fallback xmlns="">
+        <mc:Fallback>
           <p:sp>
             <p:nvSpPr>
               <p:cNvPr id="3" name="Espace réservé du contenu 2">
@@ -18482,8 +14994,37 @@
           </a:p>
         </p:txBody>
       </p:sp>
-      <mc:AlternateContent xmlns:mc="http://schemas.openxmlformats.org/markup-compatibility/2006" xmlns:a14="http://schemas.microsoft.com/office/drawing/2010/main">
-        <mc:Choice Requires="a14">
+      <p:sp>
+        <p:nvSpPr>
+          <p:cNvPr id="4" name="Espace réservé du numéro de diapositive 3">
+            <a:extLst>
+              <a:ext uri="{FF2B5EF4-FFF2-40B4-BE49-F238E27FC236}">
+                <a16:creationId xmlns:a16="http://schemas.microsoft.com/office/drawing/2014/main" id="{CFC8EC61-861F-7E48-9740-55292BB50B76}"/>
+              </a:ext>
+            </a:extLst>
+          </p:cNvPr>
+          <p:cNvSpPr>
+            <a:spLocks noGrp="1"/>
+          </p:cNvSpPr>
+          <p:nvPr>
+            <p:ph type="sldNum" idx="12"/>
+          </p:nvPr>
+        </p:nvSpPr>
+        <p:spPr/>
+        <p:txBody>
+          <a:bodyPr/>
+          <a:lstStyle/>
+          <a:p>
+            <a:fld id="{71CC62B1-FA1F-4849-B719-012F8D8A46B3}" type="slidenum">
+              <a:rPr lang="en-GB" smtClean="0"/>
+              <a:t>8</a:t>
+            </a:fld>
+            <a:endParaRPr lang="en-GB"/>
+          </a:p>
+        </p:txBody>
+      </p:sp>
+      <mc:AlternateContent xmlns:mc="http://schemas.openxmlformats.org/markup-compatibility/2006">
+        <mc:Choice xmlns:a14="http://schemas.microsoft.com/office/drawing/2010/main" Requires="a14">
           <p:sp>
             <p:nvSpPr>
               <p:cNvPr id="3" name="Espace réservé du contenu 2">
@@ -18497,7 +15038,7 @@
                 <a:spLocks noGrp="1"/>
               </p:cNvSpPr>
               <p:nvPr>
-                <p:ph idx="1"/>
+                <p:ph sz="half" idx="2"/>
               </p:nvPr>
             </p:nvSpPr>
             <p:spPr/>
@@ -18613,7 +15154,7 @@
             </p:txBody>
           </p:sp>
         </mc:Choice>
-        <mc:Fallback xmlns="">
+        <mc:Fallback>
           <p:sp>
             <p:nvSpPr>
               <p:cNvPr id="3" name="Espace réservé du contenu 2">
@@ -18627,14 +15168,14 @@
                 <a:spLocks noGrp="1" noRot="1" noChangeAspect="1" noMove="1" noResize="1" noEditPoints="1" noAdjustHandles="1" noChangeArrowheads="1" noChangeShapeType="1" noTextEdit="1"/>
               </p:cNvSpPr>
               <p:nvPr>
-                <p:ph idx="1"/>
+                <p:ph sz="half" idx="2"/>
               </p:nvPr>
             </p:nvSpPr>
             <p:spPr>
               <a:blipFill>
                 <a:blip r:embed="rId2"/>
                 <a:stretch>
-                  <a:fillRect/>
+                  <a:fillRect l="-754" t="-1858"/>
                 </a:stretch>
               </a:blipFill>
             </p:spPr>
@@ -18666,10 +15207,15 @@
             <a:spLocks noGrp="1"/>
           </p:cNvSpPr>
           <p:nvPr>
-            <p:ph type="ftr" sz="quarter" idx="11"/>
+            <p:ph type="ftr" sz="quarter" idx="4294967295"/>
           </p:nvPr>
         </p:nvSpPr>
-        <p:spPr/>
+        <p:spPr>
+          <a:xfrm>
+            <a:off x="0" y="0"/>
+            <a:ext cx="0" cy="0"/>
+          </a:xfrm>
+        </p:spPr>
         <p:txBody>
           <a:bodyPr/>
           <a:lstStyle/>
@@ -18683,10 +15229,10 @@
       </p:sp>
       <p:pic>
         <p:nvPicPr>
-          <p:cNvPr id="9" name="Image 8">
+          <p:cNvPr id="7" name="Image 6">
             <a:extLst>
               <a:ext uri="{FF2B5EF4-FFF2-40B4-BE49-F238E27FC236}">
-                <a16:creationId xmlns:a16="http://schemas.microsoft.com/office/drawing/2014/main" id="{DA1A3F1D-DADC-FD35-107E-10023DF6DAB3}"/>
+                <a16:creationId xmlns:a16="http://schemas.microsoft.com/office/drawing/2014/main" id="{3F1E5657-8A36-F64D-35CB-9BA1D85D623E}"/>
               </a:ext>
             </a:extLst>
           </p:cNvPr>
@@ -18703,8 +15249,8 @@
         </p:blipFill>
         <p:spPr>
           <a:xfrm>
-            <a:off x="4144618" y="2486400"/>
-            <a:ext cx="5143164" cy="3331090"/>
+            <a:off x="428617" y="1938333"/>
+            <a:ext cx="4349160" cy="2052641"/>
           </a:xfrm>
           <a:prstGeom prst="rect">
             <a:avLst/>
@@ -18713,10 +15259,10 @@
       </p:pic>
       <p:pic>
         <p:nvPicPr>
-          <p:cNvPr id="11" name="Image 10">
+          <p:cNvPr id="10" name="Image 9">
             <a:extLst>
               <a:ext uri="{FF2B5EF4-FFF2-40B4-BE49-F238E27FC236}">
-                <a16:creationId xmlns:a16="http://schemas.microsoft.com/office/drawing/2014/main" id="{8BBEF42A-C277-6C82-68FF-C6939ED6B98A}"/>
+                <a16:creationId xmlns:a16="http://schemas.microsoft.com/office/drawing/2014/main" id="{CE019A50-4C1D-FF70-BAF3-352E404514CA}"/>
               </a:ext>
             </a:extLst>
           </p:cNvPr>
@@ -18733,43 +15279,44 @@
         </p:blipFill>
         <p:spPr>
           <a:xfrm>
-            <a:off x="247647" y="2797811"/>
-            <a:ext cx="3790953" cy="2312564"/>
+            <a:off x="5493185" y="1385887"/>
+            <a:ext cx="5222439" cy="2366963"/>
           </a:xfrm>
           <a:prstGeom prst="rect">
             <a:avLst/>
           </a:prstGeom>
         </p:spPr>
       </p:pic>
-      <p:sp>
-        <p:nvSpPr>
-          <p:cNvPr id="4" name="Espace réservé du numéro de diapositive 3">
+      <p:pic>
+        <p:nvPicPr>
+          <p:cNvPr id="13" name="Image 12">
             <a:extLst>
               <a:ext uri="{FF2B5EF4-FFF2-40B4-BE49-F238E27FC236}">
-                <a16:creationId xmlns:a16="http://schemas.microsoft.com/office/drawing/2014/main" id="{CFC8EC61-861F-7E48-9740-55292BB50B76}"/>
+                <a16:creationId xmlns:a16="http://schemas.microsoft.com/office/drawing/2014/main" id="{A9AA7998-12F1-5832-B795-B54733AE745F}"/>
               </a:ext>
             </a:extLst>
           </p:cNvPr>
-          <p:cNvSpPr>
-            <a:spLocks noGrp="1"/>
-          </p:cNvSpPr>
-          <p:nvPr>
-            <p:ph type="sldNum" sz="quarter" idx="12"/>
-          </p:nvPr>
-        </p:nvSpPr>
-        <p:spPr/>
-        <p:txBody>
-          <a:bodyPr/>
-          <a:lstStyle/>
-          <a:p>
-            <a:fld id="{71CC62B1-FA1F-4849-B719-012F8D8A46B3}" type="slidenum">
-              <a:rPr lang="en-GB" smtClean="0"/>
-              <a:t>8</a:t>
-            </a:fld>
-            <a:endParaRPr lang="en-GB"/>
-          </a:p>
-        </p:txBody>
-      </p:sp>
+          <p:cNvPicPr>
+            <a:picLocks noChangeAspect="1"/>
+          </p:cNvPicPr>
+          <p:nvPr/>
+        </p:nvPicPr>
+        <p:blipFill>
+          <a:blip r:embed="rId5"/>
+          <a:stretch>
+            <a:fillRect/>
+          </a:stretch>
+        </p:blipFill>
+        <p:spPr>
+          <a:xfrm>
+            <a:off x="5520828" y="3828027"/>
+            <a:ext cx="5222440" cy="2366963"/>
+          </a:xfrm>
+          <a:prstGeom prst="rect">
+            <a:avLst/>
+          </a:prstGeom>
+        </p:spPr>
+      </p:pic>
     </p:spTree>
     <p:extLst>
       <p:ext uri="{BB962C8B-B14F-4D97-AF65-F5344CB8AC3E}">
@@ -18828,8 +15375,37 @@
           </a:p>
         </p:txBody>
       </p:sp>
-      <mc:AlternateContent xmlns:mc="http://schemas.openxmlformats.org/markup-compatibility/2006" xmlns:a14="http://schemas.microsoft.com/office/drawing/2010/main">
-        <mc:Choice Requires="a14">
+      <p:sp>
+        <p:nvSpPr>
+          <p:cNvPr id="4" name="Espace réservé du numéro de diapositive 3">
+            <a:extLst>
+              <a:ext uri="{FF2B5EF4-FFF2-40B4-BE49-F238E27FC236}">
+                <a16:creationId xmlns:a16="http://schemas.microsoft.com/office/drawing/2014/main" id="{97D4F089-3EFB-24DC-24F0-6DCC0815AD66}"/>
+              </a:ext>
+            </a:extLst>
+          </p:cNvPr>
+          <p:cNvSpPr>
+            <a:spLocks noGrp="1"/>
+          </p:cNvSpPr>
+          <p:nvPr>
+            <p:ph type="sldNum" idx="12"/>
+          </p:nvPr>
+        </p:nvSpPr>
+        <p:spPr/>
+        <p:txBody>
+          <a:bodyPr/>
+          <a:lstStyle/>
+          <a:p>
+            <a:fld id="{71CC62B1-FA1F-4849-B719-012F8D8A46B3}" type="slidenum">
+              <a:rPr lang="en-GB" smtClean="0"/>
+              <a:t>9</a:t>
+            </a:fld>
+            <a:endParaRPr lang="en-GB"/>
+          </a:p>
+        </p:txBody>
+      </p:sp>
+      <mc:AlternateContent xmlns:mc="http://schemas.openxmlformats.org/markup-compatibility/2006">
+        <mc:Choice xmlns:a14="http://schemas.microsoft.com/office/drawing/2010/main" Requires="a14">
           <p:sp>
             <p:nvSpPr>
               <p:cNvPr id="3" name="Content Placeholder 2">
@@ -18843,13 +15419,13 @@
                 <a:spLocks noGrp="1"/>
               </p:cNvSpPr>
               <p:nvPr>
-                <p:ph idx="1"/>
+                <p:ph sz="half" idx="2"/>
               </p:nvPr>
             </p:nvSpPr>
             <p:spPr/>
             <p:txBody>
               <a:bodyPr>
-                <a:normAutofit fontScale="92500" lnSpcReduction="20000"/>
+                <a:normAutofit/>
               </a:bodyPr>
               <a:lstStyle/>
               <a:p>
@@ -19114,7 +15690,7 @@
             </p:txBody>
           </p:sp>
         </mc:Choice>
-        <mc:Fallback xmlns="">
+        <mc:Fallback>
           <p:sp>
             <p:nvSpPr>
               <p:cNvPr id="3" name="Content Placeholder 2">
@@ -19128,14 +15704,14 @@
                 <a:spLocks noGrp="1" noRot="1" noChangeAspect="1" noMove="1" noResize="1" noEditPoints="1" noAdjustHandles="1" noChangeArrowheads="1" noChangeShapeType="1" noTextEdit="1"/>
               </p:cNvSpPr>
               <p:nvPr>
-                <p:ph idx="1"/>
+                <p:ph sz="half" idx="2"/>
               </p:nvPr>
             </p:nvSpPr>
             <p:spPr>
               <a:blipFill>
                 <a:blip r:embed="rId2"/>
                 <a:stretch>
-                  <a:fillRect l="-58" t="-2983" b="-314"/>
+                  <a:fillRect l="-754" t="-1626"/>
                 </a:stretch>
               </a:blipFill>
             </p:spPr>
@@ -19167,10 +15743,15 @@
             <a:spLocks noGrp="1"/>
           </p:cNvSpPr>
           <p:nvPr>
-            <p:ph type="ftr" sz="quarter" idx="11"/>
+            <p:ph type="ftr" sz="quarter" idx="4294967295"/>
           </p:nvPr>
         </p:nvSpPr>
-        <p:spPr/>
+        <p:spPr>
+          <a:xfrm>
+            <a:off x="0" y="0"/>
+            <a:ext cx="0" cy="0"/>
+          </a:xfrm>
+        </p:spPr>
         <p:txBody>
           <a:bodyPr/>
           <a:lstStyle/>
@@ -19179,35 +15760,6 @@
               <a:rPr lang="en-GB"/>
               <a:t>Time Series</a:t>
             </a:r>
-          </a:p>
-        </p:txBody>
-      </p:sp>
-      <p:sp>
-        <p:nvSpPr>
-          <p:cNvPr id="4" name="Espace réservé du numéro de diapositive 3">
-            <a:extLst>
-              <a:ext uri="{FF2B5EF4-FFF2-40B4-BE49-F238E27FC236}">
-                <a16:creationId xmlns:a16="http://schemas.microsoft.com/office/drawing/2014/main" id="{97D4F089-3EFB-24DC-24F0-6DCC0815AD66}"/>
-              </a:ext>
-            </a:extLst>
-          </p:cNvPr>
-          <p:cNvSpPr>
-            <a:spLocks noGrp="1"/>
-          </p:cNvSpPr>
-          <p:nvPr>
-            <p:ph type="sldNum" sz="quarter" idx="12"/>
-          </p:nvPr>
-        </p:nvSpPr>
-        <p:spPr/>
-        <p:txBody>
-          <a:bodyPr/>
-          <a:lstStyle/>
-          <a:p>
-            <a:fld id="{71CC62B1-FA1F-4849-B719-012F8D8A46B3}" type="slidenum">
-              <a:rPr lang="en-GB" smtClean="0"/>
-              <a:t>9</a:t>
-            </a:fld>
-            <a:endParaRPr lang="en-GB"/>
           </a:p>
         </p:txBody>
       </p:sp>
@@ -20096,17 +16648,6 @@
 </file>
 
 <file path=customXml/item1.xml><?xml version="1.0" encoding="utf-8"?>
-<p:properties xmlns:p="http://schemas.microsoft.com/office/2006/metadata/properties" xmlns:xsi="http://www.w3.org/2001/XMLSchema-instance" xmlns:pc="http://schemas.microsoft.com/office/infopath/2007/PartnerControls">
-  <documentManagement>
-    <lcf76f155ced4ddcb4097134ff3c332f xmlns="0e422b70-e85d-4377-8ee0-b6227433d381">
-      <Terms xmlns="http://schemas.microsoft.com/office/infopath/2007/PartnerControls"/>
-    </lcf76f155ced4ddcb4097134ff3c332f>
-    <TaxCatchAll xmlns="199f642e-5af9-486c-ac06-f366742ef41a"/>
-  </documentManagement>
-</p:properties>
-</file>
-
-<file path=customXml/item2.xml><?xml version="1.0" encoding="utf-8"?>
 <ct:contentTypeSchema xmlns:ct="http://schemas.microsoft.com/office/2006/metadata/contentType" xmlns:ma="http://schemas.microsoft.com/office/2006/metadata/properties/metaAttributes" ct:_="" ma:_="" ma:contentTypeName="Document" ma:contentTypeID="0x010100E6AA5C57F8EADE4E9CD6BB064C0C3195" ma:contentTypeVersion="16" ma:contentTypeDescription="Create a new document." ma:contentTypeScope="" ma:versionID="bb51c19a58f458ddcddd050a07659236">
   <xsd:schema xmlns:xsd="http://www.w3.org/2001/XMLSchema" xmlns:xs="http://www.w3.org/2001/XMLSchema" xmlns:p="http://schemas.microsoft.com/office/2006/metadata/properties" xmlns:ns2="0e422b70-e85d-4377-8ee0-b6227433d381" xmlns:ns3="199f642e-5af9-486c-ac06-f366742ef41a" targetNamespace="http://schemas.microsoft.com/office/2006/metadata/properties" ma:root="true" ma:fieldsID="0ee7a3bac0352a48a43420936abd968a" ns2:_="" ns3:_="">
     <xsd:import namespace="0e422b70-e85d-4377-8ee0-b6227433d381"/>
@@ -20347,6 +16888,17 @@
 </ct:contentTypeSchema>
 </file>
 
+<file path=customXml/item2.xml><?xml version="1.0" encoding="utf-8"?>
+<p:properties xmlns:p="http://schemas.microsoft.com/office/2006/metadata/properties" xmlns:xsi="http://www.w3.org/2001/XMLSchema-instance" xmlns:pc="http://schemas.microsoft.com/office/infopath/2007/PartnerControls">
+  <documentManagement>
+    <lcf76f155ced4ddcb4097134ff3c332f xmlns="0e422b70-e85d-4377-8ee0-b6227433d381">
+      <Terms xmlns="http://schemas.microsoft.com/office/infopath/2007/PartnerControls"/>
+    </lcf76f155ced4ddcb4097134ff3c332f>
+    <TaxCatchAll xmlns="199f642e-5af9-486c-ac06-f366742ef41a"/>
+  </documentManagement>
+</p:properties>
+</file>
+
 <file path=customXml/item3.xml><?xml version="1.0" encoding="utf-8"?>
 <?mso-contentType ?>
 <FormTemplates xmlns="http://schemas.microsoft.com/sharepoint/v3/contenttype/forms">
@@ -20357,23 +16909,6 @@
 </file>
 
 <file path=customXml/itemProps1.xml><?xml version="1.0" encoding="utf-8"?>
-<ds:datastoreItem xmlns:ds="http://schemas.openxmlformats.org/officeDocument/2006/customXml" ds:itemID="{2D6C293B-B8B4-4284-A17E-9F9E4C32B25A}">
-  <ds:schemaRefs>
-    <ds:schemaRef ds:uri="http://schemas.microsoft.com/office/2006/documentManagement/types"/>
-    <ds:schemaRef ds:uri="http://purl.org/dc/elements/1.1/"/>
-    <ds:schemaRef ds:uri="http://purl.org/dc/terms/"/>
-    <ds:schemaRef ds:uri="http://purl.org/dc/dcmitype/"/>
-    <ds:schemaRef ds:uri="0e422b70-e85d-4377-8ee0-b6227433d381"/>
-    <ds:schemaRef ds:uri="http://schemas.microsoft.com/office/infopath/2007/PartnerControls"/>
-    <ds:schemaRef ds:uri="199f642e-5af9-486c-ac06-f366742ef41a"/>
-    <ds:schemaRef ds:uri="http://schemas.openxmlformats.org/package/2006/metadata/core-properties"/>
-    <ds:schemaRef ds:uri="http://schemas.microsoft.com/office/2006/metadata/properties"/>
-    <ds:schemaRef ds:uri="http://www.w3.org/XML/1998/namespace"/>
-  </ds:schemaRefs>
-</ds:datastoreItem>
-</file>
-
-<file path=customXml/itemProps2.xml><?xml version="1.0" encoding="utf-8"?>
 <ds:datastoreItem xmlns:ds="http://schemas.openxmlformats.org/officeDocument/2006/customXml" ds:itemID="{04B464EA-1576-49DD-9675-1E3399D4D196}">
   <ds:schemaRefs>
     <ds:schemaRef ds:uri="http://schemas.microsoft.com/office/2006/metadata/contentType"/>
@@ -20392,6 +16927,23 @@
 </ds:datastoreItem>
 </file>
 
+<file path=customXml/itemProps2.xml><?xml version="1.0" encoding="utf-8"?>
+<ds:datastoreItem xmlns:ds="http://schemas.openxmlformats.org/officeDocument/2006/customXml" ds:itemID="{2D6C293B-B8B4-4284-A17E-9F9E4C32B25A}">
+  <ds:schemaRefs>
+    <ds:schemaRef ds:uri="http://schemas.microsoft.com/office/2006/documentManagement/types"/>
+    <ds:schemaRef ds:uri="http://purl.org/dc/elements/1.1/"/>
+    <ds:schemaRef ds:uri="http://purl.org/dc/terms/"/>
+    <ds:schemaRef ds:uri="http://purl.org/dc/dcmitype/"/>
+    <ds:schemaRef ds:uri="0e422b70-e85d-4377-8ee0-b6227433d381"/>
+    <ds:schemaRef ds:uri="http://schemas.microsoft.com/office/infopath/2007/PartnerControls"/>
+    <ds:schemaRef ds:uri="199f642e-5af9-486c-ac06-f366742ef41a"/>
+    <ds:schemaRef ds:uri="http://schemas.openxmlformats.org/package/2006/metadata/core-properties"/>
+    <ds:schemaRef ds:uri="http://schemas.microsoft.com/office/2006/metadata/properties"/>
+    <ds:schemaRef ds:uri="http://www.w3.org/XML/1998/namespace"/>
+  </ds:schemaRefs>
+</ds:datastoreItem>
+</file>
+
 <file path=customXml/itemProps3.xml><?xml version="1.0" encoding="utf-8"?>
 <ds:datastoreItem xmlns:ds="http://schemas.openxmlformats.org/officeDocument/2006/customXml" ds:itemID="{67DD9E9F-9EEB-4105-B29B-819486C2855A}">
   <ds:schemaRefs>

--- a/1.5 Time series.pptx
+++ b/1.5 Time series.pptx
@@ -282,7 +282,7 @@
       <p15:notesGuideLst xmlns:p15="http://schemas.microsoft.com/office/powerpoint/2012/main"/>
     </p:ext>
     <p:ext uri="http://customooxmlschemas.google.com/">
-      <go:slidesCustomData xmlns="" xmlns:go="http://customooxmlschemas.google.com/" xmlns:ahyp="http://schemas.microsoft.com/office/drawing/2018/hyperlinkcolor" xmlns:p15="http://schemas.microsoft.com/office/powerpoint/2012/main" xmlns:p14="http://schemas.microsoft.com/office/powerpoint/2010/main" xmlns:com="http://schemas.openxmlformats.org/drawingml/2006/compatibility" xmlns:pvml="urn:schemas-microsoft-com:office:powerpoint" xmlns:v="urn:schemas-microsoft-com:vml" xmlns:o="urn:schemas-microsoft-com:office:office" xmlns:dgm="http://schemas.openxmlformats.org/drawingml/2006/diagram" xmlns:c="http://schemas.openxmlformats.org/drawingml/2006/chart" xmlns:mv="urn:schemas-microsoft-com:mac:vml" xmlns:mc="http://schemas.openxmlformats.org/markup-compatibility/2006" r:id="rId59" roundtripDataSignature="AMtx7mh3YP3xexYcFoahXa2ehi0H5V4Zaw=="/>
+      <go:slidesCustomData xmlns:mc="http://schemas.openxmlformats.org/markup-compatibility/2006" xmlns:mv="urn:schemas-microsoft-com:mac:vml" xmlns:c="http://schemas.openxmlformats.org/drawingml/2006/chart" xmlns:dgm="http://schemas.openxmlformats.org/drawingml/2006/diagram" xmlns:o="urn:schemas-microsoft-com:office:office" xmlns:v="urn:schemas-microsoft-com:vml" xmlns:pvml="urn:schemas-microsoft-com:office:powerpoint" xmlns:com="http://schemas.openxmlformats.org/drawingml/2006/compatibility" xmlns:p14="http://schemas.microsoft.com/office/powerpoint/2010/main" xmlns:p15="http://schemas.microsoft.com/office/powerpoint/2012/main" xmlns:ahyp="http://schemas.microsoft.com/office/drawing/2018/hyperlinkcolor" xmlns:go="http://customooxmlschemas.google.com/" xmlns="" r:id="rId59" roundtripDataSignature="AMtx7mh3YP3xexYcFoahXa2ehi0H5V4Zaw=="/>
     </p:ext>
   </p:extLst>
 </p:presentation>
@@ -382,7 +382,7 @@
           <a:p>
             <a:fld id="{0CBFB8CE-488C-4A7E-87F2-3AF6127C51C1}" type="datetimeFigureOut">
               <a:rPr lang="en-IE" smtClean="0"/>
-              <a:t>30/09/2026</a:t>
+              <a:t>01/10/2026</a:t>
             </a:fld>
             <a:endParaRPr lang="en-IE"/>
           </a:p>
@@ -6238,7 +6238,7 @@
           <a:p>
             <a:r>
               <a:rPr lang="en-IE" dirty="0"/>
-              <a:t>Time series</a:t>
+              <a:t>1.5 Time series</a:t>
             </a:r>
           </a:p>
         </p:txBody>
@@ -6321,7 +6321,7 @@
           <a:p>
             <a:r>
               <a:rPr lang="en-GB" dirty="0"/>
-              <a:t>Stationary series</a:t>
+              <a:t>4.1 Stationary series</a:t>
             </a:r>
           </a:p>
         </p:txBody>
@@ -6470,7 +6470,7 @@
           <a:p>
             <a:r>
               <a:rPr lang="en-GB" dirty="0"/>
-              <a:t>Stationary series in R</a:t>
+              <a:t>4.2 Stationary series in R</a:t>
             </a:r>
           </a:p>
         </p:txBody>
@@ -6716,7 +6716,7 @@
           <a:p>
             <a:r>
               <a:rPr lang="en-GB" dirty="0"/>
-              <a:t>Arima models</a:t>
+              <a:t>5 Arima models</a:t>
             </a:r>
           </a:p>
         </p:txBody>
@@ -6750,8 +6750,8 @@
           </a:p>
         </p:txBody>
       </p:sp>
-      <mc:AlternateContent xmlns:mc="http://schemas.openxmlformats.org/markup-compatibility/2006">
-        <mc:Choice xmlns:a14="http://schemas.microsoft.com/office/drawing/2010/main" Requires="a14">
+      <mc:AlternateContent xmlns:mc="http://schemas.openxmlformats.org/markup-compatibility/2006" xmlns:a14="http://schemas.microsoft.com/office/drawing/2010/main">
+        <mc:Choice Requires="a14">
           <p:sp>
             <p:nvSpPr>
               <p:cNvPr id="3" name="Content Placeholder 2">
@@ -6971,7 +6971,7 @@
             </p:txBody>
           </p:sp>
         </mc:Choice>
-        <mc:Fallback>
+        <mc:Fallback xmlns="">
           <p:sp>
             <p:nvSpPr>
               <p:cNvPr id="3" name="Content Placeholder 2">
@@ -7097,7 +7097,7 @@
           <a:p>
             <a:r>
               <a:rPr lang="en-GB" dirty="0"/>
-              <a:t>Arima models (definitions)</a:t>
+              <a:t>5.1 Arima models (definitions)</a:t>
             </a:r>
           </a:p>
         </p:txBody>
@@ -7131,8 +7131,8 @@
           </a:p>
         </p:txBody>
       </p:sp>
-      <mc:AlternateContent xmlns:mc="http://schemas.openxmlformats.org/markup-compatibility/2006">
-        <mc:Choice xmlns:a14="http://schemas.microsoft.com/office/drawing/2010/main" Requires="a14">
+      <mc:AlternateContent xmlns:mc="http://schemas.openxmlformats.org/markup-compatibility/2006" xmlns:a14="http://schemas.microsoft.com/office/drawing/2010/main">
+        <mc:Choice Requires="a14">
           <p:sp>
             <p:nvSpPr>
               <p:cNvPr id="3" name="Content Placeholder 2">
@@ -8057,7 +8057,7 @@
             </p:txBody>
           </p:sp>
         </mc:Choice>
-        <mc:Fallback>
+        <mc:Fallback xmlns="">
           <p:sp>
             <p:nvSpPr>
               <p:cNvPr id="3" name="Content Placeholder 2">
@@ -8183,7 +8183,7 @@
           <a:p>
             <a:r>
               <a:rPr lang="en-GB" dirty="0"/>
-              <a:t>Arima models (definitions)</a:t>
+              <a:t>5.2 Arima models (definitions)</a:t>
             </a:r>
           </a:p>
         </p:txBody>
@@ -8217,8 +8217,8 @@
           </a:p>
         </p:txBody>
       </p:sp>
-      <mc:AlternateContent xmlns:mc="http://schemas.openxmlformats.org/markup-compatibility/2006">
-        <mc:Choice xmlns:a14="http://schemas.microsoft.com/office/drawing/2010/main" Requires="a14">
+      <mc:AlternateContent xmlns:mc="http://schemas.openxmlformats.org/markup-compatibility/2006" xmlns:a14="http://schemas.microsoft.com/office/drawing/2010/main">
+        <mc:Choice Requires="a14">
           <p:sp>
             <p:nvSpPr>
               <p:cNvPr id="3" name="Content Placeholder 2">
@@ -9306,7 +9306,7 @@
             </p:txBody>
           </p:sp>
         </mc:Choice>
-        <mc:Fallback>
+        <mc:Fallback xmlns="">
           <p:sp>
             <p:nvSpPr>
               <p:cNvPr id="3" name="Content Placeholder 2">
@@ -9432,7 +9432,7 @@
           <a:p>
             <a:r>
               <a:rPr lang="en-GB" dirty="0"/>
-              <a:t>Arima model properties</a:t>
+              <a:t>5.3 Arima model properties</a:t>
             </a:r>
           </a:p>
         </p:txBody>
@@ -9466,8 +9466,8 @@
           </a:p>
         </p:txBody>
       </p:sp>
-      <mc:AlternateContent xmlns:mc="http://schemas.openxmlformats.org/markup-compatibility/2006">
-        <mc:Choice xmlns:a14="http://schemas.microsoft.com/office/drawing/2010/main" Requires="a14">
+      <mc:AlternateContent xmlns:mc="http://schemas.openxmlformats.org/markup-compatibility/2006" xmlns:a14="http://schemas.microsoft.com/office/drawing/2010/main">
+        <mc:Choice Requires="a14">
           <p:sp>
             <p:nvSpPr>
               <p:cNvPr id="3" name="Content Placeholder 2">
@@ -10578,7 +10578,7 @@
             </p:txBody>
           </p:sp>
         </mc:Choice>
-        <mc:Fallback>
+        <mc:Fallback xmlns="">
           <p:sp>
             <p:nvSpPr>
               <p:cNvPr id="3" name="Content Placeholder 2">
@@ -10704,7 +10704,7 @@
           <a:p>
             <a:r>
               <a:rPr lang="en-GB" dirty="0"/>
-              <a:t>Final remarks</a:t>
+              <a:t>6 Final remarks</a:t>
             </a:r>
           </a:p>
         </p:txBody>
@@ -12982,8 +12982,8 @@
           </a:p>
         </p:txBody>
       </p:sp>
-      <mc:AlternateContent xmlns:mc="http://schemas.openxmlformats.org/markup-compatibility/2006">
-        <mc:Choice xmlns:a14="http://schemas.microsoft.com/office/drawing/2010/main" Requires="a14">
+      <mc:AlternateContent xmlns:mc="http://schemas.openxmlformats.org/markup-compatibility/2006" xmlns:a14="http://schemas.microsoft.com/office/drawing/2010/main">
+        <mc:Choice Requires="a14">
           <p:sp>
             <p:nvSpPr>
               <p:cNvPr id="3" name="Espace réservé du contenu 2">
@@ -14128,7 +14128,7 @@
             </p:txBody>
           </p:sp>
         </mc:Choice>
-        <mc:Fallback>
+        <mc:Fallback xmlns="">
           <p:sp>
             <p:nvSpPr>
               <p:cNvPr id="3" name="Espace réservé du contenu 2">
@@ -14314,8 +14314,8 @@
           </a:p>
         </p:txBody>
       </p:sp>
-      <mc:AlternateContent xmlns:mc="http://schemas.openxmlformats.org/markup-compatibility/2006">
-        <mc:Choice xmlns:a14="http://schemas.microsoft.com/office/drawing/2010/main" Requires="a14">
+      <mc:AlternateContent xmlns:mc="http://schemas.openxmlformats.org/markup-compatibility/2006" xmlns:a14="http://schemas.microsoft.com/office/drawing/2010/main">
+        <mc:Choice Requires="a14">
           <p:sp>
             <p:nvSpPr>
               <p:cNvPr id="3" name="Espace réservé du contenu 2">
@@ -14806,7 +14806,7 @@
             </p:txBody>
           </p:sp>
         </mc:Choice>
-        <mc:Fallback>
+        <mc:Fallback xmlns="">
           <p:sp>
             <p:nvSpPr>
               <p:cNvPr id="3" name="Espace réservé du contenu 2">
@@ -14968,11 +14968,11 @@
           <a:p>
             <a:r>
               <a:rPr lang="fr-BE" dirty="0"/>
-              <a:t>3. </a:t>
+              <a:t>3.1 Linear </a:t>
             </a:r>
             <a:r>
               <a:rPr lang="fr-BE" dirty="0" err="1"/>
-              <a:t>Linear</a:t>
+              <a:t>filters</a:t>
             </a:r>
             <a:r>
               <a:rPr lang="fr-BE" dirty="0"/>
@@ -14980,7 +14980,7 @@
             </a:r>
             <a:r>
               <a:rPr lang="fr-BE" dirty="0" err="1"/>
-              <a:t>filters</a:t>
+              <a:t>properties</a:t>
             </a:r>
             <a:r>
               <a:rPr lang="fr-BE" dirty="0"/>
@@ -14988,7 +14988,7 @@
             </a:r>
             <a:r>
               <a:rPr lang="fr-BE" dirty="0" err="1"/>
-              <a:t>properties</a:t>
+              <a:t>example</a:t>
             </a:r>
             <a:endParaRPr lang="en-GB" dirty="0"/>
           </a:p>
@@ -15023,8 +15023,8 @@
           </a:p>
         </p:txBody>
       </p:sp>
-      <mc:AlternateContent xmlns:mc="http://schemas.openxmlformats.org/markup-compatibility/2006">
-        <mc:Choice xmlns:a14="http://schemas.microsoft.com/office/drawing/2010/main" Requires="a14">
+      <mc:AlternateContent xmlns:mc="http://schemas.openxmlformats.org/markup-compatibility/2006" xmlns:a14="http://schemas.microsoft.com/office/drawing/2010/main">
+        <mc:Choice Requires="a14">
           <p:sp>
             <p:nvSpPr>
               <p:cNvPr id="3" name="Espace réservé du contenu 2">
@@ -15154,7 +15154,7 @@
             </p:txBody>
           </p:sp>
         </mc:Choice>
-        <mc:Fallback>
+        <mc:Fallback xmlns="">
           <p:sp>
             <p:nvSpPr>
               <p:cNvPr id="3" name="Espace réservé du contenu 2">
@@ -15229,36 +15229,6 @@
       </p:sp>
       <p:pic>
         <p:nvPicPr>
-          <p:cNvPr id="7" name="Image 6">
-            <a:extLst>
-              <a:ext uri="{FF2B5EF4-FFF2-40B4-BE49-F238E27FC236}">
-                <a16:creationId xmlns:a16="http://schemas.microsoft.com/office/drawing/2014/main" id="{3F1E5657-8A36-F64D-35CB-9BA1D85D623E}"/>
-              </a:ext>
-            </a:extLst>
-          </p:cNvPr>
-          <p:cNvPicPr>
-            <a:picLocks noChangeAspect="1"/>
-          </p:cNvPicPr>
-          <p:nvPr/>
-        </p:nvPicPr>
-        <p:blipFill>
-          <a:blip r:embed="rId3"/>
-          <a:stretch>
-            <a:fillRect/>
-          </a:stretch>
-        </p:blipFill>
-        <p:spPr>
-          <a:xfrm>
-            <a:off x="428617" y="1938333"/>
-            <a:ext cx="4349160" cy="2052641"/>
-          </a:xfrm>
-          <a:prstGeom prst="rect">
-            <a:avLst/>
-          </a:prstGeom>
-        </p:spPr>
-      </p:pic>
-      <p:pic>
-        <p:nvPicPr>
           <p:cNvPr id="10" name="Image 9">
             <a:extLst>
               <a:ext uri="{FF2B5EF4-FFF2-40B4-BE49-F238E27FC236}">
@@ -15272,7 +15242,7 @@
           <p:nvPr/>
         </p:nvPicPr>
         <p:blipFill>
-          <a:blip r:embed="rId4"/>
+          <a:blip r:embed="rId3"/>
           <a:stretch>
             <a:fillRect/>
           </a:stretch>
@@ -15302,7 +15272,7 @@
           <p:nvPr/>
         </p:nvPicPr>
         <p:blipFill>
-          <a:blip r:embed="rId5"/>
+          <a:blip r:embed="rId4"/>
           <a:stretch>
             <a:fillRect/>
           </a:stretch>
@@ -15311,6 +15281,36 @@
           <a:xfrm>
             <a:off x="5520828" y="3828027"/>
             <a:ext cx="5222440" cy="2366963"/>
+          </a:xfrm>
+          <a:prstGeom prst="rect">
+            <a:avLst/>
+          </a:prstGeom>
+        </p:spPr>
+      </p:pic>
+      <p:pic>
+        <p:nvPicPr>
+          <p:cNvPr id="8" name="Image 7">
+            <a:extLst>
+              <a:ext uri="{FF2B5EF4-FFF2-40B4-BE49-F238E27FC236}">
+                <a16:creationId xmlns:a16="http://schemas.microsoft.com/office/drawing/2014/main" id="{49E33F77-F364-B7B6-8AA5-4538BB114D3A}"/>
+              </a:ext>
+            </a:extLst>
+          </p:cNvPr>
+          <p:cNvPicPr>
+            <a:picLocks noChangeAspect="1"/>
+          </p:cNvPicPr>
+          <p:nvPr/>
+        </p:nvPicPr>
+        <p:blipFill>
+          <a:blip r:embed="rId5"/>
+          <a:stretch>
+            <a:fillRect/>
+          </a:stretch>
+        </p:blipFill>
+        <p:spPr>
+          <a:xfrm>
+            <a:off x="285743" y="2062159"/>
+            <a:ext cx="5018233" cy="2462216"/>
           </a:xfrm>
           <a:prstGeom prst="rect">
             <a:avLst/>
@@ -15404,8 +15404,8 @@
           </a:p>
         </p:txBody>
       </p:sp>
-      <mc:AlternateContent xmlns:mc="http://schemas.openxmlformats.org/markup-compatibility/2006">
-        <mc:Choice xmlns:a14="http://schemas.microsoft.com/office/drawing/2010/main" Requires="a14">
+      <mc:AlternateContent xmlns:mc="http://schemas.openxmlformats.org/markup-compatibility/2006" xmlns:a14="http://schemas.microsoft.com/office/drawing/2010/main">
+        <mc:Choice Requires="a14">
           <p:sp>
             <p:nvSpPr>
               <p:cNvPr id="3" name="Content Placeholder 2">
@@ -15690,7 +15690,7 @@
             </p:txBody>
           </p:sp>
         </mc:Choice>
-        <mc:Fallback>
+        <mc:Fallback xmlns="">
           <p:sp>
             <p:nvSpPr>
               <p:cNvPr id="3" name="Content Placeholder 2">
@@ -16648,6 +16648,17 @@
 </file>
 
 <file path=customXml/item1.xml><?xml version="1.0" encoding="utf-8"?>
+<p:properties xmlns:p="http://schemas.microsoft.com/office/2006/metadata/properties" xmlns:xsi="http://www.w3.org/2001/XMLSchema-instance" xmlns:pc="http://schemas.microsoft.com/office/infopath/2007/PartnerControls">
+  <documentManagement>
+    <lcf76f155ced4ddcb4097134ff3c332f xmlns="0e422b70-e85d-4377-8ee0-b6227433d381">
+      <Terms xmlns="http://schemas.microsoft.com/office/infopath/2007/PartnerControls"/>
+    </lcf76f155ced4ddcb4097134ff3c332f>
+    <TaxCatchAll xmlns="199f642e-5af9-486c-ac06-f366742ef41a"/>
+  </documentManagement>
+</p:properties>
+</file>
+
+<file path=customXml/item2.xml><?xml version="1.0" encoding="utf-8"?>
 <ct:contentTypeSchema xmlns:ct="http://schemas.microsoft.com/office/2006/metadata/contentType" xmlns:ma="http://schemas.microsoft.com/office/2006/metadata/properties/metaAttributes" ct:_="" ma:_="" ma:contentTypeName="Document" ma:contentTypeID="0x010100E6AA5C57F8EADE4E9CD6BB064C0C3195" ma:contentTypeVersion="16" ma:contentTypeDescription="Create a new document." ma:contentTypeScope="" ma:versionID="bb51c19a58f458ddcddd050a07659236">
   <xsd:schema xmlns:xsd="http://www.w3.org/2001/XMLSchema" xmlns:xs="http://www.w3.org/2001/XMLSchema" xmlns:p="http://schemas.microsoft.com/office/2006/metadata/properties" xmlns:ns2="0e422b70-e85d-4377-8ee0-b6227433d381" xmlns:ns3="199f642e-5af9-486c-ac06-f366742ef41a" targetNamespace="http://schemas.microsoft.com/office/2006/metadata/properties" ma:root="true" ma:fieldsID="0ee7a3bac0352a48a43420936abd968a" ns2:_="" ns3:_="">
     <xsd:import namespace="0e422b70-e85d-4377-8ee0-b6227433d381"/>
@@ -16888,17 +16899,6 @@
 </ct:contentTypeSchema>
 </file>
 
-<file path=customXml/item2.xml><?xml version="1.0" encoding="utf-8"?>
-<p:properties xmlns:p="http://schemas.microsoft.com/office/2006/metadata/properties" xmlns:xsi="http://www.w3.org/2001/XMLSchema-instance" xmlns:pc="http://schemas.microsoft.com/office/infopath/2007/PartnerControls">
-  <documentManagement>
-    <lcf76f155ced4ddcb4097134ff3c332f xmlns="0e422b70-e85d-4377-8ee0-b6227433d381">
-      <Terms xmlns="http://schemas.microsoft.com/office/infopath/2007/PartnerControls"/>
-    </lcf76f155ced4ddcb4097134ff3c332f>
-    <TaxCatchAll xmlns="199f642e-5af9-486c-ac06-f366742ef41a"/>
-  </documentManagement>
-</p:properties>
-</file>
-
 <file path=customXml/item3.xml><?xml version="1.0" encoding="utf-8"?>
 <?mso-contentType ?>
 <FormTemplates xmlns="http://schemas.microsoft.com/sharepoint/v3/contenttype/forms">
@@ -16909,6 +16909,23 @@
 </file>
 
 <file path=customXml/itemProps1.xml><?xml version="1.0" encoding="utf-8"?>
+<ds:datastoreItem xmlns:ds="http://schemas.openxmlformats.org/officeDocument/2006/customXml" ds:itemID="{2D6C293B-B8B4-4284-A17E-9F9E4C32B25A}">
+  <ds:schemaRefs>
+    <ds:schemaRef ds:uri="http://schemas.microsoft.com/office/2006/documentManagement/types"/>
+    <ds:schemaRef ds:uri="http://purl.org/dc/elements/1.1/"/>
+    <ds:schemaRef ds:uri="http://purl.org/dc/terms/"/>
+    <ds:schemaRef ds:uri="http://purl.org/dc/dcmitype/"/>
+    <ds:schemaRef ds:uri="0e422b70-e85d-4377-8ee0-b6227433d381"/>
+    <ds:schemaRef ds:uri="http://schemas.microsoft.com/office/infopath/2007/PartnerControls"/>
+    <ds:schemaRef ds:uri="199f642e-5af9-486c-ac06-f366742ef41a"/>
+    <ds:schemaRef ds:uri="http://schemas.openxmlformats.org/package/2006/metadata/core-properties"/>
+    <ds:schemaRef ds:uri="http://schemas.microsoft.com/office/2006/metadata/properties"/>
+    <ds:schemaRef ds:uri="http://www.w3.org/XML/1998/namespace"/>
+  </ds:schemaRefs>
+</ds:datastoreItem>
+</file>
+
+<file path=customXml/itemProps2.xml><?xml version="1.0" encoding="utf-8"?>
 <ds:datastoreItem xmlns:ds="http://schemas.openxmlformats.org/officeDocument/2006/customXml" ds:itemID="{04B464EA-1576-49DD-9675-1E3399D4D196}">
   <ds:schemaRefs>
     <ds:schemaRef ds:uri="http://schemas.microsoft.com/office/2006/metadata/contentType"/>
@@ -16927,23 +16944,6 @@
 </ds:datastoreItem>
 </file>
 
-<file path=customXml/itemProps2.xml><?xml version="1.0" encoding="utf-8"?>
-<ds:datastoreItem xmlns:ds="http://schemas.openxmlformats.org/officeDocument/2006/customXml" ds:itemID="{2D6C293B-B8B4-4284-A17E-9F9E4C32B25A}">
-  <ds:schemaRefs>
-    <ds:schemaRef ds:uri="http://schemas.microsoft.com/office/2006/documentManagement/types"/>
-    <ds:schemaRef ds:uri="http://purl.org/dc/elements/1.1/"/>
-    <ds:schemaRef ds:uri="http://purl.org/dc/terms/"/>
-    <ds:schemaRef ds:uri="http://purl.org/dc/dcmitype/"/>
-    <ds:schemaRef ds:uri="0e422b70-e85d-4377-8ee0-b6227433d381"/>
-    <ds:schemaRef ds:uri="http://schemas.microsoft.com/office/infopath/2007/PartnerControls"/>
-    <ds:schemaRef ds:uri="199f642e-5af9-486c-ac06-f366742ef41a"/>
-    <ds:schemaRef ds:uri="http://schemas.openxmlformats.org/package/2006/metadata/core-properties"/>
-    <ds:schemaRef ds:uri="http://schemas.microsoft.com/office/2006/metadata/properties"/>
-    <ds:schemaRef ds:uri="http://www.w3.org/XML/1998/namespace"/>
-  </ds:schemaRefs>
-</ds:datastoreItem>
-</file>
-
 <file path=customXml/itemProps3.xml><?xml version="1.0" encoding="utf-8"?>
 <ds:datastoreItem xmlns:ds="http://schemas.openxmlformats.org/officeDocument/2006/customXml" ds:itemID="{67DD9E9F-9EEB-4105-B29B-819486C2855A}">
   <ds:schemaRefs>
